--- a/docs/온국민아이디어등록제_설명자료.pptx
+++ b/docs/온국민아이디어등록제_설명자료.pptx
@@ -32,9 +32,10 @@
     <p:sldId id="280" r:id="rId26"/>
     <p:sldId id="281" r:id="rId27"/>
     <p:sldId id="282" r:id="rId28"/>
+    <p:sldId id="283" r:id="rId29"/>
   </p:sldIdLst>
   <p:notesMasterIdLst>
-    <p:notesMasterId r:id="rId29"/>
+    <p:notesMasterId r:id="rId30"/>
   </p:notesMasterIdLst>
   <p:sldSz cx="9144000" cy="5143500"/>
   <p:notesSz cx="5143500" cy="9144000"/>
@@ -2224,6 +2225,94 @@
             <a:fld id="{F7021451-1387-4CA6-816F-3879F97B5CBC}" type="slidenum">
               <a:rPr lang="en-US"/>
               <a:t>27</a:t>
+            </a:fld>
+            <a:endParaRPr lang="en-US"/>
+          </a:p>
+        </p:txBody>
+      </p:sp>
+    </p:spTree>
+    <p:extLst>
+      <p:ext uri="{BB962C8B-B14F-4D97-AF65-F5344CB8AC3E}">
+        <p14:creationId xmlns:p14="http://schemas.microsoft.com/office/powerpoint/2010/main" val="1024086991"/>
+      </p:ext>
+    </p:extLst>
+  </p:cSld>
+  <p:clrMapOvr>
+    <a:masterClrMapping/>
+  </p:clrMapOvr>
+</p:notes>
+</file>
+
+<file path=ppt/notesSlides/notesSlide28.xml><?xml version="1.0" encoding="utf-8"?>
+<p:notes xmlns:a="http://schemas.openxmlformats.org/drawingml/2006/main" xmlns:r="http://schemas.openxmlformats.org/officeDocument/2006/relationships" xmlns:p="http://schemas.openxmlformats.org/presentationml/2006/main">
+  <p:cSld>
+    <p:spTree>
+      <p:nvGrpSpPr>
+        <p:cNvPr id="1" name=""/>
+        <p:cNvGrpSpPr/>
+        <p:nvPr/>
+      </p:nvGrpSpPr>
+      <p:grpSpPr>
+        <a:xfrm>
+          <a:off x="0" y="0"/>
+          <a:ext cx="0" cy="0"/>
+          <a:chOff x="0" y="0"/>
+          <a:chExt cx="0" cy="0"/>
+        </a:xfrm>
+      </p:grpSpPr>
+      <p:sp>
+        <p:nvSpPr>
+          <p:cNvPr id="2" name="Slide Image Placeholder 1"/>
+          <p:cNvSpPr>
+            <a:spLocks noGrp="1" noRot="1" noChangeAspect="1"/>
+          </p:cNvSpPr>
+          <p:nvPr>
+            <p:ph type="sldImg"/>
+          </p:nvPr>
+        </p:nvSpPr>
+        <p:spPr/>
+      </p:sp>
+      <p:sp>
+        <p:nvSpPr>
+          <p:cNvPr id="3" name="Notes Placeholder 2"/>
+          <p:cNvSpPr>
+            <a:spLocks noGrp="1"/>
+          </p:cNvSpPr>
+          <p:nvPr>
+            <p:ph type="body" idx="1"/>
+          </p:nvPr>
+        </p:nvSpPr>
+        <p:spPr/>
+        <p:txBody>
+          <a:bodyPr/>
+          <a:lstStyle/>
+          <a:p>
+            <a:r>
+              <a:rPr lang="en-US" dirty="0"/>
+              <a:t/>
+            </a:r>
+            <a:endParaRPr lang="en-US" dirty="0"/>
+          </a:p>
+        </p:txBody>
+      </p:sp>
+      <p:sp>
+        <p:nvSpPr>
+          <p:cNvPr id="4" name="Slide Number Placeholder 3"/>
+          <p:cNvSpPr>
+            <a:spLocks noGrp="1"/>
+          </p:cNvSpPr>
+          <p:nvPr>
+            <p:ph type="sldNum" sz="quarter" idx="10"/>
+          </p:nvPr>
+        </p:nvSpPr>
+        <p:spPr/>
+        <p:txBody>
+          <a:bodyPr/>
+          <a:lstStyle/>
+          <a:p>
+            <a:fld id="{F7021451-1387-4CA6-816F-3879F97B5CBC}" type="slidenum">
+              <a:rPr lang="en-US"/>
+              <a:t>28</a:t>
             </a:fld>
             <a:endParaRPr lang="en-US"/>
           </a:p>
@@ -3623,7 +3712,7 @@
                 <a:ea typeface="맑은 고딕" pitchFamily="34" charset="-122"/>
                 <a:cs typeface="맑은 고딕" pitchFamily="34" charset="-120"/>
               </a:rPr>
-              <a:t>KDI 7,362건</a:t>
+              <a:t>KDI 발간물 7,362건</a:t>
             </a:r>
             <a:endParaRPr lang="en-US" sz="1000" dirty="0"/>
           </a:p>
@@ -3890,7 +3979,7 @@
                 <a:ea typeface="맑은 고딕" pitchFamily="34" charset="-122"/>
                 <a:cs typeface="맑은 고딕" pitchFamily="34" charset="-120"/>
               </a:rPr>
-              <a:t>10 / 27</a:t>
+              <a:t>10 / 28</a:t>
             </a:r>
             <a:endParaRPr lang="en-US" sz="1100" dirty="0"/>
           </a:p>
@@ -5681,7 +5770,7 @@
                 <a:ea typeface="맑은 고딕" pitchFamily="34" charset="-122"/>
                 <a:cs typeface="맑은 고딕" pitchFamily="34" charset="-120"/>
               </a:rPr>
-              <a:t>11 / 27</a:t>
+              <a:t>11 / 28</a:t>
             </a:r>
             <a:endParaRPr lang="en-US" sz="1100" dirty="0"/>
           </a:p>
@@ -7160,7 +7249,7 @@
                 <a:ea typeface="맑은 고딕" pitchFamily="34" charset="-122"/>
                 <a:cs typeface="맑은 고딕" pitchFamily="34" charset="-120"/>
               </a:rPr>
-              <a:t>12 / 27</a:t>
+              <a:t>12 / 28</a:t>
             </a:r>
             <a:endParaRPr lang="en-US" sz="1100" dirty="0"/>
           </a:p>
@@ -8084,7 +8173,7 @@
                 <a:ea typeface="맑은 고딕" pitchFamily="34" charset="-122"/>
                 <a:cs typeface="맑은 고딕" pitchFamily="34" charset="-120"/>
               </a:rPr>
-              <a:t>채점자에 따라 흔들리지 않음</a:t>
+              <a:t>판정 기준이 문서로 고정되어 있음</a:t>
             </a:r>
             <a:endParaRPr lang="en-US" sz="1050" dirty="0"/>
           </a:p>
@@ -8752,7 +8841,7 @@
                 <a:ea typeface="맑은 고딕" pitchFamily="34" charset="-122"/>
                 <a:cs typeface="맑은 고딕" pitchFamily="34" charset="-120"/>
               </a:rPr>
-              <a:t>13 / 27</a:t>
+              <a:t>13 / 28</a:t>
             </a:r>
             <a:endParaRPr lang="en-US" sz="1100" dirty="0"/>
           </a:p>
@@ -10864,7 +10953,7 @@
                 <a:ea typeface="맑은 고딕" pitchFamily="34" charset="-122"/>
                 <a:cs typeface="맑은 고딕" pitchFamily="34" charset="-120"/>
               </a:rPr>
-              <a:t>14 / 27</a:t>
+              <a:t>14 / 28</a:t>
             </a:r>
             <a:endParaRPr lang="en-US" sz="1100" dirty="0"/>
           </a:p>
@@ -12031,7 +12120,7 @@
                 <a:ea typeface="맑은 고딕" pitchFamily="34" charset="-122"/>
                 <a:cs typeface="맑은 고딕" pitchFamily="34" charset="-120"/>
               </a:rPr>
-              <a:t>15 / 27</a:t>
+              <a:t>15 / 28</a:t>
             </a:r>
             <a:endParaRPr lang="en-US" sz="1100" dirty="0"/>
           </a:p>
@@ -12513,7 +12602,7 @@
                 <a:ea typeface="맑은 고딕" pitchFamily="34" charset="-122"/>
                 <a:cs typeface="맑은 고딕" pitchFamily="34" charset="-120"/>
               </a:rPr>
-              <a:t>축 A ⑥ — 두 채점의 불일치가 곧 신뢰구간</a:t>
+              <a:t>축 A ⑥ — 두 채점의 불일치를 숨기지 않는다</a:t>
             </a:r>
             <a:endParaRPr lang="en-US" sz="2100" dirty="0"/>
           </a:p>
@@ -13075,7 +13164,7 @@
                 <a:ea typeface="맑은 고딕" pitchFamily="34" charset="-122"/>
                 <a:cs typeface="맑은 고딕" pitchFamily="34" charset="-120"/>
               </a:rPr>
-              <a:t>점수 하나가 아니라 "6.0 (범위 5.2–6.8)" 형태로 제시 — 불확실성을 감추지 않습니다</a:t>
+              <a:t>"6.0 (5.2–6.8)" 형태로 제시 — 통계적 신뢰구간이 아니라 두 채점의 편차 폭입니다</a:t>
             </a:r>
             <a:endParaRPr lang="en-US" sz="1250" dirty="0"/>
           </a:p>
@@ -13198,7 +13287,7 @@
                 <a:ea typeface="맑은 고딕" pitchFamily="34" charset="-122"/>
                 <a:cs typeface="맑은 고딕" pitchFamily="34" charset="-120"/>
               </a:rPr>
-              <a:t>16 / 27</a:t>
+              <a:t>16 / 28</a:t>
             </a:r>
             <a:endParaRPr lang="en-US" sz="1100" dirty="0"/>
           </a:p>
@@ -14716,7 +14805,7 @@
                 <a:ea typeface="맑은 고딕" pitchFamily="34" charset="-122"/>
                 <a:cs typeface="맑은 고딕" pitchFamily="34" charset="-120"/>
               </a:rPr>
-              <a:t>17 / 27</a:t>
+              <a:t>17 / 28</a:t>
             </a:r>
             <a:endParaRPr lang="en-US" sz="1100" dirty="0"/>
           </a:p>
@@ -16073,7 +16162,7 @@
                 <a:ea typeface="맑은 고딕" pitchFamily="34" charset="-122"/>
                 <a:cs typeface="맑은 고딕" pitchFamily="34" charset="-120"/>
               </a:rPr>
-              <a:t>18 / 27</a:t>
+              <a:t>18 / 28</a:t>
             </a:r>
             <a:endParaRPr lang="en-US" sz="1100" dirty="0"/>
           </a:p>
@@ -17110,7 +17199,7 @@
                 <a:ea typeface="맑은 고딕" pitchFamily="34" charset="-122"/>
                 <a:cs typeface="맑은 고딕" pitchFamily="34" charset="-120"/>
               </a:rPr>
-              <a:t>KDI 정책연구</a:t>
+              <a:t>KDI 발간물 7,362건</a:t>
             </a:r>
             <a:endParaRPr lang="en-US" sz="1000" dirty="0"/>
           </a:p>
@@ -17130,7 +17219,7 @@
                 <a:ea typeface="맑은 고딕" pitchFamily="34" charset="-122"/>
                 <a:cs typeface="맑은 고딕" pitchFamily="34" charset="-120"/>
               </a:rPr>
-              <a:t>7,362건</a:t>
+              <a:t>(정책연구 1,178)</a:t>
             </a:r>
             <a:endParaRPr lang="en-US" sz="1000" dirty="0"/>
           </a:p>
@@ -17980,7 +18069,7 @@
                 <a:ea typeface="맑은 고딕" pitchFamily="34" charset="-122"/>
                 <a:cs typeface="맑은 고딕" pitchFamily="34" charset="-120"/>
               </a:rPr>
-              <a:t>19 / 27</a:t>
+              <a:t>19 / 28</a:t>
             </a:r>
             <a:endParaRPr lang="en-US" sz="1100" dirty="0"/>
           </a:p>
@@ -19595,7 +19684,7 @@
                 <a:ea typeface="맑은 고딕" pitchFamily="34" charset="-122"/>
                 <a:cs typeface="맑은 고딕" pitchFamily="34" charset="-120"/>
               </a:rPr>
-              <a:t>2 / 27</a:t>
+              <a:t>2 / 28</a:t>
             </a:r>
             <a:endParaRPr lang="en-US" sz="1100" dirty="0"/>
           </a:p>
@@ -20751,7 +20840,7 @@
                 <a:ea typeface="맑은 고딕" pitchFamily="34" charset="-122"/>
                 <a:cs typeface="맑은 고딕" pitchFamily="34" charset="-120"/>
               </a:rPr>
-              <a:t>20 / 27</a:t>
+              <a:t>20 / 28</a:t>
             </a:r>
             <a:endParaRPr lang="en-US" sz="1100" dirty="0"/>
           </a:p>
@@ -22421,7 +22510,7 @@
                 <a:ea typeface="맑은 고딕" pitchFamily="34" charset="-122"/>
                 <a:cs typeface="맑은 고딕" pitchFamily="34" charset="-120"/>
               </a:rPr>
-              <a:t>21 / 27</a:t>
+              <a:t>21 / 28</a:t>
             </a:r>
             <a:endParaRPr lang="en-US" sz="1100" dirty="0"/>
           </a:p>
@@ -24377,7 +24466,7 @@
                 <a:ea typeface="맑은 고딕" pitchFamily="34" charset="-122"/>
                 <a:cs typeface="맑은 고딕" pitchFamily="34" charset="-120"/>
               </a:rPr>
-              <a:t>해외 조회에서 걸린 사례는 A급 근거 — 국가·연도·설계까지 인용할 수 있습니다</a:t>
+              <a:t>A급(해외·자기신고) — 각국이 스스로 신고한 사례로, 성과는 독립 검증되지 않았습니다</a:t>
             </a:r>
             <a:endParaRPr lang="en-US" sz="1250" dirty="0"/>
           </a:p>
@@ -24500,7 +24589,7 @@
                 <a:ea typeface="맑은 고딕" pitchFamily="34" charset="-122"/>
                 <a:cs typeface="맑은 고딕" pitchFamily="34" charset="-120"/>
               </a:rPr>
-              <a:t>22 / 27</a:t>
+              <a:t>22 / 28</a:t>
             </a:r>
             <a:endParaRPr lang="en-US" sz="1100" dirty="0"/>
           </a:p>
@@ -25087,8 +25176,8 @@
         </p:nvSpPr>
         <p:spPr>
           <a:xfrm>
-            <a:off x="530352" y="2395728"/>
-            <a:ext cx="128016" cy="402336"/>
+            <a:off x="530352" y="2377440"/>
+            <a:ext cx="128016" cy="320040"/>
           </a:xfrm>
           <a:prstGeom prst="rect">
             <a:avLst/>
@@ -25104,7 +25193,7 @@
               <a:buNone/>
             </a:pPr>
             <a:r>
-              <a:rPr lang="en-US" sz="1050" dirty="0">
+              <a:rPr lang="en-US" sz="1000" dirty="0">
                 <a:solidFill>
                   <a:srgbClr val="2563EB"/>
                 </a:solidFill>
@@ -25114,7 +25203,7 @@
               </a:rPr>
               <a:t>•</a:t>
             </a:r>
-            <a:endParaRPr lang="en-US" sz="1050" dirty="0"/>
+            <a:endParaRPr lang="en-US" sz="1000" dirty="0"/>
           </a:p>
         </p:txBody>
       </p:sp>
@@ -25126,8 +25215,8 @@
         </p:nvSpPr>
         <p:spPr>
           <a:xfrm>
-            <a:off x="667512" y="2395728"/>
-            <a:ext cx="3648456" cy="402336"/>
+            <a:off x="667512" y="2377440"/>
+            <a:ext cx="3648456" cy="320040"/>
           </a:xfrm>
           <a:prstGeom prst="rect">
             <a:avLst/>
@@ -25143,7 +25232,7 @@
               <a:buNone/>
             </a:pPr>
             <a:r>
-              <a:rPr lang="en-US" sz="1050" dirty="0">
+              <a:rPr lang="en-US" sz="1000" dirty="0">
                 <a:solidFill>
                   <a:srgbClr val="333333"/>
                 </a:solidFill>
@@ -25151,9 +25240,9 @@
                 <a:ea typeface="맑은 고딕" pitchFamily="34" charset="-122"/>
                 <a:cs typeface="맑은 고딕" pitchFamily="34" charset="-120"/>
               </a:rPr>
-              <a:t>재정·KDI·의안·해외 조회에서 실제로 나온 것</a:t>
-            </a:r>
-            <a:endParaRPr lang="en-US" sz="1050" dirty="0"/>
+              <a:t>국내 A급: 재정·KDI·의안 조회 결과</a:t>
+            </a:r>
+            <a:endParaRPr lang="en-US" sz="1000" dirty="0"/>
           </a:p>
         </p:txBody>
       </p:sp>
@@ -25165,8 +25254,8 @@
         </p:nvSpPr>
         <p:spPr>
           <a:xfrm>
-            <a:off x="530352" y="2798064"/>
-            <a:ext cx="128016" cy="402336"/>
+            <a:off x="530352" y="2697480"/>
+            <a:ext cx="128016" cy="320040"/>
           </a:xfrm>
           <a:prstGeom prst="rect">
             <a:avLst/>
@@ -25182,7 +25271,7 @@
               <a:buNone/>
             </a:pPr>
             <a:r>
-              <a:rPr lang="en-US" sz="1050" dirty="0">
+              <a:rPr lang="en-US" sz="1000" dirty="0">
                 <a:solidFill>
                   <a:srgbClr val="2563EB"/>
                 </a:solidFill>
@@ -25192,7 +25281,7 @@
               </a:rPr>
               <a:t>•</a:t>
             </a:r>
-            <a:endParaRPr lang="en-US" sz="1050" dirty="0"/>
+            <a:endParaRPr lang="en-US" sz="1000" dirty="0"/>
           </a:p>
         </p:txBody>
       </p:sp>
@@ -25204,8 +25293,8 @@
         </p:nvSpPr>
         <p:spPr>
           <a:xfrm>
-            <a:off x="667512" y="2798064"/>
-            <a:ext cx="3648456" cy="402336"/>
+            <a:off x="667512" y="2697480"/>
+            <a:ext cx="3648456" cy="320040"/>
           </a:xfrm>
           <a:prstGeom prst="rect">
             <a:avLst/>
@@ -25221,7 +25310,7 @@
               <a:buNone/>
             </a:pPr>
             <a:r>
-              <a:rPr lang="en-US" sz="1050" dirty="0">
+              <a:rPr lang="en-US" sz="1000" dirty="0">
                 <a:solidFill>
                   <a:srgbClr val="333333"/>
                 </a:solidFill>
@@ -25229,22 +25318,100 @@
                 <a:ea typeface="맑은 고딕" pitchFamily="34" charset="-122"/>
                 <a:cs typeface="맑은 고딕" pitchFamily="34" charset="-120"/>
               </a:rPr>
+              <a:t>A급(해외): OPSI — 각국 자기신고, 성과 미검증</a:t>
+            </a:r>
+            <a:endParaRPr lang="en-US" sz="1000" dirty="0"/>
+          </a:p>
+        </p:txBody>
+      </p:sp>
+      <p:sp>
+        <p:nvSpPr>
+          <p:cNvPr id="27" name="Text 25"/>
+          <p:cNvSpPr/>
+          <p:nvPr/>
+        </p:nvSpPr>
+        <p:spPr>
+          <a:xfrm>
+            <a:off x="530352" y="3017520"/>
+            <a:ext cx="128016" cy="320040"/>
+          </a:xfrm>
+          <a:prstGeom prst="rect">
+            <a:avLst/>
+          </a:prstGeom>
+          <a:noFill/>
+          <a:ln/>
+        </p:spPr>
+        <p:txBody>
+          <a:bodyPr wrap="square" lIns="0" tIns="0" rIns="0" bIns="0" rtlCol="0" anchor="t"/>
+          <a:lstStyle/>
+          <a:p>
+            <a:pPr indent="0" marL="0">
+              <a:buNone/>
+            </a:pPr>
+            <a:r>
+              <a:rPr lang="en-US" sz="1000" dirty="0">
+                <a:solidFill>
+                  <a:srgbClr val="2563EB"/>
+                </a:solidFill>
+                <a:latin typeface="맑은 고딕" pitchFamily="34" charset="0"/>
+                <a:ea typeface="맑은 고딕" pitchFamily="34" charset="-122"/>
+                <a:cs typeface="맑은 고딕" pitchFamily="34" charset="-120"/>
+              </a:rPr>
+              <a:t>•</a:t>
+            </a:r>
+            <a:endParaRPr lang="en-US" sz="1000" dirty="0"/>
+          </a:p>
+        </p:txBody>
+      </p:sp>
+      <p:sp>
+        <p:nvSpPr>
+          <p:cNvPr id="28" name="Text 26"/>
+          <p:cNvSpPr/>
+          <p:nvPr/>
+        </p:nvSpPr>
+        <p:spPr>
+          <a:xfrm>
+            <a:off x="667512" y="3017520"/>
+            <a:ext cx="3648456" cy="320040"/>
+          </a:xfrm>
+          <a:prstGeom prst="rect">
+            <a:avLst/>
+          </a:prstGeom>
+          <a:noFill/>
+          <a:ln/>
+        </p:spPr>
+        <p:txBody>
+          <a:bodyPr wrap="square" lIns="0" tIns="0" rIns="0" bIns="0" rtlCol="0" anchor="t"/>
+          <a:lstStyle/>
+          <a:p>
+            <a:pPr indent="0" marL="0">
+              <a:buNone/>
+            </a:pPr>
+            <a:r>
+              <a:rPr lang="en-US" sz="1000" dirty="0">
+                <a:solidFill>
+                  <a:srgbClr val="333333"/>
+                </a:solidFill>
+                <a:latin typeface="맑은 고딕" pitchFamily="34" charset="0"/>
+                <a:ea typeface="맑은 고딕" pitchFamily="34" charset="-122"/>
+                <a:cs typeface="맑은 고딕" pitchFamily="34" charset="-120"/>
+              </a:rPr>
               <a:t>사업명·연도·부처·예산·의안명 인용 가능</a:t>
             </a:r>
-            <a:endParaRPr lang="en-US" sz="1050" dirty="0"/>
-          </a:p>
-        </p:txBody>
-      </p:sp>
-      <p:sp>
-        <p:nvSpPr>
-          <p:cNvPr id="27" name="Text 25"/>
-          <p:cNvSpPr/>
-          <p:nvPr/>
-        </p:nvSpPr>
-        <p:spPr>
-          <a:xfrm>
-            <a:off x="530352" y="3200400"/>
-            <a:ext cx="128016" cy="402336"/>
+            <a:endParaRPr lang="en-US" sz="1000" dirty="0"/>
+          </a:p>
+        </p:txBody>
+      </p:sp>
+      <p:sp>
+        <p:nvSpPr>
+          <p:cNvPr id="29" name="Text 27"/>
+          <p:cNvSpPr/>
+          <p:nvPr/>
+        </p:nvSpPr>
+        <p:spPr>
+          <a:xfrm>
+            <a:off x="530352" y="3337560"/>
+            <a:ext cx="128016" cy="320040"/>
           </a:xfrm>
           <a:prstGeom prst="rect">
             <a:avLst/>
@@ -25260,7 +25427,7 @@
               <a:buNone/>
             </a:pPr>
             <a:r>
-              <a:rPr lang="en-US" sz="1050" dirty="0">
+              <a:rPr lang="en-US" sz="1000" dirty="0">
                 <a:solidFill>
                   <a:srgbClr val="2563EB"/>
                 </a:solidFill>
@@ -25270,20 +25437,20 @@
               </a:rPr>
               <a:t>•</a:t>
             </a:r>
-            <a:endParaRPr lang="en-US" sz="1050" dirty="0"/>
-          </a:p>
-        </p:txBody>
-      </p:sp>
-      <p:sp>
-        <p:nvSpPr>
-          <p:cNvPr id="28" name="Text 26"/>
-          <p:cNvSpPr/>
-          <p:nvPr/>
-        </p:nvSpPr>
-        <p:spPr>
-          <a:xfrm>
-            <a:off x="667512" y="3200400"/>
-            <a:ext cx="3648456" cy="402336"/>
+            <a:endParaRPr lang="en-US" sz="1000" dirty="0"/>
+          </a:p>
+        </p:txBody>
+      </p:sp>
+      <p:sp>
+        <p:nvSpPr>
+          <p:cNvPr id="30" name="Text 28"/>
+          <p:cNvSpPr/>
+          <p:nvPr/>
+        </p:nvSpPr>
+        <p:spPr>
+          <a:xfrm>
+            <a:off x="667512" y="3337560"/>
+            <a:ext cx="3648456" cy="320040"/>
           </a:xfrm>
           <a:prstGeom prst="rect">
             <a:avLst/>
@@ -25299,7 +25466,7 @@
               <a:buNone/>
             </a:pPr>
             <a:r>
-              <a:rPr lang="en-US" sz="1050" dirty="0">
+              <a:rPr lang="en-US" sz="1000" dirty="0">
                 <a:solidFill>
                   <a:srgbClr val="333333"/>
                 </a:solidFill>
@@ -25307,15 +25474,15 @@
                 <a:ea typeface="맑은 고딕" pitchFamily="34" charset="-122"/>
                 <a:cs typeface="맑은 고딕" pitchFamily="34" charset="-120"/>
               </a:rPr>
-              <a:t>단, 설계가 실질적으로 같음을 함께 논증해야 감점 근거</a:t>
-            </a:r>
-            <a:endParaRPr lang="en-US" sz="1050" dirty="0"/>
-          </a:p>
-        </p:txBody>
-      </p:sp>
-      <p:sp>
-        <p:nvSpPr>
-          <p:cNvPr id="29" name="Shape 27"/>
+              <a:t>단, 설계가 같음을 함께 논증해야 감점 근거</a:t>
+            </a:r>
+            <a:endParaRPr lang="en-US" sz="1000" dirty="0"/>
+          </a:p>
+        </p:txBody>
+      </p:sp>
+      <p:sp>
+        <p:nvSpPr>
+          <p:cNvPr id="31" name="Shape 29"/>
           <p:cNvSpPr/>
           <p:nvPr/>
         </p:nvSpPr>
@@ -25347,7 +25514,7 @@
       </p:sp>
       <p:sp>
         <p:nvSpPr>
-          <p:cNvPr id="30" name="Text 28"/>
+          <p:cNvPr id="32" name="Text 30"/>
           <p:cNvSpPr/>
           <p:nvPr/>
         </p:nvSpPr>
@@ -25386,7 +25553,7 @@
       </p:sp>
       <p:sp>
         <p:nvSpPr>
-          <p:cNvPr id="31" name="Shape 29"/>
+          <p:cNvPr id="33" name="Shape 31"/>
           <p:cNvSpPr/>
           <p:nvPr/>
         </p:nvSpPr>
@@ -25406,14 +25573,14 @@
       </p:sp>
       <p:sp>
         <p:nvSpPr>
-          <p:cNvPr id="32" name="Text 30"/>
-          <p:cNvSpPr/>
-          <p:nvPr/>
-        </p:nvSpPr>
-        <p:spPr>
-          <a:xfrm>
-            <a:off x="4828032" y="2395728"/>
-            <a:ext cx="128016" cy="402336"/>
+          <p:cNvPr id="34" name="Text 32"/>
+          <p:cNvSpPr/>
+          <p:nvPr/>
+        </p:nvSpPr>
+        <p:spPr>
+          <a:xfrm>
+            <a:off x="4828032" y="2377440"/>
+            <a:ext cx="128016" cy="320040"/>
           </a:xfrm>
           <a:prstGeom prst="rect">
             <a:avLst/>
@@ -25429,7 +25596,7 @@
               <a:buNone/>
             </a:pPr>
             <a:r>
-              <a:rPr lang="en-US" sz="1050" dirty="0">
+              <a:rPr lang="en-US" sz="1000" dirty="0">
                 <a:solidFill>
                   <a:srgbClr val="2563EB"/>
                 </a:solidFill>
@@ -25439,20 +25606,20 @@
               </a:rPr>
               <a:t>•</a:t>
             </a:r>
-            <a:endParaRPr lang="en-US" sz="1050" dirty="0"/>
-          </a:p>
-        </p:txBody>
-      </p:sp>
-      <p:sp>
-        <p:nvSpPr>
-          <p:cNvPr id="33" name="Text 31"/>
-          <p:cNvSpPr/>
-          <p:nvPr/>
-        </p:nvSpPr>
-        <p:spPr>
-          <a:xfrm>
-            <a:off x="4965192" y="2395728"/>
-            <a:ext cx="3648456" cy="402336"/>
+            <a:endParaRPr lang="en-US" sz="1000" dirty="0"/>
+          </a:p>
+        </p:txBody>
+      </p:sp>
+      <p:sp>
+        <p:nvSpPr>
+          <p:cNvPr id="35" name="Text 33"/>
+          <p:cNvSpPr/>
+          <p:nvPr/>
+        </p:nvSpPr>
+        <p:spPr>
+          <a:xfrm>
+            <a:off x="4965192" y="2377440"/>
+            <a:ext cx="3648456" cy="320040"/>
           </a:xfrm>
           <a:prstGeom prst="rect">
             <a:avLst/>
@@ -25468,7 +25635,7 @@
               <a:buNone/>
             </a:pPr>
             <a:r>
-              <a:rPr lang="en-US" sz="1050" dirty="0">
+              <a:rPr lang="en-US" sz="1000" dirty="0">
                 <a:solidFill>
                   <a:srgbClr val="333333"/>
                 </a:solidFill>
@@ -25478,20 +25645,20 @@
               </a:rPr>
               <a:t>조회로 검증되지 않은 AI의 배경지식</a:t>
             </a:r>
-            <a:endParaRPr lang="en-US" sz="1050" dirty="0"/>
-          </a:p>
-        </p:txBody>
-      </p:sp>
-      <p:sp>
-        <p:nvSpPr>
-          <p:cNvPr id="34" name="Text 32"/>
-          <p:cNvSpPr/>
-          <p:nvPr/>
-        </p:nvSpPr>
-        <p:spPr>
-          <a:xfrm>
-            <a:off x="4828032" y="2798064"/>
-            <a:ext cx="128016" cy="402336"/>
+            <a:endParaRPr lang="en-US" sz="1000" dirty="0"/>
+          </a:p>
+        </p:txBody>
+      </p:sp>
+      <p:sp>
+        <p:nvSpPr>
+          <p:cNvPr id="36" name="Text 34"/>
+          <p:cNvSpPr/>
+          <p:nvPr/>
+        </p:nvSpPr>
+        <p:spPr>
+          <a:xfrm>
+            <a:off x="4828032" y="2697480"/>
+            <a:ext cx="128016" cy="320040"/>
           </a:xfrm>
           <a:prstGeom prst="rect">
             <a:avLst/>
@@ -25507,7 +25674,7 @@
               <a:buNone/>
             </a:pPr>
             <a:r>
-              <a:rPr lang="en-US" sz="1050" dirty="0">
+              <a:rPr lang="en-US" sz="1000" dirty="0">
                 <a:solidFill>
                   <a:srgbClr val="2563EB"/>
                 </a:solidFill>
@@ -25517,20 +25684,20 @@
               </a:rPr>
               <a:t>•</a:t>
             </a:r>
-            <a:endParaRPr lang="en-US" sz="1050" dirty="0"/>
-          </a:p>
-        </p:txBody>
-      </p:sp>
-      <p:sp>
-        <p:nvSpPr>
-          <p:cNvPr id="35" name="Text 33"/>
-          <p:cNvSpPr/>
-          <p:nvPr/>
-        </p:nvSpPr>
-        <p:spPr>
-          <a:xfrm>
-            <a:off x="4965192" y="2798064"/>
-            <a:ext cx="3648456" cy="402336"/>
+            <a:endParaRPr lang="en-US" sz="1000" dirty="0"/>
+          </a:p>
+        </p:txBody>
+      </p:sp>
+      <p:sp>
+        <p:nvSpPr>
+          <p:cNvPr id="37" name="Text 35"/>
+          <p:cNvSpPr/>
+          <p:nvPr/>
+        </p:nvSpPr>
+        <p:spPr>
+          <a:xfrm>
+            <a:off x="4965192" y="2697480"/>
+            <a:ext cx="3648456" cy="320040"/>
           </a:xfrm>
           <a:prstGeom prst="rect">
             <a:avLst/>
@@ -25546,7 +25713,7 @@
               <a:buNone/>
             </a:pPr>
             <a:r>
-              <a:rPr lang="en-US" sz="1050" dirty="0">
+              <a:rPr lang="en-US" sz="1000" dirty="0">
                 <a:solidFill>
                   <a:srgbClr val="333333"/>
                 </a:solidFill>
@@ -25556,20 +25723,20 @@
               </a:rPr>
               <a:t>고유명사(사업명·연도) 인용 금지</a:t>
             </a:r>
-            <a:endParaRPr lang="en-US" sz="1050" dirty="0"/>
-          </a:p>
-        </p:txBody>
-      </p:sp>
-      <p:sp>
-        <p:nvSpPr>
-          <p:cNvPr id="36" name="Text 34"/>
-          <p:cNvSpPr/>
-          <p:nvPr/>
-        </p:nvSpPr>
-        <p:spPr>
-          <a:xfrm>
-            <a:off x="4828032" y="3200400"/>
-            <a:ext cx="128016" cy="402336"/>
+            <a:endParaRPr lang="en-US" sz="1000" dirty="0"/>
+          </a:p>
+        </p:txBody>
+      </p:sp>
+      <p:sp>
+        <p:nvSpPr>
+          <p:cNvPr id="38" name="Text 36"/>
+          <p:cNvSpPr/>
+          <p:nvPr/>
+        </p:nvSpPr>
+        <p:spPr>
+          <a:xfrm>
+            <a:off x="4828032" y="3017520"/>
+            <a:ext cx="128016" cy="320040"/>
           </a:xfrm>
           <a:prstGeom prst="rect">
             <a:avLst/>
@@ -25585,7 +25752,7 @@
               <a:buNone/>
             </a:pPr>
             <a:r>
-              <a:rPr lang="en-US" sz="1050" dirty="0">
+              <a:rPr lang="en-US" sz="1000" dirty="0">
                 <a:solidFill>
                   <a:srgbClr val="2563EB"/>
                 </a:solidFill>
@@ -25595,20 +25762,20 @@
               </a:rPr>
               <a:t>•</a:t>
             </a:r>
-            <a:endParaRPr lang="en-US" sz="1050" dirty="0"/>
-          </a:p>
-        </p:txBody>
-      </p:sp>
-      <p:sp>
-        <p:nvSpPr>
-          <p:cNvPr id="37" name="Text 35"/>
-          <p:cNvSpPr/>
-          <p:nvPr/>
-        </p:nvSpPr>
-        <p:spPr>
-          <a:xfrm>
-            <a:off x="4965192" y="3200400"/>
-            <a:ext cx="3648456" cy="402336"/>
+            <a:endParaRPr lang="en-US" sz="1000" dirty="0"/>
+          </a:p>
+        </p:txBody>
+      </p:sp>
+      <p:sp>
+        <p:nvSpPr>
+          <p:cNvPr id="39" name="Text 37"/>
+          <p:cNvSpPr/>
+          <p:nvPr/>
+        </p:nvSpPr>
+        <p:spPr>
+          <a:xfrm>
+            <a:off x="4965192" y="3017520"/>
+            <a:ext cx="3648456" cy="320040"/>
           </a:xfrm>
           <a:prstGeom prst="rect">
             <a:avLst/>
@@ -25624,7 +25791,7 @@
               <a:buNone/>
             </a:pPr>
             <a:r>
-              <a:rPr lang="en-US" sz="1050" dirty="0">
+              <a:rPr lang="en-US" sz="1000" dirty="0">
                 <a:solidFill>
                   <a:srgbClr val="333333"/>
                 </a:solidFill>
@@ -25634,13 +25801,13 @@
               </a:rPr>
               <a:t>"유사 취지의 바우처 계열이 존재" 수준의 유형 진술만</a:t>
             </a:r>
-            <a:endParaRPr lang="en-US" sz="1050" dirty="0"/>
-          </a:p>
-        </p:txBody>
-      </p:sp>
-      <p:sp>
-        <p:nvSpPr>
-          <p:cNvPr id="38" name="Shape 36"/>
+            <a:endParaRPr lang="en-US" sz="1000" dirty="0"/>
+          </a:p>
+        </p:txBody>
+      </p:sp>
+      <p:sp>
+        <p:nvSpPr>
+          <p:cNvPr id="40" name="Shape 38"/>
           <p:cNvSpPr/>
           <p:nvPr/>
         </p:nvSpPr>
@@ -25665,7 +25832,7 @@
       </p:sp>
       <p:sp>
         <p:nvSpPr>
-          <p:cNvPr id="39" name="Text 37"/>
+          <p:cNvPr id="41" name="Text 39"/>
           <p:cNvSpPr/>
           <p:nvPr/>
         </p:nvSpPr>
@@ -25704,7 +25871,7 @@
       </p:sp>
       <p:sp>
         <p:nvSpPr>
-          <p:cNvPr id="40" name="Text 38"/>
+          <p:cNvPr id="42" name="Text 40"/>
           <p:cNvSpPr/>
           <p:nvPr/>
         </p:nvSpPr>
@@ -25743,7 +25910,7 @@
       </p:sp>
       <p:sp>
         <p:nvSpPr>
-          <p:cNvPr id="41" name="Text 39"/>
+          <p:cNvPr id="43" name="Text 41"/>
           <p:cNvSpPr/>
           <p:nvPr/>
         </p:nvSpPr>
@@ -25782,7 +25949,7 @@
       </p:sp>
       <p:sp>
         <p:nvSpPr>
-          <p:cNvPr id="42" name="Text 40"/>
+          <p:cNvPr id="44" name="Text 42"/>
           <p:cNvSpPr/>
           <p:nvPr/>
         </p:nvSpPr>
@@ -25821,7 +25988,7 @@
       </p:sp>
       <p:sp>
         <p:nvSpPr>
-          <p:cNvPr id="43" name="Text 41"/>
+          <p:cNvPr id="45" name="Text 43"/>
           <p:cNvSpPr/>
           <p:nvPr/>
         </p:nvSpPr>
@@ -25975,7 +26142,7 @@
                 <a:ea typeface="맑은 고딕" pitchFamily="34" charset="-122"/>
                 <a:cs typeface="맑은 고딕" pitchFamily="34" charset="-120"/>
               </a:rPr>
-              <a:t>23 / 27</a:t>
+              <a:t>23 / 28</a:t>
             </a:r>
             <a:endParaRPr lang="en-US" sz="1100" dirty="0"/>
           </a:p>
@@ -27380,7 +27547,7 @@
                 <a:ea typeface="맑은 고딕" pitchFamily="34" charset="-122"/>
                 <a:cs typeface="맑은 고딕" pitchFamily="34" charset="-120"/>
               </a:rPr>
-              <a:t>24 / 27</a:t>
+              <a:t>24 / 28</a:t>
             </a:r>
             <a:endParaRPr lang="en-US" sz="1100" dirty="0"/>
           </a:p>
@@ -27803,7 +27970,7 @@
                 <a:ea typeface="맑은 고딕" pitchFamily="34" charset="-122"/>
                 <a:cs typeface="맑은 고딕" pitchFamily="34" charset="-120"/>
               </a:rPr>
-              <a:t>06. 구축과 운영</a:t>
+              <a:t>05. 왜 믿을 수 있나</a:t>
             </a:r>
             <a:endParaRPr lang="en-US" sz="1200" dirty="0"/>
           </a:p>
@@ -27862,7 +28029,7 @@
                 <a:ea typeface="맑은 고딕" pitchFamily="34" charset="-122"/>
                 <a:cs typeface="맑은 고딕" pitchFamily="34" charset="-120"/>
               </a:rPr>
-              <a:t>어떻게 만들었나</a:t>
+              <a:t>판정의 검증 — 확인된 것과 확인되지 않은 것</a:t>
             </a:r>
             <a:endParaRPr lang="en-US" sz="2100" dirty="0"/>
           </a:p>
@@ -27876,18 +28043,18 @@
         </p:nvSpPr>
         <p:spPr>
           <a:xfrm>
-            <a:off x="365760" y="1783080"/>
-            <a:ext cx="2011680" cy="1417320"/>
+            <a:off x="365760" y="1755648"/>
+            <a:ext cx="4114800" cy="2194560"/>
           </a:xfrm>
           <a:prstGeom prst="rect">
             <a:avLst/>
           </a:prstGeom>
           <a:solidFill>
-            <a:srgbClr val="FFFFFF"/>
+            <a:srgbClr val="F0F9F3"/>
           </a:solidFill>
-          <a:ln w="12700">
+          <a:ln w="15240">
             <a:solidFill>
-              <a:srgbClr val="E5E7EB"/>
+              <a:srgbClr val="2E7D4F"/>
             </a:solidFill>
             <a:prstDash val="solid"/>
           </a:ln>
@@ -27902,165 +28069,414 @@
       </p:sp>
       <p:sp>
         <p:nvSpPr>
-          <p:cNvPr id="21" name="Shape 19"/>
-          <p:cNvSpPr/>
-          <p:nvPr/>
-        </p:nvSpPr>
-        <p:spPr>
-          <a:xfrm>
-            <a:off x="365760" y="1783080"/>
-            <a:ext cx="2011680" cy="329184"/>
+          <p:cNvPr id="21" name="Text 19"/>
+          <p:cNvSpPr/>
+          <p:nvPr/>
+        </p:nvSpPr>
+        <p:spPr>
+          <a:xfrm>
+            <a:off x="530352" y="1865376"/>
+            <a:ext cx="3749040" cy="274320"/>
+          </a:xfrm>
+          <a:prstGeom prst="rect">
+            <a:avLst/>
+          </a:prstGeom>
+          <a:noFill/>
+          <a:ln/>
+        </p:spPr>
+        <p:txBody>
+          <a:bodyPr wrap="square" lIns="0" tIns="0" rIns="0" bIns="0" rtlCol="0" anchor="ctr"/>
+          <a:lstStyle/>
+          <a:p>
+            <a:pPr indent="0" marL="0">
+              <a:buNone/>
+            </a:pPr>
+            <a:r>
+              <a:rPr lang="en-US" sz="1350" b="1" dirty="0">
+                <a:solidFill>
+                  <a:srgbClr val="2E7D4F"/>
+                </a:solidFill>
+                <a:latin typeface="맑은 고딕" pitchFamily="34" charset="0"/>
+                <a:ea typeface="맑은 고딕" pitchFamily="34" charset="-122"/>
+                <a:cs typeface="맑은 고딕" pitchFamily="34" charset="-120"/>
+              </a:rPr>
+              <a:t>확인된 것</a:t>
+            </a:r>
+            <a:endParaRPr lang="en-US" sz="1350" dirty="0"/>
+          </a:p>
+        </p:txBody>
+      </p:sp>
+      <p:sp>
+        <p:nvSpPr>
+          <p:cNvPr id="22" name="Text 20"/>
+          <p:cNvSpPr/>
+          <p:nvPr/>
+        </p:nvSpPr>
+        <p:spPr>
+          <a:xfrm>
+            <a:off x="530352" y="2176272"/>
+            <a:ext cx="3749040" cy="237744"/>
+          </a:xfrm>
+          <a:prstGeom prst="rect">
+            <a:avLst/>
+          </a:prstGeom>
+          <a:noFill/>
+          <a:ln/>
+        </p:spPr>
+        <p:txBody>
+          <a:bodyPr wrap="square" lIns="0" tIns="0" rIns="0" bIns="0" rtlCol="0" anchor="ctr"/>
+          <a:lstStyle/>
+          <a:p>
+            <a:pPr indent="0" marL="0">
+              <a:buNone/>
+            </a:pPr>
+            <a:r>
+              <a:rPr lang="en-US" sz="1050" b="1" dirty="0">
+                <a:solidFill>
+                  <a:srgbClr val="1E293B"/>
+                </a:solidFill>
+                <a:latin typeface="맑은 고딕" pitchFamily="34" charset="0"/>
+                <a:ea typeface="맑은 고딕" pitchFamily="34" charset="-122"/>
+                <a:cs typeface="맑은 고딕" pitchFamily="34" charset="-120"/>
+              </a:rPr>
+              <a:t>판별력 시험 (n = 10)</a:t>
+            </a:r>
+            <a:endParaRPr lang="en-US" sz="1050" dirty="0"/>
+          </a:p>
+        </p:txBody>
+      </p:sp>
+      <p:sp>
+        <p:nvSpPr>
+          <p:cNvPr id="23" name="Text 21"/>
+          <p:cNvSpPr/>
+          <p:nvPr/>
+        </p:nvSpPr>
+        <p:spPr>
+          <a:xfrm>
+            <a:off x="566928" y="2450592"/>
+            <a:ext cx="2286000" cy="256032"/>
+          </a:xfrm>
+          <a:prstGeom prst="rect">
+            <a:avLst/>
+          </a:prstGeom>
+          <a:noFill/>
+          <a:ln/>
+        </p:spPr>
+        <p:txBody>
+          <a:bodyPr wrap="square" lIns="0" tIns="0" rIns="0" bIns="0" rtlCol="0" anchor="ctr"/>
+          <a:lstStyle/>
+          <a:p>
+            <a:pPr indent="0" marL="0">
+              <a:buNone/>
+            </a:pPr>
+            <a:r>
+              <a:rPr lang="en-US" sz="1000" dirty="0">
+                <a:solidFill>
+                  <a:srgbClr val="333333"/>
+                </a:solidFill>
+                <a:latin typeface="맑은 고딕" pitchFamily="34" charset="0"/>
+                <a:ea typeface="맑은 고딕" pitchFamily="34" charset="-122"/>
+                <a:cs typeface="맑은 고딕" pitchFamily="34" charset="-120"/>
+              </a:rPr>
+              <a:t>진부 아이디어 5건</a:t>
+            </a:r>
+            <a:endParaRPr lang="en-US" sz="1000" dirty="0"/>
+          </a:p>
+        </p:txBody>
+      </p:sp>
+      <p:sp>
+        <p:nvSpPr>
+          <p:cNvPr id="24" name="Text 22"/>
+          <p:cNvSpPr/>
+          <p:nvPr/>
+        </p:nvSpPr>
+        <p:spPr>
+          <a:xfrm>
+            <a:off x="2926080" y="2450592"/>
+            <a:ext cx="1371600" cy="256032"/>
+          </a:xfrm>
+          <a:prstGeom prst="rect">
+            <a:avLst/>
+          </a:prstGeom>
+          <a:noFill/>
+          <a:ln/>
+        </p:spPr>
+        <p:txBody>
+          <a:bodyPr wrap="square" lIns="0" tIns="0" rIns="0" bIns="0" rtlCol="0" anchor="ctr"/>
+          <a:lstStyle/>
+          <a:p>
+            <a:pPr algn="r" indent="0" marL="0">
+              <a:buNone/>
+            </a:pPr>
+            <a:r>
+              <a:rPr lang="en-US" sz="1000" b="1" dirty="0">
+                <a:solidFill>
+                  <a:srgbClr val="2E7D4F"/>
+                </a:solidFill>
+                <a:latin typeface="맑은 고딕" pitchFamily="34" charset="0"/>
+                <a:ea typeface="맑은 고딕" pitchFamily="34" charset="-122"/>
+                <a:cs typeface="맑은 고딕" pitchFamily="34" charset="-120"/>
+              </a:rPr>
+              <a:t>평균 4.23</a:t>
+            </a:r>
+            <a:endParaRPr lang="en-US" sz="1000" dirty="0"/>
+          </a:p>
+        </p:txBody>
+      </p:sp>
+      <p:sp>
+        <p:nvSpPr>
+          <p:cNvPr id="25" name="Text 23"/>
+          <p:cNvSpPr/>
+          <p:nvPr/>
+        </p:nvSpPr>
+        <p:spPr>
+          <a:xfrm>
+            <a:off x="566928" y="2724912"/>
+            <a:ext cx="2286000" cy="256032"/>
+          </a:xfrm>
+          <a:prstGeom prst="rect">
+            <a:avLst/>
+          </a:prstGeom>
+          <a:noFill/>
+          <a:ln/>
+        </p:spPr>
+        <p:txBody>
+          <a:bodyPr wrap="square" lIns="0" tIns="0" rIns="0" bIns="0" rtlCol="0" anchor="ctr"/>
+          <a:lstStyle/>
+          <a:p>
+            <a:pPr indent="0" marL="0">
+              <a:buNone/>
+            </a:pPr>
+            <a:r>
+              <a:rPr lang="en-US" sz="1000" dirty="0">
+                <a:solidFill>
+                  <a:srgbClr val="333333"/>
+                </a:solidFill>
+                <a:latin typeface="맑은 고딕" pitchFamily="34" charset="0"/>
+                <a:ea typeface="맑은 고딕" pitchFamily="34" charset="-122"/>
+                <a:cs typeface="맑은 고딕" pitchFamily="34" charset="-120"/>
+              </a:rPr>
+              <a:t>창의 아이디어 5건</a:t>
+            </a:r>
+            <a:endParaRPr lang="en-US" sz="1000" dirty="0"/>
+          </a:p>
+        </p:txBody>
+      </p:sp>
+      <p:sp>
+        <p:nvSpPr>
+          <p:cNvPr id="26" name="Text 24"/>
+          <p:cNvSpPr/>
+          <p:nvPr/>
+        </p:nvSpPr>
+        <p:spPr>
+          <a:xfrm>
+            <a:off x="2926080" y="2724912"/>
+            <a:ext cx="1371600" cy="256032"/>
+          </a:xfrm>
+          <a:prstGeom prst="rect">
+            <a:avLst/>
+          </a:prstGeom>
+          <a:noFill/>
+          <a:ln/>
+        </p:spPr>
+        <p:txBody>
+          <a:bodyPr wrap="square" lIns="0" tIns="0" rIns="0" bIns="0" rtlCol="0" anchor="ctr"/>
+          <a:lstStyle/>
+          <a:p>
+            <a:pPr algn="r" indent="0" marL="0">
+              <a:buNone/>
+            </a:pPr>
+            <a:r>
+              <a:rPr lang="en-US" sz="1000" b="1" dirty="0">
+                <a:solidFill>
+                  <a:srgbClr val="2E7D4F"/>
+                </a:solidFill>
+                <a:latin typeface="맑은 고딕" pitchFamily="34" charset="0"/>
+                <a:ea typeface="맑은 고딕" pitchFamily="34" charset="-122"/>
+                <a:cs typeface="맑은 고딕" pitchFamily="34" charset="-120"/>
+              </a:rPr>
+              <a:t>평균 8.50</a:t>
+            </a:r>
+            <a:endParaRPr lang="en-US" sz="1000" dirty="0"/>
+          </a:p>
+        </p:txBody>
+      </p:sp>
+      <p:sp>
+        <p:nvSpPr>
+          <p:cNvPr id="27" name="Text 25"/>
+          <p:cNvSpPr/>
+          <p:nvPr/>
+        </p:nvSpPr>
+        <p:spPr>
+          <a:xfrm>
+            <a:off x="566928" y="2999232"/>
+            <a:ext cx="2286000" cy="256032"/>
+          </a:xfrm>
+          <a:prstGeom prst="rect">
+            <a:avLst/>
+          </a:prstGeom>
+          <a:noFill/>
+          <a:ln/>
+        </p:spPr>
+        <p:txBody>
+          <a:bodyPr wrap="square" lIns="0" tIns="0" rIns="0" bIns="0" rtlCol="0" anchor="ctr"/>
+          <a:lstStyle/>
+          <a:p>
+            <a:pPr indent="0" marL="0">
+              <a:buNone/>
+            </a:pPr>
+            <a:r>
+              <a:rPr lang="en-US" sz="1000" dirty="0">
+                <a:solidFill>
+                  <a:srgbClr val="333333"/>
+                </a:solidFill>
+                <a:latin typeface="맑은 고딕" pitchFamily="34" charset="0"/>
+                <a:ea typeface="맑은 고딕" pitchFamily="34" charset="-122"/>
+                <a:cs typeface="맑은 고딕" pitchFamily="34" charset="-120"/>
+              </a:rPr>
+              <a:t>두 그룹 분포 겹침</a:t>
+            </a:r>
+            <a:endParaRPr lang="en-US" sz="1000" dirty="0"/>
+          </a:p>
+        </p:txBody>
+      </p:sp>
+      <p:sp>
+        <p:nvSpPr>
+          <p:cNvPr id="28" name="Text 26"/>
+          <p:cNvSpPr/>
+          <p:nvPr/>
+        </p:nvSpPr>
+        <p:spPr>
+          <a:xfrm>
+            <a:off x="2926080" y="2999232"/>
+            <a:ext cx="1371600" cy="256032"/>
+          </a:xfrm>
+          <a:prstGeom prst="rect">
+            <a:avLst/>
+          </a:prstGeom>
+          <a:noFill/>
+          <a:ln/>
+        </p:spPr>
+        <p:txBody>
+          <a:bodyPr wrap="square" lIns="0" tIns="0" rIns="0" bIns="0" rtlCol="0" anchor="ctr"/>
+          <a:lstStyle/>
+          <a:p>
+            <a:pPr algn="r" indent="0" marL="0">
+              <a:buNone/>
+            </a:pPr>
+            <a:r>
+              <a:rPr lang="en-US" sz="1000" b="1" dirty="0">
+                <a:solidFill>
+                  <a:srgbClr val="2E7D4F"/>
+                </a:solidFill>
+                <a:latin typeface="맑은 고딕" pitchFamily="34" charset="0"/>
+                <a:ea typeface="맑은 고딕" pitchFamily="34" charset="-122"/>
+                <a:cs typeface="맑은 고딕" pitchFamily="34" charset="-120"/>
+              </a:rPr>
+              <a:t>없음</a:t>
+            </a:r>
+            <a:endParaRPr lang="en-US" sz="1000" dirty="0"/>
+          </a:p>
+        </p:txBody>
+      </p:sp>
+      <p:sp>
+        <p:nvSpPr>
+          <p:cNvPr id="29" name="Text 27"/>
+          <p:cNvSpPr/>
+          <p:nvPr/>
+        </p:nvSpPr>
+        <p:spPr>
+          <a:xfrm>
+            <a:off x="530352" y="3310128"/>
+            <a:ext cx="3749040" cy="237744"/>
+          </a:xfrm>
+          <a:prstGeom prst="rect">
+            <a:avLst/>
+          </a:prstGeom>
+          <a:noFill/>
+          <a:ln/>
+        </p:spPr>
+        <p:txBody>
+          <a:bodyPr wrap="square" lIns="0" tIns="0" rIns="0" bIns="0" rtlCol="0" anchor="ctr"/>
+          <a:lstStyle/>
+          <a:p>
+            <a:pPr indent="0" marL="0">
+              <a:buNone/>
+            </a:pPr>
+            <a:r>
+              <a:rPr lang="en-US" sz="1050" b="1" dirty="0">
+                <a:solidFill>
+                  <a:srgbClr val="1E293B"/>
+                </a:solidFill>
+                <a:latin typeface="맑은 고딕" pitchFamily="34" charset="0"/>
+                <a:ea typeface="맑은 고딕" pitchFamily="34" charset="-122"/>
+                <a:cs typeface="맑은 고딕" pitchFamily="34" charset="-120"/>
+              </a:rPr>
+              <a:t>두 채점 간 불일치 (30건 기준)</a:t>
+            </a:r>
+            <a:endParaRPr lang="en-US" sz="1050" dirty="0"/>
+          </a:p>
+        </p:txBody>
+      </p:sp>
+      <p:sp>
+        <p:nvSpPr>
+          <p:cNvPr id="30" name="Text 28"/>
+          <p:cNvSpPr/>
+          <p:nvPr/>
+        </p:nvSpPr>
+        <p:spPr>
+          <a:xfrm>
+            <a:off x="566928" y="3566160"/>
+            <a:ext cx="3749040" cy="237744"/>
+          </a:xfrm>
+          <a:prstGeom prst="rect">
+            <a:avLst/>
+          </a:prstGeom>
+          <a:noFill/>
+          <a:ln/>
+        </p:spPr>
+        <p:txBody>
+          <a:bodyPr wrap="square" lIns="0" tIns="0" rIns="0" bIns="0" rtlCol="0" anchor="ctr"/>
+          <a:lstStyle/>
+          <a:p>
+            <a:pPr indent="0" marL="0">
+              <a:buNone/>
+            </a:pPr>
+            <a:r>
+              <a:rPr lang="en-US" sz="1000" dirty="0">
+                <a:solidFill>
+                  <a:srgbClr val="333333"/>
+                </a:solidFill>
+                <a:latin typeface="맑은 고딕" pitchFamily="34" charset="0"/>
+                <a:ea typeface="맑은 고딕" pitchFamily="34" charset="-122"/>
+                <a:cs typeface="맑은 고딕" pitchFamily="34" charset="-120"/>
+              </a:rPr>
+              <a:t>평균 절대차 2.03점 · 3점 이상 괴리 7건</a:t>
+            </a:r>
+            <a:endParaRPr lang="en-US" sz="1000" dirty="0"/>
+          </a:p>
+        </p:txBody>
+      </p:sp>
+      <p:sp>
+        <p:nvSpPr>
+          <p:cNvPr id="31" name="Shape 29"/>
+          <p:cNvSpPr/>
+          <p:nvPr/>
+        </p:nvSpPr>
+        <p:spPr>
+          <a:xfrm>
+            <a:off x="4663440" y="1755648"/>
+            <a:ext cx="4114800" cy="2194560"/>
           </a:xfrm>
           <a:prstGeom prst="rect">
             <a:avLst/>
           </a:prstGeom>
           <a:solidFill>
-            <a:srgbClr val="2563EB"/>
+            <a:srgbClr val="FDF2F2"/>
           </a:solidFill>
-          <a:ln/>
-        </p:spPr>
-      </p:sp>
-      <p:sp>
-        <p:nvSpPr>
-          <p:cNvPr id="22" name="Text 20"/>
-          <p:cNvSpPr/>
-          <p:nvPr/>
-        </p:nvSpPr>
-        <p:spPr>
-          <a:xfrm>
-            <a:off x="365760" y="1783080"/>
-            <a:ext cx="2011680" cy="329184"/>
-          </a:xfrm>
-          <a:prstGeom prst="rect">
-            <a:avLst/>
-          </a:prstGeom>
-          <a:noFill/>
-          <a:ln/>
-        </p:spPr>
-        <p:txBody>
-          <a:bodyPr wrap="square" lIns="0" tIns="0" rIns="0" bIns="0" rtlCol="0" anchor="ctr"/>
-          <a:lstStyle/>
-          <a:p>
-            <a:pPr algn="ctr" indent="0" marL="0">
-              <a:buNone/>
-            </a:pPr>
-            <a:r>
-              <a:rPr lang="en-US" sz="1150" b="1" dirty="0">
-                <a:solidFill>
-                  <a:srgbClr val="FFFFFF"/>
-                </a:solidFill>
-                <a:latin typeface="맑은 고딕" pitchFamily="34" charset="0"/>
-                <a:ea typeface="맑은 고딕" pitchFamily="34" charset="-122"/>
-                <a:cs typeface="맑은 고딕" pitchFamily="34" charset="-120"/>
-              </a:rPr>
-              <a:t>화면</a:t>
-            </a:r>
-            <a:endParaRPr lang="en-US" sz="1150" dirty="0"/>
-          </a:p>
-        </p:txBody>
-      </p:sp>
-      <p:sp>
-        <p:nvSpPr>
-          <p:cNvPr id="23" name="Text 21"/>
-          <p:cNvSpPr/>
-          <p:nvPr/>
-        </p:nvSpPr>
-        <p:spPr>
-          <a:xfrm>
-            <a:off x="475488" y="2231136"/>
-            <a:ext cx="1792224" cy="868680"/>
-          </a:xfrm>
-          <a:prstGeom prst="rect">
-            <a:avLst/>
-          </a:prstGeom>
-          <a:noFill/>
-          <a:ln/>
-        </p:spPr>
-        <p:txBody>
-          <a:bodyPr wrap="square" lIns="0" tIns="0" rIns="0" bIns="0" rtlCol="0" anchor="ctr"/>
-          <a:lstStyle/>
-          <a:p>
-            <a:pPr algn="ctr" indent="0" marL="0">
-              <a:lnSpc>
-                <a:spcPct val="130000"/>
-              </a:lnSpc>
-              <a:buNone/>
-            </a:pPr>
-            <a:r>
-              <a:rPr lang="en-US" sz="980" dirty="0">
-                <a:solidFill>
-                  <a:srgbClr val="64748B"/>
-                </a:solidFill>
-                <a:latin typeface="맑은 고딕" pitchFamily="34" charset="0"/>
-                <a:ea typeface="맑은 고딕" pitchFamily="34" charset="-122"/>
-                <a:cs typeface="맑은 고딕" pitchFamily="34" charset="-120"/>
-              </a:rPr>
-              <a:t>문답·결과 웹 화면</a:t>
-            </a:r>
-            <a:endParaRPr lang="en-US" sz="980" dirty="0"/>
-          </a:p>
-          <a:p>
-            <a:pPr algn="ctr" indent="0" marL="0">
-              <a:lnSpc>
-                <a:spcPct val="130000"/>
-              </a:lnSpc>
-              <a:buNone/>
-            </a:pPr>
-            <a:r>
-              <a:rPr lang="en-US" sz="980" dirty="0">
-                <a:solidFill>
-                  <a:srgbClr val="64748B"/>
-                </a:solidFill>
-                <a:latin typeface="맑은 고딕" pitchFamily="34" charset="0"/>
-                <a:ea typeface="맑은 고딕" pitchFamily="34" charset="-122"/>
-                <a:cs typeface="맑은 고딕" pitchFamily="34" charset="-120"/>
-              </a:rPr>
-              <a:t>음성 입력 · 문답 저장</a:t>
-            </a:r>
-            <a:endParaRPr lang="en-US" sz="980" dirty="0"/>
-          </a:p>
-          <a:p>
-            <a:pPr algn="ctr" indent="0" marL="0">
-              <a:lnSpc>
-                <a:spcPct val="130000"/>
-              </a:lnSpc>
-              <a:buNone/>
-            </a:pPr>
-            <a:r>
-              <a:rPr lang="en-US" sz="980" dirty="0">
-                <a:solidFill>
-                  <a:srgbClr val="64748B"/>
-                </a:solidFill>
-                <a:latin typeface="맑은 고딕" pitchFamily="34" charset="0"/>
-                <a:ea typeface="맑은 고딕" pitchFamily="34" charset="-122"/>
-                <a:cs typeface="맑은 고딕" pitchFamily="34" charset="-120"/>
-              </a:rPr>
-              <a:t>Word/PDF 불러와 재평가</a:t>
-            </a:r>
-            <a:endParaRPr lang="en-US" sz="980" dirty="0"/>
-          </a:p>
-        </p:txBody>
-      </p:sp>
-      <p:sp>
-        <p:nvSpPr>
-          <p:cNvPr id="24" name="Shape 22"/>
-          <p:cNvSpPr/>
-          <p:nvPr/>
-        </p:nvSpPr>
-        <p:spPr>
-          <a:xfrm>
-            <a:off x="2551176" y="1783080"/>
-            <a:ext cx="2011680" cy="1417320"/>
-          </a:xfrm>
-          <a:prstGeom prst="rect">
-            <a:avLst/>
-          </a:prstGeom>
-          <a:solidFill>
-            <a:srgbClr val="FFFFFF"/>
-          </a:solidFill>
-          <a:ln w="12700">
+          <a:ln w="15240">
             <a:solidFill>
-              <a:srgbClr val="E5E7EB"/>
+              <a:srgbClr val="F0C0C0"/>
             </a:solidFill>
             <a:prstDash val="solid"/>
           </a:ln>
@@ -28075,369 +28491,81 @@
       </p:sp>
       <p:sp>
         <p:nvSpPr>
-          <p:cNvPr id="25" name="Shape 23"/>
-          <p:cNvSpPr/>
-          <p:nvPr/>
-        </p:nvSpPr>
-        <p:spPr>
-          <a:xfrm>
-            <a:off x="2551176" y="1783080"/>
-            <a:ext cx="2011680" cy="329184"/>
-          </a:xfrm>
-          <a:prstGeom prst="rect">
-            <a:avLst/>
-          </a:prstGeom>
-          <a:solidFill>
-            <a:srgbClr val="2563EB"/>
-          </a:solidFill>
-          <a:ln/>
-        </p:spPr>
-      </p:sp>
-      <p:sp>
-        <p:nvSpPr>
-          <p:cNvPr id="26" name="Text 24"/>
-          <p:cNvSpPr/>
-          <p:nvPr/>
-        </p:nvSpPr>
-        <p:spPr>
-          <a:xfrm>
-            <a:off x="2551176" y="1783080"/>
-            <a:ext cx="2011680" cy="329184"/>
-          </a:xfrm>
-          <a:prstGeom prst="rect">
-            <a:avLst/>
-          </a:prstGeom>
-          <a:noFill/>
-          <a:ln/>
-        </p:spPr>
-        <p:txBody>
-          <a:bodyPr wrap="square" lIns="0" tIns="0" rIns="0" bIns="0" rtlCol="0" anchor="ctr"/>
-          <a:lstStyle/>
-          <a:p>
-            <a:pPr algn="ctr" indent="0" marL="0">
-              <a:buNone/>
-            </a:pPr>
-            <a:r>
-              <a:rPr lang="en-US" sz="1150" b="1" dirty="0">
-                <a:solidFill>
-                  <a:srgbClr val="FFFFFF"/>
-                </a:solidFill>
-                <a:latin typeface="맑은 고딕" pitchFamily="34" charset="0"/>
-                <a:ea typeface="맑은 고딕" pitchFamily="34" charset="-122"/>
-                <a:cs typeface="맑은 고딕" pitchFamily="34" charset="-120"/>
-              </a:rPr>
-              <a:t>평가 엔진</a:t>
-            </a:r>
-            <a:endParaRPr lang="en-US" sz="1150" dirty="0"/>
-          </a:p>
-        </p:txBody>
-      </p:sp>
-      <p:sp>
-        <p:nvSpPr>
-          <p:cNvPr id="27" name="Text 25"/>
-          <p:cNvSpPr/>
-          <p:nvPr/>
-        </p:nvSpPr>
-        <p:spPr>
-          <a:xfrm>
-            <a:off x="2660904" y="2231136"/>
-            <a:ext cx="1792224" cy="868680"/>
-          </a:xfrm>
-          <a:prstGeom prst="rect">
-            <a:avLst/>
-          </a:prstGeom>
-          <a:noFill/>
-          <a:ln/>
-        </p:spPr>
-        <p:txBody>
-          <a:bodyPr wrap="square" lIns="0" tIns="0" rIns="0" bIns="0" rtlCol="0" anchor="ctr"/>
-          <a:lstStyle/>
-          <a:p>
-            <a:pPr algn="ctr" indent="0" marL="0">
-              <a:lnSpc>
-                <a:spcPct val="130000"/>
-              </a:lnSpc>
-              <a:buNone/>
-            </a:pPr>
-            <a:r>
-              <a:rPr lang="en-US" sz="980" dirty="0">
-                <a:solidFill>
-                  <a:srgbClr val="64748B"/>
-                </a:solidFill>
-                <a:latin typeface="맑은 고딕" pitchFamily="34" charset="0"/>
-                <a:ea typeface="맑은 고딕" pitchFamily="34" charset="-122"/>
-                <a:cs typeface="맑은 고딕" pitchFamily="34" charset="-120"/>
-              </a:rPr>
-              <a:t>문답 생성 · 이원 채점</a:t>
-            </a:r>
-            <a:endParaRPr lang="en-US" sz="980" dirty="0"/>
-          </a:p>
-          <a:p>
-            <a:pPr algn="ctr" indent="0" marL="0">
-              <a:lnSpc>
-                <a:spcPct val="130000"/>
-              </a:lnSpc>
-              <a:buNone/>
-            </a:pPr>
-            <a:r>
-              <a:rPr lang="en-US" sz="980" dirty="0">
-                <a:solidFill>
-                  <a:srgbClr val="64748B"/>
-                </a:solidFill>
-                <a:latin typeface="맑은 고딕" pitchFamily="34" charset="0"/>
-                <a:ea typeface="맑은 고딕" pitchFamily="34" charset="-122"/>
-                <a:cs typeface="맑은 고딕" pitchFamily="34" charset="-120"/>
-              </a:rPr>
-              <a:t>명세 추출 · 선례 판정</a:t>
-            </a:r>
-            <a:endParaRPr lang="en-US" sz="980" dirty="0"/>
-          </a:p>
-          <a:p>
-            <a:pPr algn="ctr" indent="0" marL="0">
-              <a:lnSpc>
-                <a:spcPct val="130000"/>
-              </a:lnSpc>
-              <a:buNone/>
-            </a:pPr>
-            <a:r>
-              <a:rPr lang="en-US" sz="980" dirty="0">
-                <a:solidFill>
-                  <a:srgbClr val="64748B"/>
-                </a:solidFill>
-                <a:latin typeface="맑은 고딕" pitchFamily="34" charset="0"/>
-                <a:ea typeface="맑은 고딕" pitchFamily="34" charset="-122"/>
-                <a:cs typeface="맑은 고딕" pitchFamily="34" charset="-120"/>
-              </a:rPr>
-              <a:t>판정 규칙은 문서로 분리</a:t>
-            </a:r>
-            <a:endParaRPr lang="en-US" sz="980" dirty="0"/>
-          </a:p>
-        </p:txBody>
-      </p:sp>
-      <p:sp>
-        <p:nvSpPr>
-          <p:cNvPr id="28" name="Shape 26"/>
-          <p:cNvSpPr/>
-          <p:nvPr/>
-        </p:nvSpPr>
-        <p:spPr>
-          <a:xfrm>
-            <a:off x="4736592" y="1783080"/>
-            <a:ext cx="2011680" cy="1417320"/>
-          </a:xfrm>
-          <a:prstGeom prst="rect">
-            <a:avLst/>
-          </a:prstGeom>
-          <a:solidFill>
-            <a:srgbClr val="FFFFFF"/>
-          </a:solidFill>
-          <a:ln w="12700">
-            <a:solidFill>
-              <a:srgbClr val="E5E7EB"/>
-            </a:solidFill>
-            <a:prstDash val="solid"/>
-          </a:ln>
-          <a:effectLst>
-            <a:outerShdw sx="100000" sy="100000" kx="0" ky="0" algn="bl" rotWithShape="0" blurRad="50800" dist="12700" dir="8100000">
-              <a:srgbClr val="000000">
-                <a:alpha val="8000"/>
-              </a:srgbClr>
-            </a:outerShdw>
-          </a:effectLst>
-        </p:spPr>
-      </p:sp>
-      <p:sp>
-        <p:nvSpPr>
-          <p:cNvPr id="29" name="Shape 27"/>
-          <p:cNvSpPr/>
-          <p:nvPr/>
-        </p:nvSpPr>
-        <p:spPr>
-          <a:xfrm>
-            <a:off x="4736592" y="1783080"/>
-            <a:ext cx="2011680" cy="329184"/>
-          </a:xfrm>
-          <a:prstGeom prst="rect">
-            <a:avLst/>
-          </a:prstGeom>
-          <a:solidFill>
-            <a:srgbClr val="2563EB"/>
-          </a:solidFill>
-          <a:ln/>
-        </p:spPr>
-      </p:sp>
-      <p:sp>
-        <p:nvSpPr>
-          <p:cNvPr id="30" name="Text 28"/>
-          <p:cNvSpPr/>
-          <p:nvPr/>
-        </p:nvSpPr>
-        <p:spPr>
-          <a:xfrm>
-            <a:off x="4736592" y="1783080"/>
-            <a:ext cx="2011680" cy="329184"/>
-          </a:xfrm>
-          <a:prstGeom prst="rect">
-            <a:avLst/>
-          </a:prstGeom>
-          <a:noFill/>
-          <a:ln/>
-        </p:spPr>
-        <p:txBody>
-          <a:bodyPr wrap="square" lIns="0" tIns="0" rIns="0" bIns="0" rtlCol="0" anchor="ctr"/>
-          <a:lstStyle/>
-          <a:p>
-            <a:pPr algn="ctr" indent="0" marL="0">
-              <a:buNone/>
-            </a:pPr>
-            <a:r>
-              <a:rPr lang="en-US" sz="1150" b="1" dirty="0">
-                <a:solidFill>
-                  <a:srgbClr val="FFFFFF"/>
-                </a:solidFill>
-                <a:latin typeface="맑은 고딕" pitchFamily="34" charset="0"/>
-                <a:ea typeface="맑은 고딕" pitchFamily="34" charset="-122"/>
-                <a:cs typeface="맑은 고딕" pitchFamily="34" charset="-120"/>
-              </a:rPr>
-              <a:t>데이터</a:t>
-            </a:r>
-            <a:endParaRPr lang="en-US" sz="1150" dirty="0"/>
-          </a:p>
-        </p:txBody>
-      </p:sp>
-      <p:sp>
-        <p:nvSpPr>
-          <p:cNvPr id="31" name="Text 29"/>
-          <p:cNvSpPr/>
-          <p:nvPr/>
-        </p:nvSpPr>
-        <p:spPr>
-          <a:xfrm>
-            <a:off x="4846320" y="2231136"/>
-            <a:ext cx="1792224" cy="868680"/>
-          </a:xfrm>
-          <a:prstGeom prst="rect">
-            <a:avLst/>
-          </a:prstGeom>
-          <a:noFill/>
-          <a:ln/>
-        </p:spPr>
-        <p:txBody>
-          <a:bodyPr wrap="square" lIns="0" tIns="0" rIns="0" bIns="0" rtlCol="0" anchor="ctr"/>
-          <a:lstStyle/>
-          <a:p>
-            <a:pPr algn="ctr" indent="0" marL="0">
-              <a:lnSpc>
-                <a:spcPct val="130000"/>
-              </a:lnSpc>
-              <a:buNone/>
-            </a:pPr>
-            <a:r>
-              <a:rPr lang="en-US" sz="980" dirty="0">
-                <a:solidFill>
-                  <a:srgbClr val="64748B"/>
-                </a:solidFill>
-                <a:latin typeface="맑은 고딕" pitchFamily="34" charset="0"/>
-                <a:ea typeface="맑은 고딕" pitchFamily="34" charset="-122"/>
-                <a:cs typeface="맑은 고딕" pitchFamily="34" charset="-120"/>
-              </a:rPr>
-              <a:t>KDI 7,362건 (로컬)</a:t>
-            </a:r>
-            <a:endParaRPr lang="en-US" sz="980" dirty="0"/>
-          </a:p>
-          <a:p>
-            <a:pPr algn="ctr" indent="0" marL="0">
-              <a:lnSpc>
-                <a:spcPct val="130000"/>
-              </a:lnSpc>
-              <a:buNone/>
-            </a:pPr>
-            <a:r>
-              <a:rPr lang="en-US" sz="980" dirty="0">
-                <a:solidFill>
-                  <a:srgbClr val="64748B"/>
-                </a:solidFill>
-                <a:latin typeface="맑은 고딕" pitchFamily="34" charset="0"/>
-                <a:ea typeface="맑은 고딕" pitchFamily="34" charset="-122"/>
-                <a:cs typeface="맑은 고딕" pitchFamily="34" charset="-120"/>
-              </a:rPr>
-              <a:t>OPSI 1,015건 (로컬)</a:t>
-            </a:r>
-            <a:endParaRPr lang="en-US" sz="980" dirty="0"/>
-          </a:p>
-          <a:p>
-            <a:pPr algn="ctr" indent="0" marL="0">
-              <a:lnSpc>
-                <a:spcPct val="130000"/>
-              </a:lnSpc>
-              <a:buNone/>
-            </a:pPr>
-            <a:r>
-              <a:rPr lang="en-US" sz="980" dirty="0">
-                <a:solidFill>
-                  <a:srgbClr val="64748B"/>
-                </a:solidFill>
-                <a:latin typeface="맑은 고딕" pitchFamily="34" charset="0"/>
-                <a:ea typeface="맑은 고딕" pitchFamily="34" charset="-122"/>
-                <a:cs typeface="맑은 고딕" pitchFamily="34" charset="-120"/>
-              </a:rPr>
-              <a:t>재정 · 국회 의안 (조회)</a:t>
-            </a:r>
-            <a:endParaRPr lang="en-US" sz="980" dirty="0"/>
-          </a:p>
-        </p:txBody>
-      </p:sp>
-      <p:sp>
-        <p:nvSpPr>
-          <p:cNvPr id="32" name="Shape 30"/>
-          <p:cNvSpPr/>
-          <p:nvPr/>
-        </p:nvSpPr>
-        <p:spPr>
-          <a:xfrm>
-            <a:off x="6922008" y="1783080"/>
-            <a:ext cx="2011680" cy="1417320"/>
-          </a:xfrm>
-          <a:prstGeom prst="rect">
-            <a:avLst/>
-          </a:prstGeom>
-          <a:solidFill>
-            <a:srgbClr val="FFFFFF"/>
-          </a:solidFill>
-          <a:ln w="12700">
-            <a:solidFill>
-              <a:srgbClr val="E5E7EB"/>
-            </a:solidFill>
-            <a:prstDash val="solid"/>
-          </a:ln>
-          <a:effectLst>
-            <a:outerShdw sx="100000" sy="100000" kx="0" ky="0" algn="bl" rotWithShape="0" blurRad="50800" dist="12700" dir="8100000">
-              <a:srgbClr val="000000">
-                <a:alpha val="8000"/>
-              </a:srgbClr>
-            </a:outerShdw>
-          </a:effectLst>
-        </p:spPr>
-      </p:sp>
-      <p:sp>
-        <p:nvSpPr>
-          <p:cNvPr id="33" name="Shape 31"/>
-          <p:cNvSpPr/>
-          <p:nvPr/>
-        </p:nvSpPr>
-        <p:spPr>
-          <a:xfrm>
-            <a:off x="6922008" y="1783080"/>
-            <a:ext cx="2011680" cy="329184"/>
-          </a:xfrm>
-          <a:prstGeom prst="rect">
-            <a:avLst/>
-          </a:prstGeom>
-          <a:solidFill>
-            <a:srgbClr val="2563EB"/>
-          </a:solidFill>
-          <a:ln/>
-        </p:spPr>
+          <p:cNvPr id="32" name="Text 30"/>
+          <p:cNvSpPr/>
+          <p:nvPr/>
+        </p:nvSpPr>
+        <p:spPr>
+          <a:xfrm>
+            <a:off x="4828032" y="1865376"/>
+            <a:ext cx="3749040" cy="274320"/>
+          </a:xfrm>
+          <a:prstGeom prst="rect">
+            <a:avLst/>
+          </a:prstGeom>
+          <a:noFill/>
+          <a:ln/>
+        </p:spPr>
+        <p:txBody>
+          <a:bodyPr wrap="square" lIns="0" tIns="0" rIns="0" bIns="0" rtlCol="0" anchor="ctr"/>
+          <a:lstStyle/>
+          <a:p>
+            <a:pPr indent="0" marL="0">
+              <a:buNone/>
+            </a:pPr>
+            <a:r>
+              <a:rPr lang="en-US" sz="1350" b="1" dirty="0">
+                <a:solidFill>
+                  <a:srgbClr val="C0392B"/>
+                </a:solidFill>
+                <a:latin typeface="맑은 고딕" pitchFamily="34" charset="0"/>
+                <a:ea typeface="맑은 고딕" pitchFamily="34" charset="-122"/>
+                <a:cs typeface="맑은 고딕" pitchFamily="34" charset="-120"/>
+              </a:rPr>
+              <a:t>확인되지 않은 것</a:t>
+            </a:r>
+            <a:endParaRPr lang="en-US" sz="1350" dirty="0"/>
+          </a:p>
+        </p:txBody>
+      </p:sp>
+      <p:sp>
+        <p:nvSpPr>
+          <p:cNvPr id="33" name="Text 31"/>
+          <p:cNvSpPr/>
+          <p:nvPr/>
+        </p:nvSpPr>
+        <p:spPr>
+          <a:xfrm>
+            <a:off x="4846320" y="2212848"/>
+            <a:ext cx="128016" cy="329184"/>
+          </a:xfrm>
+          <a:prstGeom prst="rect">
+            <a:avLst/>
+          </a:prstGeom>
+          <a:noFill/>
+          <a:ln/>
+        </p:spPr>
+        <p:txBody>
+          <a:bodyPr wrap="square" lIns="0" tIns="0" rIns="0" bIns="0" rtlCol="0" anchor="t"/>
+          <a:lstStyle/>
+          <a:p>
+            <a:pPr indent="0" marL="0">
+              <a:buNone/>
+            </a:pPr>
+            <a:r>
+              <a:rPr lang="en-US" sz="1030" dirty="0">
+                <a:solidFill>
+                  <a:srgbClr val="2563EB"/>
+                </a:solidFill>
+                <a:latin typeface="맑은 고딕" pitchFamily="34" charset="0"/>
+                <a:ea typeface="맑은 고딕" pitchFamily="34" charset="-122"/>
+                <a:cs typeface="맑은 고딕" pitchFamily="34" charset="-120"/>
+              </a:rPr>
+              <a:t>•</a:t>
+            </a:r>
+            <a:endParaRPr lang="en-US" sz="1030" dirty="0"/>
+          </a:p>
+        </p:txBody>
       </p:sp>
       <p:sp>
         <p:nvSpPr>
@@ -28447,34 +28575,34 @@
         </p:nvSpPr>
         <p:spPr>
           <a:xfrm>
-            <a:off x="6922008" y="1783080"/>
-            <a:ext cx="2011680" cy="329184"/>
-          </a:xfrm>
-          <a:prstGeom prst="rect">
-            <a:avLst/>
-          </a:prstGeom>
-          <a:noFill/>
-          <a:ln/>
-        </p:spPr>
-        <p:txBody>
-          <a:bodyPr wrap="square" lIns="0" tIns="0" rIns="0" bIns="0" rtlCol="0" anchor="ctr"/>
-          <a:lstStyle/>
-          <a:p>
-            <a:pPr algn="ctr" indent="0" marL="0">
-              <a:buNone/>
-            </a:pPr>
-            <a:r>
-              <a:rPr lang="en-US" sz="1150" b="1" dirty="0">
-                <a:solidFill>
-                  <a:srgbClr val="FFFFFF"/>
-                </a:solidFill>
-                <a:latin typeface="맑은 고딕" pitchFamily="34" charset="0"/>
-                <a:ea typeface="맑은 고딕" pitchFamily="34" charset="-122"/>
-                <a:cs typeface="맑은 고딕" pitchFamily="34" charset="-120"/>
-              </a:rPr>
-              <a:t>배포</a:t>
-            </a:r>
-            <a:endParaRPr lang="en-US" sz="1150" dirty="0"/>
+            <a:off x="4983480" y="2212848"/>
+            <a:ext cx="3657600" cy="329184"/>
+          </a:xfrm>
+          <a:prstGeom prst="rect">
+            <a:avLst/>
+          </a:prstGeom>
+          <a:noFill/>
+          <a:ln/>
+        </p:spPr>
+        <p:txBody>
+          <a:bodyPr wrap="square" lIns="0" tIns="0" rIns="0" bIns="0" rtlCol="0" anchor="t"/>
+          <a:lstStyle/>
+          <a:p>
+            <a:pPr indent="0" marL="0">
+              <a:buNone/>
+            </a:pPr>
+            <a:r>
+              <a:rPr lang="en-US" sz="1030" dirty="0">
+                <a:solidFill>
+                  <a:srgbClr val="1E293B"/>
+                </a:solidFill>
+                <a:latin typeface="맑은 고딕" pitchFamily="34" charset="0"/>
+                <a:ea typeface="맑은 고딕" pitchFamily="34" charset="-122"/>
+                <a:cs typeface="맑은 고딕" pitchFamily="34" charset="-120"/>
+              </a:rPr>
+              <a:t>전문가(연구자) 판정과의 일치도</a:t>
+            </a:r>
+            <a:endParaRPr lang="en-US" sz="1030" dirty="0"/>
           </a:p>
         </p:txBody>
       </p:sp>
@@ -28486,90 +28614,320 @@
         </p:nvSpPr>
         <p:spPr>
           <a:xfrm>
-            <a:off x="7031736" y="2231136"/>
-            <a:ext cx="1792224" cy="868680"/>
-          </a:xfrm>
-          <a:prstGeom prst="rect">
-            <a:avLst/>
-          </a:prstGeom>
-          <a:noFill/>
-          <a:ln/>
-        </p:spPr>
-        <p:txBody>
-          <a:bodyPr wrap="square" lIns="0" tIns="0" rIns="0" bIns="0" rtlCol="0" anchor="ctr"/>
-          <a:lstStyle/>
-          <a:p>
-            <a:pPr algn="ctr" indent="0" marL="0">
-              <a:lnSpc>
-                <a:spcPct val="130000"/>
-              </a:lnSpc>
-              <a:buNone/>
-            </a:pPr>
-            <a:r>
-              <a:rPr lang="en-US" sz="980" dirty="0">
-                <a:solidFill>
-                  <a:srgbClr val="64748B"/>
-                </a:solidFill>
-                <a:latin typeface="맑은 고딕" pitchFamily="34" charset="0"/>
-                <a:ea typeface="맑은 고딕" pitchFamily="34" charset="-122"/>
-                <a:cs typeface="맑은 고딕" pitchFamily="34" charset="-120"/>
-              </a:rPr>
-              <a:t>연구용 · 공개용 2종</a:t>
-            </a:r>
-            <a:endParaRPr lang="en-US" sz="980" dirty="0"/>
-          </a:p>
-          <a:p>
-            <a:pPr algn="ctr" indent="0" marL="0">
-              <a:lnSpc>
-                <a:spcPct val="130000"/>
-              </a:lnSpc>
-              <a:buNone/>
-            </a:pPr>
-            <a:r>
-              <a:rPr lang="en-US" sz="980" dirty="0">
-                <a:solidFill>
-                  <a:srgbClr val="64748B"/>
-                </a:solidFill>
-                <a:latin typeface="맑은 고딕" pitchFamily="34" charset="0"/>
-                <a:ea typeface="맑은 고딕" pitchFamily="34" charset="-122"/>
-                <a:cs typeface="맑은 고딕" pitchFamily="34" charset="-120"/>
-              </a:rPr>
-              <a:t>초대 코드 접근 통제</a:t>
-            </a:r>
-            <a:endParaRPr lang="en-US" sz="980" dirty="0"/>
-          </a:p>
-          <a:p>
-            <a:pPr algn="ctr" indent="0" marL="0">
-              <a:lnSpc>
-                <a:spcPct val="130000"/>
-              </a:lnSpc>
-              <a:buNone/>
-            </a:pPr>
-            <a:r>
-              <a:rPr lang="en-US" sz="980" dirty="0">
-                <a:solidFill>
-                  <a:srgbClr val="64748B"/>
-                </a:solidFill>
-                <a:latin typeface="맑은 고딕" pitchFamily="34" charset="0"/>
-                <a:ea typeface="맑은 고딕" pitchFamily="34" charset="-122"/>
-                <a:cs typeface="맑은 고딕" pitchFamily="34" charset="-120"/>
-              </a:rPr>
-              <a:t>키는 서버에 미보관</a:t>
-            </a:r>
-            <a:endParaRPr lang="en-US" sz="980" dirty="0"/>
-          </a:p>
-        </p:txBody>
-      </p:sp>
-      <p:sp>
-        <p:nvSpPr>
-          <p:cNvPr id="36" name="Shape 34"/>
-          <p:cNvSpPr/>
-          <p:nvPr/>
-        </p:nvSpPr>
-        <p:spPr>
-          <a:xfrm>
-            <a:off x="365760" y="3337560"/>
-            <a:ext cx="8412480" cy="1572768"/>
+            <a:off x="4846320" y="2542032"/>
+            <a:ext cx="128016" cy="329184"/>
+          </a:xfrm>
+          <a:prstGeom prst="rect">
+            <a:avLst/>
+          </a:prstGeom>
+          <a:noFill/>
+          <a:ln/>
+        </p:spPr>
+        <p:txBody>
+          <a:bodyPr wrap="square" lIns="0" tIns="0" rIns="0" bIns="0" rtlCol="0" anchor="t"/>
+          <a:lstStyle/>
+          <a:p>
+            <a:pPr indent="0" marL="0">
+              <a:buNone/>
+            </a:pPr>
+            <a:r>
+              <a:rPr lang="en-US" sz="1030" dirty="0">
+                <a:solidFill>
+                  <a:srgbClr val="2563EB"/>
+                </a:solidFill>
+                <a:latin typeface="맑은 고딕" pitchFamily="34" charset="0"/>
+                <a:ea typeface="맑은 고딕" pitchFamily="34" charset="-122"/>
+                <a:cs typeface="맑은 고딕" pitchFamily="34" charset="-120"/>
+              </a:rPr>
+              <a:t>•</a:t>
+            </a:r>
+            <a:endParaRPr lang="en-US" sz="1030" dirty="0"/>
+          </a:p>
+        </p:txBody>
+      </p:sp>
+      <p:sp>
+        <p:nvSpPr>
+          <p:cNvPr id="36" name="Text 34"/>
+          <p:cNvSpPr/>
+          <p:nvPr/>
+        </p:nvSpPr>
+        <p:spPr>
+          <a:xfrm>
+            <a:off x="4983480" y="2542032"/>
+            <a:ext cx="3657600" cy="329184"/>
+          </a:xfrm>
+          <a:prstGeom prst="rect">
+            <a:avLst/>
+          </a:prstGeom>
+          <a:noFill/>
+          <a:ln/>
+        </p:spPr>
+        <p:txBody>
+          <a:bodyPr wrap="square" lIns="0" tIns="0" rIns="0" bIns="0" rtlCol="0" anchor="t"/>
+          <a:lstStyle/>
+          <a:p>
+            <a:pPr indent="0" marL="0">
+              <a:buNone/>
+            </a:pPr>
+            <a:r>
+              <a:rPr lang="en-US" sz="1030" dirty="0">
+                <a:solidFill>
+                  <a:srgbClr val="1E293B"/>
+                </a:solidFill>
+                <a:latin typeface="맑은 고딕" pitchFamily="34" charset="0"/>
+                <a:ea typeface="맑은 고딕" pitchFamily="34" charset="-122"/>
+                <a:cs typeface="맑은 고딕" pitchFamily="34" charset="-120"/>
+              </a:rPr>
+              <a:t>동일 대화 재채점 시 재현성</a:t>
+            </a:r>
+            <a:endParaRPr lang="en-US" sz="1030" dirty="0"/>
+          </a:p>
+        </p:txBody>
+      </p:sp>
+      <p:sp>
+        <p:nvSpPr>
+          <p:cNvPr id="37" name="Text 35"/>
+          <p:cNvSpPr/>
+          <p:nvPr/>
+        </p:nvSpPr>
+        <p:spPr>
+          <a:xfrm>
+            <a:off x="4846320" y="2871216"/>
+            <a:ext cx="128016" cy="329184"/>
+          </a:xfrm>
+          <a:prstGeom prst="rect">
+            <a:avLst/>
+          </a:prstGeom>
+          <a:noFill/>
+          <a:ln/>
+        </p:spPr>
+        <p:txBody>
+          <a:bodyPr wrap="square" lIns="0" tIns="0" rIns="0" bIns="0" rtlCol="0" anchor="t"/>
+          <a:lstStyle/>
+          <a:p>
+            <a:pPr indent="0" marL="0">
+              <a:buNone/>
+            </a:pPr>
+            <a:r>
+              <a:rPr lang="en-US" sz="1030" dirty="0">
+                <a:solidFill>
+                  <a:srgbClr val="2563EB"/>
+                </a:solidFill>
+                <a:latin typeface="맑은 고딕" pitchFamily="34" charset="0"/>
+                <a:ea typeface="맑은 고딕" pitchFamily="34" charset="-122"/>
+                <a:cs typeface="맑은 고딕" pitchFamily="34" charset="-120"/>
+              </a:rPr>
+              <a:t>•</a:t>
+            </a:r>
+            <a:endParaRPr lang="en-US" sz="1030" dirty="0"/>
+          </a:p>
+        </p:txBody>
+      </p:sp>
+      <p:sp>
+        <p:nvSpPr>
+          <p:cNvPr id="38" name="Text 36"/>
+          <p:cNvSpPr/>
+          <p:nvPr/>
+        </p:nvSpPr>
+        <p:spPr>
+          <a:xfrm>
+            <a:off x="4983480" y="2871216"/>
+            <a:ext cx="3657600" cy="329184"/>
+          </a:xfrm>
+          <a:prstGeom prst="rect">
+            <a:avLst/>
+          </a:prstGeom>
+          <a:noFill/>
+          <a:ln/>
+        </p:spPr>
+        <p:txBody>
+          <a:bodyPr wrap="square" lIns="0" tIns="0" rIns="0" bIns="0" rtlCol="0" anchor="t"/>
+          <a:lstStyle/>
+          <a:p>
+            <a:pPr indent="0" marL="0">
+              <a:buNone/>
+            </a:pPr>
+            <a:r>
+              <a:rPr lang="en-US" sz="1030" dirty="0">
+                <a:solidFill>
+                  <a:srgbClr val="1E293B"/>
+                </a:solidFill>
+                <a:latin typeface="맑은 고딕" pitchFamily="34" charset="0"/>
+                <a:ea typeface="맑은 고딕" pitchFamily="34" charset="-122"/>
+                <a:cs typeface="맑은 고딕" pitchFamily="34" charset="-120"/>
+              </a:rPr>
+              <a:t>경계 사례에서의 판별력</a:t>
+            </a:r>
+            <a:endParaRPr lang="en-US" sz="1030" dirty="0"/>
+          </a:p>
+        </p:txBody>
+      </p:sp>
+      <p:sp>
+        <p:nvSpPr>
+          <p:cNvPr id="39" name="Text 37"/>
+          <p:cNvSpPr/>
+          <p:nvPr/>
+        </p:nvSpPr>
+        <p:spPr>
+          <a:xfrm>
+            <a:off x="4846320" y="3200400"/>
+            <a:ext cx="128016" cy="329184"/>
+          </a:xfrm>
+          <a:prstGeom prst="rect">
+            <a:avLst/>
+          </a:prstGeom>
+          <a:noFill/>
+          <a:ln/>
+        </p:spPr>
+        <p:txBody>
+          <a:bodyPr wrap="square" lIns="0" tIns="0" rIns="0" bIns="0" rtlCol="0" anchor="t"/>
+          <a:lstStyle/>
+          <a:p>
+            <a:pPr indent="0" marL="0">
+              <a:buNone/>
+            </a:pPr>
+            <a:r>
+              <a:rPr lang="en-US" sz="1030" dirty="0">
+                <a:solidFill>
+                  <a:srgbClr val="2563EB"/>
+                </a:solidFill>
+                <a:latin typeface="맑은 고딕" pitchFamily="34" charset="0"/>
+                <a:ea typeface="맑은 고딕" pitchFamily="34" charset="-122"/>
+                <a:cs typeface="맑은 고딕" pitchFamily="34" charset="-120"/>
+              </a:rPr>
+              <a:t>•</a:t>
+            </a:r>
+            <a:endParaRPr lang="en-US" sz="1030" dirty="0"/>
+          </a:p>
+        </p:txBody>
+      </p:sp>
+      <p:sp>
+        <p:nvSpPr>
+          <p:cNvPr id="40" name="Text 38"/>
+          <p:cNvSpPr/>
+          <p:nvPr/>
+        </p:nvSpPr>
+        <p:spPr>
+          <a:xfrm>
+            <a:off x="4983480" y="3200400"/>
+            <a:ext cx="3657600" cy="329184"/>
+          </a:xfrm>
+          <a:prstGeom prst="rect">
+            <a:avLst/>
+          </a:prstGeom>
+          <a:noFill/>
+          <a:ln/>
+        </p:spPr>
+        <p:txBody>
+          <a:bodyPr wrap="square" lIns="0" tIns="0" rIns="0" bIns="0" rtlCol="0" anchor="t"/>
+          <a:lstStyle/>
+          <a:p>
+            <a:pPr indent="0" marL="0">
+              <a:buNone/>
+            </a:pPr>
+            <a:r>
+              <a:rPr lang="en-US" sz="1030" dirty="0">
+                <a:solidFill>
+                  <a:srgbClr val="1E293B"/>
+                </a:solidFill>
+                <a:latin typeface="맑은 고딕" pitchFamily="34" charset="0"/>
+                <a:ea typeface="맑은 고딕" pitchFamily="34" charset="-122"/>
+                <a:cs typeface="맑은 고딕" pitchFamily="34" charset="-120"/>
+              </a:rPr>
+              <a:t>표현력 편향의 크기</a:t>
+            </a:r>
+            <a:endParaRPr lang="en-US" sz="1030" dirty="0"/>
+          </a:p>
+        </p:txBody>
+      </p:sp>
+      <p:sp>
+        <p:nvSpPr>
+          <p:cNvPr id="41" name="Text 39"/>
+          <p:cNvSpPr/>
+          <p:nvPr/>
+        </p:nvSpPr>
+        <p:spPr>
+          <a:xfrm>
+            <a:off x="4846320" y="3529584"/>
+            <a:ext cx="128016" cy="329184"/>
+          </a:xfrm>
+          <a:prstGeom prst="rect">
+            <a:avLst/>
+          </a:prstGeom>
+          <a:noFill/>
+          <a:ln/>
+        </p:spPr>
+        <p:txBody>
+          <a:bodyPr wrap="square" lIns="0" tIns="0" rIns="0" bIns="0" rtlCol="0" anchor="t"/>
+          <a:lstStyle/>
+          <a:p>
+            <a:pPr indent="0" marL="0">
+              <a:buNone/>
+            </a:pPr>
+            <a:r>
+              <a:rPr lang="en-US" sz="1030" dirty="0">
+                <a:solidFill>
+                  <a:srgbClr val="2563EB"/>
+                </a:solidFill>
+                <a:latin typeface="맑은 고딕" pitchFamily="34" charset="0"/>
+                <a:ea typeface="맑은 고딕" pitchFamily="34" charset="-122"/>
+                <a:cs typeface="맑은 고딕" pitchFamily="34" charset="-120"/>
+              </a:rPr>
+              <a:t>•</a:t>
+            </a:r>
+            <a:endParaRPr lang="en-US" sz="1030" dirty="0"/>
+          </a:p>
+        </p:txBody>
+      </p:sp>
+      <p:sp>
+        <p:nvSpPr>
+          <p:cNvPr id="42" name="Text 40"/>
+          <p:cNvSpPr/>
+          <p:nvPr/>
+        </p:nvSpPr>
+        <p:spPr>
+          <a:xfrm>
+            <a:off x="4983480" y="3529584"/>
+            <a:ext cx="3657600" cy="329184"/>
+          </a:xfrm>
+          <a:prstGeom prst="rect">
+            <a:avLst/>
+          </a:prstGeom>
+          <a:noFill/>
+          <a:ln/>
+        </p:spPr>
+        <p:txBody>
+          <a:bodyPr wrap="square" lIns="0" tIns="0" rIns="0" bIns="0" rtlCol="0" anchor="t"/>
+          <a:lstStyle/>
+          <a:p>
+            <a:pPr indent="0" marL="0">
+              <a:buNone/>
+            </a:pPr>
+            <a:r>
+              <a:rPr lang="en-US" sz="1030" dirty="0">
+                <a:solidFill>
+                  <a:srgbClr val="1E293B"/>
+                </a:solidFill>
+                <a:latin typeface="맑은 고딕" pitchFamily="34" charset="0"/>
+                <a:ea typeface="맑은 고딕" pitchFamily="34" charset="-122"/>
+                <a:cs typeface="맑은 고딕" pitchFamily="34" charset="-120"/>
+              </a:rPr>
+              <a:t>실제 중복 제안 탐지율</a:t>
+            </a:r>
+            <a:endParaRPr lang="en-US" sz="1030" dirty="0"/>
+          </a:p>
+        </p:txBody>
+      </p:sp>
+      <p:sp>
+        <p:nvSpPr>
+          <p:cNvPr id="43" name="Shape 41"/>
+          <p:cNvSpPr/>
+          <p:nvPr/>
+        </p:nvSpPr>
+        <p:spPr>
+          <a:xfrm>
+            <a:off x="365760" y="4069080"/>
+            <a:ext cx="8412480" cy="868680"/>
           </a:xfrm>
           <a:prstGeom prst="rect">
             <a:avLst/>
@@ -28587,30 +28945,30 @@
       </p:sp>
       <p:sp>
         <p:nvSpPr>
-          <p:cNvPr id="37" name="Text 35"/>
-          <p:cNvSpPr/>
-          <p:nvPr/>
-        </p:nvSpPr>
-        <p:spPr>
-          <a:xfrm>
-            <a:off x="566928" y="3438144"/>
-            <a:ext cx="3657600" cy="256032"/>
-          </a:xfrm>
-          <a:prstGeom prst="rect">
-            <a:avLst/>
-          </a:prstGeom>
-          <a:noFill/>
-          <a:ln/>
-        </p:spPr>
-        <p:txBody>
-          <a:bodyPr wrap="square" lIns="0" tIns="0" rIns="0" bIns="0" rtlCol="0" anchor="ctr"/>
-          <a:lstStyle/>
-          <a:p>
-            <a:pPr indent="0" marL="0">
-              <a:buNone/>
-            </a:pPr>
-            <a:r>
-              <a:rPr lang="en-US" sz="1250" b="1" dirty="0">
+          <p:cNvPr id="44" name="Text 42"/>
+          <p:cNvSpPr/>
+          <p:nvPr/>
+        </p:nvSpPr>
+        <p:spPr>
+          <a:xfrm>
+            <a:off x="566928" y="4160520"/>
+            <a:ext cx="2743200" cy="256032"/>
+          </a:xfrm>
+          <a:prstGeom prst="rect">
+            <a:avLst/>
+          </a:prstGeom>
+          <a:noFill/>
+          <a:ln/>
+        </p:spPr>
+        <p:txBody>
+          <a:bodyPr wrap="square" lIns="0" tIns="0" rIns="0" bIns="0" rtlCol="0" anchor="ctr"/>
+          <a:lstStyle/>
+          <a:p>
+            <a:pPr indent="0" marL="0">
+              <a:buNone/>
+            </a:pPr>
+            <a:r>
+              <a:rPr lang="en-US" sz="1150" b="1" dirty="0">
                 <a:solidFill>
                   <a:srgbClr val="2563EB"/>
                 </a:solidFill>
@@ -28618,77 +28976,41 @@
                 <a:ea typeface="맑은 고딕" pitchFamily="34" charset="-122"/>
                 <a:cs typeface="맑은 고딕" pitchFamily="34" charset="-120"/>
               </a:rPr>
-              <a:t>데이터 확보에서 지킨 원칙</a:t>
-            </a:r>
-            <a:endParaRPr lang="en-US" sz="1250" dirty="0"/>
-          </a:p>
-        </p:txBody>
-      </p:sp>
-      <p:sp>
-        <p:nvSpPr>
-          <p:cNvPr id="38" name="Text 36"/>
-          <p:cNvSpPr/>
-          <p:nvPr/>
-        </p:nvSpPr>
-        <p:spPr>
-          <a:xfrm>
-            <a:off x="603504" y="3776472"/>
-            <a:ext cx="137160" cy="310896"/>
-          </a:xfrm>
-          <a:prstGeom prst="rect">
-            <a:avLst/>
-          </a:prstGeom>
-          <a:noFill/>
-          <a:ln/>
-        </p:spPr>
-        <p:txBody>
-          <a:bodyPr wrap="square" lIns="0" tIns="0" rIns="0" bIns="0" rtlCol="0" anchor="ctr"/>
-          <a:lstStyle/>
-          <a:p>
-            <a:pPr indent="0" marL="0">
-              <a:buNone/>
-            </a:pPr>
-            <a:r>
-              <a:rPr lang="en-US" sz="1100" dirty="0">
-                <a:solidFill>
-                  <a:srgbClr val="2563EB"/>
-                </a:solidFill>
-                <a:latin typeface="맑은 고딕" pitchFamily="34" charset="0"/>
-                <a:ea typeface="맑은 고딕" pitchFamily="34" charset="-122"/>
-                <a:cs typeface="맑은 고딕" pitchFamily="34" charset="-120"/>
-              </a:rPr>
-              <a:t>•</a:t>
-            </a:r>
-            <a:endParaRPr lang="en-US" sz="1100" dirty="0"/>
-          </a:p>
-        </p:txBody>
-      </p:sp>
-      <p:sp>
-        <p:nvSpPr>
-          <p:cNvPr id="39" name="Text 37"/>
-          <p:cNvSpPr/>
-          <p:nvPr/>
-        </p:nvSpPr>
-        <p:spPr>
-          <a:xfrm>
-            <a:off x="768096" y="3776472"/>
-            <a:ext cx="2651760" cy="310896"/>
-          </a:xfrm>
-          <a:prstGeom prst="rect">
-            <a:avLst/>
-          </a:prstGeom>
-          <a:noFill/>
-          <a:ln/>
-        </p:spPr>
-        <p:txBody>
-          <a:bodyPr wrap="square" lIns="0" tIns="0" rIns="0" bIns="0" rtlCol="0" anchor="ctr"/>
-          <a:lstStyle/>
-          <a:p>
-            <a:pPr indent="0" marL="0">
-              <a:buNone/>
-            </a:pPr>
-            <a:r>
-              <a:rPr lang="en-US" sz="1080" b="1" dirty="0">
+              <a:t>현재 판정력이 입증된 범위</a:t>
+            </a:r>
+            <a:endParaRPr lang="en-US" sz="1150" dirty="0"/>
+          </a:p>
+        </p:txBody>
+      </p:sp>
+      <p:sp>
+        <p:nvSpPr>
+          <p:cNvPr id="45" name="Text 43"/>
+          <p:cNvSpPr/>
+          <p:nvPr/>
+        </p:nvSpPr>
+        <p:spPr>
+          <a:xfrm>
+            <a:off x="566928" y="4434840"/>
+            <a:ext cx="8046720" cy="457200"/>
+          </a:xfrm>
+          <a:prstGeom prst="rect">
+            <a:avLst/>
+          </a:prstGeom>
+          <a:noFill/>
+          <a:ln/>
+        </p:spPr>
+        <p:txBody>
+          <a:bodyPr wrap="square" lIns="0" tIns="0" rIns="0" bIns="0" rtlCol="0" anchor="ctr"/>
+          <a:lstStyle/>
+          <a:p>
+            <a:pPr indent="0" marL="0">
+              <a:lnSpc>
+                <a:spcPct val="125000"/>
+              </a:lnSpc>
+              <a:buNone/>
+            </a:pPr>
+            <a:r>
+              <a:rPr lang="en-US" sz="1030" dirty="0">
                 <a:solidFill>
                   <a:srgbClr val="1E293B"/>
                 </a:solidFill>
@@ -28696,116 +29018,19 @@
                 <a:ea typeface="맑은 고딕" pitchFamily="34" charset="-122"/>
                 <a:cs typeface="맑은 고딕" pitchFamily="34" charset="-120"/>
               </a:rPr>
-              <a:t>불안정한 소스는 끈다</a:t>
-            </a:r>
-            <a:endParaRPr lang="en-US" sz="1080" dirty="0"/>
-          </a:p>
-        </p:txBody>
-      </p:sp>
-      <p:sp>
-        <p:nvSpPr>
-          <p:cNvPr id="40" name="Text 38"/>
-          <p:cNvSpPr/>
-          <p:nvPr/>
-        </p:nvSpPr>
-        <p:spPr>
-          <a:xfrm>
-            <a:off x="3474720" y="3776472"/>
-            <a:ext cx="5166360" cy="310896"/>
-          </a:xfrm>
-          <a:prstGeom prst="rect">
-            <a:avLst/>
-          </a:prstGeom>
-          <a:noFill/>
-          <a:ln/>
-        </p:spPr>
-        <p:txBody>
-          <a:bodyPr wrap="square" lIns="0" tIns="0" rIns="0" bIns="0" rtlCol="0" anchor="ctr"/>
-          <a:lstStyle/>
-          <a:p>
-            <a:pPr indent="0" marL="0">
-              <a:buNone/>
-            </a:pPr>
-            <a:r>
-              <a:rPr lang="en-US" sz="1050" dirty="0">
-                <a:solidFill>
-                  <a:srgbClr val="64748B"/>
-                </a:solidFill>
-                <a:latin typeface="맑은 고딕" pitchFamily="34" charset="0"/>
-                <a:ea typeface="맑은 고딕" pitchFamily="34" charset="-122"/>
-                <a:cs typeface="맑은 고딕" pitchFamily="34" charset="-120"/>
-              </a:rPr>
-              <a:t>외부 연구정보 API가 응답을 보장하지 못해 중단하고, 로컬 코퍼스로 대체</a:t>
-            </a:r>
-            <a:endParaRPr lang="en-US" sz="1050" dirty="0"/>
-          </a:p>
-        </p:txBody>
-      </p:sp>
-      <p:sp>
-        <p:nvSpPr>
-          <p:cNvPr id="41" name="Text 39"/>
-          <p:cNvSpPr/>
-          <p:nvPr/>
-        </p:nvSpPr>
-        <p:spPr>
-          <a:xfrm>
-            <a:off x="603504" y="4142232"/>
-            <a:ext cx="137160" cy="310896"/>
-          </a:xfrm>
-          <a:prstGeom prst="rect">
-            <a:avLst/>
-          </a:prstGeom>
-          <a:noFill/>
-          <a:ln/>
-        </p:spPr>
-        <p:txBody>
-          <a:bodyPr wrap="square" lIns="0" tIns="0" rIns="0" bIns="0" rtlCol="0" anchor="ctr"/>
-          <a:lstStyle/>
-          <a:p>
-            <a:pPr indent="0" marL="0">
-              <a:buNone/>
-            </a:pPr>
-            <a:r>
-              <a:rPr lang="en-US" sz="1100" dirty="0">
-                <a:solidFill>
-                  <a:srgbClr val="2563EB"/>
-                </a:solidFill>
-                <a:latin typeface="맑은 고딕" pitchFamily="34" charset="0"/>
-                <a:ea typeface="맑은 고딕" pitchFamily="34" charset="-122"/>
-                <a:cs typeface="맑은 고딕" pitchFamily="34" charset="-120"/>
-              </a:rPr>
-              <a:t>•</a:t>
-            </a:r>
-            <a:endParaRPr lang="en-US" sz="1100" dirty="0"/>
-          </a:p>
-        </p:txBody>
-      </p:sp>
-      <p:sp>
-        <p:nvSpPr>
-          <p:cNvPr id="42" name="Text 40"/>
-          <p:cNvSpPr/>
-          <p:nvPr/>
-        </p:nvSpPr>
-        <p:spPr>
-          <a:xfrm>
-            <a:off x="768096" y="4142232"/>
-            <a:ext cx="2651760" cy="310896"/>
-          </a:xfrm>
-          <a:prstGeom prst="rect">
-            <a:avLst/>
-          </a:prstGeom>
-          <a:noFill/>
-          <a:ln/>
-        </p:spPr>
-        <p:txBody>
-          <a:bodyPr wrap="square" lIns="0" tIns="0" rIns="0" bIns="0" rtlCol="0" anchor="ctr"/>
-          <a:lstStyle/>
-          <a:p>
-            <a:pPr indent="0" marL="0">
-              <a:buNone/>
-            </a:pPr>
-            <a:r>
-              <a:rPr lang="en-US" sz="1080" b="1" dirty="0">
+              <a:t>표본 10건 · 극단 사례(명백히 진부 vs 명백히 창의)에 한정됩니다. 시험 문항은 사람이 아니라 모델이 생성했습니다.</a:t>
+            </a:r>
+            <a:endParaRPr lang="en-US" sz="1030" dirty="0"/>
+          </a:p>
+          <a:p>
+            <a:pPr indent="0" marL="0">
+              <a:lnSpc>
+                <a:spcPct val="125000"/>
+              </a:lnSpc>
+              <a:buNone/>
+            </a:pPr>
+            <a:r>
+              <a:rPr lang="en-US" sz="1030" dirty="0">
                 <a:solidFill>
                   <a:srgbClr val="1E293B"/>
                 </a:solidFill>
@@ -28813,165 +29038,9 @@
                 <a:ea typeface="맑은 고딕" pitchFamily="34" charset="-122"/>
                 <a:cs typeface="맑은 고딕" pitchFamily="34" charset="-120"/>
               </a:rPr>
-              <a:t>우회하지 않는다</a:t>
-            </a:r>
-            <a:endParaRPr lang="en-US" sz="1080" dirty="0"/>
-          </a:p>
-        </p:txBody>
-      </p:sp>
-      <p:sp>
-        <p:nvSpPr>
-          <p:cNvPr id="43" name="Text 41"/>
-          <p:cNvSpPr/>
-          <p:nvPr/>
-        </p:nvSpPr>
-        <p:spPr>
-          <a:xfrm>
-            <a:off x="3474720" y="4142232"/>
-            <a:ext cx="5166360" cy="310896"/>
-          </a:xfrm>
-          <a:prstGeom prst="rect">
-            <a:avLst/>
-          </a:prstGeom>
-          <a:noFill/>
-          <a:ln/>
-        </p:spPr>
-        <p:txBody>
-          <a:bodyPr wrap="square" lIns="0" tIns="0" rIns="0" bIns="0" rtlCol="0" anchor="ctr"/>
-          <a:lstStyle/>
-          <a:p>
-            <a:pPr indent="0" marL="0">
-              <a:buNone/>
-            </a:pPr>
-            <a:r>
-              <a:rPr lang="en-US" sz="1050" dirty="0">
-                <a:solidFill>
-                  <a:srgbClr val="64748B"/>
-                </a:solidFill>
-                <a:latin typeface="맑은 고딕" pitchFamily="34" charset="0"/>
-                <a:ea typeface="맑은 고딕" pitchFamily="34" charset="-122"/>
-                <a:cs typeface="맑은 고딕" pitchFamily="34" charset="-120"/>
-              </a:rPr>
-              <a:t>해외 사이트의 자동 수집 차단을 기술적으로 우회하지 않고, 공개 자료를 정리해 구축</a:t>
-            </a:r>
-            <a:endParaRPr lang="en-US" sz="1050" dirty="0"/>
-          </a:p>
-        </p:txBody>
-      </p:sp>
-      <p:sp>
-        <p:nvSpPr>
-          <p:cNvPr id="44" name="Text 42"/>
-          <p:cNvSpPr/>
-          <p:nvPr/>
-        </p:nvSpPr>
-        <p:spPr>
-          <a:xfrm>
-            <a:off x="603504" y="4507992"/>
-            <a:ext cx="137160" cy="310896"/>
-          </a:xfrm>
-          <a:prstGeom prst="rect">
-            <a:avLst/>
-          </a:prstGeom>
-          <a:noFill/>
-          <a:ln/>
-        </p:spPr>
-        <p:txBody>
-          <a:bodyPr wrap="square" lIns="0" tIns="0" rIns="0" bIns="0" rtlCol="0" anchor="ctr"/>
-          <a:lstStyle/>
-          <a:p>
-            <a:pPr indent="0" marL="0">
-              <a:buNone/>
-            </a:pPr>
-            <a:r>
-              <a:rPr lang="en-US" sz="1100" dirty="0">
-                <a:solidFill>
-                  <a:srgbClr val="2563EB"/>
-                </a:solidFill>
-                <a:latin typeface="맑은 고딕" pitchFamily="34" charset="0"/>
-                <a:ea typeface="맑은 고딕" pitchFamily="34" charset="-122"/>
-                <a:cs typeface="맑은 고딕" pitchFamily="34" charset="-120"/>
-              </a:rPr>
-              <a:t>•</a:t>
-            </a:r>
-            <a:endParaRPr lang="en-US" sz="1100" dirty="0"/>
-          </a:p>
-        </p:txBody>
-      </p:sp>
-      <p:sp>
-        <p:nvSpPr>
-          <p:cNvPr id="45" name="Text 43"/>
-          <p:cNvSpPr/>
-          <p:nvPr/>
-        </p:nvSpPr>
-        <p:spPr>
-          <a:xfrm>
-            <a:off x="768096" y="4507992"/>
-            <a:ext cx="2651760" cy="310896"/>
-          </a:xfrm>
-          <a:prstGeom prst="rect">
-            <a:avLst/>
-          </a:prstGeom>
-          <a:noFill/>
-          <a:ln/>
-        </p:spPr>
-        <p:txBody>
-          <a:bodyPr wrap="square" lIns="0" tIns="0" rIns="0" bIns="0" rtlCol="0" anchor="ctr"/>
-          <a:lstStyle/>
-          <a:p>
-            <a:pPr indent="0" marL="0">
-              <a:buNone/>
-            </a:pPr>
-            <a:r>
-              <a:rPr lang="en-US" sz="1080" b="1" dirty="0">
-                <a:solidFill>
-                  <a:srgbClr val="1E293B"/>
-                </a:solidFill>
-                <a:latin typeface="맑은 고딕" pitchFamily="34" charset="0"/>
-                <a:ea typeface="맑은 고딕" pitchFamily="34" charset="-122"/>
-                <a:cs typeface="맑은 고딕" pitchFamily="34" charset="-120"/>
-              </a:rPr>
-              <a:t>외국 상용 서비스에 의존하지 않는다</a:t>
-            </a:r>
-            <a:endParaRPr lang="en-US" sz="1080" dirty="0"/>
-          </a:p>
-        </p:txBody>
-      </p:sp>
-      <p:sp>
-        <p:nvSpPr>
-          <p:cNvPr id="46" name="Text 44"/>
-          <p:cNvSpPr/>
-          <p:nvPr/>
-        </p:nvSpPr>
-        <p:spPr>
-          <a:xfrm>
-            <a:off x="3474720" y="4507992"/>
-            <a:ext cx="5166360" cy="310896"/>
-          </a:xfrm>
-          <a:prstGeom prst="rect">
-            <a:avLst/>
-          </a:prstGeom>
-          <a:noFill/>
-          <a:ln/>
-        </p:spPr>
-        <p:txBody>
-          <a:bodyPr wrap="square" lIns="0" tIns="0" rIns="0" bIns="0" rtlCol="0" anchor="ctr"/>
-          <a:lstStyle/>
-          <a:p>
-            <a:pPr indent="0" marL="0">
-              <a:buNone/>
-            </a:pPr>
-            <a:r>
-              <a:rPr lang="en-US" sz="1050" dirty="0">
-                <a:solidFill>
-                  <a:srgbClr val="64748B"/>
-                </a:solidFill>
-                <a:latin typeface="맑은 고딕" pitchFamily="34" charset="0"/>
-                <a:ea typeface="맑은 고딕" pitchFamily="34" charset="-122"/>
-                <a:cs typeface="맑은 고딕" pitchFamily="34" charset="-120"/>
-              </a:rPr>
-              <a:t>유료 해외 정책DB 대신 OECD 공개 사례로 코퍼스를 자체 확보</a:t>
-            </a:r>
-            <a:endParaRPr lang="en-US" sz="1050" dirty="0"/>
+              <a:t>실제 국민 제안은 중간대에 몰리므로, 경계 사례 판별력과 전문가 일치도는 도입 전 별도 검증이 필요합니다.</a:t>
+            </a:r>
+            <a:endParaRPr lang="en-US" sz="1030" dirty="0"/>
           </a:p>
         </p:txBody>
       </p:sp>
@@ -29092,7 +29161,7 @@
                 <a:ea typeface="맑은 고딕" pitchFamily="34" charset="-122"/>
                 <a:cs typeface="맑은 고딕" pitchFamily="34" charset="-120"/>
               </a:rPr>
-              <a:t>25 / 27</a:t>
+              <a:t>25 / 28</a:t>
             </a:r>
             <a:endParaRPr lang="en-US" sz="1100" dirty="0"/>
           </a:p>
@@ -29574,7 +29643,7 @@
                 <a:ea typeface="맑은 고딕" pitchFamily="34" charset="-122"/>
                 <a:cs typeface="맑은 고딕" pitchFamily="34" charset="-120"/>
               </a:rPr>
-              <a:t>운영 비용 — 월 처리량별 추정</a:t>
+              <a:t>어떻게 만들었나</a:t>
             </a:r>
             <a:endParaRPr lang="en-US" sz="2100" dirty="0"/>
           </a:p>
@@ -29582,1659 +29651,20 @@
       </p:sp>
       <p:sp>
         <p:nvSpPr>
-          <p:cNvPr id="20" name="Text 18"/>
-          <p:cNvSpPr/>
-          <p:nvPr/>
-        </p:nvSpPr>
-        <p:spPr>
-          <a:xfrm>
-            <a:off x="365760" y="1719072"/>
-            <a:ext cx="8412480" cy="274320"/>
-          </a:xfrm>
-          <a:prstGeom prst="rect">
-            <a:avLst/>
-          </a:prstGeom>
-          <a:noFill/>
-          <a:ln/>
-        </p:spPr>
-        <p:txBody>
-          <a:bodyPr wrap="square" lIns="0" tIns="0" rIns="0" bIns="0" rtlCol="0" anchor="ctr"/>
-          <a:lstStyle/>
-          <a:p>
-            <a:pPr indent="0" marL="0">
-              <a:buNone/>
-            </a:pPr>
-            <a:r>
-              <a:rPr lang="en-US" sz="1100" dirty="0">
-                <a:solidFill>
-                  <a:srgbClr val="64748B"/>
-                </a:solidFill>
-                <a:latin typeface="맑은 고딕" pitchFamily="34" charset="0"/>
-                <a:ea typeface="맑은 고딕" pitchFamily="34" charset="-122"/>
-                <a:cs typeface="맑은 고딕" pitchFamily="34" charset="-120"/>
-              </a:rPr>
-              <a:t>아이디어 1건당 약 2.8만~4.3만 토큰 소요 · 프롬프트 캐싱 적용 · 환율 1,500원 기준</a:t>
-            </a:r>
-            <a:endParaRPr lang="en-US" sz="1100" dirty="0"/>
-          </a:p>
-        </p:txBody>
-      </p:sp>
-      <p:sp>
-        <p:nvSpPr>
-          <p:cNvPr id="21" name="Shape 19"/>
-          <p:cNvSpPr/>
-          <p:nvPr/>
-        </p:nvSpPr>
-        <p:spPr>
-          <a:xfrm>
-            <a:off x="365760" y="2103120"/>
-            <a:ext cx="1554480" cy="402336"/>
-          </a:xfrm>
-          <a:prstGeom prst="rect">
-            <a:avLst/>
-          </a:prstGeom>
-          <a:solidFill>
-            <a:srgbClr val="2563EB"/>
-          </a:solidFill>
-          <a:ln w="6350">
-            <a:solidFill>
-              <a:srgbClr val="FFFFFF"/>
-            </a:solidFill>
-            <a:prstDash val="solid"/>
-          </a:ln>
-        </p:spPr>
-      </p:sp>
-      <p:sp>
-        <p:nvSpPr>
-          <p:cNvPr id="22" name="Text 20"/>
-          <p:cNvSpPr/>
-          <p:nvPr/>
-        </p:nvSpPr>
-        <p:spPr>
-          <a:xfrm>
-            <a:off x="365760" y="2103120"/>
-            <a:ext cx="1554480" cy="402336"/>
-          </a:xfrm>
-          <a:prstGeom prst="rect">
-            <a:avLst/>
-          </a:prstGeom>
-          <a:noFill/>
-          <a:ln/>
-        </p:spPr>
-        <p:txBody>
-          <a:bodyPr wrap="square" lIns="0" tIns="0" rIns="0" bIns="0" rtlCol="0" anchor="ctr"/>
-          <a:lstStyle/>
-          <a:p>
-            <a:pPr algn="ctr" indent="0" marL="0">
-              <a:buNone/>
-            </a:pPr>
-            <a:r>
-              <a:rPr lang="en-US" sz="1050" b="1" dirty="0">
-                <a:solidFill>
-                  <a:srgbClr val="FFFFFF"/>
-                </a:solidFill>
-                <a:latin typeface="맑은 고딕" pitchFamily="34" charset="0"/>
-                <a:ea typeface="맑은 고딕" pitchFamily="34" charset="-122"/>
-                <a:cs typeface="맑은 고딕" pitchFamily="34" charset="-120"/>
-              </a:rPr>
-              <a:t>월 처리량</a:t>
-            </a:r>
-            <a:endParaRPr lang="en-US" sz="1050" dirty="0"/>
-          </a:p>
-        </p:txBody>
-      </p:sp>
-      <p:sp>
-        <p:nvSpPr>
-          <p:cNvPr id="23" name="Shape 21"/>
-          <p:cNvSpPr/>
-          <p:nvPr/>
-        </p:nvSpPr>
-        <p:spPr>
-          <a:xfrm>
-            <a:off x="1920240" y="2103120"/>
-            <a:ext cx="1714500" cy="402336"/>
-          </a:xfrm>
-          <a:prstGeom prst="rect">
-            <a:avLst/>
-          </a:prstGeom>
-          <a:solidFill>
-            <a:srgbClr val="2563EB"/>
-          </a:solidFill>
-          <a:ln w="6350">
-            <a:solidFill>
-              <a:srgbClr val="FFFFFF"/>
-            </a:solidFill>
-            <a:prstDash val="solid"/>
-          </a:ln>
-        </p:spPr>
-      </p:sp>
-      <p:sp>
-        <p:nvSpPr>
-          <p:cNvPr id="24" name="Text 22"/>
-          <p:cNvSpPr/>
-          <p:nvPr/>
-        </p:nvSpPr>
-        <p:spPr>
-          <a:xfrm>
-            <a:off x="1920240" y="2103120"/>
-            <a:ext cx="1714500" cy="402336"/>
-          </a:xfrm>
-          <a:prstGeom prst="rect">
-            <a:avLst/>
-          </a:prstGeom>
-          <a:noFill/>
-          <a:ln/>
-        </p:spPr>
-        <p:txBody>
-          <a:bodyPr wrap="square" lIns="0" tIns="0" rIns="0" bIns="0" rtlCol="0" anchor="ctr"/>
-          <a:lstStyle/>
-          <a:p>
-            <a:pPr algn="ctr" indent="0" marL="0">
-              <a:buNone/>
-            </a:pPr>
-            <a:r>
-              <a:rPr lang="en-US" sz="1050" b="1" dirty="0">
-                <a:solidFill>
-                  <a:srgbClr val="FFFFFF"/>
-                </a:solidFill>
-                <a:latin typeface="맑은 고딕" pitchFamily="34" charset="0"/>
-                <a:ea typeface="맑은 고딕" pitchFamily="34" charset="-122"/>
-                <a:cs typeface="맑은 고딕" pitchFamily="34" charset="-120"/>
-              </a:rPr>
-              <a:t>표준 모델 · 단문</a:t>
-            </a:r>
-            <a:endParaRPr lang="en-US" sz="1050" dirty="0"/>
-          </a:p>
-        </p:txBody>
-      </p:sp>
-      <p:sp>
-        <p:nvSpPr>
-          <p:cNvPr id="25" name="Shape 23"/>
-          <p:cNvSpPr/>
-          <p:nvPr/>
-        </p:nvSpPr>
-        <p:spPr>
-          <a:xfrm>
-            <a:off x="3634740" y="2103120"/>
-            <a:ext cx="1714500" cy="402336"/>
-          </a:xfrm>
-          <a:prstGeom prst="rect">
-            <a:avLst/>
-          </a:prstGeom>
-          <a:solidFill>
-            <a:srgbClr val="2563EB"/>
-          </a:solidFill>
-          <a:ln w="6350">
-            <a:solidFill>
-              <a:srgbClr val="FFFFFF"/>
-            </a:solidFill>
-            <a:prstDash val="solid"/>
-          </a:ln>
-        </p:spPr>
-      </p:sp>
-      <p:sp>
-        <p:nvSpPr>
-          <p:cNvPr id="26" name="Text 24"/>
-          <p:cNvSpPr/>
-          <p:nvPr/>
-        </p:nvSpPr>
-        <p:spPr>
-          <a:xfrm>
-            <a:off x="3634740" y="2103120"/>
-            <a:ext cx="1714500" cy="402336"/>
-          </a:xfrm>
-          <a:prstGeom prst="rect">
-            <a:avLst/>
-          </a:prstGeom>
-          <a:noFill/>
-          <a:ln/>
-        </p:spPr>
-        <p:txBody>
-          <a:bodyPr wrap="square" lIns="0" tIns="0" rIns="0" bIns="0" rtlCol="0" anchor="ctr"/>
-          <a:lstStyle/>
-          <a:p>
-            <a:pPr algn="ctr" indent="0" marL="0">
-              <a:buNone/>
-            </a:pPr>
-            <a:r>
-              <a:rPr lang="en-US" sz="1050" b="1" dirty="0">
-                <a:solidFill>
-                  <a:srgbClr val="FFFFFF"/>
-                </a:solidFill>
-                <a:latin typeface="맑은 고딕" pitchFamily="34" charset="0"/>
-                <a:ea typeface="맑은 고딕" pitchFamily="34" charset="-122"/>
-                <a:cs typeface="맑은 고딕" pitchFamily="34" charset="-120"/>
-              </a:rPr>
-              <a:t>표준 모델 · 장문</a:t>
-            </a:r>
-            <a:endParaRPr lang="en-US" sz="1050" dirty="0"/>
-          </a:p>
-        </p:txBody>
-      </p:sp>
-      <p:sp>
-        <p:nvSpPr>
-          <p:cNvPr id="27" name="Shape 25"/>
-          <p:cNvSpPr/>
-          <p:nvPr/>
-        </p:nvSpPr>
-        <p:spPr>
-          <a:xfrm>
-            <a:off x="5349240" y="2103120"/>
-            <a:ext cx="1714500" cy="402336"/>
-          </a:xfrm>
-          <a:prstGeom prst="rect">
-            <a:avLst/>
-          </a:prstGeom>
-          <a:solidFill>
-            <a:srgbClr val="2563EB"/>
-          </a:solidFill>
-          <a:ln w="6350">
-            <a:solidFill>
-              <a:srgbClr val="FFFFFF"/>
-            </a:solidFill>
-            <a:prstDash val="solid"/>
-          </a:ln>
-        </p:spPr>
-      </p:sp>
-      <p:sp>
-        <p:nvSpPr>
-          <p:cNvPr id="28" name="Text 26"/>
-          <p:cNvSpPr/>
-          <p:nvPr/>
-        </p:nvSpPr>
-        <p:spPr>
-          <a:xfrm>
-            <a:off x="5349240" y="2103120"/>
-            <a:ext cx="1714500" cy="402336"/>
-          </a:xfrm>
-          <a:prstGeom prst="rect">
-            <a:avLst/>
-          </a:prstGeom>
-          <a:noFill/>
-          <a:ln/>
-        </p:spPr>
-        <p:txBody>
-          <a:bodyPr wrap="square" lIns="0" tIns="0" rIns="0" bIns="0" rtlCol="0" anchor="ctr"/>
-          <a:lstStyle/>
-          <a:p>
-            <a:pPr algn="ctr" indent="0" marL="0">
-              <a:buNone/>
-            </a:pPr>
-            <a:r>
-              <a:rPr lang="en-US" sz="1050" b="1" dirty="0">
-                <a:solidFill>
-                  <a:srgbClr val="FFFFFF"/>
-                </a:solidFill>
-                <a:latin typeface="맑은 고딕" pitchFamily="34" charset="0"/>
-                <a:ea typeface="맑은 고딕" pitchFamily="34" charset="-122"/>
-                <a:cs typeface="맑은 고딕" pitchFamily="34" charset="-120"/>
-              </a:rPr>
-              <a:t>고급 모델 · 단문</a:t>
-            </a:r>
-            <a:endParaRPr lang="en-US" sz="1050" dirty="0"/>
-          </a:p>
-        </p:txBody>
-      </p:sp>
-      <p:sp>
-        <p:nvSpPr>
-          <p:cNvPr id="29" name="Shape 27"/>
-          <p:cNvSpPr/>
-          <p:nvPr/>
-        </p:nvSpPr>
-        <p:spPr>
-          <a:xfrm>
-            <a:off x="7063740" y="2103120"/>
-            <a:ext cx="1714500" cy="402336"/>
-          </a:xfrm>
-          <a:prstGeom prst="rect">
-            <a:avLst/>
-          </a:prstGeom>
-          <a:solidFill>
-            <a:srgbClr val="2563EB"/>
-          </a:solidFill>
-          <a:ln w="6350">
-            <a:solidFill>
-              <a:srgbClr val="FFFFFF"/>
-            </a:solidFill>
-            <a:prstDash val="solid"/>
-          </a:ln>
-        </p:spPr>
-      </p:sp>
-      <p:sp>
-        <p:nvSpPr>
-          <p:cNvPr id="30" name="Text 28"/>
-          <p:cNvSpPr/>
-          <p:nvPr/>
-        </p:nvSpPr>
-        <p:spPr>
-          <a:xfrm>
-            <a:off x="7063740" y="2103120"/>
-            <a:ext cx="1714500" cy="402336"/>
-          </a:xfrm>
-          <a:prstGeom prst="rect">
-            <a:avLst/>
-          </a:prstGeom>
-          <a:noFill/>
-          <a:ln/>
-        </p:spPr>
-        <p:txBody>
-          <a:bodyPr wrap="square" lIns="0" tIns="0" rIns="0" bIns="0" rtlCol="0" anchor="ctr"/>
-          <a:lstStyle/>
-          <a:p>
-            <a:pPr algn="ctr" indent="0" marL="0">
-              <a:buNone/>
-            </a:pPr>
-            <a:r>
-              <a:rPr lang="en-US" sz="1050" b="1" dirty="0">
-                <a:solidFill>
-                  <a:srgbClr val="FFFFFF"/>
-                </a:solidFill>
-                <a:latin typeface="맑은 고딕" pitchFamily="34" charset="0"/>
-                <a:ea typeface="맑은 고딕" pitchFamily="34" charset="-122"/>
-                <a:cs typeface="맑은 고딕" pitchFamily="34" charset="-120"/>
-              </a:rPr>
-              <a:t>고급 모델 · 장문</a:t>
-            </a:r>
-            <a:endParaRPr lang="en-US" sz="1050" dirty="0"/>
-          </a:p>
-        </p:txBody>
-      </p:sp>
-      <p:sp>
-        <p:nvSpPr>
-          <p:cNvPr id="31" name="Shape 29"/>
-          <p:cNvSpPr/>
-          <p:nvPr/>
-        </p:nvSpPr>
-        <p:spPr>
-          <a:xfrm>
-            <a:off x="365760" y="2505456"/>
-            <a:ext cx="1554480" cy="420624"/>
+          <p:cNvPr id="20" name="Shape 18"/>
+          <p:cNvSpPr/>
+          <p:nvPr/>
+        </p:nvSpPr>
+        <p:spPr>
+          <a:xfrm>
+            <a:off x="365760" y="1783080"/>
+            <a:ext cx="2011680" cy="1417320"/>
           </a:xfrm>
           <a:prstGeom prst="rect">
             <a:avLst/>
           </a:prstGeom>
           <a:solidFill>
             <a:srgbClr val="FFFFFF"/>
-          </a:solidFill>
-          <a:ln w="6350">
-            <a:solidFill>
-              <a:srgbClr val="E5E7EB"/>
-            </a:solidFill>
-            <a:prstDash val="solid"/>
-          </a:ln>
-        </p:spPr>
-      </p:sp>
-      <p:sp>
-        <p:nvSpPr>
-          <p:cNvPr id="32" name="Text 30"/>
-          <p:cNvSpPr/>
-          <p:nvPr/>
-        </p:nvSpPr>
-        <p:spPr>
-          <a:xfrm>
-            <a:off x="365760" y="2505456"/>
-            <a:ext cx="1554480" cy="420624"/>
-          </a:xfrm>
-          <a:prstGeom prst="rect">
-            <a:avLst/>
-          </a:prstGeom>
-          <a:noFill/>
-          <a:ln/>
-        </p:spPr>
-        <p:txBody>
-          <a:bodyPr wrap="square" lIns="0" tIns="0" rIns="0" bIns="0" rtlCol="0" anchor="ctr"/>
-          <a:lstStyle/>
-          <a:p>
-            <a:pPr algn="ctr" indent="0" marL="0">
-              <a:buNone/>
-            </a:pPr>
-            <a:r>
-              <a:rPr lang="en-US" sz="1100" b="1" dirty="0">
-                <a:solidFill>
-                  <a:srgbClr val="2563EB"/>
-                </a:solidFill>
-                <a:latin typeface="맑은 고딕" pitchFamily="34" charset="0"/>
-                <a:ea typeface="맑은 고딕" pitchFamily="34" charset="-122"/>
-                <a:cs typeface="맑은 고딕" pitchFamily="34" charset="-120"/>
-              </a:rPr>
-              <a:t>500건</a:t>
-            </a:r>
-            <a:endParaRPr lang="en-US" sz="1100" dirty="0"/>
-          </a:p>
-        </p:txBody>
-      </p:sp>
-      <p:sp>
-        <p:nvSpPr>
-          <p:cNvPr id="33" name="Shape 31"/>
-          <p:cNvSpPr/>
-          <p:nvPr/>
-        </p:nvSpPr>
-        <p:spPr>
-          <a:xfrm>
-            <a:off x="1920240" y="2505456"/>
-            <a:ext cx="1714500" cy="420624"/>
-          </a:xfrm>
-          <a:prstGeom prst="rect">
-            <a:avLst/>
-          </a:prstGeom>
-          <a:solidFill>
-            <a:srgbClr val="FFFFFF"/>
-          </a:solidFill>
-          <a:ln w="6350">
-            <a:solidFill>
-              <a:srgbClr val="E5E7EB"/>
-            </a:solidFill>
-            <a:prstDash val="solid"/>
-          </a:ln>
-        </p:spPr>
-      </p:sp>
-      <p:sp>
-        <p:nvSpPr>
-          <p:cNvPr id="34" name="Text 32"/>
-          <p:cNvSpPr/>
-          <p:nvPr/>
-        </p:nvSpPr>
-        <p:spPr>
-          <a:xfrm>
-            <a:off x="1920240" y="2505456"/>
-            <a:ext cx="1714500" cy="420624"/>
-          </a:xfrm>
-          <a:prstGeom prst="rect">
-            <a:avLst/>
-          </a:prstGeom>
-          <a:noFill/>
-          <a:ln/>
-        </p:spPr>
-        <p:txBody>
-          <a:bodyPr wrap="square" lIns="0" tIns="0" rIns="0" bIns="0" rtlCol="0" anchor="ctr"/>
-          <a:lstStyle/>
-          <a:p>
-            <a:pPr algn="ctr" indent="0" marL="0">
-              <a:buNone/>
-            </a:pPr>
-            <a:r>
-              <a:rPr lang="en-US" sz="1100" dirty="0">
-                <a:solidFill>
-                  <a:srgbClr val="1E293B"/>
-                </a:solidFill>
-                <a:latin typeface="맑은 고딕" pitchFamily="34" charset="0"/>
-                <a:ea typeface="맑은 고딕" pitchFamily="34" charset="-122"/>
-                <a:cs typeface="맑은 고딕" pitchFamily="34" charset="-120"/>
-              </a:rPr>
-              <a:t>약 14만 원</a:t>
-            </a:r>
-            <a:endParaRPr lang="en-US" sz="1100" dirty="0"/>
-          </a:p>
-        </p:txBody>
-      </p:sp>
-      <p:sp>
-        <p:nvSpPr>
-          <p:cNvPr id="35" name="Shape 33"/>
-          <p:cNvSpPr/>
-          <p:nvPr/>
-        </p:nvSpPr>
-        <p:spPr>
-          <a:xfrm>
-            <a:off x="3634740" y="2505456"/>
-            <a:ext cx="1714500" cy="420624"/>
-          </a:xfrm>
-          <a:prstGeom prst="rect">
-            <a:avLst/>
-          </a:prstGeom>
-          <a:solidFill>
-            <a:srgbClr val="FFFFFF"/>
-          </a:solidFill>
-          <a:ln w="6350">
-            <a:solidFill>
-              <a:srgbClr val="E5E7EB"/>
-            </a:solidFill>
-            <a:prstDash val="solid"/>
-          </a:ln>
-        </p:spPr>
-      </p:sp>
-      <p:sp>
-        <p:nvSpPr>
-          <p:cNvPr id="36" name="Text 34"/>
-          <p:cNvSpPr/>
-          <p:nvPr/>
-        </p:nvSpPr>
-        <p:spPr>
-          <a:xfrm>
-            <a:off x="3634740" y="2505456"/>
-            <a:ext cx="1714500" cy="420624"/>
-          </a:xfrm>
-          <a:prstGeom prst="rect">
-            <a:avLst/>
-          </a:prstGeom>
-          <a:noFill/>
-          <a:ln/>
-        </p:spPr>
-        <p:txBody>
-          <a:bodyPr wrap="square" lIns="0" tIns="0" rIns="0" bIns="0" rtlCol="0" anchor="ctr"/>
-          <a:lstStyle/>
-          <a:p>
-            <a:pPr algn="ctr" indent="0" marL="0">
-              <a:buNone/>
-            </a:pPr>
-            <a:r>
-              <a:rPr lang="en-US" sz="1100" dirty="0">
-                <a:solidFill>
-                  <a:srgbClr val="1E293B"/>
-                </a:solidFill>
-                <a:latin typeface="맑은 고딕" pitchFamily="34" charset="0"/>
-                <a:ea typeface="맑은 고딕" pitchFamily="34" charset="-122"/>
-                <a:cs typeface="맑은 고딕" pitchFamily="34" charset="-120"/>
-              </a:rPr>
-              <a:t>약 18만 원</a:t>
-            </a:r>
-            <a:endParaRPr lang="en-US" sz="1100" dirty="0"/>
-          </a:p>
-        </p:txBody>
-      </p:sp>
-      <p:sp>
-        <p:nvSpPr>
-          <p:cNvPr id="37" name="Shape 35"/>
-          <p:cNvSpPr/>
-          <p:nvPr/>
-        </p:nvSpPr>
-        <p:spPr>
-          <a:xfrm>
-            <a:off x="5349240" y="2505456"/>
-            <a:ext cx="1714500" cy="420624"/>
-          </a:xfrm>
-          <a:prstGeom prst="rect">
-            <a:avLst/>
-          </a:prstGeom>
-          <a:solidFill>
-            <a:srgbClr val="FFFFFF"/>
-          </a:solidFill>
-          <a:ln w="6350">
-            <a:solidFill>
-              <a:srgbClr val="E5E7EB"/>
-            </a:solidFill>
-            <a:prstDash val="solid"/>
-          </a:ln>
-        </p:spPr>
-      </p:sp>
-      <p:sp>
-        <p:nvSpPr>
-          <p:cNvPr id="38" name="Text 36"/>
-          <p:cNvSpPr/>
-          <p:nvPr/>
-        </p:nvSpPr>
-        <p:spPr>
-          <a:xfrm>
-            <a:off x="5349240" y="2505456"/>
-            <a:ext cx="1714500" cy="420624"/>
-          </a:xfrm>
-          <a:prstGeom prst="rect">
-            <a:avLst/>
-          </a:prstGeom>
-          <a:noFill/>
-          <a:ln/>
-        </p:spPr>
-        <p:txBody>
-          <a:bodyPr wrap="square" lIns="0" tIns="0" rIns="0" bIns="0" rtlCol="0" anchor="ctr"/>
-          <a:lstStyle/>
-          <a:p>
-            <a:pPr algn="ctr" indent="0" marL="0">
-              <a:buNone/>
-            </a:pPr>
-            <a:r>
-              <a:rPr lang="en-US" sz="1100" dirty="0">
-                <a:solidFill>
-                  <a:srgbClr val="1E293B"/>
-                </a:solidFill>
-                <a:latin typeface="맑은 고딕" pitchFamily="34" charset="0"/>
-                <a:ea typeface="맑은 고딕" pitchFamily="34" charset="-122"/>
-                <a:cs typeface="맑은 고딕" pitchFamily="34" charset="-120"/>
-              </a:rPr>
-              <a:t>약 24만 원</a:t>
-            </a:r>
-            <a:endParaRPr lang="en-US" sz="1100" dirty="0"/>
-          </a:p>
-        </p:txBody>
-      </p:sp>
-      <p:sp>
-        <p:nvSpPr>
-          <p:cNvPr id="39" name="Shape 37"/>
-          <p:cNvSpPr/>
-          <p:nvPr/>
-        </p:nvSpPr>
-        <p:spPr>
-          <a:xfrm>
-            <a:off x="7063740" y="2505456"/>
-            <a:ext cx="1714500" cy="420624"/>
-          </a:xfrm>
-          <a:prstGeom prst="rect">
-            <a:avLst/>
-          </a:prstGeom>
-          <a:solidFill>
-            <a:srgbClr val="FFFFFF"/>
-          </a:solidFill>
-          <a:ln w="6350">
-            <a:solidFill>
-              <a:srgbClr val="E5E7EB"/>
-            </a:solidFill>
-            <a:prstDash val="solid"/>
-          </a:ln>
-        </p:spPr>
-      </p:sp>
-      <p:sp>
-        <p:nvSpPr>
-          <p:cNvPr id="40" name="Text 38"/>
-          <p:cNvSpPr/>
-          <p:nvPr/>
-        </p:nvSpPr>
-        <p:spPr>
-          <a:xfrm>
-            <a:off x="7063740" y="2505456"/>
-            <a:ext cx="1714500" cy="420624"/>
-          </a:xfrm>
-          <a:prstGeom prst="rect">
-            <a:avLst/>
-          </a:prstGeom>
-          <a:noFill/>
-          <a:ln/>
-        </p:spPr>
-        <p:txBody>
-          <a:bodyPr wrap="square" lIns="0" tIns="0" rIns="0" bIns="0" rtlCol="0" anchor="ctr"/>
-          <a:lstStyle/>
-          <a:p>
-            <a:pPr algn="ctr" indent="0" marL="0">
-              <a:buNone/>
-            </a:pPr>
-            <a:r>
-              <a:rPr lang="en-US" sz="1100" dirty="0">
-                <a:solidFill>
-                  <a:srgbClr val="1E293B"/>
-                </a:solidFill>
-                <a:latin typeface="맑은 고딕" pitchFamily="34" charset="0"/>
-                <a:ea typeface="맑은 고딕" pitchFamily="34" charset="-122"/>
-                <a:cs typeface="맑은 고딕" pitchFamily="34" charset="-120"/>
-              </a:rPr>
-              <a:t>약 30만 원</a:t>
-            </a:r>
-            <a:endParaRPr lang="en-US" sz="1100" dirty="0"/>
-          </a:p>
-        </p:txBody>
-      </p:sp>
-      <p:sp>
-        <p:nvSpPr>
-          <p:cNvPr id="41" name="Shape 39"/>
-          <p:cNvSpPr/>
-          <p:nvPr/>
-        </p:nvSpPr>
-        <p:spPr>
-          <a:xfrm>
-            <a:off x="365760" y="2926080"/>
-            <a:ext cx="1554480" cy="420624"/>
-          </a:xfrm>
-          <a:prstGeom prst="rect">
-            <a:avLst/>
-          </a:prstGeom>
-          <a:solidFill>
-            <a:srgbClr val="F8FAFC"/>
-          </a:solidFill>
-          <a:ln w="6350">
-            <a:solidFill>
-              <a:srgbClr val="E5E7EB"/>
-            </a:solidFill>
-            <a:prstDash val="solid"/>
-          </a:ln>
-        </p:spPr>
-      </p:sp>
-      <p:sp>
-        <p:nvSpPr>
-          <p:cNvPr id="42" name="Text 40"/>
-          <p:cNvSpPr/>
-          <p:nvPr/>
-        </p:nvSpPr>
-        <p:spPr>
-          <a:xfrm>
-            <a:off x="365760" y="2926080"/>
-            <a:ext cx="1554480" cy="420624"/>
-          </a:xfrm>
-          <a:prstGeom prst="rect">
-            <a:avLst/>
-          </a:prstGeom>
-          <a:noFill/>
-          <a:ln/>
-        </p:spPr>
-        <p:txBody>
-          <a:bodyPr wrap="square" lIns="0" tIns="0" rIns="0" bIns="0" rtlCol="0" anchor="ctr"/>
-          <a:lstStyle/>
-          <a:p>
-            <a:pPr algn="ctr" indent="0" marL="0">
-              <a:buNone/>
-            </a:pPr>
-            <a:r>
-              <a:rPr lang="en-US" sz="1100" b="1" dirty="0">
-                <a:solidFill>
-                  <a:srgbClr val="2563EB"/>
-                </a:solidFill>
-                <a:latin typeface="맑은 고딕" pitchFamily="34" charset="0"/>
-                <a:ea typeface="맑은 고딕" pitchFamily="34" charset="-122"/>
-                <a:cs typeface="맑은 고딕" pitchFamily="34" charset="-120"/>
-              </a:rPr>
-              <a:t>1,000건</a:t>
-            </a:r>
-            <a:endParaRPr lang="en-US" sz="1100" dirty="0"/>
-          </a:p>
-        </p:txBody>
-      </p:sp>
-      <p:sp>
-        <p:nvSpPr>
-          <p:cNvPr id="43" name="Shape 41"/>
-          <p:cNvSpPr/>
-          <p:nvPr/>
-        </p:nvSpPr>
-        <p:spPr>
-          <a:xfrm>
-            <a:off x="1920240" y="2926080"/>
-            <a:ext cx="1714500" cy="420624"/>
-          </a:xfrm>
-          <a:prstGeom prst="rect">
-            <a:avLst/>
-          </a:prstGeom>
-          <a:solidFill>
-            <a:srgbClr val="F8FAFC"/>
-          </a:solidFill>
-          <a:ln w="6350">
-            <a:solidFill>
-              <a:srgbClr val="E5E7EB"/>
-            </a:solidFill>
-            <a:prstDash val="solid"/>
-          </a:ln>
-        </p:spPr>
-      </p:sp>
-      <p:sp>
-        <p:nvSpPr>
-          <p:cNvPr id="44" name="Text 42"/>
-          <p:cNvSpPr/>
-          <p:nvPr/>
-        </p:nvSpPr>
-        <p:spPr>
-          <a:xfrm>
-            <a:off x="1920240" y="2926080"/>
-            <a:ext cx="1714500" cy="420624"/>
-          </a:xfrm>
-          <a:prstGeom prst="rect">
-            <a:avLst/>
-          </a:prstGeom>
-          <a:noFill/>
-          <a:ln/>
-        </p:spPr>
-        <p:txBody>
-          <a:bodyPr wrap="square" lIns="0" tIns="0" rIns="0" bIns="0" rtlCol="0" anchor="ctr"/>
-          <a:lstStyle/>
-          <a:p>
-            <a:pPr algn="ctr" indent="0" marL="0">
-              <a:buNone/>
-            </a:pPr>
-            <a:r>
-              <a:rPr lang="en-US" sz="1100" dirty="0">
-                <a:solidFill>
-                  <a:srgbClr val="1E293B"/>
-                </a:solidFill>
-                <a:latin typeface="맑은 고딕" pitchFamily="34" charset="0"/>
-                <a:ea typeface="맑은 고딕" pitchFamily="34" charset="-122"/>
-                <a:cs typeface="맑은 고딕" pitchFamily="34" charset="-120"/>
-              </a:rPr>
-              <a:t>약 29만 원</a:t>
-            </a:r>
-            <a:endParaRPr lang="en-US" sz="1100" dirty="0"/>
-          </a:p>
-        </p:txBody>
-      </p:sp>
-      <p:sp>
-        <p:nvSpPr>
-          <p:cNvPr id="45" name="Shape 43"/>
-          <p:cNvSpPr/>
-          <p:nvPr/>
-        </p:nvSpPr>
-        <p:spPr>
-          <a:xfrm>
-            <a:off x="3634740" y="2926080"/>
-            <a:ext cx="1714500" cy="420624"/>
-          </a:xfrm>
-          <a:prstGeom prst="rect">
-            <a:avLst/>
-          </a:prstGeom>
-          <a:solidFill>
-            <a:srgbClr val="F8FAFC"/>
-          </a:solidFill>
-          <a:ln w="6350">
-            <a:solidFill>
-              <a:srgbClr val="E5E7EB"/>
-            </a:solidFill>
-            <a:prstDash val="solid"/>
-          </a:ln>
-        </p:spPr>
-      </p:sp>
-      <p:sp>
-        <p:nvSpPr>
-          <p:cNvPr id="46" name="Text 44"/>
-          <p:cNvSpPr/>
-          <p:nvPr/>
-        </p:nvSpPr>
-        <p:spPr>
-          <a:xfrm>
-            <a:off x="3634740" y="2926080"/>
-            <a:ext cx="1714500" cy="420624"/>
-          </a:xfrm>
-          <a:prstGeom prst="rect">
-            <a:avLst/>
-          </a:prstGeom>
-          <a:noFill/>
-          <a:ln/>
-        </p:spPr>
-        <p:txBody>
-          <a:bodyPr wrap="square" lIns="0" tIns="0" rIns="0" bIns="0" rtlCol="0" anchor="ctr"/>
-          <a:lstStyle/>
-          <a:p>
-            <a:pPr algn="ctr" indent="0" marL="0">
-              <a:buNone/>
-            </a:pPr>
-            <a:r>
-              <a:rPr lang="en-US" sz="1100" dirty="0">
-                <a:solidFill>
-                  <a:srgbClr val="1E293B"/>
-                </a:solidFill>
-                <a:latin typeface="맑은 고딕" pitchFamily="34" charset="0"/>
-                <a:ea typeface="맑은 고딕" pitchFamily="34" charset="-122"/>
-                <a:cs typeface="맑은 고딕" pitchFamily="34" charset="-120"/>
-              </a:rPr>
-              <a:t>약 36만 원</a:t>
-            </a:r>
-            <a:endParaRPr lang="en-US" sz="1100" dirty="0"/>
-          </a:p>
-        </p:txBody>
-      </p:sp>
-      <p:sp>
-        <p:nvSpPr>
-          <p:cNvPr id="47" name="Shape 45"/>
-          <p:cNvSpPr/>
-          <p:nvPr/>
-        </p:nvSpPr>
-        <p:spPr>
-          <a:xfrm>
-            <a:off x="5349240" y="2926080"/>
-            <a:ext cx="1714500" cy="420624"/>
-          </a:xfrm>
-          <a:prstGeom prst="rect">
-            <a:avLst/>
-          </a:prstGeom>
-          <a:solidFill>
-            <a:srgbClr val="F8FAFC"/>
-          </a:solidFill>
-          <a:ln w="6350">
-            <a:solidFill>
-              <a:srgbClr val="E5E7EB"/>
-            </a:solidFill>
-            <a:prstDash val="solid"/>
-          </a:ln>
-        </p:spPr>
-      </p:sp>
-      <p:sp>
-        <p:nvSpPr>
-          <p:cNvPr id="48" name="Text 46"/>
-          <p:cNvSpPr/>
-          <p:nvPr/>
-        </p:nvSpPr>
-        <p:spPr>
-          <a:xfrm>
-            <a:off x="5349240" y="2926080"/>
-            <a:ext cx="1714500" cy="420624"/>
-          </a:xfrm>
-          <a:prstGeom prst="rect">
-            <a:avLst/>
-          </a:prstGeom>
-          <a:noFill/>
-          <a:ln/>
-        </p:spPr>
-        <p:txBody>
-          <a:bodyPr wrap="square" lIns="0" tIns="0" rIns="0" bIns="0" rtlCol="0" anchor="ctr"/>
-          <a:lstStyle/>
-          <a:p>
-            <a:pPr algn="ctr" indent="0" marL="0">
-              <a:buNone/>
-            </a:pPr>
-            <a:r>
-              <a:rPr lang="en-US" sz="1100" dirty="0">
-                <a:solidFill>
-                  <a:srgbClr val="1E293B"/>
-                </a:solidFill>
-                <a:latin typeface="맑은 고딕" pitchFamily="34" charset="0"/>
-                <a:ea typeface="맑은 고딕" pitchFamily="34" charset="-122"/>
-                <a:cs typeface="맑은 고딕" pitchFamily="34" charset="-120"/>
-              </a:rPr>
-              <a:t>약 48만 원</a:t>
-            </a:r>
-            <a:endParaRPr lang="en-US" sz="1100" dirty="0"/>
-          </a:p>
-        </p:txBody>
-      </p:sp>
-      <p:sp>
-        <p:nvSpPr>
-          <p:cNvPr id="49" name="Shape 47"/>
-          <p:cNvSpPr/>
-          <p:nvPr/>
-        </p:nvSpPr>
-        <p:spPr>
-          <a:xfrm>
-            <a:off x="7063740" y="2926080"/>
-            <a:ext cx="1714500" cy="420624"/>
-          </a:xfrm>
-          <a:prstGeom prst="rect">
-            <a:avLst/>
-          </a:prstGeom>
-          <a:solidFill>
-            <a:srgbClr val="F8FAFC"/>
-          </a:solidFill>
-          <a:ln w="6350">
-            <a:solidFill>
-              <a:srgbClr val="E5E7EB"/>
-            </a:solidFill>
-            <a:prstDash val="solid"/>
-          </a:ln>
-        </p:spPr>
-      </p:sp>
-      <p:sp>
-        <p:nvSpPr>
-          <p:cNvPr id="50" name="Text 48"/>
-          <p:cNvSpPr/>
-          <p:nvPr/>
-        </p:nvSpPr>
-        <p:spPr>
-          <a:xfrm>
-            <a:off x="7063740" y="2926080"/>
-            <a:ext cx="1714500" cy="420624"/>
-          </a:xfrm>
-          <a:prstGeom prst="rect">
-            <a:avLst/>
-          </a:prstGeom>
-          <a:noFill/>
-          <a:ln/>
-        </p:spPr>
-        <p:txBody>
-          <a:bodyPr wrap="square" lIns="0" tIns="0" rIns="0" bIns="0" rtlCol="0" anchor="ctr"/>
-          <a:lstStyle/>
-          <a:p>
-            <a:pPr algn="ctr" indent="0" marL="0">
-              <a:buNone/>
-            </a:pPr>
-            <a:r>
-              <a:rPr lang="en-US" sz="1100" dirty="0">
-                <a:solidFill>
-                  <a:srgbClr val="1E293B"/>
-                </a:solidFill>
-                <a:latin typeface="맑은 고딕" pitchFamily="34" charset="0"/>
-                <a:ea typeface="맑은 고딕" pitchFamily="34" charset="-122"/>
-                <a:cs typeface="맑은 고딕" pitchFamily="34" charset="-120"/>
-              </a:rPr>
-              <a:t>약 60만 원</a:t>
-            </a:r>
-            <a:endParaRPr lang="en-US" sz="1100" dirty="0"/>
-          </a:p>
-        </p:txBody>
-      </p:sp>
-      <p:sp>
-        <p:nvSpPr>
-          <p:cNvPr id="51" name="Shape 49"/>
-          <p:cNvSpPr/>
-          <p:nvPr/>
-        </p:nvSpPr>
-        <p:spPr>
-          <a:xfrm>
-            <a:off x="365760" y="3346704"/>
-            <a:ext cx="1554480" cy="420624"/>
-          </a:xfrm>
-          <a:prstGeom prst="rect">
-            <a:avLst/>
-          </a:prstGeom>
-          <a:solidFill>
-            <a:srgbClr val="FFFFFF"/>
-          </a:solidFill>
-          <a:ln w="6350">
-            <a:solidFill>
-              <a:srgbClr val="E5E7EB"/>
-            </a:solidFill>
-            <a:prstDash val="solid"/>
-          </a:ln>
-        </p:spPr>
-      </p:sp>
-      <p:sp>
-        <p:nvSpPr>
-          <p:cNvPr id="52" name="Text 50"/>
-          <p:cNvSpPr/>
-          <p:nvPr/>
-        </p:nvSpPr>
-        <p:spPr>
-          <a:xfrm>
-            <a:off x="365760" y="3346704"/>
-            <a:ext cx="1554480" cy="420624"/>
-          </a:xfrm>
-          <a:prstGeom prst="rect">
-            <a:avLst/>
-          </a:prstGeom>
-          <a:noFill/>
-          <a:ln/>
-        </p:spPr>
-        <p:txBody>
-          <a:bodyPr wrap="square" lIns="0" tIns="0" rIns="0" bIns="0" rtlCol="0" anchor="ctr"/>
-          <a:lstStyle/>
-          <a:p>
-            <a:pPr algn="ctr" indent="0" marL="0">
-              <a:buNone/>
-            </a:pPr>
-            <a:r>
-              <a:rPr lang="en-US" sz="1100" b="1" dirty="0">
-                <a:solidFill>
-                  <a:srgbClr val="2563EB"/>
-                </a:solidFill>
-                <a:latin typeface="맑은 고딕" pitchFamily="34" charset="0"/>
-                <a:ea typeface="맑은 고딕" pitchFamily="34" charset="-122"/>
-                <a:cs typeface="맑은 고딕" pitchFamily="34" charset="-120"/>
-              </a:rPr>
-              <a:t>2,000건</a:t>
-            </a:r>
-            <a:endParaRPr lang="en-US" sz="1100" dirty="0"/>
-          </a:p>
-        </p:txBody>
-      </p:sp>
-      <p:sp>
-        <p:nvSpPr>
-          <p:cNvPr id="53" name="Shape 51"/>
-          <p:cNvSpPr/>
-          <p:nvPr/>
-        </p:nvSpPr>
-        <p:spPr>
-          <a:xfrm>
-            <a:off x="1920240" y="3346704"/>
-            <a:ext cx="1714500" cy="420624"/>
-          </a:xfrm>
-          <a:prstGeom prst="rect">
-            <a:avLst/>
-          </a:prstGeom>
-          <a:solidFill>
-            <a:srgbClr val="FFFFFF"/>
-          </a:solidFill>
-          <a:ln w="6350">
-            <a:solidFill>
-              <a:srgbClr val="E5E7EB"/>
-            </a:solidFill>
-            <a:prstDash val="solid"/>
-          </a:ln>
-        </p:spPr>
-      </p:sp>
-      <p:sp>
-        <p:nvSpPr>
-          <p:cNvPr id="54" name="Text 52"/>
-          <p:cNvSpPr/>
-          <p:nvPr/>
-        </p:nvSpPr>
-        <p:spPr>
-          <a:xfrm>
-            <a:off x="1920240" y="3346704"/>
-            <a:ext cx="1714500" cy="420624"/>
-          </a:xfrm>
-          <a:prstGeom prst="rect">
-            <a:avLst/>
-          </a:prstGeom>
-          <a:noFill/>
-          <a:ln/>
-        </p:spPr>
-        <p:txBody>
-          <a:bodyPr wrap="square" lIns="0" tIns="0" rIns="0" bIns="0" rtlCol="0" anchor="ctr"/>
-          <a:lstStyle/>
-          <a:p>
-            <a:pPr algn="ctr" indent="0" marL="0">
-              <a:buNone/>
-            </a:pPr>
-            <a:r>
-              <a:rPr lang="en-US" sz="1100" dirty="0">
-                <a:solidFill>
-                  <a:srgbClr val="1E293B"/>
-                </a:solidFill>
-                <a:latin typeface="맑은 고딕" pitchFamily="34" charset="0"/>
-                <a:ea typeface="맑은 고딕" pitchFamily="34" charset="-122"/>
-                <a:cs typeface="맑은 고딕" pitchFamily="34" charset="-120"/>
-              </a:rPr>
-              <a:t>약 57만 원</a:t>
-            </a:r>
-            <a:endParaRPr lang="en-US" sz="1100" dirty="0"/>
-          </a:p>
-        </p:txBody>
-      </p:sp>
-      <p:sp>
-        <p:nvSpPr>
-          <p:cNvPr id="55" name="Shape 53"/>
-          <p:cNvSpPr/>
-          <p:nvPr/>
-        </p:nvSpPr>
-        <p:spPr>
-          <a:xfrm>
-            <a:off x="3634740" y="3346704"/>
-            <a:ext cx="1714500" cy="420624"/>
-          </a:xfrm>
-          <a:prstGeom prst="rect">
-            <a:avLst/>
-          </a:prstGeom>
-          <a:solidFill>
-            <a:srgbClr val="FFFFFF"/>
-          </a:solidFill>
-          <a:ln w="6350">
-            <a:solidFill>
-              <a:srgbClr val="E5E7EB"/>
-            </a:solidFill>
-            <a:prstDash val="solid"/>
-          </a:ln>
-        </p:spPr>
-      </p:sp>
-      <p:sp>
-        <p:nvSpPr>
-          <p:cNvPr id="56" name="Text 54"/>
-          <p:cNvSpPr/>
-          <p:nvPr/>
-        </p:nvSpPr>
-        <p:spPr>
-          <a:xfrm>
-            <a:off x="3634740" y="3346704"/>
-            <a:ext cx="1714500" cy="420624"/>
-          </a:xfrm>
-          <a:prstGeom prst="rect">
-            <a:avLst/>
-          </a:prstGeom>
-          <a:noFill/>
-          <a:ln/>
-        </p:spPr>
-        <p:txBody>
-          <a:bodyPr wrap="square" lIns="0" tIns="0" rIns="0" bIns="0" rtlCol="0" anchor="ctr"/>
-          <a:lstStyle/>
-          <a:p>
-            <a:pPr algn="ctr" indent="0" marL="0">
-              <a:buNone/>
-            </a:pPr>
-            <a:r>
-              <a:rPr lang="en-US" sz="1100" dirty="0">
-                <a:solidFill>
-                  <a:srgbClr val="1E293B"/>
-                </a:solidFill>
-                <a:latin typeface="맑은 고딕" pitchFamily="34" charset="0"/>
-                <a:ea typeface="맑은 고딕" pitchFamily="34" charset="-122"/>
-                <a:cs typeface="맑은 고딕" pitchFamily="34" charset="-120"/>
-              </a:rPr>
-              <a:t>약 72만 원</a:t>
-            </a:r>
-            <a:endParaRPr lang="en-US" sz="1100" dirty="0"/>
-          </a:p>
-        </p:txBody>
-      </p:sp>
-      <p:sp>
-        <p:nvSpPr>
-          <p:cNvPr id="57" name="Shape 55"/>
-          <p:cNvSpPr/>
-          <p:nvPr/>
-        </p:nvSpPr>
-        <p:spPr>
-          <a:xfrm>
-            <a:off x="5349240" y="3346704"/>
-            <a:ext cx="1714500" cy="420624"/>
-          </a:xfrm>
-          <a:prstGeom prst="rect">
-            <a:avLst/>
-          </a:prstGeom>
-          <a:solidFill>
-            <a:srgbClr val="FFFFFF"/>
-          </a:solidFill>
-          <a:ln w="6350">
-            <a:solidFill>
-              <a:srgbClr val="E5E7EB"/>
-            </a:solidFill>
-            <a:prstDash val="solid"/>
-          </a:ln>
-        </p:spPr>
-      </p:sp>
-      <p:sp>
-        <p:nvSpPr>
-          <p:cNvPr id="58" name="Text 56"/>
-          <p:cNvSpPr/>
-          <p:nvPr/>
-        </p:nvSpPr>
-        <p:spPr>
-          <a:xfrm>
-            <a:off x="5349240" y="3346704"/>
-            <a:ext cx="1714500" cy="420624"/>
-          </a:xfrm>
-          <a:prstGeom prst="rect">
-            <a:avLst/>
-          </a:prstGeom>
-          <a:noFill/>
-          <a:ln/>
-        </p:spPr>
-        <p:txBody>
-          <a:bodyPr wrap="square" lIns="0" tIns="0" rIns="0" bIns="0" rtlCol="0" anchor="ctr"/>
-          <a:lstStyle/>
-          <a:p>
-            <a:pPr algn="ctr" indent="0" marL="0">
-              <a:buNone/>
-            </a:pPr>
-            <a:r>
-              <a:rPr lang="en-US" sz="1100" dirty="0">
-                <a:solidFill>
-                  <a:srgbClr val="1E293B"/>
-                </a:solidFill>
-                <a:latin typeface="맑은 고딕" pitchFamily="34" charset="0"/>
-                <a:ea typeface="맑은 고딕" pitchFamily="34" charset="-122"/>
-                <a:cs typeface="맑은 고딕" pitchFamily="34" charset="-120"/>
-              </a:rPr>
-              <a:t>약 96만 원</a:t>
-            </a:r>
-            <a:endParaRPr lang="en-US" sz="1100" dirty="0"/>
-          </a:p>
-        </p:txBody>
-      </p:sp>
-      <p:sp>
-        <p:nvSpPr>
-          <p:cNvPr id="59" name="Shape 57"/>
-          <p:cNvSpPr/>
-          <p:nvPr/>
-        </p:nvSpPr>
-        <p:spPr>
-          <a:xfrm>
-            <a:off x="7063740" y="3346704"/>
-            <a:ext cx="1714500" cy="420624"/>
-          </a:xfrm>
-          <a:prstGeom prst="rect">
-            <a:avLst/>
-          </a:prstGeom>
-          <a:solidFill>
-            <a:srgbClr val="FFFFFF"/>
-          </a:solidFill>
-          <a:ln w="6350">
-            <a:solidFill>
-              <a:srgbClr val="E5E7EB"/>
-            </a:solidFill>
-            <a:prstDash val="solid"/>
-          </a:ln>
-        </p:spPr>
-      </p:sp>
-      <p:sp>
-        <p:nvSpPr>
-          <p:cNvPr id="60" name="Text 58"/>
-          <p:cNvSpPr/>
-          <p:nvPr/>
-        </p:nvSpPr>
-        <p:spPr>
-          <a:xfrm>
-            <a:off x="7063740" y="3346704"/>
-            <a:ext cx="1714500" cy="420624"/>
-          </a:xfrm>
-          <a:prstGeom prst="rect">
-            <a:avLst/>
-          </a:prstGeom>
-          <a:noFill/>
-          <a:ln/>
-        </p:spPr>
-        <p:txBody>
-          <a:bodyPr wrap="square" lIns="0" tIns="0" rIns="0" bIns="0" rtlCol="0" anchor="ctr"/>
-          <a:lstStyle/>
-          <a:p>
-            <a:pPr algn="ctr" indent="0" marL="0">
-              <a:buNone/>
-            </a:pPr>
-            <a:r>
-              <a:rPr lang="en-US" sz="1100" dirty="0">
-                <a:solidFill>
-                  <a:srgbClr val="1E293B"/>
-                </a:solidFill>
-                <a:latin typeface="맑은 고딕" pitchFamily="34" charset="0"/>
-                <a:ea typeface="맑은 고딕" pitchFamily="34" charset="-122"/>
-                <a:cs typeface="맑은 고딕" pitchFamily="34" charset="-120"/>
-              </a:rPr>
-              <a:t>약 120만 원</a:t>
-            </a:r>
-            <a:endParaRPr lang="en-US" sz="1100" dirty="0"/>
-          </a:p>
-        </p:txBody>
-      </p:sp>
-      <p:sp>
-        <p:nvSpPr>
-          <p:cNvPr id="61" name="Shape 59"/>
-          <p:cNvSpPr/>
-          <p:nvPr/>
-        </p:nvSpPr>
-        <p:spPr>
-          <a:xfrm>
-            <a:off x="365760" y="3767328"/>
-            <a:ext cx="1554480" cy="420624"/>
-          </a:xfrm>
-          <a:prstGeom prst="rect">
-            <a:avLst/>
-          </a:prstGeom>
-          <a:solidFill>
-            <a:srgbClr val="F8FAFC"/>
-          </a:solidFill>
-          <a:ln w="6350">
-            <a:solidFill>
-              <a:srgbClr val="E5E7EB"/>
-            </a:solidFill>
-            <a:prstDash val="solid"/>
-          </a:ln>
-        </p:spPr>
-      </p:sp>
-      <p:sp>
-        <p:nvSpPr>
-          <p:cNvPr id="62" name="Text 60"/>
-          <p:cNvSpPr/>
-          <p:nvPr/>
-        </p:nvSpPr>
-        <p:spPr>
-          <a:xfrm>
-            <a:off x="365760" y="3767328"/>
-            <a:ext cx="1554480" cy="420624"/>
-          </a:xfrm>
-          <a:prstGeom prst="rect">
-            <a:avLst/>
-          </a:prstGeom>
-          <a:noFill/>
-          <a:ln/>
-        </p:spPr>
-        <p:txBody>
-          <a:bodyPr wrap="square" lIns="0" tIns="0" rIns="0" bIns="0" rtlCol="0" anchor="ctr"/>
-          <a:lstStyle/>
-          <a:p>
-            <a:pPr algn="ctr" indent="0" marL="0">
-              <a:buNone/>
-            </a:pPr>
-            <a:r>
-              <a:rPr lang="en-US" sz="1100" b="1" dirty="0">
-                <a:solidFill>
-                  <a:srgbClr val="2563EB"/>
-                </a:solidFill>
-                <a:latin typeface="맑은 고딕" pitchFamily="34" charset="0"/>
-                <a:ea typeface="맑은 고딕" pitchFamily="34" charset="-122"/>
-                <a:cs typeface="맑은 고딕" pitchFamily="34" charset="-120"/>
-              </a:rPr>
-              <a:t>10,000건</a:t>
-            </a:r>
-            <a:endParaRPr lang="en-US" sz="1100" dirty="0"/>
-          </a:p>
-        </p:txBody>
-      </p:sp>
-      <p:sp>
-        <p:nvSpPr>
-          <p:cNvPr id="63" name="Shape 61"/>
-          <p:cNvSpPr/>
-          <p:nvPr/>
-        </p:nvSpPr>
-        <p:spPr>
-          <a:xfrm>
-            <a:off x="1920240" y="3767328"/>
-            <a:ext cx="1714500" cy="420624"/>
-          </a:xfrm>
-          <a:prstGeom prst="rect">
-            <a:avLst/>
-          </a:prstGeom>
-          <a:solidFill>
-            <a:srgbClr val="F8FAFC"/>
-          </a:solidFill>
-          <a:ln w="6350">
-            <a:solidFill>
-              <a:srgbClr val="E5E7EB"/>
-            </a:solidFill>
-            <a:prstDash val="solid"/>
-          </a:ln>
-        </p:spPr>
-      </p:sp>
-      <p:sp>
-        <p:nvSpPr>
-          <p:cNvPr id="64" name="Text 62"/>
-          <p:cNvSpPr/>
-          <p:nvPr/>
-        </p:nvSpPr>
-        <p:spPr>
-          <a:xfrm>
-            <a:off x="1920240" y="3767328"/>
-            <a:ext cx="1714500" cy="420624"/>
-          </a:xfrm>
-          <a:prstGeom prst="rect">
-            <a:avLst/>
-          </a:prstGeom>
-          <a:noFill/>
-          <a:ln/>
-        </p:spPr>
-        <p:txBody>
-          <a:bodyPr wrap="square" lIns="0" tIns="0" rIns="0" bIns="0" rtlCol="0" anchor="ctr"/>
-          <a:lstStyle/>
-          <a:p>
-            <a:pPr algn="ctr" indent="0" marL="0">
-              <a:buNone/>
-            </a:pPr>
-            <a:r>
-              <a:rPr lang="en-US" sz="1100" dirty="0">
-                <a:solidFill>
-                  <a:srgbClr val="1E293B"/>
-                </a:solidFill>
-                <a:latin typeface="맑은 고딕" pitchFamily="34" charset="0"/>
-                <a:ea typeface="맑은 고딕" pitchFamily="34" charset="-122"/>
-                <a:cs typeface="맑은 고딕" pitchFamily="34" charset="-120"/>
-              </a:rPr>
-              <a:t>약 285만 원</a:t>
-            </a:r>
-            <a:endParaRPr lang="en-US" sz="1100" dirty="0"/>
-          </a:p>
-        </p:txBody>
-      </p:sp>
-      <p:sp>
-        <p:nvSpPr>
-          <p:cNvPr id="65" name="Shape 63"/>
-          <p:cNvSpPr/>
-          <p:nvPr/>
-        </p:nvSpPr>
-        <p:spPr>
-          <a:xfrm>
-            <a:off x="3634740" y="3767328"/>
-            <a:ext cx="1714500" cy="420624"/>
-          </a:xfrm>
-          <a:prstGeom prst="rect">
-            <a:avLst/>
-          </a:prstGeom>
-          <a:solidFill>
-            <a:srgbClr val="F8FAFC"/>
-          </a:solidFill>
-          <a:ln w="6350">
-            <a:solidFill>
-              <a:srgbClr val="E5E7EB"/>
-            </a:solidFill>
-            <a:prstDash val="solid"/>
-          </a:ln>
-        </p:spPr>
-      </p:sp>
-      <p:sp>
-        <p:nvSpPr>
-          <p:cNvPr id="66" name="Text 64"/>
-          <p:cNvSpPr/>
-          <p:nvPr/>
-        </p:nvSpPr>
-        <p:spPr>
-          <a:xfrm>
-            <a:off x="3634740" y="3767328"/>
-            <a:ext cx="1714500" cy="420624"/>
-          </a:xfrm>
-          <a:prstGeom prst="rect">
-            <a:avLst/>
-          </a:prstGeom>
-          <a:noFill/>
-          <a:ln/>
-        </p:spPr>
-        <p:txBody>
-          <a:bodyPr wrap="square" lIns="0" tIns="0" rIns="0" bIns="0" rtlCol="0" anchor="ctr"/>
-          <a:lstStyle/>
-          <a:p>
-            <a:pPr algn="ctr" indent="0" marL="0">
-              <a:buNone/>
-            </a:pPr>
-            <a:r>
-              <a:rPr lang="en-US" sz="1100" dirty="0">
-                <a:solidFill>
-                  <a:srgbClr val="1E293B"/>
-                </a:solidFill>
-                <a:latin typeface="맑은 고딕" pitchFamily="34" charset="0"/>
-                <a:ea typeface="맑은 고딕" pitchFamily="34" charset="-122"/>
-                <a:cs typeface="맑은 고딕" pitchFamily="34" charset="-120"/>
-              </a:rPr>
-              <a:t>약 360만 원</a:t>
-            </a:r>
-            <a:endParaRPr lang="en-US" sz="1100" dirty="0"/>
-          </a:p>
-        </p:txBody>
-      </p:sp>
-      <p:sp>
-        <p:nvSpPr>
-          <p:cNvPr id="67" name="Shape 65"/>
-          <p:cNvSpPr/>
-          <p:nvPr/>
-        </p:nvSpPr>
-        <p:spPr>
-          <a:xfrm>
-            <a:off x="5349240" y="3767328"/>
-            <a:ext cx="1714500" cy="420624"/>
-          </a:xfrm>
-          <a:prstGeom prst="rect">
-            <a:avLst/>
-          </a:prstGeom>
-          <a:solidFill>
-            <a:srgbClr val="F8FAFC"/>
-          </a:solidFill>
-          <a:ln w="6350">
-            <a:solidFill>
-              <a:srgbClr val="E5E7EB"/>
-            </a:solidFill>
-            <a:prstDash val="solid"/>
-          </a:ln>
-        </p:spPr>
-      </p:sp>
-      <p:sp>
-        <p:nvSpPr>
-          <p:cNvPr id="68" name="Text 66"/>
-          <p:cNvSpPr/>
-          <p:nvPr/>
-        </p:nvSpPr>
-        <p:spPr>
-          <a:xfrm>
-            <a:off x="5349240" y="3767328"/>
-            <a:ext cx="1714500" cy="420624"/>
-          </a:xfrm>
-          <a:prstGeom prst="rect">
-            <a:avLst/>
-          </a:prstGeom>
-          <a:noFill/>
-          <a:ln/>
-        </p:spPr>
-        <p:txBody>
-          <a:bodyPr wrap="square" lIns="0" tIns="0" rIns="0" bIns="0" rtlCol="0" anchor="ctr"/>
-          <a:lstStyle/>
-          <a:p>
-            <a:pPr algn="ctr" indent="0" marL="0">
-              <a:buNone/>
-            </a:pPr>
-            <a:r>
-              <a:rPr lang="en-US" sz="1100" dirty="0">
-                <a:solidFill>
-                  <a:srgbClr val="1E293B"/>
-                </a:solidFill>
-                <a:latin typeface="맑은 고딕" pitchFamily="34" charset="0"/>
-                <a:ea typeface="맑은 고딕" pitchFamily="34" charset="-122"/>
-                <a:cs typeface="맑은 고딕" pitchFamily="34" charset="-120"/>
-              </a:rPr>
-              <a:t>약 480만 원</a:t>
-            </a:r>
-            <a:endParaRPr lang="en-US" sz="1100" dirty="0"/>
-          </a:p>
-        </p:txBody>
-      </p:sp>
-      <p:sp>
-        <p:nvSpPr>
-          <p:cNvPr id="69" name="Shape 67"/>
-          <p:cNvSpPr/>
-          <p:nvPr/>
-        </p:nvSpPr>
-        <p:spPr>
-          <a:xfrm>
-            <a:off x="7063740" y="3767328"/>
-            <a:ext cx="1714500" cy="420624"/>
-          </a:xfrm>
-          <a:prstGeom prst="rect">
-            <a:avLst/>
-          </a:prstGeom>
-          <a:solidFill>
-            <a:srgbClr val="F8FAFC"/>
-          </a:solidFill>
-          <a:ln w="6350">
-            <a:solidFill>
-              <a:srgbClr val="E5E7EB"/>
-            </a:solidFill>
-            <a:prstDash val="solid"/>
-          </a:ln>
-        </p:spPr>
-      </p:sp>
-      <p:sp>
-        <p:nvSpPr>
-          <p:cNvPr id="70" name="Text 68"/>
-          <p:cNvSpPr/>
-          <p:nvPr/>
-        </p:nvSpPr>
-        <p:spPr>
-          <a:xfrm>
-            <a:off x="7063740" y="3767328"/>
-            <a:ext cx="1714500" cy="420624"/>
-          </a:xfrm>
-          <a:prstGeom prst="rect">
-            <a:avLst/>
-          </a:prstGeom>
-          <a:noFill/>
-          <a:ln/>
-        </p:spPr>
-        <p:txBody>
-          <a:bodyPr wrap="square" lIns="0" tIns="0" rIns="0" bIns="0" rtlCol="0" anchor="ctr"/>
-          <a:lstStyle/>
-          <a:p>
-            <a:pPr algn="ctr" indent="0" marL="0">
-              <a:buNone/>
-            </a:pPr>
-            <a:r>
-              <a:rPr lang="en-US" sz="1100" dirty="0">
-                <a:solidFill>
-                  <a:srgbClr val="1E293B"/>
-                </a:solidFill>
-                <a:latin typeface="맑은 고딕" pitchFamily="34" charset="0"/>
-                <a:ea typeface="맑은 고딕" pitchFamily="34" charset="-122"/>
-                <a:cs typeface="맑은 고딕" pitchFamily="34" charset="-120"/>
-              </a:rPr>
-              <a:t>약 600만 원</a:t>
-            </a:r>
-            <a:endParaRPr lang="en-US" sz="1100" dirty="0"/>
-          </a:p>
-        </p:txBody>
-      </p:sp>
-      <p:sp>
-        <p:nvSpPr>
-          <p:cNvPr id="71" name="Shape 69"/>
-          <p:cNvSpPr/>
-          <p:nvPr/>
-        </p:nvSpPr>
-        <p:spPr>
-          <a:xfrm>
-            <a:off x="365760" y="4315968"/>
-            <a:ext cx="8412480" cy="621792"/>
-          </a:xfrm>
-          <a:prstGeom prst="rect">
-            <a:avLst/>
-          </a:prstGeom>
-          <a:solidFill>
-            <a:srgbClr val="EBF5FF"/>
           </a:solidFill>
           <a:ln w="12700">
             <a:solidFill>
@@ -31242,18 +29672,45 @@
             </a:solidFill>
             <a:prstDash val="solid"/>
           </a:ln>
-        </p:spPr>
-      </p:sp>
-      <p:sp>
-        <p:nvSpPr>
-          <p:cNvPr id="72" name="Text 70"/>
-          <p:cNvSpPr/>
-          <p:nvPr/>
-        </p:nvSpPr>
-        <p:spPr>
-          <a:xfrm>
-            <a:off x="457200" y="4370832"/>
-            <a:ext cx="8229600" cy="274320"/>
+          <a:effectLst>
+            <a:outerShdw sx="100000" sy="100000" kx="0" ky="0" algn="bl" rotWithShape="0" blurRad="50800" dist="12700" dir="8100000">
+              <a:srgbClr val="000000">
+                <a:alpha val="8000"/>
+              </a:srgbClr>
+            </a:outerShdw>
+          </a:effectLst>
+        </p:spPr>
+      </p:sp>
+      <p:sp>
+        <p:nvSpPr>
+          <p:cNvPr id="21" name="Shape 19"/>
+          <p:cNvSpPr/>
+          <p:nvPr/>
+        </p:nvSpPr>
+        <p:spPr>
+          <a:xfrm>
+            <a:off x="365760" y="1783080"/>
+            <a:ext cx="2011680" cy="329184"/>
+          </a:xfrm>
+          <a:prstGeom prst="rect">
+            <a:avLst/>
+          </a:prstGeom>
+          <a:solidFill>
+            <a:srgbClr val="2563EB"/>
+          </a:solidFill>
+          <a:ln/>
+        </p:spPr>
+      </p:sp>
+      <p:sp>
+        <p:nvSpPr>
+          <p:cNvPr id="22" name="Text 20"/>
+          <p:cNvSpPr/>
+          <p:nvPr/>
+        </p:nvSpPr>
+        <p:spPr>
+          <a:xfrm>
+            <a:off x="365760" y="1783080"/>
+            <a:ext cx="2011680" cy="329184"/>
           </a:xfrm>
           <a:prstGeom prst="rect">
             <a:avLst/>
@@ -31271,44 +29728,787 @@
             <a:r>
               <a:rPr lang="en-US" sz="1150" b="1" dirty="0">
                 <a:solidFill>
+                  <a:srgbClr val="FFFFFF"/>
+                </a:solidFill>
+                <a:latin typeface="맑은 고딕" pitchFamily="34" charset="0"/>
+                <a:ea typeface="맑은 고딕" pitchFamily="34" charset="-122"/>
+                <a:cs typeface="맑은 고딕" pitchFamily="34" charset="-120"/>
+              </a:rPr>
+              <a:t>화면</a:t>
+            </a:r>
+            <a:endParaRPr lang="en-US" sz="1150" dirty="0"/>
+          </a:p>
+        </p:txBody>
+      </p:sp>
+      <p:sp>
+        <p:nvSpPr>
+          <p:cNvPr id="23" name="Text 21"/>
+          <p:cNvSpPr/>
+          <p:nvPr/>
+        </p:nvSpPr>
+        <p:spPr>
+          <a:xfrm>
+            <a:off x="475488" y="2231136"/>
+            <a:ext cx="1792224" cy="868680"/>
+          </a:xfrm>
+          <a:prstGeom prst="rect">
+            <a:avLst/>
+          </a:prstGeom>
+          <a:noFill/>
+          <a:ln/>
+        </p:spPr>
+        <p:txBody>
+          <a:bodyPr wrap="square" lIns="0" tIns="0" rIns="0" bIns="0" rtlCol="0" anchor="ctr"/>
+          <a:lstStyle/>
+          <a:p>
+            <a:pPr algn="ctr" indent="0" marL="0">
+              <a:lnSpc>
+                <a:spcPct val="130000"/>
+              </a:lnSpc>
+              <a:buNone/>
+            </a:pPr>
+            <a:r>
+              <a:rPr lang="en-US" sz="980" dirty="0">
+                <a:solidFill>
+                  <a:srgbClr val="64748B"/>
+                </a:solidFill>
+                <a:latin typeface="맑은 고딕" pitchFamily="34" charset="0"/>
+                <a:ea typeface="맑은 고딕" pitchFamily="34" charset="-122"/>
+                <a:cs typeface="맑은 고딕" pitchFamily="34" charset="-120"/>
+              </a:rPr>
+              <a:t>문답·결과 웹 화면</a:t>
+            </a:r>
+            <a:endParaRPr lang="en-US" sz="980" dirty="0"/>
+          </a:p>
+          <a:p>
+            <a:pPr algn="ctr" indent="0" marL="0">
+              <a:lnSpc>
+                <a:spcPct val="130000"/>
+              </a:lnSpc>
+              <a:buNone/>
+            </a:pPr>
+            <a:r>
+              <a:rPr lang="en-US" sz="980" dirty="0">
+                <a:solidFill>
+                  <a:srgbClr val="64748B"/>
+                </a:solidFill>
+                <a:latin typeface="맑은 고딕" pitchFamily="34" charset="0"/>
+                <a:ea typeface="맑은 고딕" pitchFamily="34" charset="-122"/>
+                <a:cs typeface="맑은 고딕" pitchFamily="34" charset="-120"/>
+              </a:rPr>
+              <a:t>음성 입력 · 문답 저장</a:t>
+            </a:r>
+            <a:endParaRPr lang="en-US" sz="980" dirty="0"/>
+          </a:p>
+          <a:p>
+            <a:pPr algn="ctr" indent="0" marL="0">
+              <a:lnSpc>
+                <a:spcPct val="130000"/>
+              </a:lnSpc>
+              <a:buNone/>
+            </a:pPr>
+            <a:r>
+              <a:rPr lang="en-US" sz="980" dirty="0">
+                <a:solidFill>
+                  <a:srgbClr val="64748B"/>
+                </a:solidFill>
+                <a:latin typeface="맑은 고딕" pitchFamily="34" charset="0"/>
+                <a:ea typeface="맑은 고딕" pitchFamily="34" charset="-122"/>
+                <a:cs typeface="맑은 고딕" pitchFamily="34" charset="-120"/>
+              </a:rPr>
+              <a:t>Word/PDF 불러와 재평가</a:t>
+            </a:r>
+            <a:endParaRPr lang="en-US" sz="980" dirty="0"/>
+          </a:p>
+        </p:txBody>
+      </p:sp>
+      <p:sp>
+        <p:nvSpPr>
+          <p:cNvPr id="24" name="Shape 22"/>
+          <p:cNvSpPr/>
+          <p:nvPr/>
+        </p:nvSpPr>
+        <p:spPr>
+          <a:xfrm>
+            <a:off x="2551176" y="1783080"/>
+            <a:ext cx="2011680" cy="1417320"/>
+          </a:xfrm>
+          <a:prstGeom prst="rect">
+            <a:avLst/>
+          </a:prstGeom>
+          <a:solidFill>
+            <a:srgbClr val="FFFFFF"/>
+          </a:solidFill>
+          <a:ln w="12700">
+            <a:solidFill>
+              <a:srgbClr val="E5E7EB"/>
+            </a:solidFill>
+            <a:prstDash val="solid"/>
+          </a:ln>
+          <a:effectLst>
+            <a:outerShdw sx="100000" sy="100000" kx="0" ky="0" algn="bl" rotWithShape="0" blurRad="50800" dist="12700" dir="8100000">
+              <a:srgbClr val="000000">
+                <a:alpha val="8000"/>
+              </a:srgbClr>
+            </a:outerShdw>
+          </a:effectLst>
+        </p:spPr>
+      </p:sp>
+      <p:sp>
+        <p:nvSpPr>
+          <p:cNvPr id="25" name="Shape 23"/>
+          <p:cNvSpPr/>
+          <p:nvPr/>
+        </p:nvSpPr>
+        <p:spPr>
+          <a:xfrm>
+            <a:off x="2551176" y="1783080"/>
+            <a:ext cx="2011680" cy="329184"/>
+          </a:xfrm>
+          <a:prstGeom prst="rect">
+            <a:avLst/>
+          </a:prstGeom>
+          <a:solidFill>
+            <a:srgbClr val="2563EB"/>
+          </a:solidFill>
+          <a:ln/>
+        </p:spPr>
+      </p:sp>
+      <p:sp>
+        <p:nvSpPr>
+          <p:cNvPr id="26" name="Text 24"/>
+          <p:cNvSpPr/>
+          <p:nvPr/>
+        </p:nvSpPr>
+        <p:spPr>
+          <a:xfrm>
+            <a:off x="2551176" y="1783080"/>
+            <a:ext cx="2011680" cy="329184"/>
+          </a:xfrm>
+          <a:prstGeom prst="rect">
+            <a:avLst/>
+          </a:prstGeom>
+          <a:noFill/>
+          <a:ln/>
+        </p:spPr>
+        <p:txBody>
+          <a:bodyPr wrap="square" lIns="0" tIns="0" rIns="0" bIns="0" rtlCol="0" anchor="ctr"/>
+          <a:lstStyle/>
+          <a:p>
+            <a:pPr algn="ctr" indent="0" marL="0">
+              <a:buNone/>
+            </a:pPr>
+            <a:r>
+              <a:rPr lang="en-US" sz="1150" b="1" dirty="0">
+                <a:solidFill>
+                  <a:srgbClr val="FFFFFF"/>
+                </a:solidFill>
+                <a:latin typeface="맑은 고딕" pitchFamily="34" charset="0"/>
+                <a:ea typeface="맑은 고딕" pitchFamily="34" charset="-122"/>
+                <a:cs typeface="맑은 고딕" pitchFamily="34" charset="-120"/>
+              </a:rPr>
+              <a:t>평가 엔진</a:t>
+            </a:r>
+            <a:endParaRPr lang="en-US" sz="1150" dirty="0"/>
+          </a:p>
+        </p:txBody>
+      </p:sp>
+      <p:sp>
+        <p:nvSpPr>
+          <p:cNvPr id="27" name="Text 25"/>
+          <p:cNvSpPr/>
+          <p:nvPr/>
+        </p:nvSpPr>
+        <p:spPr>
+          <a:xfrm>
+            <a:off x="2660904" y="2231136"/>
+            <a:ext cx="1792224" cy="868680"/>
+          </a:xfrm>
+          <a:prstGeom prst="rect">
+            <a:avLst/>
+          </a:prstGeom>
+          <a:noFill/>
+          <a:ln/>
+        </p:spPr>
+        <p:txBody>
+          <a:bodyPr wrap="square" lIns="0" tIns="0" rIns="0" bIns="0" rtlCol="0" anchor="ctr"/>
+          <a:lstStyle/>
+          <a:p>
+            <a:pPr algn="ctr" indent="0" marL="0">
+              <a:lnSpc>
+                <a:spcPct val="130000"/>
+              </a:lnSpc>
+              <a:buNone/>
+            </a:pPr>
+            <a:r>
+              <a:rPr lang="en-US" sz="980" dirty="0">
+                <a:solidFill>
+                  <a:srgbClr val="64748B"/>
+                </a:solidFill>
+                <a:latin typeface="맑은 고딕" pitchFamily="34" charset="0"/>
+                <a:ea typeface="맑은 고딕" pitchFamily="34" charset="-122"/>
+                <a:cs typeface="맑은 고딕" pitchFamily="34" charset="-120"/>
+              </a:rPr>
+              <a:t>문답 생성 · 이원 채점</a:t>
+            </a:r>
+            <a:endParaRPr lang="en-US" sz="980" dirty="0"/>
+          </a:p>
+          <a:p>
+            <a:pPr algn="ctr" indent="0" marL="0">
+              <a:lnSpc>
+                <a:spcPct val="130000"/>
+              </a:lnSpc>
+              <a:buNone/>
+            </a:pPr>
+            <a:r>
+              <a:rPr lang="en-US" sz="980" dirty="0">
+                <a:solidFill>
+                  <a:srgbClr val="64748B"/>
+                </a:solidFill>
+                <a:latin typeface="맑은 고딕" pitchFamily="34" charset="0"/>
+                <a:ea typeface="맑은 고딕" pitchFamily="34" charset="-122"/>
+                <a:cs typeface="맑은 고딕" pitchFamily="34" charset="-120"/>
+              </a:rPr>
+              <a:t>명세 추출 · 선례 판정</a:t>
+            </a:r>
+            <a:endParaRPr lang="en-US" sz="980" dirty="0"/>
+          </a:p>
+          <a:p>
+            <a:pPr algn="ctr" indent="0" marL="0">
+              <a:lnSpc>
+                <a:spcPct val="130000"/>
+              </a:lnSpc>
+              <a:buNone/>
+            </a:pPr>
+            <a:r>
+              <a:rPr lang="en-US" sz="980" dirty="0">
+                <a:solidFill>
+                  <a:srgbClr val="64748B"/>
+                </a:solidFill>
+                <a:latin typeface="맑은 고딕" pitchFamily="34" charset="0"/>
+                <a:ea typeface="맑은 고딕" pitchFamily="34" charset="-122"/>
+                <a:cs typeface="맑은 고딕" pitchFamily="34" charset="-120"/>
+              </a:rPr>
+              <a:t>판정 규칙은 문서로 분리</a:t>
+            </a:r>
+            <a:endParaRPr lang="en-US" sz="980" dirty="0"/>
+          </a:p>
+        </p:txBody>
+      </p:sp>
+      <p:sp>
+        <p:nvSpPr>
+          <p:cNvPr id="28" name="Shape 26"/>
+          <p:cNvSpPr/>
+          <p:nvPr/>
+        </p:nvSpPr>
+        <p:spPr>
+          <a:xfrm>
+            <a:off x="4736592" y="1783080"/>
+            <a:ext cx="2011680" cy="1417320"/>
+          </a:xfrm>
+          <a:prstGeom prst="rect">
+            <a:avLst/>
+          </a:prstGeom>
+          <a:solidFill>
+            <a:srgbClr val="FFFFFF"/>
+          </a:solidFill>
+          <a:ln w="12700">
+            <a:solidFill>
+              <a:srgbClr val="E5E7EB"/>
+            </a:solidFill>
+            <a:prstDash val="solid"/>
+          </a:ln>
+          <a:effectLst>
+            <a:outerShdw sx="100000" sy="100000" kx="0" ky="0" algn="bl" rotWithShape="0" blurRad="50800" dist="12700" dir="8100000">
+              <a:srgbClr val="000000">
+                <a:alpha val="8000"/>
+              </a:srgbClr>
+            </a:outerShdw>
+          </a:effectLst>
+        </p:spPr>
+      </p:sp>
+      <p:sp>
+        <p:nvSpPr>
+          <p:cNvPr id="29" name="Shape 27"/>
+          <p:cNvSpPr/>
+          <p:nvPr/>
+        </p:nvSpPr>
+        <p:spPr>
+          <a:xfrm>
+            <a:off x="4736592" y="1783080"/>
+            <a:ext cx="2011680" cy="329184"/>
+          </a:xfrm>
+          <a:prstGeom prst="rect">
+            <a:avLst/>
+          </a:prstGeom>
+          <a:solidFill>
+            <a:srgbClr val="2563EB"/>
+          </a:solidFill>
+          <a:ln/>
+        </p:spPr>
+      </p:sp>
+      <p:sp>
+        <p:nvSpPr>
+          <p:cNvPr id="30" name="Text 28"/>
+          <p:cNvSpPr/>
+          <p:nvPr/>
+        </p:nvSpPr>
+        <p:spPr>
+          <a:xfrm>
+            <a:off x="4736592" y="1783080"/>
+            <a:ext cx="2011680" cy="329184"/>
+          </a:xfrm>
+          <a:prstGeom prst="rect">
+            <a:avLst/>
+          </a:prstGeom>
+          <a:noFill/>
+          <a:ln/>
+        </p:spPr>
+        <p:txBody>
+          <a:bodyPr wrap="square" lIns="0" tIns="0" rIns="0" bIns="0" rtlCol="0" anchor="ctr"/>
+          <a:lstStyle/>
+          <a:p>
+            <a:pPr algn="ctr" indent="0" marL="0">
+              <a:buNone/>
+            </a:pPr>
+            <a:r>
+              <a:rPr lang="en-US" sz="1150" b="1" dirty="0">
+                <a:solidFill>
+                  <a:srgbClr val="FFFFFF"/>
+                </a:solidFill>
+                <a:latin typeface="맑은 고딕" pitchFamily="34" charset="0"/>
+                <a:ea typeface="맑은 고딕" pitchFamily="34" charset="-122"/>
+                <a:cs typeface="맑은 고딕" pitchFamily="34" charset="-120"/>
+              </a:rPr>
+              <a:t>데이터</a:t>
+            </a:r>
+            <a:endParaRPr lang="en-US" sz="1150" dirty="0"/>
+          </a:p>
+        </p:txBody>
+      </p:sp>
+      <p:sp>
+        <p:nvSpPr>
+          <p:cNvPr id="31" name="Text 29"/>
+          <p:cNvSpPr/>
+          <p:nvPr/>
+        </p:nvSpPr>
+        <p:spPr>
+          <a:xfrm>
+            <a:off x="4846320" y="2231136"/>
+            <a:ext cx="1792224" cy="868680"/>
+          </a:xfrm>
+          <a:prstGeom prst="rect">
+            <a:avLst/>
+          </a:prstGeom>
+          <a:noFill/>
+          <a:ln/>
+        </p:spPr>
+        <p:txBody>
+          <a:bodyPr wrap="square" lIns="0" tIns="0" rIns="0" bIns="0" rtlCol="0" anchor="ctr"/>
+          <a:lstStyle/>
+          <a:p>
+            <a:pPr algn="ctr" indent="0" marL="0">
+              <a:lnSpc>
+                <a:spcPct val="130000"/>
+              </a:lnSpc>
+              <a:buNone/>
+            </a:pPr>
+            <a:r>
+              <a:rPr lang="en-US" sz="980" dirty="0">
+                <a:solidFill>
+                  <a:srgbClr val="64748B"/>
+                </a:solidFill>
+                <a:latin typeface="맑은 고딕" pitchFamily="34" charset="0"/>
+                <a:ea typeface="맑은 고딕" pitchFamily="34" charset="-122"/>
+                <a:cs typeface="맑은 고딕" pitchFamily="34" charset="-120"/>
+              </a:rPr>
+              <a:t>KDI 발간물 7,362건</a:t>
+            </a:r>
+            <a:endParaRPr lang="en-US" sz="980" dirty="0"/>
+          </a:p>
+          <a:p>
+            <a:pPr algn="ctr" indent="0" marL="0">
+              <a:lnSpc>
+                <a:spcPct val="130000"/>
+              </a:lnSpc>
+              <a:buNone/>
+            </a:pPr>
+            <a:r>
+              <a:rPr lang="en-US" sz="980" dirty="0">
+                <a:solidFill>
+                  <a:srgbClr val="64748B"/>
+                </a:solidFill>
+                <a:latin typeface="맑은 고딕" pitchFamily="34" charset="0"/>
+                <a:ea typeface="맑은 고딕" pitchFamily="34" charset="-122"/>
+                <a:cs typeface="맑은 고딕" pitchFamily="34" charset="-120"/>
+              </a:rPr>
+              <a:t>OPSI 1,015건 (로컬)</a:t>
+            </a:r>
+            <a:endParaRPr lang="en-US" sz="980" dirty="0"/>
+          </a:p>
+          <a:p>
+            <a:pPr algn="ctr" indent="0" marL="0">
+              <a:lnSpc>
+                <a:spcPct val="130000"/>
+              </a:lnSpc>
+              <a:buNone/>
+            </a:pPr>
+            <a:r>
+              <a:rPr lang="en-US" sz="980" dirty="0">
+                <a:solidFill>
+                  <a:srgbClr val="64748B"/>
+                </a:solidFill>
+                <a:latin typeface="맑은 고딕" pitchFamily="34" charset="0"/>
+                <a:ea typeface="맑은 고딕" pitchFamily="34" charset="-122"/>
+                <a:cs typeface="맑은 고딕" pitchFamily="34" charset="-120"/>
+              </a:rPr>
+              <a:t>재정 · 국회 의안 (조회)</a:t>
+            </a:r>
+            <a:endParaRPr lang="en-US" sz="980" dirty="0"/>
+          </a:p>
+        </p:txBody>
+      </p:sp>
+      <p:sp>
+        <p:nvSpPr>
+          <p:cNvPr id="32" name="Shape 30"/>
+          <p:cNvSpPr/>
+          <p:nvPr/>
+        </p:nvSpPr>
+        <p:spPr>
+          <a:xfrm>
+            <a:off x="6922008" y="1783080"/>
+            <a:ext cx="2011680" cy="1417320"/>
+          </a:xfrm>
+          <a:prstGeom prst="rect">
+            <a:avLst/>
+          </a:prstGeom>
+          <a:solidFill>
+            <a:srgbClr val="FFFFFF"/>
+          </a:solidFill>
+          <a:ln w="12700">
+            <a:solidFill>
+              <a:srgbClr val="E5E7EB"/>
+            </a:solidFill>
+            <a:prstDash val="solid"/>
+          </a:ln>
+          <a:effectLst>
+            <a:outerShdw sx="100000" sy="100000" kx="0" ky="0" algn="bl" rotWithShape="0" blurRad="50800" dist="12700" dir="8100000">
+              <a:srgbClr val="000000">
+                <a:alpha val="8000"/>
+              </a:srgbClr>
+            </a:outerShdw>
+          </a:effectLst>
+        </p:spPr>
+      </p:sp>
+      <p:sp>
+        <p:nvSpPr>
+          <p:cNvPr id="33" name="Shape 31"/>
+          <p:cNvSpPr/>
+          <p:nvPr/>
+        </p:nvSpPr>
+        <p:spPr>
+          <a:xfrm>
+            <a:off x="6922008" y="1783080"/>
+            <a:ext cx="2011680" cy="329184"/>
+          </a:xfrm>
+          <a:prstGeom prst="rect">
+            <a:avLst/>
+          </a:prstGeom>
+          <a:solidFill>
+            <a:srgbClr val="2563EB"/>
+          </a:solidFill>
+          <a:ln/>
+        </p:spPr>
+      </p:sp>
+      <p:sp>
+        <p:nvSpPr>
+          <p:cNvPr id="34" name="Text 32"/>
+          <p:cNvSpPr/>
+          <p:nvPr/>
+        </p:nvSpPr>
+        <p:spPr>
+          <a:xfrm>
+            <a:off x="6922008" y="1783080"/>
+            <a:ext cx="2011680" cy="329184"/>
+          </a:xfrm>
+          <a:prstGeom prst="rect">
+            <a:avLst/>
+          </a:prstGeom>
+          <a:noFill/>
+          <a:ln/>
+        </p:spPr>
+        <p:txBody>
+          <a:bodyPr wrap="square" lIns="0" tIns="0" rIns="0" bIns="0" rtlCol="0" anchor="ctr"/>
+          <a:lstStyle/>
+          <a:p>
+            <a:pPr algn="ctr" indent="0" marL="0">
+              <a:buNone/>
+            </a:pPr>
+            <a:r>
+              <a:rPr lang="en-US" sz="1150" b="1" dirty="0">
+                <a:solidFill>
+                  <a:srgbClr val="FFFFFF"/>
+                </a:solidFill>
+                <a:latin typeface="맑은 고딕" pitchFamily="34" charset="0"/>
+                <a:ea typeface="맑은 고딕" pitchFamily="34" charset="-122"/>
+                <a:cs typeface="맑은 고딕" pitchFamily="34" charset="-120"/>
+              </a:rPr>
+              <a:t>배포</a:t>
+            </a:r>
+            <a:endParaRPr lang="en-US" sz="1150" dirty="0"/>
+          </a:p>
+        </p:txBody>
+      </p:sp>
+      <p:sp>
+        <p:nvSpPr>
+          <p:cNvPr id="35" name="Text 33"/>
+          <p:cNvSpPr/>
+          <p:nvPr/>
+        </p:nvSpPr>
+        <p:spPr>
+          <a:xfrm>
+            <a:off x="7031736" y="2231136"/>
+            <a:ext cx="1792224" cy="868680"/>
+          </a:xfrm>
+          <a:prstGeom prst="rect">
+            <a:avLst/>
+          </a:prstGeom>
+          <a:noFill/>
+          <a:ln/>
+        </p:spPr>
+        <p:txBody>
+          <a:bodyPr wrap="square" lIns="0" tIns="0" rIns="0" bIns="0" rtlCol="0" anchor="ctr"/>
+          <a:lstStyle/>
+          <a:p>
+            <a:pPr algn="ctr" indent="0" marL="0">
+              <a:lnSpc>
+                <a:spcPct val="130000"/>
+              </a:lnSpc>
+              <a:buNone/>
+            </a:pPr>
+            <a:r>
+              <a:rPr lang="en-US" sz="980" dirty="0">
+                <a:solidFill>
+                  <a:srgbClr val="64748B"/>
+                </a:solidFill>
+                <a:latin typeface="맑은 고딕" pitchFamily="34" charset="0"/>
+                <a:ea typeface="맑은 고딕" pitchFamily="34" charset="-122"/>
+                <a:cs typeface="맑은 고딕" pitchFamily="34" charset="-120"/>
+              </a:rPr>
+              <a:t>연구용 · 공개용 2종</a:t>
+            </a:r>
+            <a:endParaRPr lang="en-US" sz="980" dirty="0"/>
+          </a:p>
+          <a:p>
+            <a:pPr algn="ctr" indent="0" marL="0">
+              <a:lnSpc>
+                <a:spcPct val="130000"/>
+              </a:lnSpc>
+              <a:buNone/>
+            </a:pPr>
+            <a:r>
+              <a:rPr lang="en-US" sz="980" dirty="0">
+                <a:solidFill>
+                  <a:srgbClr val="64748B"/>
+                </a:solidFill>
+                <a:latin typeface="맑은 고딕" pitchFamily="34" charset="0"/>
+                <a:ea typeface="맑은 고딕" pitchFamily="34" charset="-122"/>
+                <a:cs typeface="맑은 고딕" pitchFamily="34" charset="-120"/>
+              </a:rPr>
+              <a:t>초대 코드 접근 통제</a:t>
+            </a:r>
+            <a:endParaRPr lang="en-US" sz="980" dirty="0"/>
+          </a:p>
+          <a:p>
+            <a:pPr algn="ctr" indent="0" marL="0">
+              <a:lnSpc>
+                <a:spcPct val="130000"/>
+              </a:lnSpc>
+              <a:buNone/>
+            </a:pPr>
+            <a:r>
+              <a:rPr lang="en-US" sz="980" dirty="0">
+                <a:solidFill>
+                  <a:srgbClr val="64748B"/>
+                </a:solidFill>
+                <a:latin typeface="맑은 고딕" pitchFamily="34" charset="0"/>
+                <a:ea typeface="맑은 고딕" pitchFamily="34" charset="-122"/>
+                <a:cs typeface="맑은 고딕" pitchFamily="34" charset="-120"/>
+              </a:rPr>
+              <a:t>키는 서버에 미보관</a:t>
+            </a:r>
+            <a:endParaRPr lang="en-US" sz="980" dirty="0"/>
+          </a:p>
+        </p:txBody>
+      </p:sp>
+      <p:sp>
+        <p:nvSpPr>
+          <p:cNvPr id="36" name="Shape 34"/>
+          <p:cNvSpPr/>
+          <p:nvPr/>
+        </p:nvSpPr>
+        <p:spPr>
+          <a:xfrm>
+            <a:off x="365760" y="3337560"/>
+            <a:ext cx="8412480" cy="1572768"/>
+          </a:xfrm>
+          <a:prstGeom prst="rect">
+            <a:avLst/>
+          </a:prstGeom>
+          <a:solidFill>
+            <a:srgbClr val="F8FAFC"/>
+          </a:solidFill>
+          <a:ln w="12700">
+            <a:solidFill>
+              <a:srgbClr val="E5E7EB"/>
+            </a:solidFill>
+            <a:prstDash val="solid"/>
+          </a:ln>
+        </p:spPr>
+      </p:sp>
+      <p:sp>
+        <p:nvSpPr>
+          <p:cNvPr id="37" name="Text 35"/>
+          <p:cNvSpPr/>
+          <p:nvPr/>
+        </p:nvSpPr>
+        <p:spPr>
+          <a:xfrm>
+            <a:off x="566928" y="3438144"/>
+            <a:ext cx="3657600" cy="256032"/>
+          </a:xfrm>
+          <a:prstGeom prst="rect">
+            <a:avLst/>
+          </a:prstGeom>
+          <a:noFill/>
+          <a:ln/>
+        </p:spPr>
+        <p:txBody>
+          <a:bodyPr wrap="square" lIns="0" tIns="0" rIns="0" bIns="0" rtlCol="0" anchor="ctr"/>
+          <a:lstStyle/>
+          <a:p>
+            <a:pPr indent="0" marL="0">
+              <a:buNone/>
+            </a:pPr>
+            <a:r>
+              <a:rPr lang="en-US" sz="1250" b="1" dirty="0">
+                <a:solidFill>
                   <a:srgbClr val="2563EB"/>
                 </a:solidFill>
                 <a:latin typeface="맑은 고딕" pitchFamily="34" charset="0"/>
                 <a:ea typeface="맑은 고딕" pitchFamily="34" charset="-122"/>
                 <a:cs typeface="맑은 고딕" pitchFamily="34" charset="-120"/>
               </a:rPr>
-              <a:t>월 1,000건을 표준 모델로 처리할 경우 약 29만~36만 원 — 담당자 1인 검토시간과 비교 가능한 수준</a:t>
-            </a:r>
-            <a:endParaRPr lang="en-US" sz="1150" dirty="0"/>
-          </a:p>
-        </p:txBody>
-      </p:sp>
-      <p:sp>
-        <p:nvSpPr>
-          <p:cNvPr id="73" name="Text 71"/>
-          <p:cNvSpPr/>
-          <p:nvPr/>
-        </p:nvSpPr>
-        <p:spPr>
-          <a:xfrm>
-            <a:off x="457200" y="4645152"/>
-            <a:ext cx="8229600" cy="237744"/>
-          </a:xfrm>
-          <a:prstGeom prst="rect">
-            <a:avLst/>
-          </a:prstGeom>
-          <a:noFill/>
-          <a:ln/>
-        </p:spPr>
-        <p:txBody>
-          <a:bodyPr wrap="square" lIns="0" tIns="0" rIns="0" bIns="0" rtlCol="0" anchor="ctr"/>
-          <a:lstStyle/>
-          <a:p>
-            <a:pPr algn="ctr" indent="0" marL="0">
-              <a:buNone/>
-            </a:pPr>
-            <a:r>
-              <a:rPr lang="en-US" sz="950" dirty="0">
+              <a:t>데이터 확보에서 지킨 원칙</a:t>
+            </a:r>
+            <a:endParaRPr lang="en-US" sz="1250" dirty="0"/>
+          </a:p>
+        </p:txBody>
+      </p:sp>
+      <p:sp>
+        <p:nvSpPr>
+          <p:cNvPr id="38" name="Text 36"/>
+          <p:cNvSpPr/>
+          <p:nvPr/>
+        </p:nvSpPr>
+        <p:spPr>
+          <a:xfrm>
+            <a:off x="603504" y="3776472"/>
+            <a:ext cx="137160" cy="310896"/>
+          </a:xfrm>
+          <a:prstGeom prst="rect">
+            <a:avLst/>
+          </a:prstGeom>
+          <a:noFill/>
+          <a:ln/>
+        </p:spPr>
+        <p:txBody>
+          <a:bodyPr wrap="square" lIns="0" tIns="0" rIns="0" bIns="0" rtlCol="0" anchor="ctr"/>
+          <a:lstStyle/>
+          <a:p>
+            <a:pPr indent="0" marL="0">
+              <a:buNone/>
+            </a:pPr>
+            <a:r>
+              <a:rPr lang="en-US" sz="1100" dirty="0">
+                <a:solidFill>
+                  <a:srgbClr val="2563EB"/>
+                </a:solidFill>
+                <a:latin typeface="맑은 고딕" pitchFamily="34" charset="0"/>
+                <a:ea typeface="맑은 고딕" pitchFamily="34" charset="-122"/>
+                <a:cs typeface="맑은 고딕" pitchFamily="34" charset="-120"/>
+              </a:rPr>
+              <a:t>•</a:t>
+            </a:r>
+            <a:endParaRPr lang="en-US" sz="1100" dirty="0"/>
+          </a:p>
+        </p:txBody>
+      </p:sp>
+      <p:sp>
+        <p:nvSpPr>
+          <p:cNvPr id="39" name="Text 37"/>
+          <p:cNvSpPr/>
+          <p:nvPr/>
+        </p:nvSpPr>
+        <p:spPr>
+          <a:xfrm>
+            <a:off x="768096" y="3776472"/>
+            <a:ext cx="2651760" cy="310896"/>
+          </a:xfrm>
+          <a:prstGeom prst="rect">
+            <a:avLst/>
+          </a:prstGeom>
+          <a:noFill/>
+          <a:ln/>
+        </p:spPr>
+        <p:txBody>
+          <a:bodyPr wrap="square" lIns="0" tIns="0" rIns="0" bIns="0" rtlCol="0" anchor="ctr"/>
+          <a:lstStyle/>
+          <a:p>
+            <a:pPr indent="0" marL="0">
+              <a:buNone/>
+            </a:pPr>
+            <a:r>
+              <a:rPr lang="en-US" sz="1080" b="1" dirty="0">
+                <a:solidFill>
+                  <a:srgbClr val="1E293B"/>
+                </a:solidFill>
+                <a:latin typeface="맑은 고딕" pitchFamily="34" charset="0"/>
+                <a:ea typeface="맑은 고딕" pitchFamily="34" charset="-122"/>
+                <a:cs typeface="맑은 고딕" pitchFamily="34" charset="-120"/>
+              </a:rPr>
+              <a:t>불안정한 소스는 끈다</a:t>
+            </a:r>
+            <a:endParaRPr lang="en-US" sz="1080" dirty="0"/>
+          </a:p>
+        </p:txBody>
+      </p:sp>
+      <p:sp>
+        <p:nvSpPr>
+          <p:cNvPr id="40" name="Text 38"/>
+          <p:cNvSpPr/>
+          <p:nvPr/>
+        </p:nvSpPr>
+        <p:spPr>
+          <a:xfrm>
+            <a:off x="3474720" y="3776472"/>
+            <a:ext cx="5166360" cy="310896"/>
+          </a:xfrm>
+          <a:prstGeom prst="rect">
+            <a:avLst/>
+          </a:prstGeom>
+          <a:noFill/>
+          <a:ln/>
+        </p:spPr>
+        <p:txBody>
+          <a:bodyPr wrap="square" lIns="0" tIns="0" rIns="0" bIns="0" rtlCol="0" anchor="ctr"/>
+          <a:lstStyle/>
+          <a:p>
+            <a:pPr indent="0" marL="0">
+              <a:buNone/>
+            </a:pPr>
+            <a:r>
+              <a:rPr lang="en-US" sz="1050" dirty="0">
                 <a:solidFill>
                   <a:srgbClr val="64748B"/>
                 </a:solidFill>
@@ -31316,9 +30516,243 @@
                 <a:ea typeface="맑은 고딕" pitchFamily="34" charset="-122"/>
                 <a:cs typeface="맑은 고딕" pitchFamily="34" charset="-120"/>
               </a:rPr>
-              <a:t>※ 대화 길이(단문/장문)에 따라 변동하며, 반복되는 지시문은 캐싱으로 절감됩니다</a:t>
-            </a:r>
-            <a:endParaRPr lang="en-US" sz="950" dirty="0"/>
+              <a:t>외부 연구정보 API가 응답을 보장하지 못해 중단하고, 로컬 코퍼스로 대체</a:t>
+            </a:r>
+            <a:endParaRPr lang="en-US" sz="1050" dirty="0"/>
+          </a:p>
+        </p:txBody>
+      </p:sp>
+      <p:sp>
+        <p:nvSpPr>
+          <p:cNvPr id="41" name="Text 39"/>
+          <p:cNvSpPr/>
+          <p:nvPr/>
+        </p:nvSpPr>
+        <p:spPr>
+          <a:xfrm>
+            <a:off x="603504" y="4142232"/>
+            <a:ext cx="137160" cy="310896"/>
+          </a:xfrm>
+          <a:prstGeom prst="rect">
+            <a:avLst/>
+          </a:prstGeom>
+          <a:noFill/>
+          <a:ln/>
+        </p:spPr>
+        <p:txBody>
+          <a:bodyPr wrap="square" lIns="0" tIns="0" rIns="0" bIns="0" rtlCol="0" anchor="ctr"/>
+          <a:lstStyle/>
+          <a:p>
+            <a:pPr indent="0" marL="0">
+              <a:buNone/>
+            </a:pPr>
+            <a:r>
+              <a:rPr lang="en-US" sz="1100" dirty="0">
+                <a:solidFill>
+                  <a:srgbClr val="2563EB"/>
+                </a:solidFill>
+                <a:latin typeface="맑은 고딕" pitchFamily="34" charset="0"/>
+                <a:ea typeface="맑은 고딕" pitchFamily="34" charset="-122"/>
+                <a:cs typeface="맑은 고딕" pitchFamily="34" charset="-120"/>
+              </a:rPr>
+              <a:t>•</a:t>
+            </a:r>
+            <a:endParaRPr lang="en-US" sz="1100" dirty="0"/>
+          </a:p>
+        </p:txBody>
+      </p:sp>
+      <p:sp>
+        <p:nvSpPr>
+          <p:cNvPr id="42" name="Text 40"/>
+          <p:cNvSpPr/>
+          <p:nvPr/>
+        </p:nvSpPr>
+        <p:spPr>
+          <a:xfrm>
+            <a:off x="768096" y="4142232"/>
+            <a:ext cx="2651760" cy="310896"/>
+          </a:xfrm>
+          <a:prstGeom prst="rect">
+            <a:avLst/>
+          </a:prstGeom>
+          <a:noFill/>
+          <a:ln/>
+        </p:spPr>
+        <p:txBody>
+          <a:bodyPr wrap="square" lIns="0" tIns="0" rIns="0" bIns="0" rtlCol="0" anchor="ctr"/>
+          <a:lstStyle/>
+          <a:p>
+            <a:pPr indent="0" marL="0">
+              <a:buNone/>
+            </a:pPr>
+            <a:r>
+              <a:rPr lang="en-US" sz="1080" b="1" dirty="0">
+                <a:solidFill>
+                  <a:srgbClr val="1E293B"/>
+                </a:solidFill>
+                <a:latin typeface="맑은 고딕" pitchFamily="34" charset="0"/>
+                <a:ea typeface="맑은 고딕" pitchFamily="34" charset="-122"/>
+                <a:cs typeface="맑은 고딕" pitchFamily="34" charset="-120"/>
+              </a:rPr>
+              <a:t>우회하지 않는다</a:t>
+            </a:r>
+            <a:endParaRPr lang="en-US" sz="1080" dirty="0"/>
+          </a:p>
+        </p:txBody>
+      </p:sp>
+      <p:sp>
+        <p:nvSpPr>
+          <p:cNvPr id="43" name="Text 41"/>
+          <p:cNvSpPr/>
+          <p:nvPr/>
+        </p:nvSpPr>
+        <p:spPr>
+          <a:xfrm>
+            <a:off x="3474720" y="4142232"/>
+            <a:ext cx="5166360" cy="310896"/>
+          </a:xfrm>
+          <a:prstGeom prst="rect">
+            <a:avLst/>
+          </a:prstGeom>
+          <a:noFill/>
+          <a:ln/>
+        </p:spPr>
+        <p:txBody>
+          <a:bodyPr wrap="square" lIns="0" tIns="0" rIns="0" bIns="0" rtlCol="0" anchor="ctr"/>
+          <a:lstStyle/>
+          <a:p>
+            <a:pPr indent="0" marL="0">
+              <a:buNone/>
+            </a:pPr>
+            <a:r>
+              <a:rPr lang="en-US" sz="1050" dirty="0">
+                <a:solidFill>
+                  <a:srgbClr val="64748B"/>
+                </a:solidFill>
+                <a:latin typeface="맑은 고딕" pitchFamily="34" charset="0"/>
+                <a:ea typeface="맑은 고딕" pitchFamily="34" charset="-122"/>
+                <a:cs typeface="맑은 고딕" pitchFamily="34" charset="-120"/>
+              </a:rPr>
+              <a:t>해외 사이트의 자동 수집 차단을 기술적으로 우회하지 않고, 공개 자료를 정리해 구축</a:t>
+            </a:r>
+            <a:endParaRPr lang="en-US" sz="1050" dirty="0"/>
+          </a:p>
+        </p:txBody>
+      </p:sp>
+      <p:sp>
+        <p:nvSpPr>
+          <p:cNvPr id="44" name="Text 42"/>
+          <p:cNvSpPr/>
+          <p:nvPr/>
+        </p:nvSpPr>
+        <p:spPr>
+          <a:xfrm>
+            <a:off x="603504" y="4507992"/>
+            <a:ext cx="137160" cy="310896"/>
+          </a:xfrm>
+          <a:prstGeom prst="rect">
+            <a:avLst/>
+          </a:prstGeom>
+          <a:noFill/>
+          <a:ln/>
+        </p:spPr>
+        <p:txBody>
+          <a:bodyPr wrap="square" lIns="0" tIns="0" rIns="0" bIns="0" rtlCol="0" anchor="ctr"/>
+          <a:lstStyle/>
+          <a:p>
+            <a:pPr indent="0" marL="0">
+              <a:buNone/>
+            </a:pPr>
+            <a:r>
+              <a:rPr lang="en-US" sz="1100" dirty="0">
+                <a:solidFill>
+                  <a:srgbClr val="2563EB"/>
+                </a:solidFill>
+                <a:latin typeface="맑은 고딕" pitchFamily="34" charset="0"/>
+                <a:ea typeface="맑은 고딕" pitchFamily="34" charset="-122"/>
+                <a:cs typeface="맑은 고딕" pitchFamily="34" charset="-120"/>
+              </a:rPr>
+              <a:t>•</a:t>
+            </a:r>
+            <a:endParaRPr lang="en-US" sz="1100" dirty="0"/>
+          </a:p>
+        </p:txBody>
+      </p:sp>
+      <p:sp>
+        <p:nvSpPr>
+          <p:cNvPr id="45" name="Text 43"/>
+          <p:cNvSpPr/>
+          <p:nvPr/>
+        </p:nvSpPr>
+        <p:spPr>
+          <a:xfrm>
+            <a:off x="768096" y="4507992"/>
+            <a:ext cx="2651760" cy="310896"/>
+          </a:xfrm>
+          <a:prstGeom prst="rect">
+            <a:avLst/>
+          </a:prstGeom>
+          <a:noFill/>
+          <a:ln/>
+        </p:spPr>
+        <p:txBody>
+          <a:bodyPr wrap="square" lIns="0" tIns="0" rIns="0" bIns="0" rtlCol="0" anchor="ctr"/>
+          <a:lstStyle/>
+          <a:p>
+            <a:pPr indent="0" marL="0">
+              <a:buNone/>
+            </a:pPr>
+            <a:r>
+              <a:rPr lang="en-US" sz="1080" b="1" dirty="0">
+                <a:solidFill>
+                  <a:srgbClr val="1E293B"/>
+                </a:solidFill>
+                <a:latin typeface="맑은 고딕" pitchFamily="34" charset="0"/>
+                <a:ea typeface="맑은 고딕" pitchFamily="34" charset="-122"/>
+                <a:cs typeface="맑은 고딕" pitchFamily="34" charset="-120"/>
+              </a:rPr>
+              <a:t>외국 상용 서비스에 의존하지 않는다</a:t>
+            </a:r>
+            <a:endParaRPr lang="en-US" sz="1080" dirty="0"/>
+          </a:p>
+        </p:txBody>
+      </p:sp>
+      <p:sp>
+        <p:nvSpPr>
+          <p:cNvPr id="46" name="Text 44"/>
+          <p:cNvSpPr/>
+          <p:nvPr/>
+        </p:nvSpPr>
+        <p:spPr>
+          <a:xfrm>
+            <a:off x="3474720" y="4507992"/>
+            <a:ext cx="5166360" cy="310896"/>
+          </a:xfrm>
+          <a:prstGeom prst="rect">
+            <a:avLst/>
+          </a:prstGeom>
+          <a:noFill/>
+          <a:ln/>
+        </p:spPr>
+        <p:txBody>
+          <a:bodyPr wrap="square" lIns="0" tIns="0" rIns="0" bIns="0" rtlCol="0" anchor="ctr"/>
+          <a:lstStyle/>
+          <a:p>
+            <a:pPr indent="0" marL="0">
+              <a:buNone/>
+            </a:pPr>
+            <a:r>
+              <a:rPr lang="en-US" sz="1050" dirty="0">
+                <a:solidFill>
+                  <a:srgbClr val="64748B"/>
+                </a:solidFill>
+                <a:latin typeface="맑은 고딕" pitchFamily="34" charset="0"/>
+                <a:ea typeface="맑은 고딕" pitchFamily="34" charset="-122"/>
+                <a:cs typeface="맑은 고딕" pitchFamily="34" charset="-120"/>
+              </a:rPr>
+              <a:t>유료 해외 정책DB 대신 OECD 공개 사례로 코퍼스를 자체 확보</a:t>
+            </a:r>
+            <a:endParaRPr lang="en-US" sz="1050" dirty="0"/>
           </a:p>
         </p:txBody>
       </p:sp>
@@ -31439,7 +30873,2354 @@
                 <a:ea typeface="맑은 고딕" pitchFamily="34" charset="-122"/>
                 <a:cs typeface="맑은 고딕" pitchFamily="34" charset="-120"/>
               </a:rPr>
-              <a:t>26 / 27</a:t>
+              <a:t>26 / 28</a:t>
+            </a:r>
+            <a:endParaRPr lang="en-US" sz="1100" dirty="0"/>
+          </a:p>
+        </p:txBody>
+      </p:sp>
+      <p:sp>
+        <p:nvSpPr>
+          <p:cNvPr id="5" name="Shape 3"/>
+          <p:cNvSpPr/>
+          <p:nvPr/>
+        </p:nvSpPr>
+        <p:spPr>
+          <a:xfrm>
+            <a:off x="0" y="502920"/>
+            <a:ext cx="1524000" cy="320040"/>
+          </a:xfrm>
+          <a:prstGeom prst="rect">
+            <a:avLst/>
+          </a:prstGeom>
+          <a:solidFill>
+            <a:srgbClr val="F1F5F9"/>
+          </a:solidFill>
+          <a:ln w="6350">
+            <a:solidFill>
+              <a:srgbClr val="E5E7EB"/>
+            </a:solidFill>
+            <a:prstDash val="solid"/>
+          </a:ln>
+        </p:spPr>
+      </p:sp>
+      <p:sp>
+        <p:nvSpPr>
+          <p:cNvPr id="6" name="Text 4"/>
+          <p:cNvSpPr/>
+          <p:nvPr/>
+        </p:nvSpPr>
+        <p:spPr>
+          <a:xfrm>
+            <a:off x="0" y="502920"/>
+            <a:ext cx="1524000" cy="320040"/>
+          </a:xfrm>
+          <a:prstGeom prst="rect">
+            <a:avLst/>
+          </a:prstGeom>
+          <a:noFill/>
+          <a:ln/>
+        </p:spPr>
+        <p:txBody>
+          <a:bodyPr wrap="square" lIns="0" tIns="0" rIns="0" bIns="0" rtlCol="0" anchor="ctr"/>
+          <a:lstStyle/>
+          <a:p>
+            <a:pPr algn="ctr" indent="0" marL="0">
+              <a:buNone/>
+            </a:pPr>
+            <a:r>
+              <a:rPr lang="en-US" sz="950" dirty="0">
+                <a:solidFill>
+                  <a:srgbClr val="64748B"/>
+                </a:solidFill>
+                <a:latin typeface="맑은 고딕" pitchFamily="34" charset="0"/>
+                <a:ea typeface="맑은 고딕" pitchFamily="34" charset="-122"/>
+                <a:cs typeface="맑은 고딕" pitchFamily="34" charset="-120"/>
+              </a:rPr>
+              <a:t>개요</a:t>
+            </a:r>
+            <a:endParaRPr lang="en-US" sz="950" dirty="0"/>
+          </a:p>
+        </p:txBody>
+      </p:sp>
+      <p:sp>
+        <p:nvSpPr>
+          <p:cNvPr id="7" name="Shape 5"/>
+          <p:cNvSpPr/>
+          <p:nvPr/>
+        </p:nvSpPr>
+        <p:spPr>
+          <a:xfrm>
+            <a:off x="1524000" y="502920"/>
+            <a:ext cx="1524000" cy="320040"/>
+          </a:xfrm>
+          <a:prstGeom prst="rect">
+            <a:avLst/>
+          </a:prstGeom>
+          <a:solidFill>
+            <a:srgbClr val="F1F5F9"/>
+          </a:solidFill>
+          <a:ln w="6350">
+            <a:solidFill>
+              <a:srgbClr val="E5E7EB"/>
+            </a:solidFill>
+            <a:prstDash val="solid"/>
+          </a:ln>
+        </p:spPr>
+      </p:sp>
+      <p:sp>
+        <p:nvSpPr>
+          <p:cNvPr id="8" name="Text 6"/>
+          <p:cNvSpPr/>
+          <p:nvPr/>
+        </p:nvSpPr>
+        <p:spPr>
+          <a:xfrm>
+            <a:off x="1524000" y="502920"/>
+            <a:ext cx="1524000" cy="320040"/>
+          </a:xfrm>
+          <a:prstGeom prst="rect">
+            <a:avLst/>
+          </a:prstGeom>
+          <a:noFill/>
+          <a:ln/>
+        </p:spPr>
+        <p:txBody>
+          <a:bodyPr wrap="square" lIns="0" tIns="0" rIns="0" bIns="0" rtlCol="0" anchor="ctr"/>
+          <a:lstStyle/>
+          <a:p>
+            <a:pPr algn="ctr" indent="0" marL="0">
+              <a:buNone/>
+            </a:pPr>
+            <a:r>
+              <a:rPr lang="en-US" sz="950" dirty="0">
+                <a:solidFill>
+                  <a:srgbClr val="64748B"/>
+                </a:solidFill>
+                <a:latin typeface="맑은 고딕" pitchFamily="34" charset="0"/>
+                <a:ea typeface="맑은 고딕" pitchFamily="34" charset="-122"/>
+                <a:cs typeface="맑은 고딕" pitchFamily="34" charset="-120"/>
+              </a:rPr>
+              <a:t>필요성</a:t>
+            </a:r>
+            <a:endParaRPr lang="en-US" sz="950" dirty="0"/>
+          </a:p>
+        </p:txBody>
+      </p:sp>
+      <p:sp>
+        <p:nvSpPr>
+          <p:cNvPr id="9" name="Shape 7"/>
+          <p:cNvSpPr/>
+          <p:nvPr/>
+        </p:nvSpPr>
+        <p:spPr>
+          <a:xfrm>
+            <a:off x="3048000" y="502920"/>
+            <a:ext cx="1524000" cy="320040"/>
+          </a:xfrm>
+          <a:prstGeom prst="rect">
+            <a:avLst/>
+          </a:prstGeom>
+          <a:solidFill>
+            <a:srgbClr val="F1F5F9"/>
+          </a:solidFill>
+          <a:ln w="6350">
+            <a:solidFill>
+              <a:srgbClr val="E5E7EB"/>
+            </a:solidFill>
+            <a:prstDash val="solid"/>
+          </a:ln>
+        </p:spPr>
+      </p:sp>
+      <p:sp>
+        <p:nvSpPr>
+          <p:cNvPr id="10" name="Text 8"/>
+          <p:cNvSpPr/>
+          <p:nvPr/>
+        </p:nvSpPr>
+        <p:spPr>
+          <a:xfrm>
+            <a:off x="3048000" y="502920"/>
+            <a:ext cx="1524000" cy="320040"/>
+          </a:xfrm>
+          <a:prstGeom prst="rect">
+            <a:avLst/>
+          </a:prstGeom>
+          <a:noFill/>
+          <a:ln/>
+        </p:spPr>
+        <p:txBody>
+          <a:bodyPr wrap="square" lIns="0" tIns="0" rIns="0" bIns="0" rtlCol="0" anchor="ctr"/>
+          <a:lstStyle/>
+          <a:p>
+            <a:pPr algn="ctr" indent="0" marL="0">
+              <a:buNone/>
+            </a:pPr>
+            <a:r>
+              <a:rPr lang="en-US" sz="950" dirty="0">
+                <a:solidFill>
+                  <a:srgbClr val="64748B"/>
+                </a:solidFill>
+                <a:latin typeface="맑은 고딕" pitchFamily="34" charset="0"/>
+                <a:ea typeface="맑은 고딕" pitchFamily="34" charset="-122"/>
+                <a:cs typeface="맑은 고딕" pitchFamily="34" charset="-120"/>
+              </a:rPr>
+              <a:t>시스템</a:t>
+            </a:r>
+            <a:endParaRPr lang="en-US" sz="950" dirty="0"/>
+          </a:p>
+        </p:txBody>
+      </p:sp>
+      <p:sp>
+        <p:nvSpPr>
+          <p:cNvPr id="11" name="Shape 9"/>
+          <p:cNvSpPr/>
+          <p:nvPr/>
+        </p:nvSpPr>
+        <p:spPr>
+          <a:xfrm>
+            <a:off x="4572000" y="502920"/>
+            <a:ext cx="1524000" cy="320040"/>
+          </a:xfrm>
+          <a:prstGeom prst="rect">
+            <a:avLst/>
+          </a:prstGeom>
+          <a:solidFill>
+            <a:srgbClr val="F1F5F9"/>
+          </a:solidFill>
+          <a:ln w="6350">
+            <a:solidFill>
+              <a:srgbClr val="E5E7EB"/>
+            </a:solidFill>
+            <a:prstDash val="solid"/>
+          </a:ln>
+        </p:spPr>
+      </p:sp>
+      <p:sp>
+        <p:nvSpPr>
+          <p:cNvPr id="12" name="Text 10"/>
+          <p:cNvSpPr/>
+          <p:nvPr/>
+        </p:nvSpPr>
+        <p:spPr>
+          <a:xfrm>
+            <a:off x="4572000" y="502920"/>
+            <a:ext cx="1524000" cy="320040"/>
+          </a:xfrm>
+          <a:prstGeom prst="rect">
+            <a:avLst/>
+          </a:prstGeom>
+          <a:noFill/>
+          <a:ln/>
+        </p:spPr>
+        <p:txBody>
+          <a:bodyPr wrap="square" lIns="0" tIns="0" rIns="0" bIns="0" rtlCol="0" anchor="ctr"/>
+          <a:lstStyle/>
+          <a:p>
+            <a:pPr algn="ctr" indent="0" marL="0">
+              <a:buNone/>
+            </a:pPr>
+            <a:r>
+              <a:rPr lang="en-US" sz="950" dirty="0">
+                <a:solidFill>
+                  <a:srgbClr val="64748B"/>
+                </a:solidFill>
+                <a:latin typeface="맑은 고딕" pitchFamily="34" charset="0"/>
+                <a:ea typeface="맑은 고딕" pitchFamily="34" charset="-122"/>
+                <a:cs typeface="맑은 고딕" pitchFamily="34" charset="-120"/>
+              </a:rPr>
+              <a:t>대화·채점</a:t>
+            </a:r>
+            <a:endParaRPr lang="en-US" sz="950" dirty="0"/>
+          </a:p>
+        </p:txBody>
+      </p:sp>
+      <p:sp>
+        <p:nvSpPr>
+          <p:cNvPr id="13" name="Shape 11"/>
+          <p:cNvSpPr/>
+          <p:nvPr/>
+        </p:nvSpPr>
+        <p:spPr>
+          <a:xfrm>
+            <a:off x="6096000" y="502920"/>
+            <a:ext cx="1524000" cy="320040"/>
+          </a:xfrm>
+          <a:prstGeom prst="rect">
+            <a:avLst/>
+          </a:prstGeom>
+          <a:solidFill>
+            <a:srgbClr val="F1F5F9"/>
+          </a:solidFill>
+          <a:ln w="6350">
+            <a:solidFill>
+              <a:srgbClr val="E5E7EB"/>
+            </a:solidFill>
+            <a:prstDash val="solid"/>
+          </a:ln>
+        </p:spPr>
+      </p:sp>
+      <p:sp>
+        <p:nvSpPr>
+          <p:cNvPr id="14" name="Text 12"/>
+          <p:cNvSpPr/>
+          <p:nvPr/>
+        </p:nvSpPr>
+        <p:spPr>
+          <a:xfrm>
+            <a:off x="6096000" y="502920"/>
+            <a:ext cx="1524000" cy="320040"/>
+          </a:xfrm>
+          <a:prstGeom prst="rect">
+            <a:avLst/>
+          </a:prstGeom>
+          <a:noFill/>
+          <a:ln/>
+        </p:spPr>
+        <p:txBody>
+          <a:bodyPr wrap="square" lIns="0" tIns="0" rIns="0" bIns="0" rtlCol="0" anchor="ctr"/>
+          <a:lstStyle/>
+          <a:p>
+            <a:pPr algn="ctr" indent="0" marL="0">
+              <a:buNone/>
+            </a:pPr>
+            <a:r>
+              <a:rPr lang="en-US" sz="950" dirty="0">
+                <a:solidFill>
+                  <a:srgbClr val="64748B"/>
+                </a:solidFill>
+                <a:latin typeface="맑은 고딕" pitchFamily="34" charset="0"/>
+                <a:ea typeface="맑은 고딕" pitchFamily="34" charset="-122"/>
+                <a:cs typeface="맑은 고딕" pitchFamily="34" charset="-120"/>
+              </a:rPr>
+              <a:t>검증 통로</a:t>
+            </a:r>
+            <a:endParaRPr lang="en-US" sz="950" dirty="0"/>
+          </a:p>
+        </p:txBody>
+      </p:sp>
+      <p:sp>
+        <p:nvSpPr>
+          <p:cNvPr id="15" name="Shape 13"/>
+          <p:cNvSpPr/>
+          <p:nvPr/>
+        </p:nvSpPr>
+        <p:spPr>
+          <a:xfrm>
+            <a:off x="7620000" y="502920"/>
+            <a:ext cx="1524000" cy="320040"/>
+          </a:xfrm>
+          <a:prstGeom prst="rect">
+            <a:avLst/>
+          </a:prstGeom>
+          <a:solidFill>
+            <a:srgbClr val="2563EB"/>
+          </a:solidFill>
+          <a:ln w="6350">
+            <a:solidFill>
+              <a:srgbClr val="E5E7EB"/>
+            </a:solidFill>
+            <a:prstDash val="solid"/>
+          </a:ln>
+        </p:spPr>
+      </p:sp>
+      <p:sp>
+        <p:nvSpPr>
+          <p:cNvPr id="16" name="Text 14"/>
+          <p:cNvSpPr/>
+          <p:nvPr/>
+        </p:nvSpPr>
+        <p:spPr>
+          <a:xfrm>
+            <a:off x="7620000" y="502920"/>
+            <a:ext cx="1524000" cy="320040"/>
+          </a:xfrm>
+          <a:prstGeom prst="rect">
+            <a:avLst/>
+          </a:prstGeom>
+          <a:noFill/>
+          <a:ln/>
+        </p:spPr>
+        <p:txBody>
+          <a:bodyPr wrap="square" lIns="0" tIns="0" rIns="0" bIns="0" rtlCol="0" anchor="ctr"/>
+          <a:lstStyle/>
+          <a:p>
+            <a:pPr algn="ctr" indent="0" marL="0">
+              <a:buNone/>
+            </a:pPr>
+            <a:r>
+              <a:rPr lang="en-US" sz="950" dirty="0">
+                <a:solidFill>
+                  <a:srgbClr val="FFFFFF"/>
+                </a:solidFill>
+                <a:latin typeface="맑은 고딕" pitchFamily="34" charset="0"/>
+                <a:ea typeface="맑은 고딕" pitchFamily="34" charset="-122"/>
+                <a:cs typeface="맑은 고딕" pitchFamily="34" charset="-120"/>
+              </a:rPr>
+              <a:t>신뢰성·운영</a:t>
+            </a:r>
+            <a:endParaRPr lang="en-US" sz="950" dirty="0"/>
+          </a:p>
+        </p:txBody>
+      </p:sp>
+      <p:sp>
+        <p:nvSpPr>
+          <p:cNvPr id="17" name="Text 15"/>
+          <p:cNvSpPr/>
+          <p:nvPr/>
+        </p:nvSpPr>
+        <p:spPr>
+          <a:xfrm>
+            <a:off x="365760" y="987552"/>
+            <a:ext cx="8412480" cy="237744"/>
+          </a:xfrm>
+          <a:prstGeom prst="rect">
+            <a:avLst/>
+          </a:prstGeom>
+          <a:noFill/>
+          <a:ln/>
+        </p:spPr>
+        <p:txBody>
+          <a:bodyPr wrap="square" lIns="0" tIns="0" rIns="0" bIns="0" rtlCol="0" anchor="ctr"/>
+          <a:lstStyle/>
+          <a:p>
+            <a:pPr indent="0" marL="0">
+              <a:buNone/>
+            </a:pPr>
+            <a:r>
+              <a:rPr lang="en-US" sz="1200" dirty="0">
+                <a:solidFill>
+                  <a:srgbClr val="2563EB"/>
+                </a:solidFill>
+                <a:latin typeface="맑은 고딕" pitchFamily="34" charset="0"/>
+                <a:ea typeface="맑은 고딕" pitchFamily="34" charset="-122"/>
+                <a:cs typeface="맑은 고딕" pitchFamily="34" charset="-120"/>
+              </a:rPr>
+              <a:t>06. 구축과 운영</a:t>
+            </a:r>
+            <a:endParaRPr lang="en-US" sz="1200" dirty="0"/>
+          </a:p>
+        </p:txBody>
+      </p:sp>
+      <p:sp>
+        <p:nvSpPr>
+          <p:cNvPr id="18" name="Shape 16"/>
+          <p:cNvSpPr/>
+          <p:nvPr/>
+        </p:nvSpPr>
+        <p:spPr>
+          <a:xfrm>
+            <a:off x="365760" y="1243584"/>
+            <a:ext cx="54864" cy="310896"/>
+          </a:xfrm>
+          <a:prstGeom prst="rect">
+            <a:avLst/>
+          </a:prstGeom>
+          <a:solidFill>
+            <a:srgbClr val="2563EB"/>
+          </a:solidFill>
+          <a:ln/>
+        </p:spPr>
+      </p:sp>
+      <p:sp>
+        <p:nvSpPr>
+          <p:cNvPr id="19" name="Text 17"/>
+          <p:cNvSpPr/>
+          <p:nvPr/>
+        </p:nvSpPr>
+        <p:spPr>
+          <a:xfrm>
+            <a:off x="512064" y="1207008"/>
+            <a:ext cx="8229600" cy="384048"/>
+          </a:xfrm>
+          <a:prstGeom prst="rect">
+            <a:avLst/>
+          </a:prstGeom>
+          <a:noFill/>
+          <a:ln/>
+        </p:spPr>
+        <p:txBody>
+          <a:bodyPr wrap="square" lIns="0" tIns="0" rIns="0" bIns="0" rtlCol="0" anchor="ctr"/>
+          <a:lstStyle/>
+          <a:p>
+            <a:pPr indent="0" marL="0">
+              <a:buNone/>
+            </a:pPr>
+            <a:r>
+              <a:rPr lang="en-US" sz="2100" b="1" dirty="0">
+                <a:solidFill>
+                  <a:srgbClr val="1E293B"/>
+                </a:solidFill>
+                <a:latin typeface="맑은 고딕" pitchFamily="34" charset="0"/>
+                <a:ea typeface="맑은 고딕" pitchFamily="34" charset="-122"/>
+                <a:cs typeface="맑은 고딕" pitchFamily="34" charset="-120"/>
+              </a:rPr>
+              <a:t>운영 비용 — 월 처리량별 추정</a:t>
+            </a:r>
+            <a:endParaRPr lang="en-US" sz="2100" dirty="0"/>
+          </a:p>
+        </p:txBody>
+      </p:sp>
+      <p:sp>
+        <p:nvSpPr>
+          <p:cNvPr id="20" name="Text 18"/>
+          <p:cNvSpPr/>
+          <p:nvPr/>
+        </p:nvSpPr>
+        <p:spPr>
+          <a:xfrm>
+            <a:off x="365760" y="1719072"/>
+            <a:ext cx="8412480" cy="274320"/>
+          </a:xfrm>
+          <a:prstGeom prst="rect">
+            <a:avLst/>
+          </a:prstGeom>
+          <a:noFill/>
+          <a:ln/>
+        </p:spPr>
+        <p:txBody>
+          <a:bodyPr wrap="square" lIns="0" tIns="0" rIns="0" bIns="0" rtlCol="0" anchor="ctr"/>
+          <a:lstStyle/>
+          <a:p>
+            <a:pPr indent="0" marL="0">
+              <a:buNone/>
+            </a:pPr>
+            <a:r>
+              <a:rPr lang="en-US" sz="1100" dirty="0">
+                <a:solidFill>
+                  <a:srgbClr val="64748B"/>
+                </a:solidFill>
+                <a:latin typeface="맑은 고딕" pitchFamily="34" charset="0"/>
+                <a:ea typeface="맑은 고딕" pitchFamily="34" charset="-122"/>
+                <a:cs typeface="맑은 고딕" pitchFamily="34" charset="-120"/>
+              </a:rPr>
+              <a:t>아이디어 1건당 약 2.8만~4.3만 토큰 · 캐싱 적용 시 추정(현재 미구현) · 환율 1,500원 기준</a:t>
+            </a:r>
+            <a:endParaRPr lang="en-US" sz="1100" dirty="0"/>
+          </a:p>
+        </p:txBody>
+      </p:sp>
+      <p:sp>
+        <p:nvSpPr>
+          <p:cNvPr id="21" name="Shape 19"/>
+          <p:cNvSpPr/>
+          <p:nvPr/>
+        </p:nvSpPr>
+        <p:spPr>
+          <a:xfrm>
+            <a:off x="365760" y="2103120"/>
+            <a:ext cx="1554480" cy="402336"/>
+          </a:xfrm>
+          <a:prstGeom prst="rect">
+            <a:avLst/>
+          </a:prstGeom>
+          <a:solidFill>
+            <a:srgbClr val="2563EB"/>
+          </a:solidFill>
+          <a:ln w="6350">
+            <a:solidFill>
+              <a:srgbClr val="FFFFFF"/>
+            </a:solidFill>
+            <a:prstDash val="solid"/>
+          </a:ln>
+        </p:spPr>
+      </p:sp>
+      <p:sp>
+        <p:nvSpPr>
+          <p:cNvPr id="22" name="Text 20"/>
+          <p:cNvSpPr/>
+          <p:nvPr/>
+        </p:nvSpPr>
+        <p:spPr>
+          <a:xfrm>
+            <a:off x="365760" y="2103120"/>
+            <a:ext cx="1554480" cy="402336"/>
+          </a:xfrm>
+          <a:prstGeom prst="rect">
+            <a:avLst/>
+          </a:prstGeom>
+          <a:noFill/>
+          <a:ln/>
+        </p:spPr>
+        <p:txBody>
+          <a:bodyPr wrap="square" lIns="0" tIns="0" rIns="0" bIns="0" rtlCol="0" anchor="ctr"/>
+          <a:lstStyle/>
+          <a:p>
+            <a:pPr algn="ctr" indent="0" marL="0">
+              <a:buNone/>
+            </a:pPr>
+            <a:r>
+              <a:rPr lang="en-US" sz="1050" b="1" dirty="0">
+                <a:solidFill>
+                  <a:srgbClr val="FFFFFF"/>
+                </a:solidFill>
+                <a:latin typeface="맑은 고딕" pitchFamily="34" charset="0"/>
+                <a:ea typeface="맑은 고딕" pitchFamily="34" charset="-122"/>
+                <a:cs typeface="맑은 고딕" pitchFamily="34" charset="-120"/>
+              </a:rPr>
+              <a:t>월 처리량</a:t>
+            </a:r>
+            <a:endParaRPr lang="en-US" sz="1050" dirty="0"/>
+          </a:p>
+        </p:txBody>
+      </p:sp>
+      <p:sp>
+        <p:nvSpPr>
+          <p:cNvPr id="23" name="Shape 21"/>
+          <p:cNvSpPr/>
+          <p:nvPr/>
+        </p:nvSpPr>
+        <p:spPr>
+          <a:xfrm>
+            <a:off x="1920240" y="2103120"/>
+            <a:ext cx="1714500" cy="402336"/>
+          </a:xfrm>
+          <a:prstGeom prst="rect">
+            <a:avLst/>
+          </a:prstGeom>
+          <a:solidFill>
+            <a:srgbClr val="2563EB"/>
+          </a:solidFill>
+          <a:ln w="6350">
+            <a:solidFill>
+              <a:srgbClr val="FFFFFF"/>
+            </a:solidFill>
+            <a:prstDash val="solid"/>
+          </a:ln>
+        </p:spPr>
+      </p:sp>
+      <p:sp>
+        <p:nvSpPr>
+          <p:cNvPr id="24" name="Text 22"/>
+          <p:cNvSpPr/>
+          <p:nvPr/>
+        </p:nvSpPr>
+        <p:spPr>
+          <a:xfrm>
+            <a:off x="1920240" y="2103120"/>
+            <a:ext cx="1714500" cy="402336"/>
+          </a:xfrm>
+          <a:prstGeom prst="rect">
+            <a:avLst/>
+          </a:prstGeom>
+          <a:noFill/>
+          <a:ln/>
+        </p:spPr>
+        <p:txBody>
+          <a:bodyPr wrap="square" lIns="0" tIns="0" rIns="0" bIns="0" rtlCol="0" anchor="ctr"/>
+          <a:lstStyle/>
+          <a:p>
+            <a:pPr algn="ctr" indent="0" marL="0">
+              <a:buNone/>
+            </a:pPr>
+            <a:r>
+              <a:rPr lang="en-US" sz="1050" b="1" dirty="0">
+                <a:solidFill>
+                  <a:srgbClr val="FFFFFF"/>
+                </a:solidFill>
+                <a:latin typeface="맑은 고딕" pitchFamily="34" charset="0"/>
+                <a:ea typeface="맑은 고딕" pitchFamily="34" charset="-122"/>
+                <a:cs typeface="맑은 고딕" pitchFamily="34" charset="-120"/>
+              </a:rPr>
+              <a:t>표준 모델 · 단문</a:t>
+            </a:r>
+            <a:endParaRPr lang="en-US" sz="1050" dirty="0"/>
+          </a:p>
+        </p:txBody>
+      </p:sp>
+      <p:sp>
+        <p:nvSpPr>
+          <p:cNvPr id="25" name="Shape 23"/>
+          <p:cNvSpPr/>
+          <p:nvPr/>
+        </p:nvSpPr>
+        <p:spPr>
+          <a:xfrm>
+            <a:off x="3634740" y="2103120"/>
+            <a:ext cx="1714500" cy="402336"/>
+          </a:xfrm>
+          <a:prstGeom prst="rect">
+            <a:avLst/>
+          </a:prstGeom>
+          <a:solidFill>
+            <a:srgbClr val="2563EB"/>
+          </a:solidFill>
+          <a:ln w="6350">
+            <a:solidFill>
+              <a:srgbClr val="FFFFFF"/>
+            </a:solidFill>
+            <a:prstDash val="solid"/>
+          </a:ln>
+        </p:spPr>
+      </p:sp>
+      <p:sp>
+        <p:nvSpPr>
+          <p:cNvPr id="26" name="Text 24"/>
+          <p:cNvSpPr/>
+          <p:nvPr/>
+        </p:nvSpPr>
+        <p:spPr>
+          <a:xfrm>
+            <a:off x="3634740" y="2103120"/>
+            <a:ext cx="1714500" cy="402336"/>
+          </a:xfrm>
+          <a:prstGeom prst="rect">
+            <a:avLst/>
+          </a:prstGeom>
+          <a:noFill/>
+          <a:ln/>
+        </p:spPr>
+        <p:txBody>
+          <a:bodyPr wrap="square" lIns="0" tIns="0" rIns="0" bIns="0" rtlCol="0" anchor="ctr"/>
+          <a:lstStyle/>
+          <a:p>
+            <a:pPr algn="ctr" indent="0" marL="0">
+              <a:buNone/>
+            </a:pPr>
+            <a:r>
+              <a:rPr lang="en-US" sz="1050" b="1" dirty="0">
+                <a:solidFill>
+                  <a:srgbClr val="FFFFFF"/>
+                </a:solidFill>
+                <a:latin typeface="맑은 고딕" pitchFamily="34" charset="0"/>
+                <a:ea typeface="맑은 고딕" pitchFamily="34" charset="-122"/>
+                <a:cs typeface="맑은 고딕" pitchFamily="34" charset="-120"/>
+              </a:rPr>
+              <a:t>표준 모델 · 장문</a:t>
+            </a:r>
+            <a:endParaRPr lang="en-US" sz="1050" dirty="0"/>
+          </a:p>
+        </p:txBody>
+      </p:sp>
+      <p:sp>
+        <p:nvSpPr>
+          <p:cNvPr id="27" name="Shape 25"/>
+          <p:cNvSpPr/>
+          <p:nvPr/>
+        </p:nvSpPr>
+        <p:spPr>
+          <a:xfrm>
+            <a:off x="5349240" y="2103120"/>
+            <a:ext cx="1714500" cy="402336"/>
+          </a:xfrm>
+          <a:prstGeom prst="rect">
+            <a:avLst/>
+          </a:prstGeom>
+          <a:solidFill>
+            <a:srgbClr val="2563EB"/>
+          </a:solidFill>
+          <a:ln w="6350">
+            <a:solidFill>
+              <a:srgbClr val="FFFFFF"/>
+            </a:solidFill>
+            <a:prstDash val="solid"/>
+          </a:ln>
+        </p:spPr>
+      </p:sp>
+      <p:sp>
+        <p:nvSpPr>
+          <p:cNvPr id="28" name="Text 26"/>
+          <p:cNvSpPr/>
+          <p:nvPr/>
+        </p:nvSpPr>
+        <p:spPr>
+          <a:xfrm>
+            <a:off x="5349240" y="2103120"/>
+            <a:ext cx="1714500" cy="402336"/>
+          </a:xfrm>
+          <a:prstGeom prst="rect">
+            <a:avLst/>
+          </a:prstGeom>
+          <a:noFill/>
+          <a:ln/>
+        </p:spPr>
+        <p:txBody>
+          <a:bodyPr wrap="square" lIns="0" tIns="0" rIns="0" bIns="0" rtlCol="0" anchor="ctr"/>
+          <a:lstStyle/>
+          <a:p>
+            <a:pPr algn="ctr" indent="0" marL="0">
+              <a:buNone/>
+            </a:pPr>
+            <a:r>
+              <a:rPr lang="en-US" sz="1050" b="1" dirty="0">
+                <a:solidFill>
+                  <a:srgbClr val="FFFFFF"/>
+                </a:solidFill>
+                <a:latin typeface="맑은 고딕" pitchFamily="34" charset="0"/>
+                <a:ea typeface="맑은 고딕" pitchFamily="34" charset="-122"/>
+                <a:cs typeface="맑은 고딕" pitchFamily="34" charset="-120"/>
+              </a:rPr>
+              <a:t>고급 모델 · 단문</a:t>
+            </a:r>
+            <a:endParaRPr lang="en-US" sz="1050" dirty="0"/>
+          </a:p>
+        </p:txBody>
+      </p:sp>
+      <p:sp>
+        <p:nvSpPr>
+          <p:cNvPr id="29" name="Shape 27"/>
+          <p:cNvSpPr/>
+          <p:nvPr/>
+        </p:nvSpPr>
+        <p:spPr>
+          <a:xfrm>
+            <a:off x="7063740" y="2103120"/>
+            <a:ext cx="1714500" cy="402336"/>
+          </a:xfrm>
+          <a:prstGeom prst="rect">
+            <a:avLst/>
+          </a:prstGeom>
+          <a:solidFill>
+            <a:srgbClr val="2563EB"/>
+          </a:solidFill>
+          <a:ln w="6350">
+            <a:solidFill>
+              <a:srgbClr val="FFFFFF"/>
+            </a:solidFill>
+            <a:prstDash val="solid"/>
+          </a:ln>
+        </p:spPr>
+      </p:sp>
+      <p:sp>
+        <p:nvSpPr>
+          <p:cNvPr id="30" name="Text 28"/>
+          <p:cNvSpPr/>
+          <p:nvPr/>
+        </p:nvSpPr>
+        <p:spPr>
+          <a:xfrm>
+            <a:off x="7063740" y="2103120"/>
+            <a:ext cx="1714500" cy="402336"/>
+          </a:xfrm>
+          <a:prstGeom prst="rect">
+            <a:avLst/>
+          </a:prstGeom>
+          <a:noFill/>
+          <a:ln/>
+        </p:spPr>
+        <p:txBody>
+          <a:bodyPr wrap="square" lIns="0" tIns="0" rIns="0" bIns="0" rtlCol="0" anchor="ctr"/>
+          <a:lstStyle/>
+          <a:p>
+            <a:pPr algn="ctr" indent="0" marL="0">
+              <a:buNone/>
+            </a:pPr>
+            <a:r>
+              <a:rPr lang="en-US" sz="1050" b="1" dirty="0">
+                <a:solidFill>
+                  <a:srgbClr val="FFFFFF"/>
+                </a:solidFill>
+                <a:latin typeface="맑은 고딕" pitchFamily="34" charset="0"/>
+                <a:ea typeface="맑은 고딕" pitchFamily="34" charset="-122"/>
+                <a:cs typeface="맑은 고딕" pitchFamily="34" charset="-120"/>
+              </a:rPr>
+              <a:t>고급 모델 · 장문</a:t>
+            </a:r>
+            <a:endParaRPr lang="en-US" sz="1050" dirty="0"/>
+          </a:p>
+        </p:txBody>
+      </p:sp>
+      <p:sp>
+        <p:nvSpPr>
+          <p:cNvPr id="31" name="Shape 29"/>
+          <p:cNvSpPr/>
+          <p:nvPr/>
+        </p:nvSpPr>
+        <p:spPr>
+          <a:xfrm>
+            <a:off x="365760" y="2505456"/>
+            <a:ext cx="1554480" cy="420624"/>
+          </a:xfrm>
+          <a:prstGeom prst="rect">
+            <a:avLst/>
+          </a:prstGeom>
+          <a:solidFill>
+            <a:srgbClr val="FFFFFF"/>
+          </a:solidFill>
+          <a:ln w="6350">
+            <a:solidFill>
+              <a:srgbClr val="E5E7EB"/>
+            </a:solidFill>
+            <a:prstDash val="solid"/>
+          </a:ln>
+        </p:spPr>
+      </p:sp>
+      <p:sp>
+        <p:nvSpPr>
+          <p:cNvPr id="32" name="Text 30"/>
+          <p:cNvSpPr/>
+          <p:nvPr/>
+        </p:nvSpPr>
+        <p:spPr>
+          <a:xfrm>
+            <a:off x="365760" y="2505456"/>
+            <a:ext cx="1554480" cy="420624"/>
+          </a:xfrm>
+          <a:prstGeom prst="rect">
+            <a:avLst/>
+          </a:prstGeom>
+          <a:noFill/>
+          <a:ln/>
+        </p:spPr>
+        <p:txBody>
+          <a:bodyPr wrap="square" lIns="0" tIns="0" rIns="0" bIns="0" rtlCol="0" anchor="ctr"/>
+          <a:lstStyle/>
+          <a:p>
+            <a:pPr algn="ctr" indent="0" marL="0">
+              <a:buNone/>
+            </a:pPr>
+            <a:r>
+              <a:rPr lang="en-US" sz="1100" b="1" dirty="0">
+                <a:solidFill>
+                  <a:srgbClr val="2563EB"/>
+                </a:solidFill>
+                <a:latin typeface="맑은 고딕" pitchFamily="34" charset="0"/>
+                <a:ea typeface="맑은 고딕" pitchFamily="34" charset="-122"/>
+                <a:cs typeface="맑은 고딕" pitchFamily="34" charset="-120"/>
+              </a:rPr>
+              <a:t>500건</a:t>
+            </a:r>
+            <a:endParaRPr lang="en-US" sz="1100" dirty="0"/>
+          </a:p>
+        </p:txBody>
+      </p:sp>
+      <p:sp>
+        <p:nvSpPr>
+          <p:cNvPr id="33" name="Shape 31"/>
+          <p:cNvSpPr/>
+          <p:nvPr/>
+        </p:nvSpPr>
+        <p:spPr>
+          <a:xfrm>
+            <a:off x="1920240" y="2505456"/>
+            <a:ext cx="1714500" cy="420624"/>
+          </a:xfrm>
+          <a:prstGeom prst="rect">
+            <a:avLst/>
+          </a:prstGeom>
+          <a:solidFill>
+            <a:srgbClr val="FFFFFF"/>
+          </a:solidFill>
+          <a:ln w="6350">
+            <a:solidFill>
+              <a:srgbClr val="E5E7EB"/>
+            </a:solidFill>
+            <a:prstDash val="solid"/>
+          </a:ln>
+        </p:spPr>
+      </p:sp>
+      <p:sp>
+        <p:nvSpPr>
+          <p:cNvPr id="34" name="Text 32"/>
+          <p:cNvSpPr/>
+          <p:nvPr/>
+        </p:nvSpPr>
+        <p:spPr>
+          <a:xfrm>
+            <a:off x="1920240" y="2505456"/>
+            <a:ext cx="1714500" cy="420624"/>
+          </a:xfrm>
+          <a:prstGeom prst="rect">
+            <a:avLst/>
+          </a:prstGeom>
+          <a:noFill/>
+          <a:ln/>
+        </p:spPr>
+        <p:txBody>
+          <a:bodyPr wrap="square" lIns="0" tIns="0" rIns="0" bIns="0" rtlCol="0" anchor="ctr"/>
+          <a:lstStyle/>
+          <a:p>
+            <a:pPr algn="ctr" indent="0" marL="0">
+              <a:buNone/>
+            </a:pPr>
+            <a:r>
+              <a:rPr lang="en-US" sz="1100" dirty="0">
+                <a:solidFill>
+                  <a:srgbClr val="1E293B"/>
+                </a:solidFill>
+                <a:latin typeface="맑은 고딕" pitchFamily="34" charset="0"/>
+                <a:ea typeface="맑은 고딕" pitchFamily="34" charset="-122"/>
+                <a:cs typeface="맑은 고딕" pitchFamily="34" charset="-120"/>
+              </a:rPr>
+              <a:t>약 14만 원</a:t>
+            </a:r>
+            <a:endParaRPr lang="en-US" sz="1100" dirty="0"/>
+          </a:p>
+        </p:txBody>
+      </p:sp>
+      <p:sp>
+        <p:nvSpPr>
+          <p:cNvPr id="35" name="Shape 33"/>
+          <p:cNvSpPr/>
+          <p:nvPr/>
+        </p:nvSpPr>
+        <p:spPr>
+          <a:xfrm>
+            <a:off x="3634740" y="2505456"/>
+            <a:ext cx="1714500" cy="420624"/>
+          </a:xfrm>
+          <a:prstGeom prst="rect">
+            <a:avLst/>
+          </a:prstGeom>
+          <a:solidFill>
+            <a:srgbClr val="FFFFFF"/>
+          </a:solidFill>
+          <a:ln w="6350">
+            <a:solidFill>
+              <a:srgbClr val="E5E7EB"/>
+            </a:solidFill>
+            <a:prstDash val="solid"/>
+          </a:ln>
+        </p:spPr>
+      </p:sp>
+      <p:sp>
+        <p:nvSpPr>
+          <p:cNvPr id="36" name="Text 34"/>
+          <p:cNvSpPr/>
+          <p:nvPr/>
+        </p:nvSpPr>
+        <p:spPr>
+          <a:xfrm>
+            <a:off x="3634740" y="2505456"/>
+            <a:ext cx="1714500" cy="420624"/>
+          </a:xfrm>
+          <a:prstGeom prst="rect">
+            <a:avLst/>
+          </a:prstGeom>
+          <a:noFill/>
+          <a:ln/>
+        </p:spPr>
+        <p:txBody>
+          <a:bodyPr wrap="square" lIns="0" tIns="0" rIns="0" bIns="0" rtlCol="0" anchor="ctr"/>
+          <a:lstStyle/>
+          <a:p>
+            <a:pPr algn="ctr" indent="0" marL="0">
+              <a:buNone/>
+            </a:pPr>
+            <a:r>
+              <a:rPr lang="en-US" sz="1100" dirty="0">
+                <a:solidFill>
+                  <a:srgbClr val="1E293B"/>
+                </a:solidFill>
+                <a:latin typeface="맑은 고딕" pitchFamily="34" charset="0"/>
+                <a:ea typeface="맑은 고딕" pitchFamily="34" charset="-122"/>
+                <a:cs typeface="맑은 고딕" pitchFamily="34" charset="-120"/>
+              </a:rPr>
+              <a:t>약 18만 원</a:t>
+            </a:r>
+            <a:endParaRPr lang="en-US" sz="1100" dirty="0"/>
+          </a:p>
+        </p:txBody>
+      </p:sp>
+      <p:sp>
+        <p:nvSpPr>
+          <p:cNvPr id="37" name="Shape 35"/>
+          <p:cNvSpPr/>
+          <p:nvPr/>
+        </p:nvSpPr>
+        <p:spPr>
+          <a:xfrm>
+            <a:off x="5349240" y="2505456"/>
+            <a:ext cx="1714500" cy="420624"/>
+          </a:xfrm>
+          <a:prstGeom prst="rect">
+            <a:avLst/>
+          </a:prstGeom>
+          <a:solidFill>
+            <a:srgbClr val="FFFFFF"/>
+          </a:solidFill>
+          <a:ln w="6350">
+            <a:solidFill>
+              <a:srgbClr val="E5E7EB"/>
+            </a:solidFill>
+            <a:prstDash val="solid"/>
+          </a:ln>
+        </p:spPr>
+      </p:sp>
+      <p:sp>
+        <p:nvSpPr>
+          <p:cNvPr id="38" name="Text 36"/>
+          <p:cNvSpPr/>
+          <p:nvPr/>
+        </p:nvSpPr>
+        <p:spPr>
+          <a:xfrm>
+            <a:off x="5349240" y="2505456"/>
+            <a:ext cx="1714500" cy="420624"/>
+          </a:xfrm>
+          <a:prstGeom prst="rect">
+            <a:avLst/>
+          </a:prstGeom>
+          <a:noFill/>
+          <a:ln/>
+        </p:spPr>
+        <p:txBody>
+          <a:bodyPr wrap="square" lIns="0" tIns="0" rIns="0" bIns="0" rtlCol="0" anchor="ctr"/>
+          <a:lstStyle/>
+          <a:p>
+            <a:pPr algn="ctr" indent="0" marL="0">
+              <a:buNone/>
+            </a:pPr>
+            <a:r>
+              <a:rPr lang="en-US" sz="1100" dirty="0">
+                <a:solidFill>
+                  <a:srgbClr val="1E293B"/>
+                </a:solidFill>
+                <a:latin typeface="맑은 고딕" pitchFamily="34" charset="0"/>
+                <a:ea typeface="맑은 고딕" pitchFamily="34" charset="-122"/>
+                <a:cs typeface="맑은 고딕" pitchFamily="34" charset="-120"/>
+              </a:rPr>
+              <a:t>약 24만 원</a:t>
+            </a:r>
+            <a:endParaRPr lang="en-US" sz="1100" dirty="0"/>
+          </a:p>
+        </p:txBody>
+      </p:sp>
+      <p:sp>
+        <p:nvSpPr>
+          <p:cNvPr id="39" name="Shape 37"/>
+          <p:cNvSpPr/>
+          <p:nvPr/>
+        </p:nvSpPr>
+        <p:spPr>
+          <a:xfrm>
+            <a:off x="7063740" y="2505456"/>
+            <a:ext cx="1714500" cy="420624"/>
+          </a:xfrm>
+          <a:prstGeom prst="rect">
+            <a:avLst/>
+          </a:prstGeom>
+          <a:solidFill>
+            <a:srgbClr val="FFFFFF"/>
+          </a:solidFill>
+          <a:ln w="6350">
+            <a:solidFill>
+              <a:srgbClr val="E5E7EB"/>
+            </a:solidFill>
+            <a:prstDash val="solid"/>
+          </a:ln>
+        </p:spPr>
+      </p:sp>
+      <p:sp>
+        <p:nvSpPr>
+          <p:cNvPr id="40" name="Text 38"/>
+          <p:cNvSpPr/>
+          <p:nvPr/>
+        </p:nvSpPr>
+        <p:spPr>
+          <a:xfrm>
+            <a:off x="7063740" y="2505456"/>
+            <a:ext cx="1714500" cy="420624"/>
+          </a:xfrm>
+          <a:prstGeom prst="rect">
+            <a:avLst/>
+          </a:prstGeom>
+          <a:noFill/>
+          <a:ln/>
+        </p:spPr>
+        <p:txBody>
+          <a:bodyPr wrap="square" lIns="0" tIns="0" rIns="0" bIns="0" rtlCol="0" anchor="ctr"/>
+          <a:lstStyle/>
+          <a:p>
+            <a:pPr algn="ctr" indent="0" marL="0">
+              <a:buNone/>
+            </a:pPr>
+            <a:r>
+              <a:rPr lang="en-US" sz="1100" dirty="0">
+                <a:solidFill>
+                  <a:srgbClr val="1E293B"/>
+                </a:solidFill>
+                <a:latin typeface="맑은 고딕" pitchFamily="34" charset="0"/>
+                <a:ea typeface="맑은 고딕" pitchFamily="34" charset="-122"/>
+                <a:cs typeface="맑은 고딕" pitchFamily="34" charset="-120"/>
+              </a:rPr>
+              <a:t>약 30만 원</a:t>
+            </a:r>
+            <a:endParaRPr lang="en-US" sz="1100" dirty="0"/>
+          </a:p>
+        </p:txBody>
+      </p:sp>
+      <p:sp>
+        <p:nvSpPr>
+          <p:cNvPr id="41" name="Shape 39"/>
+          <p:cNvSpPr/>
+          <p:nvPr/>
+        </p:nvSpPr>
+        <p:spPr>
+          <a:xfrm>
+            <a:off x="365760" y="2926080"/>
+            <a:ext cx="1554480" cy="420624"/>
+          </a:xfrm>
+          <a:prstGeom prst="rect">
+            <a:avLst/>
+          </a:prstGeom>
+          <a:solidFill>
+            <a:srgbClr val="F8FAFC"/>
+          </a:solidFill>
+          <a:ln w="6350">
+            <a:solidFill>
+              <a:srgbClr val="E5E7EB"/>
+            </a:solidFill>
+            <a:prstDash val="solid"/>
+          </a:ln>
+        </p:spPr>
+      </p:sp>
+      <p:sp>
+        <p:nvSpPr>
+          <p:cNvPr id="42" name="Text 40"/>
+          <p:cNvSpPr/>
+          <p:nvPr/>
+        </p:nvSpPr>
+        <p:spPr>
+          <a:xfrm>
+            <a:off x="365760" y="2926080"/>
+            <a:ext cx="1554480" cy="420624"/>
+          </a:xfrm>
+          <a:prstGeom prst="rect">
+            <a:avLst/>
+          </a:prstGeom>
+          <a:noFill/>
+          <a:ln/>
+        </p:spPr>
+        <p:txBody>
+          <a:bodyPr wrap="square" lIns="0" tIns="0" rIns="0" bIns="0" rtlCol="0" anchor="ctr"/>
+          <a:lstStyle/>
+          <a:p>
+            <a:pPr algn="ctr" indent="0" marL="0">
+              <a:buNone/>
+            </a:pPr>
+            <a:r>
+              <a:rPr lang="en-US" sz="1100" b="1" dirty="0">
+                <a:solidFill>
+                  <a:srgbClr val="2563EB"/>
+                </a:solidFill>
+                <a:latin typeface="맑은 고딕" pitchFamily="34" charset="0"/>
+                <a:ea typeface="맑은 고딕" pitchFamily="34" charset="-122"/>
+                <a:cs typeface="맑은 고딕" pitchFamily="34" charset="-120"/>
+              </a:rPr>
+              <a:t>1,000건</a:t>
+            </a:r>
+            <a:endParaRPr lang="en-US" sz="1100" dirty="0"/>
+          </a:p>
+        </p:txBody>
+      </p:sp>
+      <p:sp>
+        <p:nvSpPr>
+          <p:cNvPr id="43" name="Shape 41"/>
+          <p:cNvSpPr/>
+          <p:nvPr/>
+        </p:nvSpPr>
+        <p:spPr>
+          <a:xfrm>
+            <a:off x="1920240" y="2926080"/>
+            <a:ext cx="1714500" cy="420624"/>
+          </a:xfrm>
+          <a:prstGeom prst="rect">
+            <a:avLst/>
+          </a:prstGeom>
+          <a:solidFill>
+            <a:srgbClr val="F8FAFC"/>
+          </a:solidFill>
+          <a:ln w="6350">
+            <a:solidFill>
+              <a:srgbClr val="E5E7EB"/>
+            </a:solidFill>
+            <a:prstDash val="solid"/>
+          </a:ln>
+        </p:spPr>
+      </p:sp>
+      <p:sp>
+        <p:nvSpPr>
+          <p:cNvPr id="44" name="Text 42"/>
+          <p:cNvSpPr/>
+          <p:nvPr/>
+        </p:nvSpPr>
+        <p:spPr>
+          <a:xfrm>
+            <a:off x="1920240" y="2926080"/>
+            <a:ext cx="1714500" cy="420624"/>
+          </a:xfrm>
+          <a:prstGeom prst="rect">
+            <a:avLst/>
+          </a:prstGeom>
+          <a:noFill/>
+          <a:ln/>
+        </p:spPr>
+        <p:txBody>
+          <a:bodyPr wrap="square" lIns="0" tIns="0" rIns="0" bIns="0" rtlCol="0" anchor="ctr"/>
+          <a:lstStyle/>
+          <a:p>
+            <a:pPr algn="ctr" indent="0" marL="0">
+              <a:buNone/>
+            </a:pPr>
+            <a:r>
+              <a:rPr lang="en-US" sz="1100" dirty="0">
+                <a:solidFill>
+                  <a:srgbClr val="1E293B"/>
+                </a:solidFill>
+                <a:latin typeface="맑은 고딕" pitchFamily="34" charset="0"/>
+                <a:ea typeface="맑은 고딕" pitchFamily="34" charset="-122"/>
+                <a:cs typeface="맑은 고딕" pitchFamily="34" charset="-120"/>
+              </a:rPr>
+              <a:t>약 29만 원</a:t>
+            </a:r>
+            <a:endParaRPr lang="en-US" sz="1100" dirty="0"/>
+          </a:p>
+        </p:txBody>
+      </p:sp>
+      <p:sp>
+        <p:nvSpPr>
+          <p:cNvPr id="45" name="Shape 43"/>
+          <p:cNvSpPr/>
+          <p:nvPr/>
+        </p:nvSpPr>
+        <p:spPr>
+          <a:xfrm>
+            <a:off x="3634740" y="2926080"/>
+            <a:ext cx="1714500" cy="420624"/>
+          </a:xfrm>
+          <a:prstGeom prst="rect">
+            <a:avLst/>
+          </a:prstGeom>
+          <a:solidFill>
+            <a:srgbClr val="F8FAFC"/>
+          </a:solidFill>
+          <a:ln w="6350">
+            <a:solidFill>
+              <a:srgbClr val="E5E7EB"/>
+            </a:solidFill>
+            <a:prstDash val="solid"/>
+          </a:ln>
+        </p:spPr>
+      </p:sp>
+      <p:sp>
+        <p:nvSpPr>
+          <p:cNvPr id="46" name="Text 44"/>
+          <p:cNvSpPr/>
+          <p:nvPr/>
+        </p:nvSpPr>
+        <p:spPr>
+          <a:xfrm>
+            <a:off x="3634740" y="2926080"/>
+            <a:ext cx="1714500" cy="420624"/>
+          </a:xfrm>
+          <a:prstGeom prst="rect">
+            <a:avLst/>
+          </a:prstGeom>
+          <a:noFill/>
+          <a:ln/>
+        </p:spPr>
+        <p:txBody>
+          <a:bodyPr wrap="square" lIns="0" tIns="0" rIns="0" bIns="0" rtlCol="0" anchor="ctr"/>
+          <a:lstStyle/>
+          <a:p>
+            <a:pPr algn="ctr" indent="0" marL="0">
+              <a:buNone/>
+            </a:pPr>
+            <a:r>
+              <a:rPr lang="en-US" sz="1100" dirty="0">
+                <a:solidFill>
+                  <a:srgbClr val="1E293B"/>
+                </a:solidFill>
+                <a:latin typeface="맑은 고딕" pitchFamily="34" charset="0"/>
+                <a:ea typeface="맑은 고딕" pitchFamily="34" charset="-122"/>
+                <a:cs typeface="맑은 고딕" pitchFamily="34" charset="-120"/>
+              </a:rPr>
+              <a:t>약 36만 원</a:t>
+            </a:r>
+            <a:endParaRPr lang="en-US" sz="1100" dirty="0"/>
+          </a:p>
+        </p:txBody>
+      </p:sp>
+      <p:sp>
+        <p:nvSpPr>
+          <p:cNvPr id="47" name="Shape 45"/>
+          <p:cNvSpPr/>
+          <p:nvPr/>
+        </p:nvSpPr>
+        <p:spPr>
+          <a:xfrm>
+            <a:off x="5349240" y="2926080"/>
+            <a:ext cx="1714500" cy="420624"/>
+          </a:xfrm>
+          <a:prstGeom prst="rect">
+            <a:avLst/>
+          </a:prstGeom>
+          <a:solidFill>
+            <a:srgbClr val="F8FAFC"/>
+          </a:solidFill>
+          <a:ln w="6350">
+            <a:solidFill>
+              <a:srgbClr val="E5E7EB"/>
+            </a:solidFill>
+            <a:prstDash val="solid"/>
+          </a:ln>
+        </p:spPr>
+      </p:sp>
+      <p:sp>
+        <p:nvSpPr>
+          <p:cNvPr id="48" name="Text 46"/>
+          <p:cNvSpPr/>
+          <p:nvPr/>
+        </p:nvSpPr>
+        <p:spPr>
+          <a:xfrm>
+            <a:off x="5349240" y="2926080"/>
+            <a:ext cx="1714500" cy="420624"/>
+          </a:xfrm>
+          <a:prstGeom prst="rect">
+            <a:avLst/>
+          </a:prstGeom>
+          <a:noFill/>
+          <a:ln/>
+        </p:spPr>
+        <p:txBody>
+          <a:bodyPr wrap="square" lIns="0" tIns="0" rIns="0" bIns="0" rtlCol="0" anchor="ctr"/>
+          <a:lstStyle/>
+          <a:p>
+            <a:pPr algn="ctr" indent="0" marL="0">
+              <a:buNone/>
+            </a:pPr>
+            <a:r>
+              <a:rPr lang="en-US" sz="1100" dirty="0">
+                <a:solidFill>
+                  <a:srgbClr val="1E293B"/>
+                </a:solidFill>
+                <a:latin typeface="맑은 고딕" pitchFamily="34" charset="0"/>
+                <a:ea typeface="맑은 고딕" pitchFamily="34" charset="-122"/>
+                <a:cs typeface="맑은 고딕" pitchFamily="34" charset="-120"/>
+              </a:rPr>
+              <a:t>약 48만 원</a:t>
+            </a:r>
+            <a:endParaRPr lang="en-US" sz="1100" dirty="0"/>
+          </a:p>
+        </p:txBody>
+      </p:sp>
+      <p:sp>
+        <p:nvSpPr>
+          <p:cNvPr id="49" name="Shape 47"/>
+          <p:cNvSpPr/>
+          <p:nvPr/>
+        </p:nvSpPr>
+        <p:spPr>
+          <a:xfrm>
+            <a:off x="7063740" y="2926080"/>
+            <a:ext cx="1714500" cy="420624"/>
+          </a:xfrm>
+          <a:prstGeom prst="rect">
+            <a:avLst/>
+          </a:prstGeom>
+          <a:solidFill>
+            <a:srgbClr val="F8FAFC"/>
+          </a:solidFill>
+          <a:ln w="6350">
+            <a:solidFill>
+              <a:srgbClr val="E5E7EB"/>
+            </a:solidFill>
+            <a:prstDash val="solid"/>
+          </a:ln>
+        </p:spPr>
+      </p:sp>
+      <p:sp>
+        <p:nvSpPr>
+          <p:cNvPr id="50" name="Text 48"/>
+          <p:cNvSpPr/>
+          <p:nvPr/>
+        </p:nvSpPr>
+        <p:spPr>
+          <a:xfrm>
+            <a:off x="7063740" y="2926080"/>
+            <a:ext cx="1714500" cy="420624"/>
+          </a:xfrm>
+          <a:prstGeom prst="rect">
+            <a:avLst/>
+          </a:prstGeom>
+          <a:noFill/>
+          <a:ln/>
+        </p:spPr>
+        <p:txBody>
+          <a:bodyPr wrap="square" lIns="0" tIns="0" rIns="0" bIns="0" rtlCol="0" anchor="ctr"/>
+          <a:lstStyle/>
+          <a:p>
+            <a:pPr algn="ctr" indent="0" marL="0">
+              <a:buNone/>
+            </a:pPr>
+            <a:r>
+              <a:rPr lang="en-US" sz="1100" dirty="0">
+                <a:solidFill>
+                  <a:srgbClr val="1E293B"/>
+                </a:solidFill>
+                <a:latin typeface="맑은 고딕" pitchFamily="34" charset="0"/>
+                <a:ea typeface="맑은 고딕" pitchFamily="34" charset="-122"/>
+                <a:cs typeface="맑은 고딕" pitchFamily="34" charset="-120"/>
+              </a:rPr>
+              <a:t>약 60만 원</a:t>
+            </a:r>
+            <a:endParaRPr lang="en-US" sz="1100" dirty="0"/>
+          </a:p>
+        </p:txBody>
+      </p:sp>
+      <p:sp>
+        <p:nvSpPr>
+          <p:cNvPr id="51" name="Shape 49"/>
+          <p:cNvSpPr/>
+          <p:nvPr/>
+        </p:nvSpPr>
+        <p:spPr>
+          <a:xfrm>
+            <a:off x="365760" y="3346704"/>
+            <a:ext cx="1554480" cy="420624"/>
+          </a:xfrm>
+          <a:prstGeom prst="rect">
+            <a:avLst/>
+          </a:prstGeom>
+          <a:solidFill>
+            <a:srgbClr val="FFFFFF"/>
+          </a:solidFill>
+          <a:ln w="6350">
+            <a:solidFill>
+              <a:srgbClr val="E5E7EB"/>
+            </a:solidFill>
+            <a:prstDash val="solid"/>
+          </a:ln>
+        </p:spPr>
+      </p:sp>
+      <p:sp>
+        <p:nvSpPr>
+          <p:cNvPr id="52" name="Text 50"/>
+          <p:cNvSpPr/>
+          <p:nvPr/>
+        </p:nvSpPr>
+        <p:spPr>
+          <a:xfrm>
+            <a:off x="365760" y="3346704"/>
+            <a:ext cx="1554480" cy="420624"/>
+          </a:xfrm>
+          <a:prstGeom prst="rect">
+            <a:avLst/>
+          </a:prstGeom>
+          <a:noFill/>
+          <a:ln/>
+        </p:spPr>
+        <p:txBody>
+          <a:bodyPr wrap="square" lIns="0" tIns="0" rIns="0" bIns="0" rtlCol="0" anchor="ctr"/>
+          <a:lstStyle/>
+          <a:p>
+            <a:pPr algn="ctr" indent="0" marL="0">
+              <a:buNone/>
+            </a:pPr>
+            <a:r>
+              <a:rPr lang="en-US" sz="1100" b="1" dirty="0">
+                <a:solidFill>
+                  <a:srgbClr val="2563EB"/>
+                </a:solidFill>
+                <a:latin typeface="맑은 고딕" pitchFamily="34" charset="0"/>
+                <a:ea typeface="맑은 고딕" pitchFamily="34" charset="-122"/>
+                <a:cs typeface="맑은 고딕" pitchFamily="34" charset="-120"/>
+              </a:rPr>
+              <a:t>2,000건</a:t>
+            </a:r>
+            <a:endParaRPr lang="en-US" sz="1100" dirty="0"/>
+          </a:p>
+        </p:txBody>
+      </p:sp>
+      <p:sp>
+        <p:nvSpPr>
+          <p:cNvPr id="53" name="Shape 51"/>
+          <p:cNvSpPr/>
+          <p:nvPr/>
+        </p:nvSpPr>
+        <p:spPr>
+          <a:xfrm>
+            <a:off x="1920240" y="3346704"/>
+            <a:ext cx="1714500" cy="420624"/>
+          </a:xfrm>
+          <a:prstGeom prst="rect">
+            <a:avLst/>
+          </a:prstGeom>
+          <a:solidFill>
+            <a:srgbClr val="FFFFFF"/>
+          </a:solidFill>
+          <a:ln w="6350">
+            <a:solidFill>
+              <a:srgbClr val="E5E7EB"/>
+            </a:solidFill>
+            <a:prstDash val="solid"/>
+          </a:ln>
+        </p:spPr>
+      </p:sp>
+      <p:sp>
+        <p:nvSpPr>
+          <p:cNvPr id="54" name="Text 52"/>
+          <p:cNvSpPr/>
+          <p:nvPr/>
+        </p:nvSpPr>
+        <p:spPr>
+          <a:xfrm>
+            <a:off x="1920240" y="3346704"/>
+            <a:ext cx="1714500" cy="420624"/>
+          </a:xfrm>
+          <a:prstGeom prst="rect">
+            <a:avLst/>
+          </a:prstGeom>
+          <a:noFill/>
+          <a:ln/>
+        </p:spPr>
+        <p:txBody>
+          <a:bodyPr wrap="square" lIns="0" tIns="0" rIns="0" bIns="0" rtlCol="0" anchor="ctr"/>
+          <a:lstStyle/>
+          <a:p>
+            <a:pPr algn="ctr" indent="0" marL="0">
+              <a:buNone/>
+            </a:pPr>
+            <a:r>
+              <a:rPr lang="en-US" sz="1100" dirty="0">
+                <a:solidFill>
+                  <a:srgbClr val="1E293B"/>
+                </a:solidFill>
+                <a:latin typeface="맑은 고딕" pitchFamily="34" charset="0"/>
+                <a:ea typeface="맑은 고딕" pitchFamily="34" charset="-122"/>
+                <a:cs typeface="맑은 고딕" pitchFamily="34" charset="-120"/>
+              </a:rPr>
+              <a:t>약 57만 원</a:t>
+            </a:r>
+            <a:endParaRPr lang="en-US" sz="1100" dirty="0"/>
+          </a:p>
+        </p:txBody>
+      </p:sp>
+      <p:sp>
+        <p:nvSpPr>
+          <p:cNvPr id="55" name="Shape 53"/>
+          <p:cNvSpPr/>
+          <p:nvPr/>
+        </p:nvSpPr>
+        <p:spPr>
+          <a:xfrm>
+            <a:off x="3634740" y="3346704"/>
+            <a:ext cx="1714500" cy="420624"/>
+          </a:xfrm>
+          <a:prstGeom prst="rect">
+            <a:avLst/>
+          </a:prstGeom>
+          <a:solidFill>
+            <a:srgbClr val="FFFFFF"/>
+          </a:solidFill>
+          <a:ln w="6350">
+            <a:solidFill>
+              <a:srgbClr val="E5E7EB"/>
+            </a:solidFill>
+            <a:prstDash val="solid"/>
+          </a:ln>
+        </p:spPr>
+      </p:sp>
+      <p:sp>
+        <p:nvSpPr>
+          <p:cNvPr id="56" name="Text 54"/>
+          <p:cNvSpPr/>
+          <p:nvPr/>
+        </p:nvSpPr>
+        <p:spPr>
+          <a:xfrm>
+            <a:off x="3634740" y="3346704"/>
+            <a:ext cx="1714500" cy="420624"/>
+          </a:xfrm>
+          <a:prstGeom prst="rect">
+            <a:avLst/>
+          </a:prstGeom>
+          <a:noFill/>
+          <a:ln/>
+        </p:spPr>
+        <p:txBody>
+          <a:bodyPr wrap="square" lIns="0" tIns="0" rIns="0" bIns="0" rtlCol="0" anchor="ctr"/>
+          <a:lstStyle/>
+          <a:p>
+            <a:pPr algn="ctr" indent="0" marL="0">
+              <a:buNone/>
+            </a:pPr>
+            <a:r>
+              <a:rPr lang="en-US" sz="1100" dirty="0">
+                <a:solidFill>
+                  <a:srgbClr val="1E293B"/>
+                </a:solidFill>
+                <a:latin typeface="맑은 고딕" pitchFamily="34" charset="0"/>
+                <a:ea typeface="맑은 고딕" pitchFamily="34" charset="-122"/>
+                <a:cs typeface="맑은 고딕" pitchFamily="34" charset="-120"/>
+              </a:rPr>
+              <a:t>약 72만 원</a:t>
+            </a:r>
+            <a:endParaRPr lang="en-US" sz="1100" dirty="0"/>
+          </a:p>
+        </p:txBody>
+      </p:sp>
+      <p:sp>
+        <p:nvSpPr>
+          <p:cNvPr id="57" name="Shape 55"/>
+          <p:cNvSpPr/>
+          <p:nvPr/>
+        </p:nvSpPr>
+        <p:spPr>
+          <a:xfrm>
+            <a:off x="5349240" y="3346704"/>
+            <a:ext cx="1714500" cy="420624"/>
+          </a:xfrm>
+          <a:prstGeom prst="rect">
+            <a:avLst/>
+          </a:prstGeom>
+          <a:solidFill>
+            <a:srgbClr val="FFFFFF"/>
+          </a:solidFill>
+          <a:ln w="6350">
+            <a:solidFill>
+              <a:srgbClr val="E5E7EB"/>
+            </a:solidFill>
+            <a:prstDash val="solid"/>
+          </a:ln>
+        </p:spPr>
+      </p:sp>
+      <p:sp>
+        <p:nvSpPr>
+          <p:cNvPr id="58" name="Text 56"/>
+          <p:cNvSpPr/>
+          <p:nvPr/>
+        </p:nvSpPr>
+        <p:spPr>
+          <a:xfrm>
+            <a:off x="5349240" y="3346704"/>
+            <a:ext cx="1714500" cy="420624"/>
+          </a:xfrm>
+          <a:prstGeom prst="rect">
+            <a:avLst/>
+          </a:prstGeom>
+          <a:noFill/>
+          <a:ln/>
+        </p:spPr>
+        <p:txBody>
+          <a:bodyPr wrap="square" lIns="0" tIns="0" rIns="0" bIns="0" rtlCol="0" anchor="ctr"/>
+          <a:lstStyle/>
+          <a:p>
+            <a:pPr algn="ctr" indent="0" marL="0">
+              <a:buNone/>
+            </a:pPr>
+            <a:r>
+              <a:rPr lang="en-US" sz="1100" dirty="0">
+                <a:solidFill>
+                  <a:srgbClr val="1E293B"/>
+                </a:solidFill>
+                <a:latin typeface="맑은 고딕" pitchFamily="34" charset="0"/>
+                <a:ea typeface="맑은 고딕" pitchFamily="34" charset="-122"/>
+                <a:cs typeface="맑은 고딕" pitchFamily="34" charset="-120"/>
+              </a:rPr>
+              <a:t>약 96만 원</a:t>
+            </a:r>
+            <a:endParaRPr lang="en-US" sz="1100" dirty="0"/>
+          </a:p>
+        </p:txBody>
+      </p:sp>
+      <p:sp>
+        <p:nvSpPr>
+          <p:cNvPr id="59" name="Shape 57"/>
+          <p:cNvSpPr/>
+          <p:nvPr/>
+        </p:nvSpPr>
+        <p:spPr>
+          <a:xfrm>
+            <a:off x="7063740" y="3346704"/>
+            <a:ext cx="1714500" cy="420624"/>
+          </a:xfrm>
+          <a:prstGeom prst="rect">
+            <a:avLst/>
+          </a:prstGeom>
+          <a:solidFill>
+            <a:srgbClr val="FFFFFF"/>
+          </a:solidFill>
+          <a:ln w="6350">
+            <a:solidFill>
+              <a:srgbClr val="E5E7EB"/>
+            </a:solidFill>
+            <a:prstDash val="solid"/>
+          </a:ln>
+        </p:spPr>
+      </p:sp>
+      <p:sp>
+        <p:nvSpPr>
+          <p:cNvPr id="60" name="Text 58"/>
+          <p:cNvSpPr/>
+          <p:nvPr/>
+        </p:nvSpPr>
+        <p:spPr>
+          <a:xfrm>
+            <a:off x="7063740" y="3346704"/>
+            <a:ext cx="1714500" cy="420624"/>
+          </a:xfrm>
+          <a:prstGeom prst="rect">
+            <a:avLst/>
+          </a:prstGeom>
+          <a:noFill/>
+          <a:ln/>
+        </p:spPr>
+        <p:txBody>
+          <a:bodyPr wrap="square" lIns="0" tIns="0" rIns="0" bIns="0" rtlCol="0" anchor="ctr"/>
+          <a:lstStyle/>
+          <a:p>
+            <a:pPr algn="ctr" indent="0" marL="0">
+              <a:buNone/>
+            </a:pPr>
+            <a:r>
+              <a:rPr lang="en-US" sz="1100" dirty="0">
+                <a:solidFill>
+                  <a:srgbClr val="1E293B"/>
+                </a:solidFill>
+                <a:latin typeface="맑은 고딕" pitchFamily="34" charset="0"/>
+                <a:ea typeface="맑은 고딕" pitchFamily="34" charset="-122"/>
+                <a:cs typeface="맑은 고딕" pitchFamily="34" charset="-120"/>
+              </a:rPr>
+              <a:t>약 120만 원</a:t>
+            </a:r>
+            <a:endParaRPr lang="en-US" sz="1100" dirty="0"/>
+          </a:p>
+        </p:txBody>
+      </p:sp>
+      <p:sp>
+        <p:nvSpPr>
+          <p:cNvPr id="61" name="Shape 59"/>
+          <p:cNvSpPr/>
+          <p:nvPr/>
+        </p:nvSpPr>
+        <p:spPr>
+          <a:xfrm>
+            <a:off x="365760" y="3767328"/>
+            <a:ext cx="1554480" cy="420624"/>
+          </a:xfrm>
+          <a:prstGeom prst="rect">
+            <a:avLst/>
+          </a:prstGeom>
+          <a:solidFill>
+            <a:srgbClr val="F8FAFC"/>
+          </a:solidFill>
+          <a:ln w="6350">
+            <a:solidFill>
+              <a:srgbClr val="E5E7EB"/>
+            </a:solidFill>
+            <a:prstDash val="solid"/>
+          </a:ln>
+        </p:spPr>
+      </p:sp>
+      <p:sp>
+        <p:nvSpPr>
+          <p:cNvPr id="62" name="Text 60"/>
+          <p:cNvSpPr/>
+          <p:nvPr/>
+        </p:nvSpPr>
+        <p:spPr>
+          <a:xfrm>
+            <a:off x="365760" y="3767328"/>
+            <a:ext cx="1554480" cy="420624"/>
+          </a:xfrm>
+          <a:prstGeom prst="rect">
+            <a:avLst/>
+          </a:prstGeom>
+          <a:noFill/>
+          <a:ln/>
+        </p:spPr>
+        <p:txBody>
+          <a:bodyPr wrap="square" lIns="0" tIns="0" rIns="0" bIns="0" rtlCol="0" anchor="ctr"/>
+          <a:lstStyle/>
+          <a:p>
+            <a:pPr algn="ctr" indent="0" marL="0">
+              <a:buNone/>
+            </a:pPr>
+            <a:r>
+              <a:rPr lang="en-US" sz="1100" b="1" dirty="0">
+                <a:solidFill>
+                  <a:srgbClr val="2563EB"/>
+                </a:solidFill>
+                <a:latin typeface="맑은 고딕" pitchFamily="34" charset="0"/>
+                <a:ea typeface="맑은 고딕" pitchFamily="34" charset="-122"/>
+                <a:cs typeface="맑은 고딕" pitchFamily="34" charset="-120"/>
+              </a:rPr>
+              <a:t>10,000건</a:t>
+            </a:r>
+            <a:endParaRPr lang="en-US" sz="1100" dirty="0"/>
+          </a:p>
+        </p:txBody>
+      </p:sp>
+      <p:sp>
+        <p:nvSpPr>
+          <p:cNvPr id="63" name="Shape 61"/>
+          <p:cNvSpPr/>
+          <p:nvPr/>
+        </p:nvSpPr>
+        <p:spPr>
+          <a:xfrm>
+            <a:off x="1920240" y="3767328"/>
+            <a:ext cx="1714500" cy="420624"/>
+          </a:xfrm>
+          <a:prstGeom prst="rect">
+            <a:avLst/>
+          </a:prstGeom>
+          <a:solidFill>
+            <a:srgbClr val="F8FAFC"/>
+          </a:solidFill>
+          <a:ln w="6350">
+            <a:solidFill>
+              <a:srgbClr val="E5E7EB"/>
+            </a:solidFill>
+            <a:prstDash val="solid"/>
+          </a:ln>
+        </p:spPr>
+      </p:sp>
+      <p:sp>
+        <p:nvSpPr>
+          <p:cNvPr id="64" name="Text 62"/>
+          <p:cNvSpPr/>
+          <p:nvPr/>
+        </p:nvSpPr>
+        <p:spPr>
+          <a:xfrm>
+            <a:off x="1920240" y="3767328"/>
+            <a:ext cx="1714500" cy="420624"/>
+          </a:xfrm>
+          <a:prstGeom prst="rect">
+            <a:avLst/>
+          </a:prstGeom>
+          <a:noFill/>
+          <a:ln/>
+        </p:spPr>
+        <p:txBody>
+          <a:bodyPr wrap="square" lIns="0" tIns="0" rIns="0" bIns="0" rtlCol="0" anchor="ctr"/>
+          <a:lstStyle/>
+          <a:p>
+            <a:pPr algn="ctr" indent="0" marL="0">
+              <a:buNone/>
+            </a:pPr>
+            <a:r>
+              <a:rPr lang="en-US" sz="1100" dirty="0">
+                <a:solidFill>
+                  <a:srgbClr val="1E293B"/>
+                </a:solidFill>
+                <a:latin typeface="맑은 고딕" pitchFamily="34" charset="0"/>
+                <a:ea typeface="맑은 고딕" pitchFamily="34" charset="-122"/>
+                <a:cs typeface="맑은 고딕" pitchFamily="34" charset="-120"/>
+              </a:rPr>
+              <a:t>약 285만 원</a:t>
+            </a:r>
+            <a:endParaRPr lang="en-US" sz="1100" dirty="0"/>
+          </a:p>
+        </p:txBody>
+      </p:sp>
+      <p:sp>
+        <p:nvSpPr>
+          <p:cNvPr id="65" name="Shape 63"/>
+          <p:cNvSpPr/>
+          <p:nvPr/>
+        </p:nvSpPr>
+        <p:spPr>
+          <a:xfrm>
+            <a:off x="3634740" y="3767328"/>
+            <a:ext cx="1714500" cy="420624"/>
+          </a:xfrm>
+          <a:prstGeom prst="rect">
+            <a:avLst/>
+          </a:prstGeom>
+          <a:solidFill>
+            <a:srgbClr val="F8FAFC"/>
+          </a:solidFill>
+          <a:ln w="6350">
+            <a:solidFill>
+              <a:srgbClr val="E5E7EB"/>
+            </a:solidFill>
+            <a:prstDash val="solid"/>
+          </a:ln>
+        </p:spPr>
+      </p:sp>
+      <p:sp>
+        <p:nvSpPr>
+          <p:cNvPr id="66" name="Text 64"/>
+          <p:cNvSpPr/>
+          <p:nvPr/>
+        </p:nvSpPr>
+        <p:spPr>
+          <a:xfrm>
+            <a:off x="3634740" y="3767328"/>
+            <a:ext cx="1714500" cy="420624"/>
+          </a:xfrm>
+          <a:prstGeom prst="rect">
+            <a:avLst/>
+          </a:prstGeom>
+          <a:noFill/>
+          <a:ln/>
+        </p:spPr>
+        <p:txBody>
+          <a:bodyPr wrap="square" lIns="0" tIns="0" rIns="0" bIns="0" rtlCol="0" anchor="ctr"/>
+          <a:lstStyle/>
+          <a:p>
+            <a:pPr algn="ctr" indent="0" marL="0">
+              <a:buNone/>
+            </a:pPr>
+            <a:r>
+              <a:rPr lang="en-US" sz="1100" dirty="0">
+                <a:solidFill>
+                  <a:srgbClr val="1E293B"/>
+                </a:solidFill>
+                <a:latin typeface="맑은 고딕" pitchFamily="34" charset="0"/>
+                <a:ea typeface="맑은 고딕" pitchFamily="34" charset="-122"/>
+                <a:cs typeface="맑은 고딕" pitchFamily="34" charset="-120"/>
+              </a:rPr>
+              <a:t>약 360만 원</a:t>
+            </a:r>
+            <a:endParaRPr lang="en-US" sz="1100" dirty="0"/>
+          </a:p>
+        </p:txBody>
+      </p:sp>
+      <p:sp>
+        <p:nvSpPr>
+          <p:cNvPr id="67" name="Shape 65"/>
+          <p:cNvSpPr/>
+          <p:nvPr/>
+        </p:nvSpPr>
+        <p:spPr>
+          <a:xfrm>
+            <a:off x="5349240" y="3767328"/>
+            <a:ext cx="1714500" cy="420624"/>
+          </a:xfrm>
+          <a:prstGeom prst="rect">
+            <a:avLst/>
+          </a:prstGeom>
+          <a:solidFill>
+            <a:srgbClr val="F8FAFC"/>
+          </a:solidFill>
+          <a:ln w="6350">
+            <a:solidFill>
+              <a:srgbClr val="E5E7EB"/>
+            </a:solidFill>
+            <a:prstDash val="solid"/>
+          </a:ln>
+        </p:spPr>
+      </p:sp>
+      <p:sp>
+        <p:nvSpPr>
+          <p:cNvPr id="68" name="Text 66"/>
+          <p:cNvSpPr/>
+          <p:nvPr/>
+        </p:nvSpPr>
+        <p:spPr>
+          <a:xfrm>
+            <a:off x="5349240" y="3767328"/>
+            <a:ext cx="1714500" cy="420624"/>
+          </a:xfrm>
+          <a:prstGeom prst="rect">
+            <a:avLst/>
+          </a:prstGeom>
+          <a:noFill/>
+          <a:ln/>
+        </p:spPr>
+        <p:txBody>
+          <a:bodyPr wrap="square" lIns="0" tIns="0" rIns="0" bIns="0" rtlCol="0" anchor="ctr"/>
+          <a:lstStyle/>
+          <a:p>
+            <a:pPr algn="ctr" indent="0" marL="0">
+              <a:buNone/>
+            </a:pPr>
+            <a:r>
+              <a:rPr lang="en-US" sz="1100" dirty="0">
+                <a:solidFill>
+                  <a:srgbClr val="1E293B"/>
+                </a:solidFill>
+                <a:latin typeface="맑은 고딕" pitchFamily="34" charset="0"/>
+                <a:ea typeface="맑은 고딕" pitchFamily="34" charset="-122"/>
+                <a:cs typeface="맑은 고딕" pitchFamily="34" charset="-120"/>
+              </a:rPr>
+              <a:t>약 480만 원</a:t>
+            </a:r>
+            <a:endParaRPr lang="en-US" sz="1100" dirty="0"/>
+          </a:p>
+        </p:txBody>
+      </p:sp>
+      <p:sp>
+        <p:nvSpPr>
+          <p:cNvPr id="69" name="Shape 67"/>
+          <p:cNvSpPr/>
+          <p:nvPr/>
+        </p:nvSpPr>
+        <p:spPr>
+          <a:xfrm>
+            <a:off x="7063740" y="3767328"/>
+            <a:ext cx="1714500" cy="420624"/>
+          </a:xfrm>
+          <a:prstGeom prst="rect">
+            <a:avLst/>
+          </a:prstGeom>
+          <a:solidFill>
+            <a:srgbClr val="F8FAFC"/>
+          </a:solidFill>
+          <a:ln w="6350">
+            <a:solidFill>
+              <a:srgbClr val="E5E7EB"/>
+            </a:solidFill>
+            <a:prstDash val="solid"/>
+          </a:ln>
+        </p:spPr>
+      </p:sp>
+      <p:sp>
+        <p:nvSpPr>
+          <p:cNvPr id="70" name="Text 68"/>
+          <p:cNvSpPr/>
+          <p:nvPr/>
+        </p:nvSpPr>
+        <p:spPr>
+          <a:xfrm>
+            <a:off x="7063740" y="3767328"/>
+            <a:ext cx="1714500" cy="420624"/>
+          </a:xfrm>
+          <a:prstGeom prst="rect">
+            <a:avLst/>
+          </a:prstGeom>
+          <a:noFill/>
+          <a:ln/>
+        </p:spPr>
+        <p:txBody>
+          <a:bodyPr wrap="square" lIns="0" tIns="0" rIns="0" bIns="0" rtlCol="0" anchor="ctr"/>
+          <a:lstStyle/>
+          <a:p>
+            <a:pPr algn="ctr" indent="0" marL="0">
+              <a:buNone/>
+            </a:pPr>
+            <a:r>
+              <a:rPr lang="en-US" sz="1100" dirty="0">
+                <a:solidFill>
+                  <a:srgbClr val="1E293B"/>
+                </a:solidFill>
+                <a:latin typeface="맑은 고딕" pitchFamily="34" charset="0"/>
+                <a:ea typeface="맑은 고딕" pitchFamily="34" charset="-122"/>
+                <a:cs typeface="맑은 고딕" pitchFamily="34" charset="-120"/>
+              </a:rPr>
+              <a:t>약 600만 원</a:t>
+            </a:r>
+            <a:endParaRPr lang="en-US" sz="1100" dirty="0"/>
+          </a:p>
+        </p:txBody>
+      </p:sp>
+      <p:sp>
+        <p:nvSpPr>
+          <p:cNvPr id="71" name="Shape 69"/>
+          <p:cNvSpPr/>
+          <p:nvPr/>
+        </p:nvSpPr>
+        <p:spPr>
+          <a:xfrm>
+            <a:off x="365760" y="4315968"/>
+            <a:ext cx="8412480" cy="621792"/>
+          </a:xfrm>
+          <a:prstGeom prst="rect">
+            <a:avLst/>
+          </a:prstGeom>
+          <a:solidFill>
+            <a:srgbClr val="EBF5FF"/>
+          </a:solidFill>
+          <a:ln w="12700">
+            <a:solidFill>
+              <a:srgbClr val="E5E7EB"/>
+            </a:solidFill>
+            <a:prstDash val="solid"/>
+          </a:ln>
+        </p:spPr>
+      </p:sp>
+      <p:sp>
+        <p:nvSpPr>
+          <p:cNvPr id="72" name="Text 70"/>
+          <p:cNvSpPr/>
+          <p:nvPr/>
+        </p:nvSpPr>
+        <p:spPr>
+          <a:xfrm>
+            <a:off x="457200" y="4370832"/>
+            <a:ext cx="8229600" cy="274320"/>
+          </a:xfrm>
+          <a:prstGeom prst="rect">
+            <a:avLst/>
+          </a:prstGeom>
+          <a:noFill/>
+          <a:ln/>
+        </p:spPr>
+        <p:txBody>
+          <a:bodyPr wrap="square" lIns="0" tIns="0" rIns="0" bIns="0" rtlCol="0" anchor="ctr"/>
+          <a:lstStyle/>
+          <a:p>
+            <a:pPr algn="ctr" indent="0" marL="0">
+              <a:buNone/>
+            </a:pPr>
+            <a:r>
+              <a:rPr lang="en-US" sz="1150" b="1" dirty="0">
+                <a:solidFill>
+                  <a:srgbClr val="2563EB"/>
+                </a:solidFill>
+                <a:latin typeface="맑은 고딕" pitchFamily="34" charset="0"/>
+                <a:ea typeface="맑은 고딕" pitchFamily="34" charset="-122"/>
+                <a:cs typeface="맑은 고딕" pitchFamily="34" charset="-120"/>
+              </a:rPr>
+              <a:t>월 1,000건을 표준 모델로 처리할 경우 약 29만~36만 원 (API 비용만)</a:t>
+            </a:r>
+            <a:endParaRPr lang="en-US" sz="1150" dirty="0"/>
+          </a:p>
+        </p:txBody>
+      </p:sp>
+      <p:sp>
+        <p:nvSpPr>
+          <p:cNvPr id="73" name="Text 71"/>
+          <p:cNvSpPr/>
+          <p:nvPr/>
+        </p:nvSpPr>
+        <p:spPr>
+          <a:xfrm>
+            <a:off x="457200" y="4645152"/>
+            <a:ext cx="8229600" cy="237744"/>
+          </a:xfrm>
+          <a:prstGeom prst="rect">
+            <a:avLst/>
+          </a:prstGeom>
+          <a:noFill/>
+          <a:ln/>
+        </p:spPr>
+        <p:txBody>
+          <a:bodyPr wrap="square" lIns="0" tIns="0" rIns="0" bIns="0" rtlCol="0" anchor="ctr"/>
+          <a:lstStyle/>
+          <a:p>
+            <a:pPr algn="ctr" indent="0" marL="0">
+              <a:buNone/>
+            </a:pPr>
+            <a:r>
+              <a:rPr lang="en-US" sz="950" dirty="0">
+                <a:solidFill>
+                  <a:srgbClr val="64748B"/>
+                </a:solidFill>
+                <a:latin typeface="맑은 고딕" pitchFamily="34" charset="0"/>
+                <a:ea typeface="맑은 고딕" pitchFamily="34" charset="-122"/>
+                <a:cs typeface="맑은 고딕" pitchFamily="34" charset="-120"/>
+              </a:rPr>
+              <a:t>※ 캐싱 미적용 시 입력 토큰이 전액 과금되어 실제 비용은 이보다 큼 · 인건비·서버·코퍼스 갱신 비용 제외</a:t>
+            </a:r>
+            <a:endParaRPr lang="en-US" sz="950" dirty="0"/>
+          </a:p>
+        </p:txBody>
+      </p:sp>
+    </p:spTree>
+  </p:cSld>
+  <p:clrMapOvr>
+    <a:masterClrMapping/>
+  </p:clrMapOvr>
+</p:sld>
+</file>
+
+<file path=ppt/slides/slide27.xml><?xml version="1.0" encoding="utf-8"?>
+<p:sld xmlns:a="http://schemas.openxmlformats.org/drawingml/2006/main" xmlns:r="http://schemas.openxmlformats.org/officeDocument/2006/relationships" xmlns:p="http://schemas.openxmlformats.org/presentationml/2006/main">
+  <p:cSld name="Slide 27">
+    <p:spTree>
+      <p:nvGrpSpPr>
+        <p:cNvPr id="1" name=""/>
+        <p:cNvGrpSpPr/>
+        <p:nvPr/>
+      </p:nvGrpSpPr>
+      <p:grpSpPr>
+        <a:xfrm>
+          <a:off x="0" y="0"/>
+          <a:ext cx="0" cy="0"/>
+          <a:chOff x="0" y="0"/>
+          <a:chExt cx="0" cy="0"/>
+        </a:xfrm>
+      </p:grpSpPr>
+      <p:sp>
+        <p:nvSpPr>
+          <p:cNvPr id="2" name="Shape 0"/>
+          <p:cNvSpPr/>
+          <p:nvPr/>
+        </p:nvSpPr>
+        <p:spPr>
+          <a:xfrm>
+            <a:off x="0" y="0"/>
+            <a:ext cx="9144000" cy="502920"/>
+          </a:xfrm>
+          <a:prstGeom prst="rect">
+            <a:avLst/>
+          </a:prstGeom>
+          <a:solidFill>
+            <a:srgbClr val="1A1A2E"/>
+          </a:solidFill>
+          <a:ln/>
+        </p:spPr>
+      </p:sp>
+      <p:sp>
+        <p:nvSpPr>
+          <p:cNvPr id="3" name="Text 1"/>
+          <p:cNvSpPr/>
+          <p:nvPr/>
+        </p:nvSpPr>
+        <p:spPr>
+          <a:xfrm>
+            <a:off x="365760" y="0"/>
+            <a:ext cx="6949440" cy="502920"/>
+          </a:xfrm>
+          <a:prstGeom prst="rect">
+            <a:avLst/>
+          </a:prstGeom>
+          <a:noFill/>
+          <a:ln/>
+        </p:spPr>
+        <p:txBody>
+          <a:bodyPr wrap="square" lIns="0" tIns="0" rIns="0" bIns="0" rtlCol="0" anchor="ctr"/>
+          <a:lstStyle/>
+          <a:p>
+            <a:pPr indent="0" marL="0">
+              <a:buNone/>
+            </a:pPr>
+            <a:r>
+              <a:rPr lang="en-US" sz="1200" b="1" dirty="0">
+                <a:solidFill>
+                  <a:srgbClr val="FFFFFF"/>
+                </a:solidFill>
+                <a:latin typeface="맑은 고딕" pitchFamily="34" charset="0"/>
+                <a:ea typeface="맑은 고딕" pitchFamily="34" charset="-122"/>
+                <a:cs typeface="맑은 고딕" pitchFamily="34" charset="-120"/>
+              </a:rPr>
+              <a:t>온 국민 아이디어 등록제 — 정책 아이디어 평가 시스템</a:t>
+            </a:r>
+            <a:endParaRPr lang="en-US" sz="1200" dirty="0"/>
+          </a:p>
+        </p:txBody>
+      </p:sp>
+      <p:sp>
+        <p:nvSpPr>
+          <p:cNvPr id="4" name="Text 2"/>
+          <p:cNvSpPr/>
+          <p:nvPr/>
+        </p:nvSpPr>
+        <p:spPr>
+          <a:xfrm>
+            <a:off x="7680960" y="0"/>
+            <a:ext cx="1097280" cy="502920"/>
+          </a:xfrm>
+          <a:prstGeom prst="rect">
+            <a:avLst/>
+          </a:prstGeom>
+          <a:noFill/>
+          <a:ln/>
+        </p:spPr>
+        <p:txBody>
+          <a:bodyPr wrap="square" lIns="0" tIns="0" rIns="0" bIns="0" rtlCol="0" anchor="ctr"/>
+          <a:lstStyle/>
+          <a:p>
+            <a:pPr algn="r" indent="0" marL="0">
+              <a:buNone/>
+            </a:pPr>
+            <a:r>
+              <a:rPr lang="en-US" sz="1100" dirty="0">
+                <a:solidFill>
+                  <a:srgbClr val="FFFFFF"/>
+                </a:solidFill>
+                <a:latin typeface="맑은 고딕" pitchFamily="34" charset="0"/>
+                <a:ea typeface="맑은 고딕" pitchFamily="34" charset="-122"/>
+                <a:cs typeface="맑은 고딕" pitchFamily="34" charset="-120"/>
+              </a:rPr>
+              <a:t>27 / 28</a:t>
             </a:r>
             <a:endParaRPr lang="en-US" sz="1100" dirty="0"/>
           </a:p>
@@ -32026,8 +33807,8 @@
         </p:nvSpPr>
         <p:spPr>
           <a:xfrm>
-            <a:off x="530352" y="2414016"/>
-            <a:ext cx="128016" cy="356616"/>
+            <a:off x="530352" y="2395728"/>
+            <a:ext cx="128016" cy="301752"/>
           </a:xfrm>
           <a:prstGeom prst="rect">
             <a:avLst/>
@@ -32043,7 +33824,7 @@
               <a:buNone/>
             </a:pPr>
             <a:r>
-              <a:rPr lang="en-US" sz="1050" dirty="0">
+              <a:rPr lang="en-US" sz="1000" dirty="0">
                 <a:solidFill>
                   <a:srgbClr val="2563EB"/>
                 </a:solidFill>
@@ -32053,7 +33834,7 @@
               </a:rPr>
               <a:t>•</a:t>
             </a:r>
-            <a:endParaRPr lang="en-US" sz="1050" dirty="0"/>
+            <a:endParaRPr lang="en-US" sz="1000" dirty="0"/>
           </a:p>
         </p:txBody>
       </p:sp>
@@ -32065,8 +33846,8 @@
         </p:nvSpPr>
         <p:spPr>
           <a:xfrm>
-            <a:off x="667512" y="2414016"/>
-            <a:ext cx="3648456" cy="356616"/>
+            <a:off x="667512" y="2395728"/>
+            <a:ext cx="3648456" cy="301752"/>
           </a:xfrm>
           <a:prstGeom prst="rect">
             <a:avLst/>
@@ -32082,7 +33863,7 @@
               <a:buNone/>
             </a:pPr>
             <a:r>
-              <a:rPr lang="en-US" sz="1050" dirty="0">
+              <a:rPr lang="en-US" sz="1000" dirty="0">
                 <a:solidFill>
                   <a:srgbClr val="333333"/>
                 </a:solidFill>
@@ -32090,22 +33871,178 @@
                 <a:ea typeface="맑은 고딕" pitchFamily="34" charset="-122"/>
                 <a:cs typeface="맑은 고딕" pitchFamily="34" charset="-120"/>
               </a:rPr>
+              <a:t>표현력 편향 — 조리 있게 말하는 제안자가 유리</a:t>
+            </a:r>
+            <a:endParaRPr lang="en-US" sz="1000" dirty="0"/>
+          </a:p>
+        </p:txBody>
+      </p:sp>
+      <p:sp>
+        <p:nvSpPr>
+          <p:cNvPr id="25" name="Text 23"/>
+          <p:cNvSpPr/>
+          <p:nvPr/>
+        </p:nvSpPr>
+        <p:spPr>
+          <a:xfrm>
+            <a:off x="530352" y="2697480"/>
+            <a:ext cx="128016" cy="301752"/>
+          </a:xfrm>
+          <a:prstGeom prst="rect">
+            <a:avLst/>
+          </a:prstGeom>
+          <a:noFill/>
+          <a:ln/>
+        </p:spPr>
+        <p:txBody>
+          <a:bodyPr wrap="square" lIns="0" tIns="0" rIns="0" bIns="0" rtlCol="0" anchor="t"/>
+          <a:lstStyle/>
+          <a:p>
+            <a:pPr indent="0" marL="0">
+              <a:buNone/>
+            </a:pPr>
+            <a:r>
+              <a:rPr lang="en-US" sz="1000" dirty="0">
+                <a:solidFill>
+                  <a:srgbClr val="2563EB"/>
+                </a:solidFill>
+                <a:latin typeface="맑은 고딕" pitchFamily="34" charset="0"/>
+                <a:ea typeface="맑은 고딕" pitchFamily="34" charset="-122"/>
+                <a:cs typeface="맑은 고딕" pitchFamily="34" charset="-120"/>
+              </a:rPr>
+              <a:t>•</a:t>
+            </a:r>
+            <a:endParaRPr lang="en-US" sz="1000" dirty="0"/>
+          </a:p>
+        </p:txBody>
+      </p:sp>
+      <p:sp>
+        <p:nvSpPr>
+          <p:cNvPr id="26" name="Text 24"/>
+          <p:cNvSpPr/>
+          <p:nvPr/>
+        </p:nvSpPr>
+        <p:spPr>
+          <a:xfrm>
+            <a:off x="667512" y="2697480"/>
+            <a:ext cx="3648456" cy="301752"/>
+          </a:xfrm>
+          <a:prstGeom prst="rect">
+            <a:avLst/>
+          </a:prstGeom>
+          <a:noFill/>
+          <a:ln/>
+        </p:spPr>
+        <p:txBody>
+          <a:bodyPr wrap="square" lIns="0" tIns="0" rIns="0" bIns="0" rtlCol="0" anchor="t"/>
+          <a:lstStyle/>
+          <a:p>
+            <a:pPr indent="0" marL="0">
+              <a:buNone/>
+            </a:pPr>
+            <a:r>
+              <a:rPr lang="en-US" sz="1000" dirty="0">
+                <a:solidFill>
+                  <a:srgbClr val="333333"/>
+                </a:solidFill>
+                <a:latin typeface="맑은 고딕" pitchFamily="34" charset="0"/>
+                <a:ea typeface="맑은 고딕" pitchFamily="34" charset="-122"/>
+                <a:cs typeface="맑은 고딕" pitchFamily="34" charset="-120"/>
+              </a:rPr>
+              <a:t>법적·규제 타당성은 채점에 미포함</a:t>
+            </a:r>
+            <a:endParaRPr lang="en-US" sz="1000" dirty="0"/>
+          </a:p>
+        </p:txBody>
+      </p:sp>
+      <p:sp>
+        <p:nvSpPr>
+          <p:cNvPr id="27" name="Text 25"/>
+          <p:cNvSpPr/>
+          <p:nvPr/>
+        </p:nvSpPr>
+        <p:spPr>
+          <a:xfrm>
+            <a:off x="530352" y="2999232"/>
+            <a:ext cx="128016" cy="301752"/>
+          </a:xfrm>
+          <a:prstGeom prst="rect">
+            <a:avLst/>
+          </a:prstGeom>
+          <a:noFill/>
+          <a:ln/>
+        </p:spPr>
+        <p:txBody>
+          <a:bodyPr wrap="square" lIns="0" tIns="0" rIns="0" bIns="0" rtlCol="0" anchor="t"/>
+          <a:lstStyle/>
+          <a:p>
+            <a:pPr indent="0" marL="0">
+              <a:buNone/>
+            </a:pPr>
+            <a:r>
+              <a:rPr lang="en-US" sz="1000" dirty="0">
+                <a:solidFill>
+                  <a:srgbClr val="2563EB"/>
+                </a:solidFill>
+                <a:latin typeface="맑은 고딕" pitchFamily="34" charset="0"/>
+                <a:ea typeface="맑은 고딕" pitchFamily="34" charset="-122"/>
+                <a:cs typeface="맑은 고딕" pitchFamily="34" charset="-120"/>
+              </a:rPr>
+              <a:t>•</a:t>
+            </a:r>
+            <a:endParaRPr lang="en-US" sz="1000" dirty="0"/>
+          </a:p>
+        </p:txBody>
+      </p:sp>
+      <p:sp>
+        <p:nvSpPr>
+          <p:cNvPr id="28" name="Text 26"/>
+          <p:cNvSpPr/>
+          <p:nvPr/>
+        </p:nvSpPr>
+        <p:spPr>
+          <a:xfrm>
+            <a:off x="667512" y="2999232"/>
+            <a:ext cx="3648456" cy="301752"/>
+          </a:xfrm>
+          <a:prstGeom prst="rect">
+            <a:avLst/>
+          </a:prstGeom>
+          <a:noFill/>
+          <a:ln/>
+        </p:spPr>
+        <p:txBody>
+          <a:bodyPr wrap="square" lIns="0" tIns="0" rIns="0" bIns="0" rtlCol="0" anchor="t"/>
+          <a:lstStyle/>
+          <a:p>
+            <a:pPr indent="0" marL="0">
+              <a:buNone/>
+            </a:pPr>
+            <a:r>
+              <a:rPr lang="en-US" sz="1000" dirty="0">
+                <a:solidFill>
+                  <a:srgbClr val="333333"/>
+                </a:solidFill>
+                <a:latin typeface="맑은 고딕" pitchFamily="34" charset="0"/>
+                <a:ea typeface="맑은 고딕" pitchFamily="34" charset="-122"/>
+                <a:cs typeface="맑은 고딕" pitchFamily="34" charset="-120"/>
+              </a:rPr>
               <a:t>지자체 자체사업·기금사업 포착이 불균등</a:t>
             </a:r>
-            <a:endParaRPr lang="en-US" sz="1050" dirty="0"/>
-          </a:p>
-        </p:txBody>
-      </p:sp>
-      <p:sp>
-        <p:nvSpPr>
-          <p:cNvPr id="25" name="Text 23"/>
-          <p:cNvSpPr/>
-          <p:nvPr/>
-        </p:nvSpPr>
-        <p:spPr>
-          <a:xfrm>
-            <a:off x="530352" y="2770632"/>
-            <a:ext cx="128016" cy="356616"/>
+            <a:endParaRPr lang="en-US" sz="1000" dirty="0"/>
+          </a:p>
+        </p:txBody>
+      </p:sp>
+      <p:sp>
+        <p:nvSpPr>
+          <p:cNvPr id="29" name="Text 27"/>
+          <p:cNvSpPr/>
+          <p:nvPr/>
+        </p:nvSpPr>
+        <p:spPr>
+          <a:xfrm>
+            <a:off x="530352" y="3300984"/>
+            <a:ext cx="128016" cy="301752"/>
           </a:xfrm>
           <a:prstGeom prst="rect">
             <a:avLst/>
@@ -32121,7 +34058,7 @@
               <a:buNone/>
             </a:pPr>
             <a:r>
-              <a:rPr lang="en-US" sz="1050" dirty="0">
+              <a:rPr lang="en-US" sz="1000" dirty="0">
                 <a:solidFill>
                   <a:srgbClr val="2563EB"/>
                 </a:solidFill>
@@ -32131,20 +34068,20 @@
               </a:rPr>
               <a:t>•</a:t>
             </a:r>
-            <a:endParaRPr lang="en-US" sz="1050" dirty="0"/>
-          </a:p>
-        </p:txBody>
-      </p:sp>
-      <p:sp>
-        <p:nvSpPr>
-          <p:cNvPr id="26" name="Text 24"/>
-          <p:cNvSpPr/>
-          <p:nvPr/>
-        </p:nvSpPr>
-        <p:spPr>
-          <a:xfrm>
-            <a:off x="667512" y="2770632"/>
-            <a:ext cx="3648456" cy="356616"/>
+            <a:endParaRPr lang="en-US" sz="1000" dirty="0"/>
+          </a:p>
+        </p:txBody>
+      </p:sp>
+      <p:sp>
+        <p:nvSpPr>
+          <p:cNvPr id="30" name="Text 28"/>
+          <p:cNvSpPr/>
+          <p:nvPr/>
+        </p:nvSpPr>
+        <p:spPr>
+          <a:xfrm>
+            <a:off x="667512" y="3300984"/>
+            <a:ext cx="3648456" cy="301752"/>
           </a:xfrm>
           <a:prstGeom prst="rect">
             <a:avLst/>
@@ -32160,7 +34097,7 @@
               <a:buNone/>
             </a:pPr>
             <a:r>
-              <a:rPr lang="en-US" sz="1050" dirty="0">
+              <a:rPr lang="en-US" sz="1000" dirty="0">
                 <a:solidFill>
                   <a:srgbClr val="333333"/>
                 </a:solidFill>
@@ -32168,22 +34105,22 @@
                 <a:ea typeface="맑은 고딕" pitchFamily="34" charset="-122"/>
                 <a:cs typeface="맑은 고딕" pitchFamily="34" charset="-120"/>
               </a:rPr>
-              <a:t>재정 자료는 최근 5개 연도만 수록</a:t>
-            </a:r>
-            <a:endParaRPr lang="en-US" sz="1050" dirty="0"/>
-          </a:p>
-        </p:txBody>
-      </p:sp>
-      <p:sp>
-        <p:nvSpPr>
-          <p:cNvPr id="27" name="Text 25"/>
-          <p:cNvSpPr/>
-          <p:nvPr/>
-        </p:nvSpPr>
-        <p:spPr>
-          <a:xfrm>
-            <a:off x="530352" y="3127248"/>
-            <a:ext cx="128016" cy="356616"/>
+              <a:t>재정 자료는 최근 5개 시점(결측 있음)</a:t>
+            </a:r>
+            <a:endParaRPr lang="en-US" sz="1000" dirty="0"/>
+          </a:p>
+        </p:txBody>
+      </p:sp>
+      <p:sp>
+        <p:nvSpPr>
+          <p:cNvPr id="31" name="Text 29"/>
+          <p:cNvSpPr/>
+          <p:nvPr/>
+        </p:nvSpPr>
+        <p:spPr>
+          <a:xfrm>
+            <a:off x="530352" y="3602736"/>
+            <a:ext cx="128016" cy="301752"/>
           </a:xfrm>
           <a:prstGeom prst="rect">
             <a:avLst/>
@@ -32199,7 +34136,7 @@
               <a:buNone/>
             </a:pPr>
             <a:r>
-              <a:rPr lang="en-US" sz="1050" dirty="0">
+              <a:rPr lang="en-US" sz="1000" dirty="0">
                 <a:solidFill>
                   <a:srgbClr val="2563EB"/>
                 </a:solidFill>
@@ -32209,20 +34146,20 @@
               </a:rPr>
               <a:t>•</a:t>
             </a:r>
-            <a:endParaRPr lang="en-US" sz="1050" dirty="0"/>
-          </a:p>
-        </p:txBody>
-      </p:sp>
-      <p:sp>
-        <p:nvSpPr>
-          <p:cNvPr id="28" name="Text 26"/>
-          <p:cNvSpPr/>
-          <p:nvPr/>
-        </p:nvSpPr>
-        <p:spPr>
-          <a:xfrm>
-            <a:off x="667512" y="3127248"/>
-            <a:ext cx="3648456" cy="356616"/>
+            <a:endParaRPr lang="en-US" sz="1000" dirty="0"/>
+          </a:p>
+        </p:txBody>
+      </p:sp>
+      <p:sp>
+        <p:nvSpPr>
+          <p:cNvPr id="32" name="Text 30"/>
+          <p:cNvSpPr/>
+          <p:nvPr/>
+        </p:nvSpPr>
+        <p:spPr>
+          <a:xfrm>
+            <a:off x="667512" y="3602736"/>
+            <a:ext cx="3648456" cy="301752"/>
           </a:xfrm>
           <a:prstGeom prst="rect">
             <a:avLst/>
@@ -32238,7 +34175,7 @@
               <a:buNone/>
             </a:pPr>
             <a:r>
-              <a:rPr lang="en-US" sz="1050" dirty="0">
+              <a:rPr lang="en-US" sz="1000" dirty="0">
                 <a:solidFill>
                   <a:srgbClr val="333333"/>
                 </a:solidFill>
@@ -32246,22 +34183,22 @@
                 <a:ea typeface="맑은 고딕" pitchFamily="34" charset="-122"/>
                 <a:cs typeface="맑은 고딕" pitchFamily="34" charset="-120"/>
               </a:rPr>
-              <a:t>국내 소스는 2000년대 후반 이후를 주로 덮음</a:t>
-            </a:r>
-            <a:endParaRPr lang="en-US" sz="1050" dirty="0"/>
-          </a:p>
-        </p:txBody>
-      </p:sp>
-      <p:sp>
-        <p:nvSpPr>
-          <p:cNvPr id="29" name="Text 27"/>
-          <p:cNvSpPr/>
-          <p:nvPr/>
-        </p:nvSpPr>
-        <p:spPr>
-          <a:xfrm>
-            <a:off x="530352" y="3483864"/>
-            <a:ext cx="128016" cy="356616"/>
+              <a:t>해외 코퍼스는 OECD 등재·자기신고 사례</a:t>
+            </a:r>
+            <a:endParaRPr lang="en-US" sz="1000" dirty="0"/>
+          </a:p>
+        </p:txBody>
+      </p:sp>
+      <p:sp>
+        <p:nvSpPr>
+          <p:cNvPr id="33" name="Text 31"/>
+          <p:cNvSpPr/>
+          <p:nvPr/>
+        </p:nvSpPr>
+        <p:spPr>
+          <a:xfrm>
+            <a:off x="530352" y="3904488"/>
+            <a:ext cx="128016" cy="301752"/>
           </a:xfrm>
           <a:prstGeom prst="rect">
             <a:avLst/>
@@ -32277,7 +34214,7 @@
               <a:buNone/>
             </a:pPr>
             <a:r>
-              <a:rPr lang="en-US" sz="1050" dirty="0">
+              <a:rPr lang="en-US" sz="1000" dirty="0">
                 <a:solidFill>
                   <a:srgbClr val="2563EB"/>
                 </a:solidFill>
@@ -32287,20 +34224,20 @@
               </a:rPr>
               <a:t>•</a:t>
             </a:r>
-            <a:endParaRPr lang="en-US" sz="1050" dirty="0"/>
-          </a:p>
-        </p:txBody>
-      </p:sp>
-      <p:sp>
-        <p:nvSpPr>
-          <p:cNvPr id="30" name="Text 28"/>
-          <p:cNvSpPr/>
-          <p:nvPr/>
-        </p:nvSpPr>
-        <p:spPr>
-          <a:xfrm>
-            <a:off x="667512" y="3483864"/>
-            <a:ext cx="3648456" cy="356616"/>
+            <a:endParaRPr lang="en-US" sz="1000" dirty="0"/>
+          </a:p>
+        </p:txBody>
+      </p:sp>
+      <p:sp>
+        <p:nvSpPr>
+          <p:cNvPr id="34" name="Text 32"/>
+          <p:cNvSpPr/>
+          <p:nvPr/>
+        </p:nvSpPr>
+        <p:spPr>
+          <a:xfrm>
+            <a:off x="667512" y="3904488"/>
+            <a:ext cx="3648456" cy="301752"/>
           </a:xfrm>
           <a:prstGeom prst="rect">
             <a:avLst/>
@@ -32316,7 +34253,7 @@
               <a:buNone/>
             </a:pPr>
             <a:r>
-              <a:rPr lang="en-US" sz="1050" dirty="0">
+              <a:rPr lang="en-US" sz="1000" dirty="0">
                 <a:solidFill>
                   <a:srgbClr val="333333"/>
                 </a:solidFill>
@@ -32324,93 +34261,15 @@
                 <a:ea typeface="맑은 고딕" pitchFamily="34" charset="-122"/>
                 <a:cs typeface="맑은 고딕" pitchFamily="34" charset="-120"/>
               </a:rPr>
-              <a:t>해외 코퍼스는 OECD 등재 사례에 한정</a:t>
-            </a:r>
-            <a:endParaRPr lang="en-US" sz="1050" dirty="0"/>
-          </a:p>
-        </p:txBody>
-      </p:sp>
-      <p:sp>
-        <p:nvSpPr>
-          <p:cNvPr id="31" name="Text 29"/>
-          <p:cNvSpPr/>
-          <p:nvPr/>
-        </p:nvSpPr>
-        <p:spPr>
-          <a:xfrm>
-            <a:off x="530352" y="3840480"/>
-            <a:ext cx="128016" cy="356616"/>
-          </a:xfrm>
-          <a:prstGeom prst="rect">
-            <a:avLst/>
-          </a:prstGeom>
-          <a:noFill/>
-          <a:ln/>
-        </p:spPr>
-        <p:txBody>
-          <a:bodyPr wrap="square" lIns="0" tIns="0" rIns="0" bIns="0" rtlCol="0" anchor="t"/>
-          <a:lstStyle/>
-          <a:p>
-            <a:pPr indent="0" marL="0">
-              <a:buNone/>
-            </a:pPr>
-            <a:r>
-              <a:rPr lang="en-US" sz="1050" dirty="0">
-                <a:solidFill>
-                  <a:srgbClr val="2563EB"/>
-                </a:solidFill>
-                <a:latin typeface="맑은 고딕" pitchFamily="34" charset="0"/>
-                <a:ea typeface="맑은 고딕" pitchFamily="34" charset="-122"/>
-                <a:cs typeface="맑은 고딕" pitchFamily="34" charset="-120"/>
-              </a:rPr>
-              <a:t>•</a:t>
-            </a:r>
-            <a:endParaRPr lang="en-US" sz="1050" dirty="0"/>
-          </a:p>
-        </p:txBody>
-      </p:sp>
-      <p:sp>
-        <p:nvSpPr>
-          <p:cNvPr id="32" name="Text 30"/>
-          <p:cNvSpPr/>
-          <p:nvPr/>
-        </p:nvSpPr>
-        <p:spPr>
-          <a:xfrm>
-            <a:off x="667512" y="3840480"/>
-            <a:ext cx="3648456" cy="356616"/>
-          </a:xfrm>
-          <a:prstGeom prst="rect">
-            <a:avLst/>
-          </a:prstGeom>
-          <a:noFill/>
-          <a:ln/>
-        </p:spPr>
-        <p:txBody>
-          <a:bodyPr wrap="square" lIns="0" tIns="0" rIns="0" bIns="0" rtlCol="0" anchor="t"/>
-          <a:lstStyle/>
-          <a:p>
-            <a:pPr indent="0" marL="0">
-              <a:buNone/>
-            </a:pPr>
-            <a:r>
-              <a:rPr lang="en-US" sz="1050" dirty="0">
-                <a:solidFill>
-                  <a:srgbClr val="333333"/>
-                </a:solidFill>
-                <a:latin typeface="맑은 고딕" pitchFamily="34" charset="0"/>
-                <a:ea typeface="맑은 고딕" pitchFamily="34" charset="-122"/>
-                <a:cs typeface="맑은 고딕" pitchFamily="34" charset="-120"/>
-              </a:rPr>
               <a:t>판정은 최종 결론이 아니라 검토 후보 목록</a:t>
             </a:r>
-            <a:endParaRPr lang="en-US" sz="1050" dirty="0"/>
-          </a:p>
-        </p:txBody>
-      </p:sp>
-      <p:sp>
-        <p:nvSpPr>
-          <p:cNvPr id="33" name="Shape 31"/>
+            <a:endParaRPr lang="en-US" sz="1000" dirty="0"/>
+          </a:p>
+        </p:txBody>
+      </p:sp>
+      <p:sp>
+        <p:nvSpPr>
+          <p:cNvPr id="35" name="Shape 33"/>
           <p:cNvSpPr/>
           <p:nvPr/>
         </p:nvSpPr>
@@ -32442,7 +34301,7 @@
       </p:sp>
       <p:sp>
         <p:nvSpPr>
-          <p:cNvPr id="34" name="Text 32"/>
+          <p:cNvPr id="36" name="Text 34"/>
           <p:cNvSpPr/>
           <p:nvPr/>
         </p:nvSpPr>
@@ -32481,7 +34340,7 @@
       </p:sp>
       <p:sp>
         <p:nvSpPr>
-          <p:cNvPr id="35" name="Shape 33"/>
+          <p:cNvPr id="37" name="Shape 35"/>
           <p:cNvSpPr/>
           <p:nvPr/>
         </p:nvSpPr>
@@ -32501,14 +34360,14 @@
       </p:sp>
       <p:sp>
         <p:nvSpPr>
-          <p:cNvPr id="36" name="Text 34"/>
-          <p:cNvSpPr/>
-          <p:nvPr/>
-        </p:nvSpPr>
-        <p:spPr>
-          <a:xfrm>
-            <a:off x="4828032" y="2414016"/>
-            <a:ext cx="128016" cy="356616"/>
+          <p:cNvPr id="38" name="Text 36"/>
+          <p:cNvSpPr/>
+          <p:nvPr/>
+        </p:nvSpPr>
+        <p:spPr>
+          <a:xfrm>
+            <a:off x="4828032" y="2395728"/>
+            <a:ext cx="128016" cy="301752"/>
           </a:xfrm>
           <a:prstGeom prst="rect">
             <a:avLst/>
@@ -32524,7 +34383,7 @@
               <a:buNone/>
             </a:pPr>
             <a:r>
-              <a:rPr lang="en-US" sz="1050" dirty="0">
+              <a:rPr lang="en-US" sz="1000" dirty="0">
                 <a:solidFill>
                   <a:srgbClr val="2563EB"/>
                 </a:solidFill>
@@ -32534,20 +34393,20 @@
               </a:rPr>
               <a:t>•</a:t>
             </a:r>
-            <a:endParaRPr lang="en-US" sz="1050" dirty="0"/>
-          </a:p>
-        </p:txBody>
-      </p:sp>
-      <p:sp>
-        <p:nvSpPr>
-          <p:cNvPr id="37" name="Text 35"/>
-          <p:cNvSpPr/>
-          <p:nvPr/>
-        </p:nvSpPr>
-        <p:spPr>
-          <a:xfrm>
-            <a:off x="4965192" y="2414016"/>
-            <a:ext cx="3648456" cy="356616"/>
+            <a:endParaRPr lang="en-US" sz="1000" dirty="0"/>
+          </a:p>
+        </p:txBody>
+      </p:sp>
+      <p:sp>
+        <p:nvSpPr>
+          <p:cNvPr id="39" name="Text 37"/>
+          <p:cNvSpPr/>
+          <p:nvPr/>
+        </p:nvSpPr>
+        <p:spPr>
+          <a:xfrm>
+            <a:off x="4965192" y="2395728"/>
+            <a:ext cx="3648456" cy="301752"/>
           </a:xfrm>
           <a:prstGeom prst="rect">
             <a:avLst/>
@@ -32563,7 +34422,7 @@
               <a:buNone/>
             </a:pPr>
             <a:r>
-              <a:rPr lang="en-US" sz="1050" dirty="0">
+              <a:rPr lang="en-US" sz="1000" dirty="0">
                 <a:solidFill>
                   <a:srgbClr val="333333"/>
                 </a:solidFill>
@@ -32571,22 +34430,256 @@
                 <a:ea typeface="맑은 고딕" pitchFamily="34" charset="-122"/>
                 <a:cs typeface="맑은 고딕" pitchFamily="34" charset="-120"/>
               </a:rPr>
+              <a:t>전문가 판정과의 일치도 측정</a:t>
+            </a:r>
+            <a:endParaRPr lang="en-US" sz="1000" dirty="0"/>
+          </a:p>
+        </p:txBody>
+      </p:sp>
+      <p:sp>
+        <p:nvSpPr>
+          <p:cNvPr id="40" name="Text 38"/>
+          <p:cNvSpPr/>
+          <p:nvPr/>
+        </p:nvSpPr>
+        <p:spPr>
+          <a:xfrm>
+            <a:off x="4828032" y="2697480"/>
+            <a:ext cx="128016" cy="301752"/>
+          </a:xfrm>
+          <a:prstGeom prst="rect">
+            <a:avLst/>
+          </a:prstGeom>
+          <a:noFill/>
+          <a:ln/>
+        </p:spPr>
+        <p:txBody>
+          <a:bodyPr wrap="square" lIns="0" tIns="0" rIns="0" bIns="0" rtlCol="0" anchor="t"/>
+          <a:lstStyle/>
+          <a:p>
+            <a:pPr indent="0" marL="0">
+              <a:buNone/>
+            </a:pPr>
+            <a:r>
+              <a:rPr lang="en-US" sz="1000" dirty="0">
+                <a:solidFill>
+                  <a:srgbClr val="2563EB"/>
+                </a:solidFill>
+                <a:latin typeface="맑은 고딕" pitchFamily="34" charset="0"/>
+                <a:ea typeface="맑은 고딕" pitchFamily="34" charset="-122"/>
+                <a:cs typeface="맑은 고딕" pitchFamily="34" charset="-120"/>
+              </a:rPr>
+              <a:t>•</a:t>
+            </a:r>
+            <a:endParaRPr lang="en-US" sz="1000" dirty="0"/>
+          </a:p>
+        </p:txBody>
+      </p:sp>
+      <p:sp>
+        <p:nvSpPr>
+          <p:cNvPr id="41" name="Text 39"/>
+          <p:cNvSpPr/>
+          <p:nvPr/>
+        </p:nvSpPr>
+        <p:spPr>
+          <a:xfrm>
+            <a:off x="4965192" y="2697480"/>
+            <a:ext cx="3648456" cy="301752"/>
+          </a:xfrm>
+          <a:prstGeom prst="rect">
+            <a:avLst/>
+          </a:prstGeom>
+          <a:noFill/>
+          <a:ln/>
+        </p:spPr>
+        <p:txBody>
+          <a:bodyPr wrap="square" lIns="0" tIns="0" rIns="0" bIns="0" rtlCol="0" anchor="t"/>
+          <a:lstStyle/>
+          <a:p>
+            <a:pPr indent="0" marL="0">
+              <a:buNone/>
+            </a:pPr>
+            <a:r>
+              <a:rPr lang="en-US" sz="1000" dirty="0">
+                <a:solidFill>
+                  <a:srgbClr val="333333"/>
+                </a:solidFill>
+                <a:latin typeface="맑은 고딕" pitchFamily="34" charset="0"/>
+                <a:ea typeface="맑은 고딕" pitchFamily="34" charset="-122"/>
+                <a:cs typeface="맑은 고딕" pitchFamily="34" charset="-120"/>
+              </a:rPr>
+              <a:t>동일 대화 재채점 재현성 검증</a:t>
+            </a:r>
+            <a:endParaRPr lang="en-US" sz="1000" dirty="0"/>
+          </a:p>
+        </p:txBody>
+      </p:sp>
+      <p:sp>
+        <p:nvSpPr>
+          <p:cNvPr id="42" name="Text 40"/>
+          <p:cNvSpPr/>
+          <p:nvPr/>
+        </p:nvSpPr>
+        <p:spPr>
+          <a:xfrm>
+            <a:off x="4828032" y="2999232"/>
+            <a:ext cx="128016" cy="301752"/>
+          </a:xfrm>
+          <a:prstGeom prst="rect">
+            <a:avLst/>
+          </a:prstGeom>
+          <a:noFill/>
+          <a:ln/>
+        </p:spPr>
+        <p:txBody>
+          <a:bodyPr wrap="square" lIns="0" tIns="0" rIns="0" bIns="0" rtlCol="0" anchor="t"/>
+          <a:lstStyle/>
+          <a:p>
+            <a:pPr indent="0" marL="0">
+              <a:buNone/>
+            </a:pPr>
+            <a:r>
+              <a:rPr lang="en-US" sz="1000" dirty="0">
+                <a:solidFill>
+                  <a:srgbClr val="2563EB"/>
+                </a:solidFill>
+                <a:latin typeface="맑은 고딕" pitchFamily="34" charset="0"/>
+                <a:ea typeface="맑은 고딕" pitchFamily="34" charset="-122"/>
+                <a:cs typeface="맑은 고딕" pitchFamily="34" charset="-120"/>
+              </a:rPr>
+              <a:t>•</a:t>
+            </a:r>
+            <a:endParaRPr lang="en-US" sz="1000" dirty="0"/>
+          </a:p>
+        </p:txBody>
+      </p:sp>
+      <p:sp>
+        <p:nvSpPr>
+          <p:cNvPr id="43" name="Text 41"/>
+          <p:cNvSpPr/>
+          <p:nvPr/>
+        </p:nvSpPr>
+        <p:spPr>
+          <a:xfrm>
+            <a:off x="4965192" y="2999232"/>
+            <a:ext cx="3648456" cy="301752"/>
+          </a:xfrm>
+          <a:prstGeom prst="rect">
+            <a:avLst/>
+          </a:prstGeom>
+          <a:noFill/>
+          <a:ln/>
+        </p:spPr>
+        <p:txBody>
+          <a:bodyPr wrap="square" lIns="0" tIns="0" rIns="0" bIns="0" rtlCol="0" anchor="t"/>
+          <a:lstStyle/>
+          <a:p>
+            <a:pPr indent="0" marL="0">
+              <a:buNone/>
+            </a:pPr>
+            <a:r>
+              <a:rPr lang="en-US" sz="1000" dirty="0">
+                <a:solidFill>
+                  <a:srgbClr val="333333"/>
+                </a:solidFill>
+                <a:latin typeface="맑은 고딕" pitchFamily="34" charset="0"/>
+                <a:ea typeface="맑은 고딕" pitchFamily="34" charset="-122"/>
+                <a:cs typeface="맑은 고딕" pitchFamily="34" charset="-120"/>
+              </a:rPr>
+              <a:t>표현력 편향 보정 설계 · 법적 타당성 항목 추가</a:t>
+            </a:r>
+            <a:endParaRPr lang="en-US" sz="1000" dirty="0"/>
+          </a:p>
+        </p:txBody>
+      </p:sp>
+      <p:sp>
+        <p:nvSpPr>
+          <p:cNvPr id="44" name="Text 42"/>
+          <p:cNvSpPr/>
+          <p:nvPr/>
+        </p:nvSpPr>
+        <p:spPr>
+          <a:xfrm>
+            <a:off x="4828032" y="3300984"/>
+            <a:ext cx="128016" cy="301752"/>
+          </a:xfrm>
+          <a:prstGeom prst="rect">
+            <a:avLst/>
+          </a:prstGeom>
+          <a:noFill/>
+          <a:ln/>
+        </p:spPr>
+        <p:txBody>
+          <a:bodyPr wrap="square" lIns="0" tIns="0" rIns="0" bIns="0" rtlCol="0" anchor="t"/>
+          <a:lstStyle/>
+          <a:p>
+            <a:pPr indent="0" marL="0">
+              <a:buNone/>
+            </a:pPr>
+            <a:r>
+              <a:rPr lang="en-US" sz="1000" dirty="0">
+                <a:solidFill>
+                  <a:srgbClr val="2563EB"/>
+                </a:solidFill>
+                <a:latin typeface="맑은 고딕" pitchFamily="34" charset="0"/>
+                <a:ea typeface="맑은 고딕" pitchFamily="34" charset="-122"/>
+                <a:cs typeface="맑은 고딕" pitchFamily="34" charset="-120"/>
+              </a:rPr>
+              <a:t>•</a:t>
+            </a:r>
+            <a:endParaRPr lang="en-US" sz="1000" dirty="0"/>
+          </a:p>
+        </p:txBody>
+      </p:sp>
+      <p:sp>
+        <p:nvSpPr>
+          <p:cNvPr id="45" name="Text 43"/>
+          <p:cNvSpPr/>
+          <p:nvPr/>
+        </p:nvSpPr>
+        <p:spPr>
+          <a:xfrm>
+            <a:off x="4965192" y="3300984"/>
+            <a:ext cx="3648456" cy="301752"/>
+          </a:xfrm>
+          <a:prstGeom prst="rect">
+            <a:avLst/>
+          </a:prstGeom>
+          <a:noFill/>
+          <a:ln/>
+        </p:spPr>
+        <p:txBody>
+          <a:bodyPr wrap="square" lIns="0" tIns="0" rIns="0" bIns="0" rtlCol="0" anchor="t"/>
+          <a:lstStyle/>
+          <a:p>
+            <a:pPr indent="0" marL="0">
+              <a:buNone/>
+            </a:pPr>
+            <a:r>
+              <a:rPr lang="en-US" sz="1000" dirty="0">
+                <a:solidFill>
+                  <a:srgbClr val="333333"/>
+                </a:solidFill>
+                <a:latin typeface="맑은 고딕" pitchFamily="34" charset="0"/>
+                <a:ea typeface="맑은 고딕" pitchFamily="34" charset="-122"/>
+                <a:cs typeface="맑은 고딕" pitchFamily="34" charset="-120"/>
+              </a:rPr>
               <a:t>지자체·기금 데이터 통로 추가</a:t>
             </a:r>
-            <a:endParaRPr lang="en-US" sz="1050" dirty="0"/>
-          </a:p>
-        </p:txBody>
-      </p:sp>
-      <p:sp>
-        <p:nvSpPr>
-          <p:cNvPr id="38" name="Text 36"/>
-          <p:cNvSpPr/>
-          <p:nvPr/>
-        </p:nvSpPr>
-        <p:spPr>
-          <a:xfrm>
-            <a:off x="4828032" y="2770632"/>
-            <a:ext cx="128016" cy="356616"/>
+            <a:endParaRPr lang="en-US" sz="1000" dirty="0"/>
+          </a:p>
+        </p:txBody>
+      </p:sp>
+      <p:sp>
+        <p:nvSpPr>
+          <p:cNvPr id="46" name="Text 44"/>
+          <p:cNvSpPr/>
+          <p:nvPr/>
+        </p:nvSpPr>
+        <p:spPr>
+          <a:xfrm>
+            <a:off x="4828032" y="3602736"/>
+            <a:ext cx="128016" cy="301752"/>
           </a:xfrm>
           <a:prstGeom prst="rect">
             <a:avLst/>
@@ -32602,7 +34695,7 @@
               <a:buNone/>
             </a:pPr>
             <a:r>
-              <a:rPr lang="en-US" sz="1050" dirty="0">
+              <a:rPr lang="en-US" sz="1000" dirty="0">
                 <a:solidFill>
                   <a:srgbClr val="2563EB"/>
                 </a:solidFill>
@@ -32612,20 +34705,20 @@
               </a:rPr>
               <a:t>•</a:t>
             </a:r>
-            <a:endParaRPr lang="en-US" sz="1050" dirty="0"/>
-          </a:p>
-        </p:txBody>
-      </p:sp>
-      <p:sp>
-        <p:nvSpPr>
-          <p:cNvPr id="39" name="Text 37"/>
-          <p:cNvSpPr/>
-          <p:nvPr/>
-        </p:nvSpPr>
-        <p:spPr>
-          <a:xfrm>
-            <a:off x="4965192" y="2770632"/>
-            <a:ext cx="3648456" cy="356616"/>
+            <a:endParaRPr lang="en-US" sz="1000" dirty="0"/>
+          </a:p>
+        </p:txBody>
+      </p:sp>
+      <p:sp>
+        <p:nvSpPr>
+          <p:cNvPr id="47" name="Text 45"/>
+          <p:cNvSpPr/>
+          <p:nvPr/>
+        </p:nvSpPr>
+        <p:spPr>
+          <a:xfrm>
+            <a:off x="4965192" y="3602736"/>
+            <a:ext cx="3648456" cy="301752"/>
           </a:xfrm>
           <a:prstGeom prst="rect">
             <a:avLst/>
@@ -32641,7 +34734,7 @@
               <a:buNone/>
             </a:pPr>
             <a:r>
-              <a:rPr lang="en-US" sz="1050" dirty="0">
+              <a:rPr lang="en-US" sz="1000" dirty="0">
                 <a:solidFill>
                   <a:srgbClr val="333333"/>
                 </a:solidFill>
@@ -32651,20 +34744,20 @@
               </a:rPr>
               <a:t>부처 배정·이관 절차와 연계</a:t>
             </a:r>
-            <a:endParaRPr lang="en-US" sz="1050" dirty="0"/>
-          </a:p>
-        </p:txBody>
-      </p:sp>
-      <p:sp>
-        <p:nvSpPr>
-          <p:cNvPr id="40" name="Text 38"/>
-          <p:cNvSpPr/>
-          <p:nvPr/>
-        </p:nvSpPr>
-        <p:spPr>
-          <a:xfrm>
-            <a:off x="4828032" y="3127248"/>
-            <a:ext cx="128016" cy="356616"/>
+            <a:endParaRPr lang="en-US" sz="1000" dirty="0"/>
+          </a:p>
+        </p:txBody>
+      </p:sp>
+      <p:sp>
+        <p:nvSpPr>
+          <p:cNvPr id="48" name="Text 46"/>
+          <p:cNvSpPr/>
+          <p:nvPr/>
+        </p:nvSpPr>
+        <p:spPr>
+          <a:xfrm>
+            <a:off x="4828032" y="3904488"/>
+            <a:ext cx="128016" cy="301752"/>
           </a:xfrm>
           <a:prstGeom prst="rect">
             <a:avLst/>
@@ -32680,7 +34773,7 @@
               <a:buNone/>
             </a:pPr>
             <a:r>
-              <a:rPr lang="en-US" sz="1050" dirty="0">
+              <a:rPr lang="en-US" sz="1000" dirty="0">
                 <a:solidFill>
                   <a:srgbClr val="2563EB"/>
                 </a:solidFill>
@@ -32690,20 +34783,20 @@
               </a:rPr>
               <a:t>•</a:t>
             </a:r>
-            <a:endParaRPr lang="en-US" sz="1050" dirty="0"/>
-          </a:p>
-        </p:txBody>
-      </p:sp>
-      <p:sp>
-        <p:nvSpPr>
-          <p:cNvPr id="41" name="Text 39"/>
-          <p:cNvSpPr/>
-          <p:nvPr/>
-        </p:nvSpPr>
-        <p:spPr>
-          <a:xfrm>
-            <a:off x="4965192" y="3127248"/>
-            <a:ext cx="3648456" cy="356616"/>
+            <a:endParaRPr lang="en-US" sz="1000" dirty="0"/>
+          </a:p>
+        </p:txBody>
+      </p:sp>
+      <p:sp>
+        <p:nvSpPr>
+          <p:cNvPr id="49" name="Text 47"/>
+          <p:cNvSpPr/>
+          <p:nvPr/>
+        </p:nvSpPr>
+        <p:spPr>
+          <a:xfrm>
+            <a:off x="4965192" y="3904488"/>
+            <a:ext cx="3648456" cy="301752"/>
           </a:xfrm>
           <a:prstGeom prst="rect">
             <a:avLst/>
@@ -32719,7 +34812,7 @@
               <a:buNone/>
             </a:pPr>
             <a:r>
-              <a:rPr lang="en-US" sz="1050" dirty="0">
+              <a:rPr lang="en-US" sz="1000" dirty="0">
                 <a:solidFill>
                   <a:srgbClr val="333333"/>
                 </a:solidFill>
@@ -32729,169 +34822,13 @@
               </a:rPr>
               <a:t>판정 이력을 국가 아이디어 코퍼스로 축적</a:t>
             </a:r>
-            <a:endParaRPr lang="en-US" sz="1050" dirty="0"/>
-          </a:p>
-        </p:txBody>
-      </p:sp>
-      <p:sp>
-        <p:nvSpPr>
-          <p:cNvPr id="42" name="Text 40"/>
-          <p:cNvSpPr/>
-          <p:nvPr/>
-        </p:nvSpPr>
-        <p:spPr>
-          <a:xfrm>
-            <a:off x="4828032" y="3483864"/>
-            <a:ext cx="128016" cy="356616"/>
-          </a:xfrm>
-          <a:prstGeom prst="rect">
-            <a:avLst/>
-          </a:prstGeom>
-          <a:noFill/>
-          <a:ln/>
-        </p:spPr>
-        <p:txBody>
-          <a:bodyPr wrap="square" lIns="0" tIns="0" rIns="0" bIns="0" rtlCol="0" anchor="t"/>
-          <a:lstStyle/>
-          <a:p>
-            <a:pPr indent="0" marL="0">
-              <a:buNone/>
-            </a:pPr>
-            <a:r>
-              <a:rPr lang="en-US" sz="1050" dirty="0">
-                <a:solidFill>
-                  <a:srgbClr val="2563EB"/>
-                </a:solidFill>
-                <a:latin typeface="맑은 고딕" pitchFamily="34" charset="0"/>
-                <a:ea typeface="맑은 고딕" pitchFamily="34" charset="-122"/>
-                <a:cs typeface="맑은 고딕" pitchFamily="34" charset="-120"/>
-              </a:rPr>
-              <a:t>•</a:t>
-            </a:r>
-            <a:endParaRPr lang="en-US" sz="1050" dirty="0"/>
-          </a:p>
-        </p:txBody>
-      </p:sp>
-      <p:sp>
-        <p:nvSpPr>
-          <p:cNvPr id="43" name="Text 41"/>
-          <p:cNvSpPr/>
-          <p:nvPr/>
-        </p:nvSpPr>
-        <p:spPr>
-          <a:xfrm>
-            <a:off x="4965192" y="3483864"/>
-            <a:ext cx="3648456" cy="356616"/>
-          </a:xfrm>
-          <a:prstGeom prst="rect">
-            <a:avLst/>
-          </a:prstGeom>
-          <a:noFill/>
-          <a:ln/>
-        </p:spPr>
-        <p:txBody>
-          <a:bodyPr wrap="square" lIns="0" tIns="0" rIns="0" bIns="0" rtlCol="0" anchor="t"/>
-          <a:lstStyle/>
-          <a:p>
-            <a:pPr indent="0" marL="0">
-              <a:buNone/>
-            </a:pPr>
-            <a:r>
-              <a:rPr lang="en-US" sz="1050" dirty="0">
-                <a:solidFill>
-                  <a:srgbClr val="333333"/>
-                </a:solidFill>
-                <a:latin typeface="맑은 고딕" pitchFamily="34" charset="0"/>
-                <a:ea typeface="맑은 고딕" pitchFamily="34" charset="-122"/>
-                <a:cs typeface="맑은 고딕" pitchFamily="34" charset="-120"/>
-              </a:rPr>
-              <a:t>중복 제안 자동 식별 기능 강화</a:t>
-            </a:r>
-            <a:endParaRPr lang="en-US" sz="1050" dirty="0"/>
-          </a:p>
-        </p:txBody>
-      </p:sp>
-      <p:sp>
-        <p:nvSpPr>
-          <p:cNvPr id="44" name="Text 42"/>
-          <p:cNvSpPr/>
-          <p:nvPr/>
-        </p:nvSpPr>
-        <p:spPr>
-          <a:xfrm>
-            <a:off x="4828032" y="3840480"/>
-            <a:ext cx="128016" cy="356616"/>
-          </a:xfrm>
-          <a:prstGeom prst="rect">
-            <a:avLst/>
-          </a:prstGeom>
-          <a:noFill/>
-          <a:ln/>
-        </p:spPr>
-        <p:txBody>
-          <a:bodyPr wrap="square" lIns="0" tIns="0" rIns="0" bIns="0" rtlCol="0" anchor="t"/>
-          <a:lstStyle/>
-          <a:p>
-            <a:pPr indent="0" marL="0">
-              <a:buNone/>
-            </a:pPr>
-            <a:r>
-              <a:rPr lang="en-US" sz="1050" dirty="0">
-                <a:solidFill>
-                  <a:srgbClr val="2563EB"/>
-                </a:solidFill>
-                <a:latin typeface="맑은 고딕" pitchFamily="34" charset="0"/>
-                <a:ea typeface="맑은 고딕" pitchFamily="34" charset="-122"/>
-                <a:cs typeface="맑은 고딕" pitchFamily="34" charset="-120"/>
-              </a:rPr>
-              <a:t>•</a:t>
-            </a:r>
-            <a:endParaRPr lang="en-US" sz="1050" dirty="0"/>
-          </a:p>
-        </p:txBody>
-      </p:sp>
-      <p:sp>
-        <p:nvSpPr>
-          <p:cNvPr id="45" name="Text 43"/>
-          <p:cNvSpPr/>
-          <p:nvPr/>
-        </p:nvSpPr>
-        <p:spPr>
-          <a:xfrm>
-            <a:off x="4965192" y="3840480"/>
-            <a:ext cx="3648456" cy="356616"/>
-          </a:xfrm>
-          <a:prstGeom prst="rect">
-            <a:avLst/>
-          </a:prstGeom>
-          <a:noFill/>
-          <a:ln/>
-        </p:spPr>
-        <p:txBody>
-          <a:bodyPr wrap="square" lIns="0" tIns="0" rIns="0" bIns="0" rtlCol="0" anchor="t"/>
-          <a:lstStyle/>
-          <a:p>
-            <a:pPr indent="0" marL="0">
-              <a:buNone/>
-            </a:pPr>
-            <a:r>
-              <a:rPr lang="en-US" sz="1050" dirty="0">
-                <a:solidFill>
-                  <a:srgbClr val="333333"/>
-                </a:solidFill>
-                <a:latin typeface="맑은 고딕" pitchFamily="34" charset="0"/>
-                <a:ea typeface="맑은 고딕" pitchFamily="34" charset="-122"/>
-                <a:cs typeface="맑은 고딕" pitchFamily="34" charset="-120"/>
-              </a:rPr>
-              <a:t>담당자 피드백을 판정 규칙에 반영</a:t>
-            </a:r>
-            <a:endParaRPr lang="en-US" sz="1050" dirty="0"/>
-          </a:p>
-        </p:txBody>
-      </p:sp>
-      <p:sp>
-        <p:nvSpPr>
-          <p:cNvPr id="46" name="Shape 44"/>
+            <a:endParaRPr lang="en-US" sz="1000" dirty="0"/>
+          </a:p>
+        </p:txBody>
+      </p:sp>
+      <p:sp>
+        <p:nvSpPr>
+          <p:cNvPr id="50" name="Shape 48"/>
           <p:cNvSpPr/>
           <p:nvPr/>
         </p:nvSpPr>
@@ -32911,7 +34848,7 @@
       </p:sp>
       <p:sp>
         <p:nvSpPr>
-          <p:cNvPr id="47" name="Text 45"/>
+          <p:cNvPr id="51" name="Text 49"/>
           <p:cNvSpPr/>
           <p:nvPr/>
         </p:nvSpPr>
@@ -32956,9 +34893,9 @@
 </p:sld>
 </file>
 
-<file path=ppt/slides/slide27.xml><?xml version="1.0" encoding="utf-8"?>
+<file path=ppt/slides/slide28.xml><?xml version="1.0" encoding="utf-8"?>
 <p:sld xmlns:a="http://schemas.openxmlformats.org/drawingml/2006/main" xmlns:r="http://schemas.openxmlformats.org/officeDocument/2006/relationships" xmlns:p="http://schemas.openxmlformats.org/presentationml/2006/main">
-  <p:cSld name="Slide 27">
+  <p:cSld name="Slide 28">
     <p:bg>
       <p:bgPr>
         <a:solidFill>
@@ -33209,7 +35146,7 @@
                 <a:ea typeface="맑은 고딕" pitchFamily="34" charset="-122"/>
                 <a:cs typeface="맑은 고딕" pitchFamily="34" charset="-120"/>
               </a:rPr>
-              <a:t>27 / 27</a:t>
+              <a:t>28 / 28</a:t>
             </a:r>
             <a:endParaRPr lang="en-US" sz="1000" dirty="0"/>
           </a:p>
@@ -33332,7 +35269,7 @@
                 <a:ea typeface="맑은 고딕" pitchFamily="34" charset="-122"/>
                 <a:cs typeface="맑은 고딕" pitchFamily="34" charset="-120"/>
               </a:rPr>
-              <a:t>3 / 27</a:t>
+              <a:t>3 / 28</a:t>
             </a:r>
             <a:endParaRPr lang="en-US" sz="1100" dirty="0"/>
           </a:p>
@@ -34951,7 +36888,7 @@
                 <a:ea typeface="맑은 고딕" pitchFamily="34" charset="-122"/>
                 <a:cs typeface="맑은 고딕" pitchFamily="34" charset="-120"/>
               </a:rPr>
-              <a:t>4 / 27</a:t>
+              <a:t>4 / 28</a:t>
             </a:r>
             <a:endParaRPr lang="en-US" sz="1100" dirty="0"/>
           </a:p>
@@ -36317,7 +38254,7 @@
                 <a:ea typeface="맑은 고딕" pitchFamily="34" charset="-122"/>
                 <a:cs typeface="맑은 고딕" pitchFamily="34" charset="-120"/>
               </a:rPr>
-              <a:t>5 / 27</a:t>
+              <a:t>5 / 28</a:t>
             </a:r>
             <a:endParaRPr lang="en-US" sz="1100" dirty="0"/>
           </a:p>
@@ -37417,7 +39354,7 @@
                 <a:ea typeface="맑은 고딕" pitchFamily="34" charset="-122"/>
                 <a:cs typeface="맑은 고딕" pitchFamily="34" charset="-120"/>
               </a:rPr>
-              <a:t>4개 국가 데이터를 매번 동일하게 조회</a:t>
+              <a:t>4개 국가 데이터를 동일한 절차로 조회</a:t>
             </a:r>
             <a:endParaRPr lang="en-US" sz="1100" dirty="0"/>
           </a:p>
@@ -37844,7 +39781,7 @@
                 <a:ea typeface="맑은 고딕" pitchFamily="34" charset="-122"/>
                 <a:cs typeface="맑은 고딕" pitchFamily="34" charset="-120"/>
               </a:rPr>
-              <a:t>6 / 27</a:t>
+              <a:t>6 / 28</a:t>
             </a:r>
             <a:endParaRPr lang="en-US" sz="1100" dirty="0"/>
           </a:p>
@@ -39054,7 +40991,7 @@
                 <a:ea typeface="맑은 고딕" pitchFamily="34" charset="-122"/>
                 <a:cs typeface="맑은 고딕" pitchFamily="34" charset="-120"/>
               </a:rPr>
-              <a:t>담당자가 바뀌어도 동일 결과</a:t>
+              <a:t>조회 절차와 판정 규칙을 문서로 고정</a:t>
             </a:r>
             <a:endParaRPr lang="en-US" sz="1020" dirty="0"/>
           </a:p>
@@ -39814,7 +41751,7 @@
                 <a:ea typeface="맑은 고딕" pitchFamily="34" charset="-122"/>
                 <a:cs typeface="맑은 고딕" pitchFamily="34" charset="-120"/>
               </a:rPr>
-              <a:t>7 / 27</a:t>
+              <a:t>7 / 28</a:t>
             </a:r>
             <a:endParaRPr lang="en-US" sz="1100" dirty="0"/>
           </a:p>
@@ -40983,7 +42920,7 @@
                 <a:ea typeface="맑은 고딕" pitchFamily="34" charset="-122"/>
                 <a:cs typeface="맑은 고딕" pitchFamily="34" charset="-120"/>
               </a:rPr>
-              <a:t>8 / 27</a:t>
+              <a:t>8 / 28</a:t>
             </a:r>
             <a:endParaRPr lang="en-US" sz="1100" dirty="0"/>
           </a:p>
@@ -43111,7 +45048,7 @@
                 <a:ea typeface="맑은 고딕" pitchFamily="34" charset="-122"/>
                 <a:cs typeface="맑은 고딕" pitchFamily="34" charset="-120"/>
               </a:rPr>
-              <a:t>9 / 27</a:t>
+              <a:t>9 / 28</a:t>
             </a:r>
             <a:endParaRPr lang="en-US" sz="1100" dirty="0"/>
           </a:p>
@@ -44055,7 +45992,7 @@
                 <a:ea typeface="맑은 고딕" pitchFamily="34" charset="-122"/>
                 <a:cs typeface="맑은 고딕" pitchFamily="34" charset="-120"/>
               </a:rPr>
-              <a:t>산출: 0~10 점수 + 신뢰구간</a:t>
+              <a:t>산출: 0~10 점수 + 불일치 폭</a:t>
             </a:r>
             <a:endParaRPr lang="en-US" sz="1080" dirty="0"/>
           </a:p>

--- a/docs/온국민아이디어등록제_설명자료.pptx
+++ b/docs/온국민아이디어등록제_설명자료.pptx
@@ -33,9 +33,10 @@
     <p:sldId id="281" r:id="rId27"/>
     <p:sldId id="282" r:id="rId28"/>
     <p:sldId id="283" r:id="rId29"/>
+    <p:sldId id="284" r:id="rId30"/>
   </p:sldIdLst>
   <p:notesMasterIdLst>
-    <p:notesMasterId r:id="rId30"/>
+    <p:notesMasterId r:id="rId31"/>
   </p:notesMasterIdLst>
   <p:sldSz cx="9144000" cy="5143500"/>
   <p:notesSz cx="5143500" cy="9144000"/>
@@ -2313,6 +2314,94 @@
             <a:fld id="{F7021451-1387-4CA6-816F-3879F97B5CBC}" type="slidenum">
               <a:rPr lang="en-US"/>
               <a:t>28</a:t>
+            </a:fld>
+            <a:endParaRPr lang="en-US"/>
+          </a:p>
+        </p:txBody>
+      </p:sp>
+    </p:spTree>
+    <p:extLst>
+      <p:ext uri="{BB962C8B-B14F-4D97-AF65-F5344CB8AC3E}">
+        <p14:creationId xmlns:p14="http://schemas.microsoft.com/office/powerpoint/2010/main" val="1024086991"/>
+      </p:ext>
+    </p:extLst>
+  </p:cSld>
+  <p:clrMapOvr>
+    <a:masterClrMapping/>
+  </p:clrMapOvr>
+</p:notes>
+</file>
+
+<file path=ppt/notesSlides/notesSlide29.xml><?xml version="1.0" encoding="utf-8"?>
+<p:notes xmlns:a="http://schemas.openxmlformats.org/drawingml/2006/main" xmlns:r="http://schemas.openxmlformats.org/officeDocument/2006/relationships" xmlns:p="http://schemas.openxmlformats.org/presentationml/2006/main">
+  <p:cSld>
+    <p:spTree>
+      <p:nvGrpSpPr>
+        <p:cNvPr id="1" name=""/>
+        <p:cNvGrpSpPr/>
+        <p:nvPr/>
+      </p:nvGrpSpPr>
+      <p:grpSpPr>
+        <a:xfrm>
+          <a:off x="0" y="0"/>
+          <a:ext cx="0" cy="0"/>
+          <a:chOff x="0" y="0"/>
+          <a:chExt cx="0" cy="0"/>
+        </a:xfrm>
+      </p:grpSpPr>
+      <p:sp>
+        <p:nvSpPr>
+          <p:cNvPr id="2" name="Slide Image Placeholder 1"/>
+          <p:cNvSpPr>
+            <a:spLocks noGrp="1" noRot="1" noChangeAspect="1"/>
+          </p:cNvSpPr>
+          <p:nvPr>
+            <p:ph type="sldImg"/>
+          </p:nvPr>
+        </p:nvSpPr>
+        <p:spPr/>
+      </p:sp>
+      <p:sp>
+        <p:nvSpPr>
+          <p:cNvPr id="3" name="Notes Placeholder 2"/>
+          <p:cNvSpPr>
+            <a:spLocks noGrp="1"/>
+          </p:cNvSpPr>
+          <p:nvPr>
+            <p:ph type="body" idx="1"/>
+          </p:nvPr>
+        </p:nvSpPr>
+        <p:spPr/>
+        <p:txBody>
+          <a:bodyPr/>
+          <a:lstStyle/>
+          <a:p>
+            <a:r>
+              <a:rPr lang="en-US" dirty="0"/>
+              <a:t/>
+            </a:r>
+            <a:endParaRPr lang="en-US" dirty="0"/>
+          </a:p>
+        </p:txBody>
+      </p:sp>
+      <p:sp>
+        <p:nvSpPr>
+          <p:cNvPr id="4" name="Slide Number Placeholder 3"/>
+          <p:cNvSpPr>
+            <a:spLocks noGrp="1"/>
+          </p:cNvSpPr>
+          <p:nvPr>
+            <p:ph type="sldNum" sz="quarter" idx="10"/>
+          </p:nvPr>
+        </p:nvSpPr>
+        <p:spPr/>
+        <p:txBody>
+          <a:bodyPr/>
+          <a:lstStyle/>
+          <a:p>
+            <a:fld id="{F7021451-1387-4CA6-816F-3879F97B5CBC}" type="slidenum">
+              <a:rPr lang="en-US"/>
+              <a:t>29</a:t>
             </a:fld>
             <a:endParaRPr lang="en-US"/>
           </a:p>
@@ -3979,7 +4068,7 @@
                 <a:ea typeface="맑은 고딕" pitchFamily="34" charset="-122"/>
                 <a:cs typeface="맑은 고딕" pitchFamily="34" charset="-120"/>
               </a:rPr>
-              <a:t>10 / 28</a:t>
+              <a:t>10 / 29</a:t>
             </a:r>
             <a:endParaRPr lang="en-US" sz="1100" dirty="0"/>
           </a:p>
@@ -5770,7 +5859,7 @@
                 <a:ea typeface="맑은 고딕" pitchFamily="34" charset="-122"/>
                 <a:cs typeface="맑은 고딕" pitchFamily="34" charset="-120"/>
               </a:rPr>
-              <a:t>11 / 28</a:t>
+              <a:t>11 / 29</a:t>
             </a:r>
             <a:endParaRPr lang="en-US" sz="1100" dirty="0"/>
           </a:p>
@@ -7249,7 +7338,7 @@
                 <a:ea typeface="맑은 고딕" pitchFamily="34" charset="-122"/>
                 <a:cs typeface="맑은 고딕" pitchFamily="34" charset="-120"/>
               </a:rPr>
-              <a:t>12 / 28</a:t>
+              <a:t>12 / 29</a:t>
             </a:r>
             <a:endParaRPr lang="en-US" sz="1100" dirty="0"/>
           </a:p>
@@ -8841,7 +8930,7 @@
                 <a:ea typeface="맑은 고딕" pitchFamily="34" charset="-122"/>
                 <a:cs typeface="맑은 고딕" pitchFamily="34" charset="-120"/>
               </a:rPr>
-              <a:t>13 / 28</a:t>
+              <a:t>13 / 29</a:t>
             </a:r>
             <a:endParaRPr lang="en-US" sz="1100" dirty="0"/>
           </a:p>
@@ -10953,7 +11042,7 @@
                 <a:ea typeface="맑은 고딕" pitchFamily="34" charset="-122"/>
                 <a:cs typeface="맑은 고딕" pitchFamily="34" charset="-120"/>
               </a:rPr>
-              <a:t>14 / 28</a:t>
+              <a:t>14 / 29</a:t>
             </a:r>
             <a:endParaRPr lang="en-US" sz="1100" dirty="0"/>
           </a:p>
@@ -12120,7 +12209,7 @@
                 <a:ea typeface="맑은 고딕" pitchFamily="34" charset="-122"/>
                 <a:cs typeface="맑은 고딕" pitchFamily="34" charset="-120"/>
               </a:rPr>
-              <a:t>15 / 28</a:t>
+              <a:t>15 / 29</a:t>
             </a:r>
             <a:endParaRPr lang="en-US" sz="1100" dirty="0"/>
           </a:p>
@@ -13287,7 +13376,7 @@
                 <a:ea typeface="맑은 고딕" pitchFamily="34" charset="-122"/>
                 <a:cs typeface="맑은 고딕" pitchFamily="34" charset="-120"/>
               </a:rPr>
-              <a:t>16 / 28</a:t>
+              <a:t>16 / 29</a:t>
             </a:r>
             <a:endParaRPr lang="en-US" sz="1100" dirty="0"/>
           </a:p>
@@ -14805,7 +14894,7 @@
                 <a:ea typeface="맑은 고딕" pitchFamily="34" charset="-122"/>
                 <a:cs typeface="맑은 고딕" pitchFamily="34" charset="-120"/>
               </a:rPr>
-              <a:t>17 / 28</a:t>
+              <a:t>17 / 29</a:t>
             </a:r>
             <a:endParaRPr lang="en-US" sz="1100" dirty="0"/>
           </a:p>
@@ -16162,7 +16251,7 @@
                 <a:ea typeface="맑은 고딕" pitchFamily="34" charset="-122"/>
                 <a:cs typeface="맑은 고딕" pitchFamily="34" charset="-120"/>
               </a:rPr>
-              <a:t>18 / 28</a:t>
+              <a:t>18 / 29</a:t>
             </a:r>
             <a:endParaRPr lang="en-US" sz="1100" dirty="0"/>
           </a:p>
@@ -18069,7 +18158,7 @@
                 <a:ea typeface="맑은 고딕" pitchFamily="34" charset="-122"/>
                 <a:cs typeface="맑은 고딕" pitchFamily="34" charset="-120"/>
               </a:rPr>
-              <a:t>19 / 28</a:t>
+              <a:t>19 / 29</a:t>
             </a:r>
             <a:endParaRPr lang="en-US" sz="1100" dirty="0"/>
           </a:p>
@@ -19684,7 +19773,7 @@
                 <a:ea typeface="맑은 고딕" pitchFamily="34" charset="-122"/>
                 <a:cs typeface="맑은 고딕" pitchFamily="34" charset="-120"/>
               </a:rPr>
-              <a:t>2 / 28</a:t>
+              <a:t>2 / 29</a:t>
             </a:r>
             <a:endParaRPr lang="en-US" sz="1100" dirty="0"/>
           </a:p>
@@ -20840,7 +20929,7 @@
                 <a:ea typeface="맑은 고딕" pitchFamily="34" charset="-122"/>
                 <a:cs typeface="맑은 고딕" pitchFamily="34" charset="-120"/>
               </a:rPr>
-              <a:t>20 / 28</a:t>
+              <a:t>20 / 29</a:t>
             </a:r>
             <a:endParaRPr lang="en-US" sz="1100" dirty="0"/>
           </a:p>
@@ -22510,7 +22599,7 @@
                 <a:ea typeface="맑은 고딕" pitchFamily="34" charset="-122"/>
                 <a:cs typeface="맑은 고딕" pitchFamily="34" charset="-120"/>
               </a:rPr>
-              <a:t>21 / 28</a:t>
+              <a:t>21 / 29</a:t>
             </a:r>
             <a:endParaRPr lang="en-US" sz="1100" dirty="0"/>
           </a:p>
@@ -24589,7 +24678,7 @@
                 <a:ea typeface="맑은 고딕" pitchFamily="34" charset="-122"/>
                 <a:cs typeface="맑은 고딕" pitchFamily="34" charset="-120"/>
               </a:rPr>
-              <a:t>22 / 28</a:t>
+              <a:t>22 / 29</a:t>
             </a:r>
             <a:endParaRPr lang="en-US" sz="1100" dirty="0"/>
           </a:p>
@@ -26142,7 +26231,7 @@
                 <a:ea typeface="맑은 고딕" pitchFamily="34" charset="-122"/>
                 <a:cs typeface="맑은 고딕" pitchFamily="34" charset="-120"/>
               </a:rPr>
-              <a:t>23 / 28</a:t>
+              <a:t>23 / 29</a:t>
             </a:r>
             <a:endParaRPr lang="en-US" sz="1100" dirty="0"/>
           </a:p>
@@ -27547,7 +27636,7 @@
                 <a:ea typeface="맑은 고딕" pitchFamily="34" charset="-122"/>
                 <a:cs typeface="맑은 고딕" pitchFamily="34" charset="-120"/>
               </a:rPr>
-              <a:t>24 / 28</a:t>
+              <a:t>24 / 29</a:t>
             </a:r>
             <a:endParaRPr lang="en-US" sz="1100" dirty="0"/>
           </a:p>
@@ -28029,7 +28118,7 @@
                 <a:ea typeface="맑은 고딕" pitchFamily="34" charset="-122"/>
                 <a:cs typeface="맑은 고딕" pitchFamily="34" charset="-120"/>
               </a:rPr>
-              <a:t>판정의 검증 — 확인된 것과 확인되지 않은 것</a:t>
+              <a:t>편향을 구조로 막는다</a:t>
             </a:r>
             <a:endParaRPr lang="en-US" sz="2100" dirty="0"/>
           </a:p>
@@ -28037,24 +28126,63 @@
       </p:sp>
       <p:sp>
         <p:nvSpPr>
-          <p:cNvPr id="20" name="Shape 18"/>
-          <p:cNvSpPr/>
-          <p:nvPr/>
-        </p:nvSpPr>
-        <p:spPr>
-          <a:xfrm>
-            <a:off x="365760" y="1755648"/>
-            <a:ext cx="4114800" cy="2194560"/>
+          <p:cNvPr id="20" name="Text 18"/>
+          <p:cNvSpPr/>
+          <p:nvPr/>
+        </p:nvSpPr>
+        <p:spPr>
+          <a:xfrm>
+            <a:off x="365760" y="1719072"/>
+            <a:ext cx="8412480" cy="274320"/>
+          </a:xfrm>
+          <a:prstGeom prst="rect">
+            <a:avLst/>
+          </a:prstGeom>
+          <a:noFill/>
+          <a:ln/>
+        </p:spPr>
+        <p:txBody>
+          <a:bodyPr wrap="square" lIns="0" tIns="0" rIns="0" bIns="0" rtlCol="0" anchor="ctr"/>
+          <a:lstStyle/>
+          <a:p>
+            <a:pPr indent="0" marL="0">
+              <a:buNone/>
+            </a:pPr>
+            <a:r>
+              <a:rPr lang="en-US" sz="1150" dirty="0">
+                <a:solidFill>
+                  <a:srgbClr val="64748B"/>
+                </a:solidFill>
+                <a:latin typeface="맑은 고딕" pitchFamily="34" charset="0"/>
+                <a:ea typeface="맑은 고딕" pitchFamily="34" charset="-122"/>
+                <a:cs typeface="맑은 고딕" pitchFamily="34" charset="-120"/>
+              </a:rPr>
+              <a:t>"공정하게 하겠다"는 다짐이 아니라, 편향이 물리적으로 불가능하도록 역할과 절차를 나눴습니다.</a:t>
+            </a:r>
+            <a:endParaRPr lang="en-US" sz="1150" dirty="0"/>
+          </a:p>
+        </p:txBody>
+      </p:sp>
+      <p:sp>
+        <p:nvSpPr>
+          <p:cNvPr id="21" name="Shape 19"/>
+          <p:cNvSpPr/>
+          <p:nvPr/>
+        </p:nvSpPr>
+        <p:spPr>
+          <a:xfrm>
+            <a:off x="365760" y="2103120"/>
+            <a:ext cx="2011680" cy="2103120"/>
           </a:xfrm>
           <a:prstGeom prst="rect">
             <a:avLst/>
           </a:prstGeom>
           <a:solidFill>
-            <a:srgbClr val="F0F9F3"/>
+            <a:srgbClr val="FFFFFF"/>
           </a:solidFill>
-          <a:ln w="15240">
+          <a:ln w="12700">
             <a:solidFill>
-              <a:srgbClr val="2E7D4F"/>
+              <a:srgbClr val="E5E7EB"/>
             </a:solidFill>
             <a:prstDash val="solid"/>
           </a:ln>
@@ -28069,69 +28197,92 @@
       </p:sp>
       <p:sp>
         <p:nvSpPr>
-          <p:cNvPr id="21" name="Text 19"/>
-          <p:cNvSpPr/>
-          <p:nvPr/>
-        </p:nvSpPr>
-        <p:spPr>
-          <a:xfrm>
-            <a:off x="530352" y="1865376"/>
-            <a:ext cx="3749040" cy="274320"/>
-          </a:xfrm>
-          <a:prstGeom prst="rect">
-            <a:avLst/>
-          </a:prstGeom>
-          <a:noFill/>
-          <a:ln/>
-        </p:spPr>
-        <p:txBody>
-          <a:bodyPr wrap="square" lIns="0" tIns="0" rIns="0" bIns="0" rtlCol="0" anchor="ctr"/>
-          <a:lstStyle/>
-          <a:p>
-            <a:pPr indent="0" marL="0">
-              <a:buNone/>
-            </a:pPr>
-            <a:r>
-              <a:rPr lang="en-US" sz="1350" b="1" dirty="0">
-                <a:solidFill>
-                  <a:srgbClr val="2E7D4F"/>
-                </a:solidFill>
-                <a:latin typeface="맑은 고딕" pitchFamily="34" charset="0"/>
-                <a:ea typeface="맑은 고딕" pitchFamily="34" charset="-122"/>
-                <a:cs typeface="맑은 고딕" pitchFamily="34" charset="-120"/>
-              </a:rPr>
-              <a:t>확인된 것</a:t>
-            </a:r>
-            <a:endParaRPr lang="en-US" sz="1350" dirty="0"/>
-          </a:p>
-        </p:txBody>
-      </p:sp>
-      <p:sp>
-        <p:nvSpPr>
-          <p:cNvPr id="22" name="Text 20"/>
-          <p:cNvSpPr/>
-          <p:nvPr/>
-        </p:nvSpPr>
-        <p:spPr>
-          <a:xfrm>
-            <a:off x="530352" y="2176272"/>
-            <a:ext cx="3749040" cy="237744"/>
-          </a:xfrm>
-          <a:prstGeom prst="rect">
-            <a:avLst/>
-          </a:prstGeom>
-          <a:noFill/>
-          <a:ln/>
-        </p:spPr>
-        <p:txBody>
-          <a:bodyPr wrap="square" lIns="0" tIns="0" rIns="0" bIns="0" rtlCol="0" anchor="ctr"/>
-          <a:lstStyle/>
-          <a:p>
-            <a:pPr indent="0" marL="0">
-              <a:buNone/>
-            </a:pPr>
-            <a:r>
-              <a:rPr lang="en-US" sz="1050" b="1" dirty="0">
+          <p:cNvPr id="22" name="Shape 20"/>
+          <p:cNvSpPr/>
+          <p:nvPr/>
+        </p:nvSpPr>
+        <p:spPr>
+          <a:xfrm>
+            <a:off x="365760" y="2103120"/>
+            <a:ext cx="2011680" cy="365760"/>
+          </a:xfrm>
+          <a:prstGeom prst="rect">
+            <a:avLst/>
+          </a:prstGeom>
+          <a:solidFill>
+            <a:srgbClr val="2563EB"/>
+          </a:solidFill>
+          <a:ln/>
+        </p:spPr>
+      </p:sp>
+      <p:sp>
+        <p:nvSpPr>
+          <p:cNvPr id="23" name="Text 21"/>
+          <p:cNvSpPr/>
+          <p:nvPr/>
+        </p:nvSpPr>
+        <p:spPr>
+          <a:xfrm>
+            <a:off x="365760" y="2103120"/>
+            <a:ext cx="2011680" cy="365760"/>
+          </a:xfrm>
+          <a:prstGeom prst="rect">
+            <a:avLst/>
+          </a:prstGeom>
+          <a:noFill/>
+          <a:ln/>
+        </p:spPr>
+        <p:txBody>
+          <a:bodyPr wrap="square" lIns="0" tIns="0" rIns="0" bIns="0" rtlCol="0" anchor="ctr"/>
+          <a:lstStyle/>
+          <a:p>
+            <a:pPr algn="ctr" indent="0" marL="0">
+              <a:buNone/>
+            </a:pPr>
+            <a:r>
+              <a:rPr lang="en-US" sz="1150" b="1" dirty="0">
+                <a:solidFill>
+                  <a:srgbClr val="FFFFFF"/>
+                </a:solidFill>
+                <a:latin typeface="맑은 고딕" pitchFamily="34" charset="0"/>
+                <a:ea typeface="맑은 고딕" pitchFamily="34" charset="-122"/>
+                <a:cs typeface="맑은 고딕" pitchFamily="34" charset="-120"/>
+              </a:rPr>
+              <a:t>①  역할 분리</a:t>
+            </a:r>
+            <a:endParaRPr lang="en-US" sz="1150" dirty="0"/>
+          </a:p>
+        </p:txBody>
+      </p:sp>
+      <p:sp>
+        <p:nvSpPr>
+          <p:cNvPr id="24" name="Text 22"/>
+          <p:cNvSpPr/>
+          <p:nvPr/>
+        </p:nvSpPr>
+        <p:spPr>
+          <a:xfrm>
+            <a:off x="457200" y="2578608"/>
+            <a:ext cx="1828800" cy="548640"/>
+          </a:xfrm>
+          <a:prstGeom prst="rect">
+            <a:avLst/>
+          </a:prstGeom>
+          <a:noFill/>
+          <a:ln/>
+        </p:spPr>
+        <p:txBody>
+          <a:bodyPr wrap="square" lIns="0" tIns="0" rIns="0" bIns="0" rtlCol="0" anchor="ctr"/>
+          <a:lstStyle/>
+          <a:p>
+            <a:pPr algn="ctr" indent="0" marL="0">
+              <a:lnSpc>
+                <a:spcPct val="120000"/>
+              </a:lnSpc>
+              <a:buNone/>
+            </a:pPr>
+            <a:r>
+              <a:rPr lang="en-US" sz="1100" b="1" dirty="0">
                 <a:solidFill>
                   <a:srgbClr val="1E293B"/>
                 </a:solidFill>
@@ -28139,128 +28290,51 @@
                 <a:ea typeface="맑은 고딕" pitchFamily="34" charset="-122"/>
                 <a:cs typeface="맑은 고딕" pitchFamily="34" charset="-120"/>
               </a:rPr>
-              <a:t>판별력 시험 (n = 10)</a:t>
-            </a:r>
-            <a:endParaRPr lang="en-US" sz="1050" dirty="0"/>
-          </a:p>
-        </p:txBody>
-      </p:sp>
-      <p:sp>
-        <p:nvSpPr>
-          <p:cNvPr id="23" name="Text 21"/>
-          <p:cNvSpPr/>
-          <p:nvPr/>
-        </p:nvSpPr>
-        <p:spPr>
-          <a:xfrm>
-            <a:off x="566928" y="2450592"/>
-            <a:ext cx="2286000" cy="256032"/>
-          </a:xfrm>
-          <a:prstGeom prst="rect">
-            <a:avLst/>
-          </a:prstGeom>
-          <a:noFill/>
-          <a:ln/>
-        </p:spPr>
-        <p:txBody>
-          <a:bodyPr wrap="square" lIns="0" tIns="0" rIns="0" bIns="0" rtlCol="0" anchor="ctr"/>
-          <a:lstStyle/>
-          <a:p>
-            <a:pPr indent="0" marL="0">
-              <a:buNone/>
-            </a:pPr>
-            <a:r>
-              <a:rPr lang="en-US" sz="1000" dirty="0">
-                <a:solidFill>
-                  <a:srgbClr val="333333"/>
-                </a:solidFill>
-                <a:latin typeface="맑은 고딕" pitchFamily="34" charset="0"/>
-                <a:ea typeface="맑은 고딕" pitchFamily="34" charset="-122"/>
-                <a:cs typeface="맑은 고딕" pitchFamily="34" charset="-120"/>
-              </a:rPr>
-              <a:t>진부 아이디어 5건</a:t>
-            </a:r>
-            <a:endParaRPr lang="en-US" sz="1000" dirty="0"/>
-          </a:p>
-        </p:txBody>
-      </p:sp>
-      <p:sp>
-        <p:nvSpPr>
-          <p:cNvPr id="24" name="Text 22"/>
-          <p:cNvSpPr/>
-          <p:nvPr/>
-        </p:nvSpPr>
-        <p:spPr>
-          <a:xfrm>
-            <a:off x="2926080" y="2450592"/>
-            <a:ext cx="1371600" cy="256032"/>
-          </a:xfrm>
-          <a:prstGeom prst="rect">
-            <a:avLst/>
-          </a:prstGeom>
-          <a:noFill/>
-          <a:ln/>
-        </p:spPr>
-        <p:txBody>
-          <a:bodyPr wrap="square" lIns="0" tIns="0" rIns="0" bIns="0" rtlCol="0" anchor="ctr"/>
-          <a:lstStyle/>
-          <a:p>
-            <a:pPr algn="r" indent="0" marL="0">
-              <a:buNone/>
-            </a:pPr>
-            <a:r>
-              <a:rPr lang="en-US" sz="1000" b="1" dirty="0">
-                <a:solidFill>
-                  <a:srgbClr val="2E7D4F"/>
-                </a:solidFill>
-                <a:latin typeface="맑은 고딕" pitchFamily="34" charset="0"/>
-                <a:ea typeface="맑은 고딕" pitchFamily="34" charset="-122"/>
-                <a:cs typeface="맑은 고딕" pitchFamily="34" charset="-120"/>
-              </a:rPr>
-              <a:t>평균 4.23</a:t>
-            </a:r>
-            <a:endParaRPr lang="en-US" sz="1000" dirty="0"/>
-          </a:p>
-        </p:txBody>
-      </p:sp>
-      <p:sp>
-        <p:nvSpPr>
-          <p:cNvPr id="25" name="Text 23"/>
-          <p:cNvSpPr/>
-          <p:nvPr/>
-        </p:nvSpPr>
-        <p:spPr>
-          <a:xfrm>
-            <a:off x="566928" y="2724912"/>
-            <a:ext cx="2286000" cy="256032"/>
-          </a:xfrm>
-          <a:prstGeom prst="rect">
-            <a:avLst/>
-          </a:prstGeom>
-          <a:noFill/>
-          <a:ln/>
-        </p:spPr>
-        <p:txBody>
-          <a:bodyPr wrap="square" lIns="0" tIns="0" rIns="0" bIns="0" rtlCol="0" anchor="ctr"/>
-          <a:lstStyle/>
-          <a:p>
-            <a:pPr indent="0" marL="0">
-              <a:buNone/>
-            </a:pPr>
-            <a:r>
-              <a:rPr lang="en-US" sz="1000" dirty="0">
-                <a:solidFill>
-                  <a:srgbClr val="333333"/>
-                </a:solidFill>
-                <a:latin typeface="맑은 고딕" pitchFamily="34" charset="0"/>
-                <a:ea typeface="맑은 고딕" pitchFamily="34" charset="-122"/>
-                <a:cs typeface="맑은 고딕" pitchFamily="34" charset="-120"/>
-              </a:rPr>
-              <a:t>창의 아이디어 5건</a:t>
-            </a:r>
-            <a:endParaRPr lang="en-US" sz="1000" dirty="0"/>
-          </a:p>
-        </p:txBody>
+              <a:t>질문자는</a:t>
+            </a:r>
+            <a:endParaRPr lang="en-US" sz="1100" dirty="0"/>
+          </a:p>
+          <a:p>
+            <a:pPr algn="ctr" indent="0" marL="0">
+              <a:lnSpc>
+                <a:spcPct val="120000"/>
+              </a:lnSpc>
+              <a:buNone/>
+            </a:pPr>
+            <a:r>
+              <a:rPr lang="en-US" sz="1100" b="1" dirty="0">
+                <a:solidFill>
+                  <a:srgbClr val="1E293B"/>
+                </a:solidFill>
+                <a:latin typeface="맑은 고딕" pitchFamily="34" charset="0"/>
+                <a:ea typeface="맑은 고딕" pitchFamily="34" charset="-122"/>
+                <a:cs typeface="맑은 고딕" pitchFamily="34" charset="-120"/>
+              </a:rPr>
+              <a:t>점수를 모른다</a:t>
+            </a:r>
+            <a:endParaRPr lang="en-US" sz="1100" dirty="0"/>
+          </a:p>
+        </p:txBody>
+      </p:sp>
+      <p:sp>
+        <p:nvSpPr>
+          <p:cNvPr id="25" name="Shape 23"/>
+          <p:cNvSpPr/>
+          <p:nvPr/>
+        </p:nvSpPr>
+        <p:spPr>
+          <a:xfrm>
+            <a:off x="594360" y="3200400"/>
+            <a:ext cx="1554480" cy="10973"/>
+          </a:xfrm>
+          <a:prstGeom prst="rect">
+            <a:avLst/>
+          </a:prstGeom>
+          <a:solidFill>
+            <a:srgbClr val="E5E7EB"/>
+          </a:solidFill>
+          <a:ln/>
+        </p:spPr>
       </p:sp>
       <p:sp>
         <p:nvSpPr>
@@ -28270,213 +28344,100 @@
         </p:nvSpPr>
         <p:spPr>
           <a:xfrm>
-            <a:off x="2926080" y="2724912"/>
-            <a:ext cx="1371600" cy="256032"/>
-          </a:xfrm>
-          <a:prstGeom prst="rect">
-            <a:avLst/>
-          </a:prstGeom>
-          <a:noFill/>
-          <a:ln/>
-        </p:spPr>
-        <p:txBody>
-          <a:bodyPr wrap="square" lIns="0" tIns="0" rIns="0" bIns="0" rtlCol="0" anchor="ctr"/>
-          <a:lstStyle/>
-          <a:p>
-            <a:pPr algn="r" indent="0" marL="0">
-              <a:buNone/>
-            </a:pPr>
-            <a:r>
-              <a:rPr lang="en-US" sz="1000" b="1" dirty="0">
-                <a:solidFill>
-                  <a:srgbClr val="2E7D4F"/>
-                </a:solidFill>
-                <a:latin typeface="맑은 고딕" pitchFamily="34" charset="0"/>
-                <a:ea typeface="맑은 고딕" pitchFamily="34" charset="-122"/>
-                <a:cs typeface="맑은 고딕" pitchFamily="34" charset="-120"/>
-              </a:rPr>
-              <a:t>평균 8.50</a:t>
-            </a:r>
-            <a:endParaRPr lang="en-US" sz="1000" dirty="0"/>
-          </a:p>
-        </p:txBody>
-      </p:sp>
-      <p:sp>
-        <p:nvSpPr>
-          <p:cNvPr id="27" name="Text 25"/>
-          <p:cNvSpPr/>
-          <p:nvPr/>
-        </p:nvSpPr>
-        <p:spPr>
-          <a:xfrm>
-            <a:off x="566928" y="2999232"/>
-            <a:ext cx="2286000" cy="256032"/>
-          </a:xfrm>
-          <a:prstGeom prst="rect">
-            <a:avLst/>
-          </a:prstGeom>
-          <a:noFill/>
-          <a:ln/>
-        </p:spPr>
-        <p:txBody>
-          <a:bodyPr wrap="square" lIns="0" tIns="0" rIns="0" bIns="0" rtlCol="0" anchor="ctr"/>
-          <a:lstStyle/>
-          <a:p>
-            <a:pPr indent="0" marL="0">
-              <a:buNone/>
-            </a:pPr>
-            <a:r>
-              <a:rPr lang="en-US" sz="1000" dirty="0">
-                <a:solidFill>
-                  <a:srgbClr val="333333"/>
-                </a:solidFill>
-                <a:latin typeface="맑은 고딕" pitchFamily="34" charset="0"/>
-                <a:ea typeface="맑은 고딕" pitchFamily="34" charset="-122"/>
-                <a:cs typeface="맑은 고딕" pitchFamily="34" charset="-120"/>
-              </a:rPr>
-              <a:t>두 그룹 분포 겹침</a:t>
-            </a:r>
-            <a:endParaRPr lang="en-US" sz="1000" dirty="0"/>
-          </a:p>
-        </p:txBody>
-      </p:sp>
-      <p:sp>
-        <p:nvSpPr>
-          <p:cNvPr id="28" name="Text 26"/>
-          <p:cNvSpPr/>
-          <p:nvPr/>
-        </p:nvSpPr>
-        <p:spPr>
-          <a:xfrm>
-            <a:off x="2926080" y="2999232"/>
-            <a:ext cx="1371600" cy="256032"/>
-          </a:xfrm>
-          <a:prstGeom prst="rect">
-            <a:avLst/>
-          </a:prstGeom>
-          <a:noFill/>
-          <a:ln/>
-        </p:spPr>
-        <p:txBody>
-          <a:bodyPr wrap="square" lIns="0" tIns="0" rIns="0" bIns="0" rtlCol="0" anchor="ctr"/>
-          <a:lstStyle/>
-          <a:p>
-            <a:pPr algn="r" indent="0" marL="0">
-              <a:buNone/>
-            </a:pPr>
-            <a:r>
-              <a:rPr lang="en-US" sz="1000" b="1" dirty="0">
-                <a:solidFill>
-                  <a:srgbClr val="2E7D4F"/>
-                </a:solidFill>
-                <a:latin typeface="맑은 고딕" pitchFamily="34" charset="0"/>
-                <a:ea typeface="맑은 고딕" pitchFamily="34" charset="-122"/>
-                <a:cs typeface="맑은 고딕" pitchFamily="34" charset="-120"/>
-              </a:rPr>
-              <a:t>없음</a:t>
-            </a:r>
-            <a:endParaRPr lang="en-US" sz="1000" dirty="0"/>
-          </a:p>
-        </p:txBody>
-      </p:sp>
-      <p:sp>
-        <p:nvSpPr>
-          <p:cNvPr id="29" name="Text 27"/>
-          <p:cNvSpPr/>
-          <p:nvPr/>
-        </p:nvSpPr>
-        <p:spPr>
-          <a:xfrm>
-            <a:off x="530352" y="3310128"/>
-            <a:ext cx="3749040" cy="237744"/>
-          </a:xfrm>
-          <a:prstGeom prst="rect">
-            <a:avLst/>
-          </a:prstGeom>
-          <a:noFill/>
-          <a:ln/>
-        </p:spPr>
-        <p:txBody>
-          <a:bodyPr wrap="square" lIns="0" tIns="0" rIns="0" bIns="0" rtlCol="0" anchor="ctr"/>
-          <a:lstStyle/>
-          <a:p>
-            <a:pPr indent="0" marL="0">
-              <a:buNone/>
-            </a:pPr>
-            <a:r>
-              <a:rPr lang="en-US" sz="1050" b="1" dirty="0">
-                <a:solidFill>
-                  <a:srgbClr val="1E293B"/>
-                </a:solidFill>
-                <a:latin typeface="맑은 고딕" pitchFamily="34" charset="0"/>
-                <a:ea typeface="맑은 고딕" pitchFamily="34" charset="-122"/>
-                <a:cs typeface="맑은 고딕" pitchFamily="34" charset="-120"/>
-              </a:rPr>
-              <a:t>두 채점 간 불일치 (30건 기준)</a:t>
-            </a:r>
-            <a:endParaRPr lang="en-US" sz="1050" dirty="0"/>
-          </a:p>
-        </p:txBody>
-      </p:sp>
-      <p:sp>
-        <p:nvSpPr>
-          <p:cNvPr id="30" name="Text 28"/>
-          <p:cNvSpPr/>
-          <p:nvPr/>
-        </p:nvSpPr>
-        <p:spPr>
-          <a:xfrm>
-            <a:off x="566928" y="3566160"/>
-            <a:ext cx="3749040" cy="237744"/>
-          </a:xfrm>
-          <a:prstGeom prst="rect">
-            <a:avLst/>
-          </a:prstGeom>
-          <a:noFill/>
-          <a:ln/>
-        </p:spPr>
-        <p:txBody>
-          <a:bodyPr wrap="square" lIns="0" tIns="0" rIns="0" bIns="0" rtlCol="0" anchor="ctr"/>
-          <a:lstStyle/>
-          <a:p>
-            <a:pPr indent="0" marL="0">
-              <a:buNone/>
-            </a:pPr>
-            <a:r>
-              <a:rPr lang="en-US" sz="1000" dirty="0">
-                <a:solidFill>
-                  <a:srgbClr val="333333"/>
-                </a:solidFill>
-                <a:latin typeface="맑은 고딕" pitchFamily="34" charset="0"/>
-                <a:ea typeface="맑은 고딕" pitchFamily="34" charset="-122"/>
-                <a:cs typeface="맑은 고딕" pitchFamily="34" charset="-120"/>
-              </a:rPr>
-              <a:t>평균 절대차 2.03점 · 3점 이상 괴리 7건</a:t>
-            </a:r>
-            <a:endParaRPr lang="en-US" sz="1000" dirty="0"/>
-          </a:p>
-        </p:txBody>
-      </p:sp>
-      <p:sp>
-        <p:nvSpPr>
-          <p:cNvPr id="31" name="Shape 29"/>
-          <p:cNvSpPr/>
-          <p:nvPr/>
-        </p:nvSpPr>
-        <p:spPr>
-          <a:xfrm>
-            <a:off x="4663440" y="1755648"/>
-            <a:ext cx="4114800" cy="2194560"/>
+            <a:off x="457200" y="3310128"/>
+            <a:ext cx="1828800" cy="777240"/>
+          </a:xfrm>
+          <a:prstGeom prst="rect">
+            <a:avLst/>
+          </a:prstGeom>
+          <a:noFill/>
+          <a:ln/>
+        </p:spPr>
+        <p:txBody>
+          <a:bodyPr wrap="square" lIns="0" tIns="0" rIns="0" bIns="0" rtlCol="0" anchor="ctr"/>
+          <a:lstStyle/>
+          <a:p>
+            <a:pPr algn="ctr" indent="0" marL="0">
+              <a:lnSpc>
+                <a:spcPct val="125000"/>
+              </a:lnSpc>
+              <a:buNone/>
+            </a:pPr>
+            <a:r>
+              <a:rPr lang="en-US" sz="920" dirty="0">
+                <a:solidFill>
+                  <a:srgbClr val="64748B"/>
+                </a:solidFill>
+                <a:latin typeface="맑은 고딕" pitchFamily="34" charset="0"/>
+                <a:ea typeface="맑은 고딕" pitchFamily="34" charset="-122"/>
+                <a:cs typeface="맑은 고딕" pitchFamily="34" charset="-120"/>
+              </a:rPr>
+              <a:t>질문자에게 채점 기준을</a:t>
+            </a:r>
+            <a:endParaRPr lang="en-US" sz="920" dirty="0"/>
+          </a:p>
+          <a:p>
+            <a:pPr algn="ctr" indent="0" marL="0">
+              <a:lnSpc>
+                <a:spcPct val="125000"/>
+              </a:lnSpc>
+              <a:buNone/>
+            </a:pPr>
+            <a:r>
+              <a:rPr lang="en-US" sz="920" dirty="0">
+                <a:solidFill>
+                  <a:srgbClr val="64748B"/>
+                </a:solidFill>
+                <a:latin typeface="맑은 고딕" pitchFamily="34" charset="0"/>
+                <a:ea typeface="맑은 고딕" pitchFamily="34" charset="-122"/>
+                <a:cs typeface="맑은 고딕" pitchFamily="34" charset="-120"/>
+              </a:rPr>
+              <a:t>주지 않는다 — 점수를 향해</a:t>
+            </a:r>
+            <a:endParaRPr lang="en-US" sz="920" dirty="0"/>
+          </a:p>
+          <a:p>
+            <a:pPr algn="ctr" indent="0" marL="0">
+              <a:lnSpc>
+                <a:spcPct val="125000"/>
+              </a:lnSpc>
+              <a:buNone/>
+            </a:pPr>
+            <a:r>
+              <a:rPr lang="en-US" sz="920" dirty="0">
+                <a:solidFill>
+                  <a:srgbClr val="64748B"/>
+                </a:solidFill>
+                <a:latin typeface="맑은 고딕" pitchFamily="34" charset="0"/>
+                <a:ea typeface="맑은 고딕" pitchFamily="34" charset="-122"/>
+                <a:cs typeface="맑은 고딕" pitchFamily="34" charset="-120"/>
+              </a:rPr>
+              <a:t>유도할 수 없다</a:t>
+            </a:r>
+            <a:endParaRPr lang="en-US" sz="920" dirty="0"/>
+          </a:p>
+        </p:txBody>
+      </p:sp>
+      <p:sp>
+        <p:nvSpPr>
+          <p:cNvPr id="27" name="Shape 25"/>
+          <p:cNvSpPr/>
+          <p:nvPr/>
+        </p:nvSpPr>
+        <p:spPr>
+          <a:xfrm>
+            <a:off x="2551176" y="2103120"/>
+            <a:ext cx="2011680" cy="2103120"/>
           </a:xfrm>
           <a:prstGeom prst="rect">
             <a:avLst/>
           </a:prstGeom>
           <a:solidFill>
-            <a:srgbClr val="FDF2F2"/>
+            <a:srgbClr val="FFFFFF"/>
           </a:solidFill>
-          <a:ln w="15240">
+          <a:ln w="12700">
             <a:solidFill>
-              <a:srgbClr val="F0C0C0"/>
+              <a:srgbClr val="E5E7EB"/>
             </a:solidFill>
             <a:prstDash val="solid"/>
           </a:ln>
@@ -28491,449 +28452,243 @@
       </p:sp>
       <p:sp>
         <p:nvSpPr>
+          <p:cNvPr id="28" name="Shape 26"/>
+          <p:cNvSpPr/>
+          <p:nvPr/>
+        </p:nvSpPr>
+        <p:spPr>
+          <a:xfrm>
+            <a:off x="2551176" y="2103120"/>
+            <a:ext cx="2011680" cy="365760"/>
+          </a:xfrm>
+          <a:prstGeom prst="rect">
+            <a:avLst/>
+          </a:prstGeom>
+          <a:solidFill>
+            <a:srgbClr val="2563EB"/>
+          </a:solidFill>
+          <a:ln/>
+        </p:spPr>
+      </p:sp>
+      <p:sp>
+        <p:nvSpPr>
+          <p:cNvPr id="29" name="Text 27"/>
+          <p:cNvSpPr/>
+          <p:nvPr/>
+        </p:nvSpPr>
+        <p:spPr>
+          <a:xfrm>
+            <a:off x="2551176" y="2103120"/>
+            <a:ext cx="2011680" cy="365760"/>
+          </a:xfrm>
+          <a:prstGeom prst="rect">
+            <a:avLst/>
+          </a:prstGeom>
+          <a:noFill/>
+          <a:ln/>
+        </p:spPr>
+        <p:txBody>
+          <a:bodyPr wrap="square" lIns="0" tIns="0" rIns="0" bIns="0" rtlCol="0" anchor="ctr"/>
+          <a:lstStyle/>
+          <a:p>
+            <a:pPr algn="ctr" indent="0" marL="0">
+              <a:buNone/>
+            </a:pPr>
+            <a:r>
+              <a:rPr lang="en-US" sz="1150" b="1" dirty="0">
+                <a:solidFill>
+                  <a:srgbClr val="FFFFFF"/>
+                </a:solidFill>
+                <a:latin typeface="맑은 고딕" pitchFamily="34" charset="0"/>
+                <a:ea typeface="맑은 고딕" pitchFamily="34" charset="-122"/>
+                <a:cs typeface="맑은 고딕" pitchFamily="34" charset="-120"/>
+              </a:rPr>
+              <a:t>②  근거 인용 강제</a:t>
+            </a:r>
+            <a:endParaRPr lang="en-US" sz="1150" dirty="0"/>
+          </a:p>
+        </p:txBody>
+      </p:sp>
+      <p:sp>
+        <p:nvSpPr>
+          <p:cNvPr id="30" name="Text 28"/>
+          <p:cNvSpPr/>
+          <p:nvPr/>
+        </p:nvSpPr>
+        <p:spPr>
+          <a:xfrm>
+            <a:off x="2642616" y="2578608"/>
+            <a:ext cx="1828800" cy="548640"/>
+          </a:xfrm>
+          <a:prstGeom prst="rect">
+            <a:avLst/>
+          </a:prstGeom>
+          <a:noFill/>
+          <a:ln/>
+        </p:spPr>
+        <p:txBody>
+          <a:bodyPr wrap="square" lIns="0" tIns="0" rIns="0" bIns="0" rtlCol="0" anchor="ctr"/>
+          <a:lstStyle/>
+          <a:p>
+            <a:pPr algn="ctr" indent="0" marL="0">
+              <a:lnSpc>
+                <a:spcPct val="120000"/>
+              </a:lnSpc>
+              <a:buNone/>
+            </a:pPr>
+            <a:r>
+              <a:rPr lang="en-US" sz="1100" b="1" dirty="0">
+                <a:solidFill>
+                  <a:srgbClr val="1E293B"/>
+                </a:solidFill>
+                <a:latin typeface="맑은 고딕" pitchFamily="34" charset="0"/>
+                <a:ea typeface="맑은 고딕" pitchFamily="34" charset="-122"/>
+                <a:cs typeface="맑은 고딕" pitchFamily="34" charset="-120"/>
+              </a:rPr>
+              <a:t>인용 없으면</a:t>
+            </a:r>
+            <a:endParaRPr lang="en-US" sz="1100" dirty="0"/>
+          </a:p>
+          <a:p>
+            <a:pPr algn="ctr" indent="0" marL="0">
+              <a:lnSpc>
+                <a:spcPct val="120000"/>
+              </a:lnSpc>
+              <a:buNone/>
+            </a:pPr>
+            <a:r>
+              <a:rPr lang="en-US" sz="1100" b="1" dirty="0">
+                <a:solidFill>
+                  <a:srgbClr val="1E293B"/>
+                </a:solidFill>
+                <a:latin typeface="맑은 고딕" pitchFamily="34" charset="0"/>
+                <a:ea typeface="맑은 고딕" pitchFamily="34" charset="-122"/>
+                <a:cs typeface="맑은 고딕" pitchFamily="34" charset="-120"/>
+              </a:rPr>
+              <a:t>자동 불충족</a:t>
+            </a:r>
+            <a:endParaRPr lang="en-US" sz="1100" dirty="0"/>
+          </a:p>
+        </p:txBody>
+      </p:sp>
+      <p:sp>
+        <p:nvSpPr>
+          <p:cNvPr id="31" name="Shape 29"/>
+          <p:cNvSpPr/>
+          <p:nvPr/>
+        </p:nvSpPr>
+        <p:spPr>
+          <a:xfrm>
+            <a:off x="2779776" y="3200400"/>
+            <a:ext cx="1554480" cy="10973"/>
+          </a:xfrm>
+          <a:prstGeom prst="rect">
+            <a:avLst/>
+          </a:prstGeom>
+          <a:solidFill>
+            <a:srgbClr val="E5E7EB"/>
+          </a:solidFill>
+          <a:ln/>
+        </p:spPr>
+      </p:sp>
+      <p:sp>
+        <p:nvSpPr>
           <p:cNvPr id="32" name="Text 30"/>
           <p:cNvSpPr/>
           <p:nvPr/>
         </p:nvSpPr>
         <p:spPr>
           <a:xfrm>
-            <a:off x="4828032" y="1865376"/>
-            <a:ext cx="3749040" cy="274320"/>
-          </a:xfrm>
-          <a:prstGeom prst="rect">
-            <a:avLst/>
-          </a:prstGeom>
-          <a:noFill/>
-          <a:ln/>
-        </p:spPr>
-        <p:txBody>
-          <a:bodyPr wrap="square" lIns="0" tIns="0" rIns="0" bIns="0" rtlCol="0" anchor="ctr"/>
-          <a:lstStyle/>
-          <a:p>
-            <a:pPr indent="0" marL="0">
-              <a:buNone/>
-            </a:pPr>
-            <a:r>
-              <a:rPr lang="en-US" sz="1350" b="1" dirty="0">
-                <a:solidFill>
-                  <a:srgbClr val="C0392B"/>
-                </a:solidFill>
-                <a:latin typeface="맑은 고딕" pitchFamily="34" charset="0"/>
-                <a:ea typeface="맑은 고딕" pitchFamily="34" charset="-122"/>
-                <a:cs typeface="맑은 고딕" pitchFamily="34" charset="-120"/>
-              </a:rPr>
-              <a:t>확인되지 않은 것</a:t>
-            </a:r>
-            <a:endParaRPr lang="en-US" sz="1350" dirty="0"/>
-          </a:p>
-        </p:txBody>
-      </p:sp>
-      <p:sp>
-        <p:nvSpPr>
-          <p:cNvPr id="33" name="Text 31"/>
-          <p:cNvSpPr/>
-          <p:nvPr/>
-        </p:nvSpPr>
-        <p:spPr>
-          <a:xfrm>
-            <a:off x="4846320" y="2212848"/>
-            <a:ext cx="128016" cy="329184"/>
-          </a:xfrm>
-          <a:prstGeom prst="rect">
-            <a:avLst/>
-          </a:prstGeom>
-          <a:noFill/>
-          <a:ln/>
-        </p:spPr>
-        <p:txBody>
-          <a:bodyPr wrap="square" lIns="0" tIns="0" rIns="0" bIns="0" rtlCol="0" anchor="t"/>
-          <a:lstStyle/>
-          <a:p>
-            <a:pPr indent="0" marL="0">
-              <a:buNone/>
-            </a:pPr>
-            <a:r>
-              <a:rPr lang="en-US" sz="1030" dirty="0">
-                <a:solidFill>
-                  <a:srgbClr val="2563EB"/>
-                </a:solidFill>
-                <a:latin typeface="맑은 고딕" pitchFamily="34" charset="0"/>
-                <a:ea typeface="맑은 고딕" pitchFamily="34" charset="-122"/>
-                <a:cs typeface="맑은 고딕" pitchFamily="34" charset="-120"/>
-              </a:rPr>
-              <a:t>•</a:t>
-            </a:r>
-            <a:endParaRPr lang="en-US" sz="1030" dirty="0"/>
-          </a:p>
-        </p:txBody>
-      </p:sp>
-      <p:sp>
-        <p:nvSpPr>
-          <p:cNvPr id="34" name="Text 32"/>
-          <p:cNvSpPr/>
-          <p:nvPr/>
-        </p:nvSpPr>
-        <p:spPr>
-          <a:xfrm>
-            <a:off x="4983480" y="2212848"/>
-            <a:ext cx="3657600" cy="329184"/>
-          </a:xfrm>
-          <a:prstGeom prst="rect">
-            <a:avLst/>
-          </a:prstGeom>
-          <a:noFill/>
-          <a:ln/>
-        </p:spPr>
-        <p:txBody>
-          <a:bodyPr wrap="square" lIns="0" tIns="0" rIns="0" bIns="0" rtlCol="0" anchor="t"/>
-          <a:lstStyle/>
-          <a:p>
-            <a:pPr indent="0" marL="0">
-              <a:buNone/>
-            </a:pPr>
-            <a:r>
-              <a:rPr lang="en-US" sz="1030" dirty="0">
-                <a:solidFill>
-                  <a:srgbClr val="1E293B"/>
-                </a:solidFill>
-                <a:latin typeface="맑은 고딕" pitchFamily="34" charset="0"/>
-                <a:ea typeface="맑은 고딕" pitchFamily="34" charset="-122"/>
-                <a:cs typeface="맑은 고딕" pitchFamily="34" charset="-120"/>
-              </a:rPr>
-              <a:t>전문가(연구자) 판정과의 일치도</a:t>
-            </a:r>
-            <a:endParaRPr lang="en-US" sz="1030" dirty="0"/>
-          </a:p>
-        </p:txBody>
-      </p:sp>
-      <p:sp>
-        <p:nvSpPr>
-          <p:cNvPr id="35" name="Text 33"/>
-          <p:cNvSpPr/>
-          <p:nvPr/>
-        </p:nvSpPr>
-        <p:spPr>
-          <a:xfrm>
-            <a:off x="4846320" y="2542032"/>
-            <a:ext cx="128016" cy="329184"/>
-          </a:xfrm>
-          <a:prstGeom prst="rect">
-            <a:avLst/>
-          </a:prstGeom>
-          <a:noFill/>
-          <a:ln/>
-        </p:spPr>
-        <p:txBody>
-          <a:bodyPr wrap="square" lIns="0" tIns="0" rIns="0" bIns="0" rtlCol="0" anchor="t"/>
-          <a:lstStyle/>
-          <a:p>
-            <a:pPr indent="0" marL="0">
-              <a:buNone/>
-            </a:pPr>
-            <a:r>
-              <a:rPr lang="en-US" sz="1030" dirty="0">
-                <a:solidFill>
-                  <a:srgbClr val="2563EB"/>
-                </a:solidFill>
-                <a:latin typeface="맑은 고딕" pitchFamily="34" charset="0"/>
-                <a:ea typeface="맑은 고딕" pitchFamily="34" charset="-122"/>
-                <a:cs typeface="맑은 고딕" pitchFamily="34" charset="-120"/>
-              </a:rPr>
-              <a:t>•</a:t>
-            </a:r>
-            <a:endParaRPr lang="en-US" sz="1030" dirty="0"/>
-          </a:p>
-        </p:txBody>
-      </p:sp>
-      <p:sp>
-        <p:nvSpPr>
-          <p:cNvPr id="36" name="Text 34"/>
-          <p:cNvSpPr/>
-          <p:nvPr/>
-        </p:nvSpPr>
-        <p:spPr>
-          <a:xfrm>
-            <a:off x="4983480" y="2542032"/>
-            <a:ext cx="3657600" cy="329184"/>
-          </a:xfrm>
-          <a:prstGeom prst="rect">
-            <a:avLst/>
-          </a:prstGeom>
-          <a:noFill/>
-          <a:ln/>
-        </p:spPr>
-        <p:txBody>
-          <a:bodyPr wrap="square" lIns="0" tIns="0" rIns="0" bIns="0" rtlCol="0" anchor="t"/>
-          <a:lstStyle/>
-          <a:p>
-            <a:pPr indent="0" marL="0">
-              <a:buNone/>
-            </a:pPr>
-            <a:r>
-              <a:rPr lang="en-US" sz="1030" dirty="0">
-                <a:solidFill>
-                  <a:srgbClr val="1E293B"/>
-                </a:solidFill>
-                <a:latin typeface="맑은 고딕" pitchFamily="34" charset="0"/>
-                <a:ea typeface="맑은 고딕" pitchFamily="34" charset="-122"/>
-                <a:cs typeface="맑은 고딕" pitchFamily="34" charset="-120"/>
-              </a:rPr>
-              <a:t>동일 대화 재채점 시 재현성</a:t>
-            </a:r>
-            <a:endParaRPr lang="en-US" sz="1030" dirty="0"/>
-          </a:p>
-        </p:txBody>
-      </p:sp>
-      <p:sp>
-        <p:nvSpPr>
-          <p:cNvPr id="37" name="Text 35"/>
-          <p:cNvSpPr/>
-          <p:nvPr/>
-        </p:nvSpPr>
-        <p:spPr>
-          <a:xfrm>
-            <a:off x="4846320" y="2871216"/>
-            <a:ext cx="128016" cy="329184"/>
-          </a:xfrm>
-          <a:prstGeom prst="rect">
-            <a:avLst/>
-          </a:prstGeom>
-          <a:noFill/>
-          <a:ln/>
-        </p:spPr>
-        <p:txBody>
-          <a:bodyPr wrap="square" lIns="0" tIns="0" rIns="0" bIns="0" rtlCol="0" anchor="t"/>
-          <a:lstStyle/>
-          <a:p>
-            <a:pPr indent="0" marL="0">
-              <a:buNone/>
-            </a:pPr>
-            <a:r>
-              <a:rPr lang="en-US" sz="1030" dirty="0">
-                <a:solidFill>
-                  <a:srgbClr val="2563EB"/>
-                </a:solidFill>
-                <a:latin typeface="맑은 고딕" pitchFamily="34" charset="0"/>
-                <a:ea typeface="맑은 고딕" pitchFamily="34" charset="-122"/>
-                <a:cs typeface="맑은 고딕" pitchFamily="34" charset="-120"/>
-              </a:rPr>
-              <a:t>•</a:t>
-            </a:r>
-            <a:endParaRPr lang="en-US" sz="1030" dirty="0"/>
-          </a:p>
-        </p:txBody>
-      </p:sp>
-      <p:sp>
-        <p:nvSpPr>
-          <p:cNvPr id="38" name="Text 36"/>
-          <p:cNvSpPr/>
-          <p:nvPr/>
-        </p:nvSpPr>
-        <p:spPr>
-          <a:xfrm>
-            <a:off x="4983480" y="2871216"/>
-            <a:ext cx="3657600" cy="329184"/>
-          </a:xfrm>
-          <a:prstGeom prst="rect">
-            <a:avLst/>
-          </a:prstGeom>
-          <a:noFill/>
-          <a:ln/>
-        </p:spPr>
-        <p:txBody>
-          <a:bodyPr wrap="square" lIns="0" tIns="0" rIns="0" bIns="0" rtlCol="0" anchor="t"/>
-          <a:lstStyle/>
-          <a:p>
-            <a:pPr indent="0" marL="0">
-              <a:buNone/>
-            </a:pPr>
-            <a:r>
-              <a:rPr lang="en-US" sz="1030" dirty="0">
-                <a:solidFill>
-                  <a:srgbClr val="1E293B"/>
-                </a:solidFill>
-                <a:latin typeface="맑은 고딕" pitchFamily="34" charset="0"/>
-                <a:ea typeface="맑은 고딕" pitchFamily="34" charset="-122"/>
-                <a:cs typeface="맑은 고딕" pitchFamily="34" charset="-120"/>
-              </a:rPr>
-              <a:t>경계 사례에서의 판별력</a:t>
-            </a:r>
-            <a:endParaRPr lang="en-US" sz="1030" dirty="0"/>
-          </a:p>
-        </p:txBody>
-      </p:sp>
-      <p:sp>
-        <p:nvSpPr>
-          <p:cNvPr id="39" name="Text 37"/>
-          <p:cNvSpPr/>
-          <p:nvPr/>
-        </p:nvSpPr>
-        <p:spPr>
-          <a:xfrm>
-            <a:off x="4846320" y="3200400"/>
-            <a:ext cx="128016" cy="329184"/>
-          </a:xfrm>
-          <a:prstGeom prst="rect">
-            <a:avLst/>
-          </a:prstGeom>
-          <a:noFill/>
-          <a:ln/>
-        </p:spPr>
-        <p:txBody>
-          <a:bodyPr wrap="square" lIns="0" tIns="0" rIns="0" bIns="0" rtlCol="0" anchor="t"/>
-          <a:lstStyle/>
-          <a:p>
-            <a:pPr indent="0" marL="0">
-              <a:buNone/>
-            </a:pPr>
-            <a:r>
-              <a:rPr lang="en-US" sz="1030" dirty="0">
-                <a:solidFill>
-                  <a:srgbClr val="2563EB"/>
-                </a:solidFill>
-                <a:latin typeface="맑은 고딕" pitchFamily="34" charset="0"/>
-                <a:ea typeface="맑은 고딕" pitchFamily="34" charset="-122"/>
-                <a:cs typeface="맑은 고딕" pitchFamily="34" charset="-120"/>
-              </a:rPr>
-              <a:t>•</a:t>
-            </a:r>
-            <a:endParaRPr lang="en-US" sz="1030" dirty="0"/>
-          </a:p>
-        </p:txBody>
-      </p:sp>
-      <p:sp>
-        <p:nvSpPr>
-          <p:cNvPr id="40" name="Text 38"/>
-          <p:cNvSpPr/>
-          <p:nvPr/>
-        </p:nvSpPr>
-        <p:spPr>
-          <a:xfrm>
-            <a:off x="4983480" y="3200400"/>
-            <a:ext cx="3657600" cy="329184"/>
-          </a:xfrm>
-          <a:prstGeom prst="rect">
-            <a:avLst/>
-          </a:prstGeom>
-          <a:noFill/>
-          <a:ln/>
-        </p:spPr>
-        <p:txBody>
-          <a:bodyPr wrap="square" lIns="0" tIns="0" rIns="0" bIns="0" rtlCol="0" anchor="t"/>
-          <a:lstStyle/>
-          <a:p>
-            <a:pPr indent="0" marL="0">
-              <a:buNone/>
-            </a:pPr>
-            <a:r>
-              <a:rPr lang="en-US" sz="1030" dirty="0">
-                <a:solidFill>
-                  <a:srgbClr val="1E293B"/>
-                </a:solidFill>
-                <a:latin typeface="맑은 고딕" pitchFamily="34" charset="0"/>
-                <a:ea typeface="맑은 고딕" pitchFamily="34" charset="-122"/>
-                <a:cs typeface="맑은 고딕" pitchFamily="34" charset="-120"/>
-              </a:rPr>
-              <a:t>표현력 편향의 크기</a:t>
-            </a:r>
-            <a:endParaRPr lang="en-US" sz="1030" dirty="0"/>
-          </a:p>
-        </p:txBody>
-      </p:sp>
-      <p:sp>
-        <p:nvSpPr>
-          <p:cNvPr id="41" name="Text 39"/>
-          <p:cNvSpPr/>
-          <p:nvPr/>
-        </p:nvSpPr>
-        <p:spPr>
-          <a:xfrm>
-            <a:off x="4846320" y="3529584"/>
-            <a:ext cx="128016" cy="329184"/>
-          </a:xfrm>
-          <a:prstGeom prst="rect">
-            <a:avLst/>
-          </a:prstGeom>
-          <a:noFill/>
-          <a:ln/>
-        </p:spPr>
-        <p:txBody>
-          <a:bodyPr wrap="square" lIns="0" tIns="0" rIns="0" bIns="0" rtlCol="0" anchor="t"/>
-          <a:lstStyle/>
-          <a:p>
-            <a:pPr indent="0" marL="0">
-              <a:buNone/>
-            </a:pPr>
-            <a:r>
-              <a:rPr lang="en-US" sz="1030" dirty="0">
-                <a:solidFill>
-                  <a:srgbClr val="2563EB"/>
-                </a:solidFill>
-                <a:latin typeface="맑은 고딕" pitchFamily="34" charset="0"/>
-                <a:ea typeface="맑은 고딕" pitchFamily="34" charset="-122"/>
-                <a:cs typeface="맑은 고딕" pitchFamily="34" charset="-120"/>
-              </a:rPr>
-              <a:t>•</a:t>
-            </a:r>
-            <a:endParaRPr lang="en-US" sz="1030" dirty="0"/>
-          </a:p>
-        </p:txBody>
-      </p:sp>
-      <p:sp>
-        <p:nvSpPr>
-          <p:cNvPr id="42" name="Text 40"/>
-          <p:cNvSpPr/>
-          <p:nvPr/>
-        </p:nvSpPr>
-        <p:spPr>
-          <a:xfrm>
-            <a:off x="4983480" y="3529584"/>
-            <a:ext cx="3657600" cy="329184"/>
-          </a:xfrm>
-          <a:prstGeom prst="rect">
-            <a:avLst/>
-          </a:prstGeom>
-          <a:noFill/>
-          <a:ln/>
-        </p:spPr>
-        <p:txBody>
-          <a:bodyPr wrap="square" lIns="0" tIns="0" rIns="0" bIns="0" rtlCol="0" anchor="t"/>
-          <a:lstStyle/>
-          <a:p>
-            <a:pPr indent="0" marL="0">
-              <a:buNone/>
-            </a:pPr>
-            <a:r>
-              <a:rPr lang="en-US" sz="1030" dirty="0">
-                <a:solidFill>
-                  <a:srgbClr val="1E293B"/>
-                </a:solidFill>
-                <a:latin typeface="맑은 고딕" pitchFamily="34" charset="0"/>
-                <a:ea typeface="맑은 고딕" pitchFamily="34" charset="-122"/>
-                <a:cs typeface="맑은 고딕" pitchFamily="34" charset="-120"/>
-              </a:rPr>
-              <a:t>실제 중복 제안 탐지율</a:t>
-            </a:r>
-            <a:endParaRPr lang="en-US" sz="1030" dirty="0"/>
-          </a:p>
-        </p:txBody>
-      </p:sp>
-      <p:sp>
-        <p:nvSpPr>
-          <p:cNvPr id="43" name="Shape 41"/>
-          <p:cNvSpPr/>
-          <p:nvPr/>
-        </p:nvSpPr>
-        <p:spPr>
-          <a:xfrm>
-            <a:off x="365760" y="4069080"/>
-            <a:ext cx="8412480" cy="868680"/>
+            <a:off x="2642616" y="3310128"/>
+            <a:ext cx="1828800" cy="777240"/>
+          </a:xfrm>
+          <a:prstGeom prst="rect">
+            <a:avLst/>
+          </a:prstGeom>
+          <a:noFill/>
+          <a:ln/>
+        </p:spPr>
+        <p:txBody>
+          <a:bodyPr wrap="square" lIns="0" tIns="0" rIns="0" bIns="0" rtlCol="0" anchor="ctr"/>
+          <a:lstStyle/>
+          <a:p>
+            <a:pPr algn="ctr" indent="0" marL="0">
+              <a:lnSpc>
+                <a:spcPct val="125000"/>
+              </a:lnSpc>
+              <a:buNone/>
+            </a:pPr>
+            <a:r>
+              <a:rPr lang="en-US" sz="920" dirty="0">
+                <a:solidFill>
+                  <a:srgbClr val="64748B"/>
+                </a:solidFill>
+                <a:latin typeface="맑은 고딕" pitchFamily="34" charset="0"/>
+                <a:ea typeface="맑은 고딕" pitchFamily="34" charset="-122"/>
+                <a:cs typeface="맑은 고딕" pitchFamily="34" charset="-120"/>
+              </a:rPr>
+              <a:t>충족 판정에는 "턴 N" 인용</a:t>
+            </a:r>
+            <a:endParaRPr lang="en-US" sz="920" dirty="0"/>
+          </a:p>
+          <a:p>
+            <a:pPr algn="ctr" indent="0" marL="0">
+              <a:lnSpc>
+                <a:spcPct val="125000"/>
+              </a:lnSpc>
+              <a:buNone/>
+            </a:pPr>
+            <a:r>
+              <a:rPr lang="en-US" sz="920" dirty="0">
+                <a:solidFill>
+                  <a:srgbClr val="64748B"/>
+                </a:solidFill>
+                <a:latin typeface="맑은 고딕" pitchFamily="34" charset="0"/>
+                <a:ea typeface="맑은 고딕" pitchFamily="34" charset="-122"/>
+                <a:cs typeface="맑은 고딕" pitchFamily="34" charset="-120"/>
+              </a:rPr>
+              <a:t>필수 — 얼버무린 답변과</a:t>
+            </a:r>
+            <a:endParaRPr lang="en-US" sz="920" dirty="0"/>
+          </a:p>
+          <a:p>
+            <a:pPr algn="ctr" indent="0" marL="0">
+              <a:lnSpc>
+                <a:spcPct val="125000"/>
+              </a:lnSpc>
+              <a:buNone/>
+            </a:pPr>
+            <a:r>
+              <a:rPr lang="en-US" sz="920" dirty="0">
+                <a:solidFill>
+                  <a:srgbClr val="64748B"/>
+                </a:solidFill>
+                <a:latin typeface="맑은 고딕" pitchFamily="34" charset="0"/>
+                <a:ea typeface="맑은 고딕" pitchFamily="34" charset="-122"/>
+                <a:cs typeface="맑은 고딕" pitchFamily="34" charset="-120"/>
+              </a:rPr>
+              <a:t>지어낸 근거를 차단</a:t>
+            </a:r>
+            <a:endParaRPr lang="en-US" sz="920" dirty="0"/>
+          </a:p>
+        </p:txBody>
+      </p:sp>
+      <p:sp>
+        <p:nvSpPr>
+          <p:cNvPr id="33" name="Shape 31"/>
+          <p:cNvSpPr/>
+          <p:nvPr/>
+        </p:nvSpPr>
+        <p:spPr>
+          <a:xfrm>
+            <a:off x="4736592" y="2103120"/>
+            <a:ext cx="2011680" cy="2103120"/>
           </a:xfrm>
           <a:prstGeom prst="rect">
             <a:avLst/>
           </a:prstGeom>
           <a:solidFill>
-            <a:srgbClr val="F8FAFC"/>
+            <a:srgbClr val="FFFFFF"/>
           </a:solidFill>
           <a:ln w="12700">
             <a:solidFill>
@@ -28941,42 +28696,69 @@
             </a:solidFill>
             <a:prstDash val="solid"/>
           </a:ln>
-        </p:spPr>
-      </p:sp>
-      <p:sp>
-        <p:nvSpPr>
-          <p:cNvPr id="44" name="Text 42"/>
-          <p:cNvSpPr/>
-          <p:nvPr/>
-        </p:nvSpPr>
-        <p:spPr>
-          <a:xfrm>
-            <a:off x="566928" y="4160520"/>
-            <a:ext cx="2743200" cy="256032"/>
-          </a:xfrm>
-          <a:prstGeom prst="rect">
-            <a:avLst/>
-          </a:prstGeom>
-          <a:noFill/>
-          <a:ln/>
-        </p:spPr>
-        <p:txBody>
-          <a:bodyPr wrap="square" lIns="0" tIns="0" rIns="0" bIns="0" rtlCol="0" anchor="ctr"/>
-          <a:lstStyle/>
-          <a:p>
-            <a:pPr indent="0" marL="0">
+          <a:effectLst>
+            <a:outerShdw sx="100000" sy="100000" kx="0" ky="0" algn="bl" rotWithShape="0" blurRad="50800" dist="12700" dir="8100000">
+              <a:srgbClr val="000000">
+                <a:alpha val="8000"/>
+              </a:srgbClr>
+            </a:outerShdw>
+          </a:effectLst>
+        </p:spPr>
+      </p:sp>
+      <p:sp>
+        <p:nvSpPr>
+          <p:cNvPr id="34" name="Shape 32"/>
+          <p:cNvSpPr/>
+          <p:nvPr/>
+        </p:nvSpPr>
+        <p:spPr>
+          <a:xfrm>
+            <a:off x="4736592" y="2103120"/>
+            <a:ext cx="2011680" cy="365760"/>
+          </a:xfrm>
+          <a:prstGeom prst="rect">
+            <a:avLst/>
+          </a:prstGeom>
+          <a:solidFill>
+            <a:srgbClr val="2563EB"/>
+          </a:solidFill>
+          <a:ln/>
+        </p:spPr>
+      </p:sp>
+      <p:sp>
+        <p:nvSpPr>
+          <p:cNvPr id="35" name="Text 33"/>
+          <p:cNvSpPr/>
+          <p:nvPr/>
+        </p:nvSpPr>
+        <p:spPr>
+          <a:xfrm>
+            <a:off x="4736592" y="2103120"/>
+            <a:ext cx="2011680" cy="365760"/>
+          </a:xfrm>
+          <a:prstGeom prst="rect">
+            <a:avLst/>
+          </a:prstGeom>
+          <a:noFill/>
+          <a:ln/>
+        </p:spPr>
+        <p:txBody>
+          <a:bodyPr wrap="square" lIns="0" tIns="0" rIns="0" bIns="0" rtlCol="0" anchor="ctr"/>
+          <a:lstStyle/>
+          <a:p>
+            <a:pPr algn="ctr" indent="0" marL="0">
               <a:buNone/>
             </a:pPr>
             <a:r>
               <a:rPr lang="en-US" sz="1150" b="1" dirty="0">
                 <a:solidFill>
-                  <a:srgbClr val="2563EB"/>
-                </a:solidFill>
-                <a:latin typeface="맑은 고딕" pitchFamily="34" charset="0"/>
-                <a:ea typeface="맑은 고딕" pitchFamily="34" charset="-122"/>
-                <a:cs typeface="맑은 고딕" pitchFamily="34" charset="-120"/>
-              </a:rPr>
-              <a:t>현재 판정력이 입증된 범위</a:t>
+                  <a:srgbClr val="FFFFFF"/>
+                </a:solidFill>
+                <a:latin typeface="맑은 고딕" pitchFamily="34" charset="0"/>
+                <a:ea typeface="맑은 고딕" pitchFamily="34" charset="-122"/>
+                <a:cs typeface="맑은 고딕" pitchFamily="34" charset="-120"/>
+              </a:rPr>
+              <a:t>③  코드가 강제</a:t>
             </a:r>
             <a:endParaRPr lang="en-US" sz="1150" dirty="0"/>
           </a:p>
@@ -28984,53 +28766,288 @@
       </p:sp>
       <p:sp>
         <p:nvSpPr>
-          <p:cNvPr id="45" name="Text 43"/>
-          <p:cNvSpPr/>
-          <p:nvPr/>
-        </p:nvSpPr>
-        <p:spPr>
-          <a:xfrm>
-            <a:off x="566928" y="4434840"/>
-            <a:ext cx="8046720" cy="457200"/>
-          </a:xfrm>
-          <a:prstGeom prst="rect">
-            <a:avLst/>
-          </a:prstGeom>
-          <a:noFill/>
-          <a:ln/>
-        </p:spPr>
-        <p:txBody>
-          <a:bodyPr wrap="square" lIns="0" tIns="0" rIns="0" bIns="0" rtlCol="0" anchor="ctr"/>
-          <a:lstStyle/>
-          <a:p>
-            <a:pPr indent="0" marL="0">
+          <p:cNvPr id="36" name="Text 34"/>
+          <p:cNvSpPr/>
+          <p:nvPr/>
+        </p:nvSpPr>
+        <p:spPr>
+          <a:xfrm>
+            <a:off x="4828032" y="2578608"/>
+            <a:ext cx="1828800" cy="548640"/>
+          </a:xfrm>
+          <a:prstGeom prst="rect">
+            <a:avLst/>
+          </a:prstGeom>
+          <a:noFill/>
+          <a:ln/>
+        </p:spPr>
+        <p:txBody>
+          <a:bodyPr wrap="square" lIns="0" tIns="0" rIns="0" bIns="0" rtlCol="0" anchor="ctr"/>
+          <a:lstStyle/>
+          <a:p>
+            <a:pPr algn="ctr" indent="0" marL="0">
+              <a:lnSpc>
+                <a:spcPct val="120000"/>
+              </a:lnSpc>
+              <a:buNone/>
+            </a:pPr>
+            <a:r>
+              <a:rPr lang="en-US" sz="1100" b="1" dirty="0">
+                <a:solidFill>
+                  <a:srgbClr val="1E293B"/>
+                </a:solidFill>
+                <a:latin typeface="맑은 고딕" pitchFamily="34" charset="0"/>
+                <a:ea typeface="맑은 고딕" pitchFamily="34" charset="-122"/>
+                <a:cs typeface="맑은 고딕" pitchFamily="34" charset="-120"/>
+              </a:rPr>
+              <a:t>흐름과 산술은</a:t>
+            </a:r>
+            <a:endParaRPr lang="en-US" sz="1100" dirty="0"/>
+          </a:p>
+          <a:p>
+            <a:pPr algn="ctr" indent="0" marL="0">
+              <a:lnSpc>
+                <a:spcPct val="120000"/>
+              </a:lnSpc>
+              <a:buNone/>
+            </a:pPr>
+            <a:r>
+              <a:rPr lang="en-US" sz="1100" b="1" dirty="0">
+                <a:solidFill>
+                  <a:srgbClr val="1E293B"/>
+                </a:solidFill>
+                <a:latin typeface="맑은 고딕" pitchFamily="34" charset="0"/>
+                <a:ea typeface="맑은 고딕" pitchFamily="34" charset="-122"/>
+                <a:cs typeface="맑은 고딕" pitchFamily="34" charset="-120"/>
+              </a:rPr>
+              <a:t>AI가 손대지 않는다</a:t>
+            </a:r>
+            <a:endParaRPr lang="en-US" sz="1100" dirty="0"/>
+          </a:p>
+        </p:txBody>
+      </p:sp>
+      <p:sp>
+        <p:nvSpPr>
+          <p:cNvPr id="37" name="Shape 35"/>
+          <p:cNvSpPr/>
+          <p:nvPr/>
+        </p:nvSpPr>
+        <p:spPr>
+          <a:xfrm>
+            <a:off x="4965192" y="3200400"/>
+            <a:ext cx="1554480" cy="10973"/>
+          </a:xfrm>
+          <a:prstGeom prst="rect">
+            <a:avLst/>
+          </a:prstGeom>
+          <a:solidFill>
+            <a:srgbClr val="E5E7EB"/>
+          </a:solidFill>
+          <a:ln/>
+        </p:spPr>
+      </p:sp>
+      <p:sp>
+        <p:nvSpPr>
+          <p:cNvPr id="38" name="Text 36"/>
+          <p:cNvSpPr/>
+          <p:nvPr/>
+        </p:nvSpPr>
+        <p:spPr>
+          <a:xfrm>
+            <a:off x="4828032" y="3310128"/>
+            <a:ext cx="1828800" cy="777240"/>
+          </a:xfrm>
+          <a:prstGeom prst="rect">
+            <a:avLst/>
+          </a:prstGeom>
+          <a:noFill/>
+          <a:ln/>
+        </p:spPr>
+        <p:txBody>
+          <a:bodyPr wrap="square" lIns="0" tIns="0" rIns="0" bIns="0" rtlCol="0" anchor="ctr"/>
+          <a:lstStyle/>
+          <a:p>
+            <a:pPr algn="ctr" indent="0" marL="0">
               <a:lnSpc>
                 <a:spcPct val="125000"/>
               </a:lnSpc>
               <a:buNone/>
             </a:pPr>
             <a:r>
-              <a:rPr lang="en-US" sz="1030" dirty="0">
-                <a:solidFill>
-                  <a:srgbClr val="1E293B"/>
-                </a:solidFill>
-                <a:latin typeface="맑은 고딕" pitchFamily="34" charset="0"/>
-                <a:ea typeface="맑은 고딕" pitchFamily="34" charset="-122"/>
-                <a:cs typeface="맑은 고딕" pitchFamily="34" charset="-120"/>
-              </a:rPr>
-              <a:t>표본 10건 · 극단 사례(명백히 진부 vs 명백히 창의)에 한정됩니다. 시험 문항은 사람이 아니라 모델이 생성했습니다.</a:t>
-            </a:r>
-            <a:endParaRPr lang="en-US" sz="1030" dirty="0"/>
-          </a:p>
-          <a:p>
-            <a:pPr indent="0" marL="0">
+              <a:rPr lang="en-US" sz="920" dirty="0">
+                <a:solidFill>
+                  <a:srgbClr val="64748B"/>
+                </a:solidFill>
+                <a:latin typeface="맑은 고딕" pitchFamily="34" charset="0"/>
+                <a:ea typeface="맑은 고딕" pitchFamily="34" charset="-122"/>
+                <a:cs typeface="맑은 고딕" pitchFamily="34" charset="-120"/>
+              </a:rPr>
+              <a:t>단계 전이·가중평균은</a:t>
+            </a:r>
+            <a:endParaRPr lang="en-US" sz="920" dirty="0"/>
+          </a:p>
+          <a:p>
+            <a:pPr algn="ctr" indent="0" marL="0">
               <a:lnSpc>
                 <a:spcPct val="125000"/>
               </a:lnSpc>
               <a:buNone/>
             </a:pPr>
             <a:r>
-              <a:rPr lang="en-US" sz="1030" dirty="0">
+              <a:rPr lang="en-US" sz="920" dirty="0">
+                <a:solidFill>
+                  <a:srgbClr val="64748B"/>
+                </a:solidFill>
+                <a:latin typeface="맑은 고딕" pitchFamily="34" charset="0"/>
+                <a:ea typeface="맑은 고딕" pitchFamily="34" charset="-122"/>
+                <a:cs typeface="맑은 고딕" pitchFamily="34" charset="-120"/>
+              </a:rPr>
+              <a:t>프로그램이 처리 —</a:t>
+            </a:r>
+            <a:endParaRPr lang="en-US" sz="920" dirty="0"/>
+          </a:p>
+          <a:p>
+            <a:pPr algn="ctr" indent="0" marL="0">
+              <a:lnSpc>
+                <a:spcPct val="125000"/>
+              </a:lnSpc>
+              <a:buNone/>
+            </a:pPr>
+            <a:r>
+              <a:rPr lang="en-US" sz="920" dirty="0">
+                <a:solidFill>
+                  <a:srgbClr val="64748B"/>
+                </a:solidFill>
+                <a:latin typeface="맑은 고딕" pitchFamily="34" charset="0"/>
+                <a:ea typeface="맑은 고딕" pitchFamily="34" charset="-122"/>
+                <a:cs typeface="맑은 고딕" pitchFamily="34" charset="-120"/>
+              </a:rPr>
+              <a:t>AI는 판단만 담당</a:t>
+            </a:r>
+            <a:endParaRPr lang="en-US" sz="920" dirty="0"/>
+          </a:p>
+        </p:txBody>
+      </p:sp>
+      <p:sp>
+        <p:nvSpPr>
+          <p:cNvPr id="39" name="Shape 37"/>
+          <p:cNvSpPr/>
+          <p:nvPr/>
+        </p:nvSpPr>
+        <p:spPr>
+          <a:xfrm>
+            <a:off x="6922008" y="2103120"/>
+            <a:ext cx="2011680" cy="2103120"/>
+          </a:xfrm>
+          <a:prstGeom prst="rect">
+            <a:avLst/>
+          </a:prstGeom>
+          <a:solidFill>
+            <a:srgbClr val="FFFFFF"/>
+          </a:solidFill>
+          <a:ln w="12700">
+            <a:solidFill>
+              <a:srgbClr val="E5E7EB"/>
+            </a:solidFill>
+            <a:prstDash val="solid"/>
+          </a:ln>
+          <a:effectLst>
+            <a:outerShdw sx="100000" sy="100000" kx="0" ky="0" algn="bl" rotWithShape="0" blurRad="50800" dist="12700" dir="8100000">
+              <a:srgbClr val="000000">
+                <a:alpha val="8000"/>
+              </a:srgbClr>
+            </a:outerShdw>
+          </a:effectLst>
+        </p:spPr>
+      </p:sp>
+      <p:sp>
+        <p:nvSpPr>
+          <p:cNvPr id="40" name="Shape 38"/>
+          <p:cNvSpPr/>
+          <p:nvPr/>
+        </p:nvSpPr>
+        <p:spPr>
+          <a:xfrm>
+            <a:off x="6922008" y="2103120"/>
+            <a:ext cx="2011680" cy="365760"/>
+          </a:xfrm>
+          <a:prstGeom prst="rect">
+            <a:avLst/>
+          </a:prstGeom>
+          <a:solidFill>
+            <a:srgbClr val="2563EB"/>
+          </a:solidFill>
+          <a:ln/>
+        </p:spPr>
+      </p:sp>
+      <p:sp>
+        <p:nvSpPr>
+          <p:cNvPr id="41" name="Text 39"/>
+          <p:cNvSpPr/>
+          <p:nvPr/>
+        </p:nvSpPr>
+        <p:spPr>
+          <a:xfrm>
+            <a:off x="6922008" y="2103120"/>
+            <a:ext cx="2011680" cy="365760"/>
+          </a:xfrm>
+          <a:prstGeom prst="rect">
+            <a:avLst/>
+          </a:prstGeom>
+          <a:noFill/>
+          <a:ln/>
+        </p:spPr>
+        <p:txBody>
+          <a:bodyPr wrap="square" lIns="0" tIns="0" rIns="0" bIns="0" rtlCol="0" anchor="ctr"/>
+          <a:lstStyle/>
+          <a:p>
+            <a:pPr algn="ctr" indent="0" marL="0">
+              <a:buNone/>
+            </a:pPr>
+            <a:r>
+              <a:rPr lang="en-US" sz="1150" b="1" dirty="0">
+                <a:solidFill>
+                  <a:srgbClr val="FFFFFF"/>
+                </a:solidFill>
+                <a:latin typeface="맑은 고딕" pitchFamily="34" charset="0"/>
+                <a:ea typeface="맑은 고딕" pitchFamily="34" charset="-122"/>
+                <a:cs typeface="맑은 고딕" pitchFamily="34" charset="-120"/>
+              </a:rPr>
+              <a:t>④  블라인드</a:t>
+            </a:r>
+            <a:endParaRPr lang="en-US" sz="1150" dirty="0"/>
+          </a:p>
+        </p:txBody>
+      </p:sp>
+      <p:sp>
+        <p:nvSpPr>
+          <p:cNvPr id="42" name="Text 40"/>
+          <p:cNvSpPr/>
+          <p:nvPr/>
+        </p:nvSpPr>
+        <p:spPr>
+          <a:xfrm>
+            <a:off x="7013448" y="2578608"/>
+            <a:ext cx="1828800" cy="548640"/>
+          </a:xfrm>
+          <a:prstGeom prst="rect">
+            <a:avLst/>
+          </a:prstGeom>
+          <a:noFill/>
+          <a:ln/>
+        </p:spPr>
+        <p:txBody>
+          <a:bodyPr wrap="square" lIns="0" tIns="0" rIns="0" bIns="0" rtlCol="0" anchor="ctr"/>
+          <a:lstStyle/>
+          <a:p>
+            <a:pPr algn="ctr" indent="0" marL="0">
+              <a:lnSpc>
+                <a:spcPct val="120000"/>
+              </a:lnSpc>
+              <a:buNone/>
+            </a:pPr>
+            <a:r>
+              <a:rPr lang="en-US" sz="1100" b="1" dirty="0">
                 <a:solidFill>
                   <a:srgbClr val="1E293B"/>
                 </a:solidFill>
@@ -29038,9 +29055,190 @@
                 <a:ea typeface="맑은 고딕" pitchFamily="34" charset="-122"/>
                 <a:cs typeface="맑은 고딕" pitchFamily="34" charset="-120"/>
               </a:rPr>
-              <a:t>실제 국민 제안은 중간대에 몰리므로, 경계 사례 판별력과 전문가 일치도는 도입 전 별도 검증이 필요합니다.</a:t>
-            </a:r>
-            <a:endParaRPr lang="en-US" sz="1030" dirty="0"/>
+              <a:t>참가자에게</a:t>
+            </a:r>
+            <a:endParaRPr lang="en-US" sz="1100" dirty="0"/>
+          </a:p>
+          <a:p>
+            <a:pPr algn="ctr" indent="0" marL="0">
+              <a:lnSpc>
+                <a:spcPct val="120000"/>
+              </a:lnSpc>
+              <a:buNone/>
+            </a:pPr>
+            <a:r>
+              <a:rPr lang="en-US" sz="1100" b="1" dirty="0">
+                <a:solidFill>
+                  <a:srgbClr val="1E293B"/>
+                </a:solidFill>
+                <a:latin typeface="맑은 고딕" pitchFamily="34" charset="0"/>
+                <a:ea typeface="맑은 고딕" pitchFamily="34" charset="-122"/>
+                <a:cs typeface="맑은 고딕" pitchFamily="34" charset="-120"/>
+              </a:rPr>
+              <a:t>답을 보여주지 않는다</a:t>
+            </a:r>
+            <a:endParaRPr lang="en-US" sz="1100" dirty="0"/>
+          </a:p>
+        </p:txBody>
+      </p:sp>
+      <p:sp>
+        <p:nvSpPr>
+          <p:cNvPr id="43" name="Shape 41"/>
+          <p:cNvSpPr/>
+          <p:nvPr/>
+        </p:nvSpPr>
+        <p:spPr>
+          <a:xfrm>
+            <a:off x="7150608" y="3200400"/>
+            <a:ext cx="1554480" cy="10973"/>
+          </a:xfrm>
+          <a:prstGeom prst="rect">
+            <a:avLst/>
+          </a:prstGeom>
+          <a:solidFill>
+            <a:srgbClr val="E5E7EB"/>
+          </a:solidFill>
+          <a:ln/>
+        </p:spPr>
+      </p:sp>
+      <p:sp>
+        <p:nvSpPr>
+          <p:cNvPr id="44" name="Text 42"/>
+          <p:cNvSpPr/>
+          <p:nvPr/>
+        </p:nvSpPr>
+        <p:spPr>
+          <a:xfrm>
+            <a:off x="7013448" y="3310128"/>
+            <a:ext cx="1828800" cy="777240"/>
+          </a:xfrm>
+          <a:prstGeom prst="rect">
+            <a:avLst/>
+          </a:prstGeom>
+          <a:noFill/>
+          <a:ln/>
+        </p:spPr>
+        <p:txBody>
+          <a:bodyPr wrap="square" lIns="0" tIns="0" rIns="0" bIns="0" rtlCol="0" anchor="ctr"/>
+          <a:lstStyle/>
+          <a:p>
+            <a:pPr algn="ctr" indent="0" marL="0">
+              <a:lnSpc>
+                <a:spcPct val="125000"/>
+              </a:lnSpc>
+              <a:buNone/>
+            </a:pPr>
+            <a:r>
+              <a:rPr lang="en-US" sz="920" dirty="0">
+                <a:solidFill>
+                  <a:srgbClr val="64748B"/>
+                </a:solidFill>
+                <a:latin typeface="맑은 고딕" pitchFamily="34" charset="0"/>
+                <a:ea typeface="맑은 고딕" pitchFamily="34" charset="-122"/>
+                <a:cs typeface="맑은 고딕" pitchFamily="34" charset="-120"/>
+              </a:rPr>
+              <a:t>모범답안·완성 예시·점수를</a:t>
+            </a:r>
+            <a:endParaRPr lang="en-US" sz="920" dirty="0"/>
+          </a:p>
+          <a:p>
+            <a:pPr algn="ctr" indent="0" marL="0">
+              <a:lnSpc>
+                <a:spcPct val="125000"/>
+              </a:lnSpc>
+              <a:buNone/>
+            </a:pPr>
+            <a:r>
+              <a:rPr lang="en-US" sz="920" dirty="0">
+                <a:solidFill>
+                  <a:srgbClr val="64748B"/>
+                </a:solidFill>
+                <a:latin typeface="맑은 고딕" pitchFamily="34" charset="0"/>
+                <a:ea typeface="맑은 고딕" pitchFamily="34" charset="-122"/>
+                <a:cs typeface="맑은 고딕" pitchFamily="34" charset="-120"/>
+              </a:rPr>
+              <a:t>비공개 — 앵커링과</a:t>
+            </a:r>
+            <a:endParaRPr lang="en-US" sz="920" dirty="0"/>
+          </a:p>
+          <a:p>
+            <a:pPr algn="ctr" indent="0" marL="0">
+              <a:lnSpc>
+                <a:spcPct val="125000"/>
+              </a:lnSpc>
+              <a:buNone/>
+            </a:pPr>
+            <a:r>
+              <a:rPr lang="en-US" sz="920" dirty="0">
+                <a:solidFill>
+                  <a:srgbClr val="64748B"/>
+                </a:solidFill>
+                <a:latin typeface="맑은 고딕" pitchFamily="34" charset="0"/>
+                <a:ea typeface="맑은 고딕" pitchFamily="34" charset="-122"/>
+                <a:cs typeface="맑은 고딕" pitchFamily="34" charset="-120"/>
+              </a:rPr>
+              <a:t>게임화를 방지</a:t>
+            </a:r>
+            <a:endParaRPr lang="en-US" sz="920" dirty="0"/>
+          </a:p>
+        </p:txBody>
+      </p:sp>
+      <p:sp>
+        <p:nvSpPr>
+          <p:cNvPr id="45" name="Shape 43"/>
+          <p:cNvSpPr/>
+          <p:nvPr/>
+        </p:nvSpPr>
+        <p:spPr>
+          <a:xfrm>
+            <a:off x="365760" y="4526280"/>
+            <a:ext cx="8412480" cy="420624"/>
+          </a:xfrm>
+          <a:prstGeom prst="rect">
+            <a:avLst/>
+          </a:prstGeom>
+          <a:solidFill>
+            <a:srgbClr val="EBF5FF"/>
+          </a:solidFill>
+          <a:ln/>
+        </p:spPr>
+      </p:sp>
+      <p:sp>
+        <p:nvSpPr>
+          <p:cNvPr id="46" name="Text 44"/>
+          <p:cNvSpPr/>
+          <p:nvPr/>
+        </p:nvSpPr>
+        <p:spPr>
+          <a:xfrm>
+            <a:off x="457200" y="4526280"/>
+            <a:ext cx="8229600" cy="420624"/>
+          </a:xfrm>
+          <a:prstGeom prst="rect">
+            <a:avLst/>
+          </a:prstGeom>
+          <a:noFill/>
+          <a:ln/>
+        </p:spPr>
+        <p:txBody>
+          <a:bodyPr wrap="square" lIns="0" tIns="0" rIns="0" bIns="0" rtlCol="0" anchor="ctr"/>
+          <a:lstStyle/>
+          <a:p>
+            <a:pPr algn="ctr" indent="0" marL="0">
+              <a:buNone/>
+            </a:pPr>
+            <a:r>
+              <a:rPr lang="en-US" sz="1250" b="1" dirty="0">
+                <a:solidFill>
+                  <a:srgbClr val="2563EB"/>
+                </a:solidFill>
+                <a:latin typeface="맑은 고딕" pitchFamily="34" charset="0"/>
+                <a:ea typeface="맑은 고딕" pitchFamily="34" charset="-122"/>
+                <a:cs typeface="맑은 고딕" pitchFamily="34" charset="-120"/>
+              </a:rPr>
+              <a:t>질문자·채점자·재판장을 분리해 서로 감시하게 했습니다 — 한 모델이 묻고 답하고 채점하지 않습니다</a:t>
+            </a:r>
+            <a:endParaRPr lang="en-US" sz="1250" dirty="0"/>
           </a:p>
         </p:txBody>
       </p:sp>
@@ -29161,7 +29359,7 @@
                 <a:ea typeface="맑은 고딕" pitchFamily="34" charset="-122"/>
                 <a:cs typeface="맑은 고딕" pitchFamily="34" charset="-120"/>
               </a:rPr>
-              <a:t>25 / 28</a:t>
+              <a:t>25 / 29</a:t>
             </a:r>
             <a:endParaRPr lang="en-US" sz="1100" dirty="0"/>
           </a:p>
@@ -29584,7 +29782,7 @@
                 <a:ea typeface="맑은 고딕" pitchFamily="34" charset="-122"/>
                 <a:cs typeface="맑은 고딕" pitchFamily="34" charset="-120"/>
               </a:rPr>
-              <a:t>06. 구축과 운영</a:t>
+              <a:t>05. 왜 믿을 수 있나</a:t>
             </a:r>
             <a:endParaRPr lang="en-US" sz="1200" dirty="0"/>
           </a:p>
@@ -29643,7 +29841,7 @@
                 <a:ea typeface="맑은 고딕" pitchFamily="34" charset="-122"/>
                 <a:cs typeface="맑은 고딕" pitchFamily="34" charset="-120"/>
               </a:rPr>
-              <a:t>어떻게 만들었나</a:t>
+              <a:t>판정의 검증 — 확인된 것과 확인되지 않은 것</a:t>
             </a:r>
             <a:endParaRPr lang="en-US" sz="2100" dirty="0"/>
           </a:p>
@@ -29657,18 +29855,18 @@
         </p:nvSpPr>
         <p:spPr>
           <a:xfrm>
-            <a:off x="365760" y="1783080"/>
-            <a:ext cx="2011680" cy="1417320"/>
+            <a:off x="365760" y="1755648"/>
+            <a:ext cx="4114800" cy="2304288"/>
           </a:xfrm>
           <a:prstGeom prst="rect">
             <a:avLst/>
           </a:prstGeom>
           <a:solidFill>
-            <a:srgbClr val="FFFFFF"/>
+            <a:srgbClr val="F0F9F3"/>
           </a:solidFill>
-          <a:ln w="12700">
+          <a:ln w="15240">
             <a:solidFill>
-              <a:srgbClr val="E5E7EB"/>
+              <a:srgbClr val="2E7D4F"/>
             </a:solidFill>
             <a:prstDash val="solid"/>
           </a:ln>
@@ -29683,165 +29881,492 @@
       </p:sp>
       <p:sp>
         <p:nvSpPr>
-          <p:cNvPr id="21" name="Shape 19"/>
-          <p:cNvSpPr/>
-          <p:nvPr/>
-        </p:nvSpPr>
-        <p:spPr>
-          <a:xfrm>
-            <a:off x="365760" y="1783080"/>
-            <a:ext cx="2011680" cy="329184"/>
+          <p:cNvPr id="21" name="Text 19"/>
+          <p:cNvSpPr/>
+          <p:nvPr/>
+        </p:nvSpPr>
+        <p:spPr>
+          <a:xfrm>
+            <a:off x="530352" y="1847088"/>
+            <a:ext cx="3749040" cy="274320"/>
+          </a:xfrm>
+          <a:prstGeom prst="rect">
+            <a:avLst/>
+          </a:prstGeom>
+          <a:noFill/>
+          <a:ln/>
+        </p:spPr>
+        <p:txBody>
+          <a:bodyPr wrap="square" lIns="0" tIns="0" rIns="0" bIns="0" rtlCol="0" anchor="ctr"/>
+          <a:lstStyle/>
+          <a:p>
+            <a:pPr indent="0" marL="0">
+              <a:buNone/>
+            </a:pPr>
+            <a:r>
+              <a:rPr lang="en-US" sz="1350" b="1" dirty="0">
+                <a:solidFill>
+                  <a:srgbClr val="2E7D4F"/>
+                </a:solidFill>
+                <a:latin typeface="맑은 고딕" pitchFamily="34" charset="0"/>
+                <a:ea typeface="맑은 고딕" pitchFamily="34" charset="-122"/>
+                <a:cs typeface="맑은 고딕" pitchFamily="34" charset="-120"/>
+              </a:rPr>
+              <a:t>확인된 것</a:t>
+            </a:r>
+            <a:endParaRPr lang="en-US" sz="1350" dirty="0"/>
+          </a:p>
+        </p:txBody>
+      </p:sp>
+      <p:sp>
+        <p:nvSpPr>
+          <p:cNvPr id="22" name="Text 20"/>
+          <p:cNvSpPr/>
+          <p:nvPr/>
+        </p:nvSpPr>
+        <p:spPr>
+          <a:xfrm>
+            <a:off x="530352" y="2103120"/>
+            <a:ext cx="3749040" cy="237744"/>
+          </a:xfrm>
+          <a:prstGeom prst="rect">
+            <a:avLst/>
+          </a:prstGeom>
+          <a:noFill/>
+          <a:ln/>
+        </p:spPr>
+        <p:txBody>
+          <a:bodyPr wrap="square" lIns="0" tIns="0" rIns="0" bIns="0" rtlCol="0" anchor="ctr"/>
+          <a:lstStyle/>
+          <a:p>
+            <a:pPr indent="0" marL="0">
+              <a:buNone/>
+            </a:pPr>
+            <a:r>
+              <a:rPr lang="en-US" sz="1050" b="1" dirty="0">
+                <a:solidFill>
+                  <a:srgbClr val="1E293B"/>
+                </a:solidFill>
+                <a:latin typeface="맑은 고딕" pitchFamily="34" charset="0"/>
+                <a:ea typeface="맑은 고딕" pitchFamily="34" charset="-122"/>
+                <a:cs typeface="맑은 고딕" pitchFamily="34" charset="-120"/>
+              </a:rPr>
+              <a:t>판별력 시험 (n = 10)</a:t>
+            </a:r>
+            <a:endParaRPr lang="en-US" sz="1050" dirty="0"/>
+          </a:p>
+        </p:txBody>
+      </p:sp>
+      <p:sp>
+        <p:nvSpPr>
+          <p:cNvPr id="23" name="Text 21"/>
+          <p:cNvSpPr/>
+          <p:nvPr/>
+        </p:nvSpPr>
+        <p:spPr>
+          <a:xfrm>
+            <a:off x="566928" y="2331720"/>
+            <a:ext cx="2286000" cy="219456"/>
+          </a:xfrm>
+          <a:prstGeom prst="rect">
+            <a:avLst/>
+          </a:prstGeom>
+          <a:noFill/>
+          <a:ln/>
+        </p:spPr>
+        <p:txBody>
+          <a:bodyPr wrap="square" lIns="0" tIns="0" rIns="0" bIns="0" rtlCol="0" anchor="ctr"/>
+          <a:lstStyle/>
+          <a:p>
+            <a:pPr indent="0" marL="0">
+              <a:buNone/>
+            </a:pPr>
+            <a:r>
+              <a:rPr lang="en-US" sz="980" dirty="0">
+                <a:solidFill>
+                  <a:srgbClr val="333333"/>
+                </a:solidFill>
+                <a:latin typeface="맑은 고딕" pitchFamily="34" charset="0"/>
+                <a:ea typeface="맑은 고딕" pitchFamily="34" charset="-122"/>
+                <a:cs typeface="맑은 고딕" pitchFamily="34" charset="-120"/>
+              </a:rPr>
+              <a:t>진부 아이디어 5건</a:t>
+            </a:r>
+            <a:endParaRPr lang="en-US" sz="980" dirty="0"/>
+          </a:p>
+        </p:txBody>
+      </p:sp>
+      <p:sp>
+        <p:nvSpPr>
+          <p:cNvPr id="24" name="Text 22"/>
+          <p:cNvSpPr/>
+          <p:nvPr/>
+        </p:nvSpPr>
+        <p:spPr>
+          <a:xfrm>
+            <a:off x="2926080" y="2331720"/>
+            <a:ext cx="1371600" cy="219456"/>
+          </a:xfrm>
+          <a:prstGeom prst="rect">
+            <a:avLst/>
+          </a:prstGeom>
+          <a:noFill/>
+          <a:ln/>
+        </p:spPr>
+        <p:txBody>
+          <a:bodyPr wrap="square" lIns="0" tIns="0" rIns="0" bIns="0" rtlCol="0" anchor="ctr"/>
+          <a:lstStyle/>
+          <a:p>
+            <a:pPr algn="r" indent="0" marL="0">
+              <a:buNone/>
+            </a:pPr>
+            <a:r>
+              <a:rPr lang="en-US" sz="980" b="1" dirty="0">
+                <a:solidFill>
+                  <a:srgbClr val="2E7D4F"/>
+                </a:solidFill>
+                <a:latin typeface="맑은 고딕" pitchFamily="34" charset="0"/>
+                <a:ea typeface="맑은 고딕" pitchFamily="34" charset="-122"/>
+                <a:cs typeface="맑은 고딕" pitchFamily="34" charset="-120"/>
+              </a:rPr>
+              <a:t>평균 4.23</a:t>
+            </a:r>
+            <a:endParaRPr lang="en-US" sz="980" dirty="0"/>
+          </a:p>
+        </p:txBody>
+      </p:sp>
+      <p:sp>
+        <p:nvSpPr>
+          <p:cNvPr id="25" name="Text 23"/>
+          <p:cNvSpPr/>
+          <p:nvPr/>
+        </p:nvSpPr>
+        <p:spPr>
+          <a:xfrm>
+            <a:off x="566928" y="2560320"/>
+            <a:ext cx="2286000" cy="219456"/>
+          </a:xfrm>
+          <a:prstGeom prst="rect">
+            <a:avLst/>
+          </a:prstGeom>
+          <a:noFill/>
+          <a:ln/>
+        </p:spPr>
+        <p:txBody>
+          <a:bodyPr wrap="square" lIns="0" tIns="0" rIns="0" bIns="0" rtlCol="0" anchor="ctr"/>
+          <a:lstStyle/>
+          <a:p>
+            <a:pPr indent="0" marL="0">
+              <a:buNone/>
+            </a:pPr>
+            <a:r>
+              <a:rPr lang="en-US" sz="980" dirty="0">
+                <a:solidFill>
+                  <a:srgbClr val="333333"/>
+                </a:solidFill>
+                <a:latin typeface="맑은 고딕" pitchFamily="34" charset="0"/>
+                <a:ea typeface="맑은 고딕" pitchFamily="34" charset="-122"/>
+                <a:cs typeface="맑은 고딕" pitchFamily="34" charset="-120"/>
+              </a:rPr>
+              <a:t>창의 아이디어 5건</a:t>
+            </a:r>
+            <a:endParaRPr lang="en-US" sz="980" dirty="0"/>
+          </a:p>
+        </p:txBody>
+      </p:sp>
+      <p:sp>
+        <p:nvSpPr>
+          <p:cNvPr id="26" name="Text 24"/>
+          <p:cNvSpPr/>
+          <p:nvPr/>
+        </p:nvSpPr>
+        <p:spPr>
+          <a:xfrm>
+            <a:off x="2926080" y="2560320"/>
+            <a:ext cx="1371600" cy="219456"/>
+          </a:xfrm>
+          <a:prstGeom prst="rect">
+            <a:avLst/>
+          </a:prstGeom>
+          <a:noFill/>
+          <a:ln/>
+        </p:spPr>
+        <p:txBody>
+          <a:bodyPr wrap="square" lIns="0" tIns="0" rIns="0" bIns="0" rtlCol="0" anchor="ctr"/>
+          <a:lstStyle/>
+          <a:p>
+            <a:pPr algn="r" indent="0" marL="0">
+              <a:buNone/>
+            </a:pPr>
+            <a:r>
+              <a:rPr lang="en-US" sz="980" b="1" dirty="0">
+                <a:solidFill>
+                  <a:srgbClr val="2E7D4F"/>
+                </a:solidFill>
+                <a:latin typeface="맑은 고딕" pitchFamily="34" charset="0"/>
+                <a:ea typeface="맑은 고딕" pitchFamily="34" charset="-122"/>
+                <a:cs typeface="맑은 고딕" pitchFamily="34" charset="-120"/>
+              </a:rPr>
+              <a:t>평균 8.50</a:t>
+            </a:r>
+            <a:endParaRPr lang="en-US" sz="980" dirty="0"/>
+          </a:p>
+        </p:txBody>
+      </p:sp>
+      <p:sp>
+        <p:nvSpPr>
+          <p:cNvPr id="27" name="Text 25"/>
+          <p:cNvSpPr/>
+          <p:nvPr/>
+        </p:nvSpPr>
+        <p:spPr>
+          <a:xfrm>
+            <a:off x="566928" y="2788920"/>
+            <a:ext cx="2286000" cy="219456"/>
+          </a:xfrm>
+          <a:prstGeom prst="rect">
+            <a:avLst/>
+          </a:prstGeom>
+          <a:noFill/>
+          <a:ln/>
+        </p:spPr>
+        <p:txBody>
+          <a:bodyPr wrap="square" lIns="0" tIns="0" rIns="0" bIns="0" rtlCol="0" anchor="ctr"/>
+          <a:lstStyle/>
+          <a:p>
+            <a:pPr indent="0" marL="0">
+              <a:buNone/>
+            </a:pPr>
+            <a:r>
+              <a:rPr lang="en-US" sz="980" dirty="0">
+                <a:solidFill>
+                  <a:srgbClr val="333333"/>
+                </a:solidFill>
+                <a:latin typeface="맑은 고딕" pitchFamily="34" charset="0"/>
+                <a:ea typeface="맑은 고딕" pitchFamily="34" charset="-122"/>
+                <a:cs typeface="맑은 고딕" pitchFamily="34" charset="-120"/>
+              </a:rPr>
+              <a:t>두 그룹 분포 겹침</a:t>
+            </a:r>
+            <a:endParaRPr lang="en-US" sz="980" dirty="0"/>
+          </a:p>
+        </p:txBody>
+      </p:sp>
+      <p:sp>
+        <p:nvSpPr>
+          <p:cNvPr id="28" name="Text 26"/>
+          <p:cNvSpPr/>
+          <p:nvPr/>
+        </p:nvSpPr>
+        <p:spPr>
+          <a:xfrm>
+            <a:off x="2926080" y="2788920"/>
+            <a:ext cx="1371600" cy="219456"/>
+          </a:xfrm>
+          <a:prstGeom prst="rect">
+            <a:avLst/>
+          </a:prstGeom>
+          <a:noFill/>
+          <a:ln/>
+        </p:spPr>
+        <p:txBody>
+          <a:bodyPr wrap="square" lIns="0" tIns="0" rIns="0" bIns="0" rtlCol="0" anchor="ctr"/>
+          <a:lstStyle/>
+          <a:p>
+            <a:pPr algn="r" indent="0" marL="0">
+              <a:buNone/>
+            </a:pPr>
+            <a:r>
+              <a:rPr lang="en-US" sz="980" b="1" dirty="0">
+                <a:solidFill>
+                  <a:srgbClr val="2E7D4F"/>
+                </a:solidFill>
+                <a:latin typeface="맑은 고딕" pitchFamily="34" charset="0"/>
+                <a:ea typeface="맑은 고딕" pitchFamily="34" charset="-122"/>
+                <a:cs typeface="맑은 고딕" pitchFamily="34" charset="-120"/>
+              </a:rPr>
+              <a:t>없음</a:t>
+            </a:r>
+            <a:endParaRPr lang="en-US" sz="980" dirty="0"/>
+          </a:p>
+        </p:txBody>
+      </p:sp>
+      <p:sp>
+        <p:nvSpPr>
+          <p:cNvPr id="29" name="Text 27"/>
+          <p:cNvSpPr/>
+          <p:nvPr/>
+        </p:nvSpPr>
+        <p:spPr>
+          <a:xfrm>
+            <a:off x="530352" y="3044952"/>
+            <a:ext cx="3749040" cy="219456"/>
+          </a:xfrm>
+          <a:prstGeom prst="rect">
+            <a:avLst/>
+          </a:prstGeom>
+          <a:noFill/>
+          <a:ln/>
+        </p:spPr>
+        <p:txBody>
+          <a:bodyPr wrap="square" lIns="0" tIns="0" rIns="0" bIns="0" rtlCol="0" anchor="ctr"/>
+          <a:lstStyle/>
+          <a:p>
+            <a:pPr indent="0" marL="0">
+              <a:buNone/>
+            </a:pPr>
+            <a:r>
+              <a:rPr lang="en-US" sz="1050" b="1" dirty="0">
+                <a:solidFill>
+                  <a:srgbClr val="1E293B"/>
+                </a:solidFill>
+                <a:latin typeface="맑은 고딕" pitchFamily="34" charset="0"/>
+                <a:ea typeface="맑은 고딕" pitchFamily="34" charset="-122"/>
+                <a:cs typeface="맑은 고딕" pitchFamily="34" charset="-120"/>
+              </a:rPr>
+              <a:t>두 채점 간 불일치 (30건 기준)</a:t>
+            </a:r>
+            <a:endParaRPr lang="en-US" sz="1050" dirty="0"/>
+          </a:p>
+        </p:txBody>
+      </p:sp>
+      <p:sp>
+        <p:nvSpPr>
+          <p:cNvPr id="30" name="Text 28"/>
+          <p:cNvSpPr/>
+          <p:nvPr/>
+        </p:nvSpPr>
+        <p:spPr>
+          <a:xfrm>
+            <a:off x="566928" y="3255264"/>
+            <a:ext cx="3749040" cy="219456"/>
+          </a:xfrm>
+          <a:prstGeom prst="rect">
+            <a:avLst/>
+          </a:prstGeom>
+          <a:noFill/>
+          <a:ln/>
+        </p:spPr>
+        <p:txBody>
+          <a:bodyPr wrap="square" lIns="0" tIns="0" rIns="0" bIns="0" rtlCol="0" anchor="ctr"/>
+          <a:lstStyle/>
+          <a:p>
+            <a:pPr indent="0" marL="0">
+              <a:buNone/>
+            </a:pPr>
+            <a:r>
+              <a:rPr lang="en-US" sz="980" dirty="0">
+                <a:solidFill>
+                  <a:srgbClr val="333333"/>
+                </a:solidFill>
+                <a:latin typeface="맑은 고딕" pitchFamily="34" charset="0"/>
+                <a:ea typeface="맑은 고딕" pitchFamily="34" charset="-122"/>
+                <a:cs typeface="맑은 고딕" pitchFamily="34" charset="-120"/>
+              </a:rPr>
+              <a:t>평균 절대차 2.03점 · 3점 이상 괴리 7건</a:t>
+            </a:r>
+            <a:endParaRPr lang="en-US" sz="980" dirty="0"/>
+          </a:p>
+        </p:txBody>
+      </p:sp>
+      <p:sp>
+        <p:nvSpPr>
+          <p:cNvPr id="31" name="Text 29"/>
+          <p:cNvSpPr/>
+          <p:nvPr/>
+        </p:nvSpPr>
+        <p:spPr>
+          <a:xfrm>
+            <a:off x="530352" y="3511296"/>
+            <a:ext cx="3749040" cy="219456"/>
+          </a:xfrm>
+          <a:prstGeom prst="rect">
+            <a:avLst/>
+          </a:prstGeom>
+          <a:noFill/>
+          <a:ln/>
+        </p:spPr>
+        <p:txBody>
+          <a:bodyPr wrap="square" lIns="0" tIns="0" rIns="0" bIns="0" rtlCol="0" anchor="ctr"/>
+          <a:lstStyle/>
+          <a:p>
+            <a:pPr indent="0" marL="0">
+              <a:buNone/>
+            </a:pPr>
+            <a:r>
+              <a:rPr lang="en-US" sz="1050" b="1" dirty="0">
+                <a:solidFill>
+                  <a:srgbClr val="1E293B"/>
+                </a:solidFill>
+                <a:latin typeface="맑은 고딕" pitchFamily="34" charset="0"/>
+                <a:ea typeface="맑은 고딕" pitchFamily="34" charset="-122"/>
+                <a:cs typeface="맑은 고딕" pitchFamily="34" charset="-120"/>
+              </a:rPr>
+              <a:t>조작 내성 시험 (장황·유창하게 재작성)</a:t>
+            </a:r>
+            <a:endParaRPr lang="en-US" sz="1050" dirty="0"/>
+          </a:p>
+        </p:txBody>
+      </p:sp>
+      <p:sp>
+        <p:nvSpPr>
+          <p:cNvPr id="32" name="Text 30"/>
+          <p:cNvSpPr/>
+          <p:nvPr/>
+        </p:nvSpPr>
+        <p:spPr>
+          <a:xfrm>
+            <a:off x="566928" y="3721608"/>
+            <a:ext cx="3749040" cy="219456"/>
+          </a:xfrm>
+          <a:prstGeom prst="rect">
+            <a:avLst/>
+          </a:prstGeom>
+          <a:noFill/>
+          <a:ln/>
+        </p:spPr>
+        <p:txBody>
+          <a:bodyPr wrap="square" lIns="0" tIns="0" rIns="0" bIns="0" rtlCol="0" anchor="ctr"/>
+          <a:lstStyle/>
+          <a:p>
+            <a:pPr indent="0" marL="0">
+              <a:buNone/>
+            </a:pPr>
+            <a:r>
+              <a:rPr lang="en-US" sz="980" dirty="0">
+                <a:solidFill>
+                  <a:srgbClr val="333333"/>
+                </a:solidFill>
+                <a:latin typeface="맑은 고딕" pitchFamily="34" charset="0"/>
+                <a:ea typeface="맑은 고딕" pitchFamily="34" charset="-122"/>
+                <a:cs typeface="맑은 고딕" pitchFamily="34" charset="-120"/>
+              </a:rPr>
+              <a:t>점수 상승 없음 — 실용성 5→4로 오히려 하락</a:t>
+            </a:r>
+            <a:endParaRPr lang="en-US" sz="980" dirty="0"/>
+          </a:p>
+        </p:txBody>
+      </p:sp>
+      <p:sp>
+        <p:nvSpPr>
+          <p:cNvPr id="33" name="Shape 31"/>
+          <p:cNvSpPr/>
+          <p:nvPr/>
+        </p:nvSpPr>
+        <p:spPr>
+          <a:xfrm>
+            <a:off x="4663440" y="1755648"/>
+            <a:ext cx="4114800" cy="2304288"/>
           </a:xfrm>
           <a:prstGeom prst="rect">
             <a:avLst/>
           </a:prstGeom>
           <a:solidFill>
-            <a:srgbClr val="2563EB"/>
+            <a:srgbClr val="FDF2F2"/>
           </a:solidFill>
-          <a:ln/>
-        </p:spPr>
-      </p:sp>
-      <p:sp>
-        <p:nvSpPr>
-          <p:cNvPr id="22" name="Text 20"/>
-          <p:cNvSpPr/>
-          <p:nvPr/>
-        </p:nvSpPr>
-        <p:spPr>
-          <a:xfrm>
-            <a:off x="365760" y="1783080"/>
-            <a:ext cx="2011680" cy="329184"/>
-          </a:xfrm>
-          <a:prstGeom prst="rect">
-            <a:avLst/>
-          </a:prstGeom>
-          <a:noFill/>
-          <a:ln/>
-        </p:spPr>
-        <p:txBody>
-          <a:bodyPr wrap="square" lIns="0" tIns="0" rIns="0" bIns="0" rtlCol="0" anchor="ctr"/>
-          <a:lstStyle/>
-          <a:p>
-            <a:pPr algn="ctr" indent="0" marL="0">
-              <a:buNone/>
-            </a:pPr>
-            <a:r>
-              <a:rPr lang="en-US" sz="1150" b="1" dirty="0">
-                <a:solidFill>
-                  <a:srgbClr val="FFFFFF"/>
-                </a:solidFill>
-                <a:latin typeface="맑은 고딕" pitchFamily="34" charset="0"/>
-                <a:ea typeface="맑은 고딕" pitchFamily="34" charset="-122"/>
-                <a:cs typeface="맑은 고딕" pitchFamily="34" charset="-120"/>
-              </a:rPr>
-              <a:t>화면</a:t>
-            </a:r>
-            <a:endParaRPr lang="en-US" sz="1150" dirty="0"/>
-          </a:p>
-        </p:txBody>
-      </p:sp>
-      <p:sp>
-        <p:nvSpPr>
-          <p:cNvPr id="23" name="Text 21"/>
-          <p:cNvSpPr/>
-          <p:nvPr/>
-        </p:nvSpPr>
-        <p:spPr>
-          <a:xfrm>
-            <a:off x="475488" y="2231136"/>
-            <a:ext cx="1792224" cy="868680"/>
-          </a:xfrm>
-          <a:prstGeom prst="rect">
-            <a:avLst/>
-          </a:prstGeom>
-          <a:noFill/>
-          <a:ln/>
-        </p:spPr>
-        <p:txBody>
-          <a:bodyPr wrap="square" lIns="0" tIns="0" rIns="0" bIns="0" rtlCol="0" anchor="ctr"/>
-          <a:lstStyle/>
-          <a:p>
-            <a:pPr algn="ctr" indent="0" marL="0">
-              <a:lnSpc>
-                <a:spcPct val="130000"/>
-              </a:lnSpc>
-              <a:buNone/>
-            </a:pPr>
-            <a:r>
-              <a:rPr lang="en-US" sz="980" dirty="0">
-                <a:solidFill>
-                  <a:srgbClr val="64748B"/>
-                </a:solidFill>
-                <a:latin typeface="맑은 고딕" pitchFamily="34" charset="0"/>
-                <a:ea typeface="맑은 고딕" pitchFamily="34" charset="-122"/>
-                <a:cs typeface="맑은 고딕" pitchFamily="34" charset="-120"/>
-              </a:rPr>
-              <a:t>문답·결과 웹 화면</a:t>
-            </a:r>
-            <a:endParaRPr lang="en-US" sz="980" dirty="0"/>
-          </a:p>
-          <a:p>
-            <a:pPr algn="ctr" indent="0" marL="0">
-              <a:lnSpc>
-                <a:spcPct val="130000"/>
-              </a:lnSpc>
-              <a:buNone/>
-            </a:pPr>
-            <a:r>
-              <a:rPr lang="en-US" sz="980" dirty="0">
-                <a:solidFill>
-                  <a:srgbClr val="64748B"/>
-                </a:solidFill>
-                <a:latin typeface="맑은 고딕" pitchFamily="34" charset="0"/>
-                <a:ea typeface="맑은 고딕" pitchFamily="34" charset="-122"/>
-                <a:cs typeface="맑은 고딕" pitchFamily="34" charset="-120"/>
-              </a:rPr>
-              <a:t>음성 입력 · 문답 저장</a:t>
-            </a:r>
-            <a:endParaRPr lang="en-US" sz="980" dirty="0"/>
-          </a:p>
-          <a:p>
-            <a:pPr algn="ctr" indent="0" marL="0">
-              <a:lnSpc>
-                <a:spcPct val="130000"/>
-              </a:lnSpc>
-              <a:buNone/>
-            </a:pPr>
-            <a:r>
-              <a:rPr lang="en-US" sz="980" dirty="0">
-                <a:solidFill>
-                  <a:srgbClr val="64748B"/>
-                </a:solidFill>
-                <a:latin typeface="맑은 고딕" pitchFamily="34" charset="0"/>
-                <a:ea typeface="맑은 고딕" pitchFamily="34" charset="-122"/>
-                <a:cs typeface="맑은 고딕" pitchFamily="34" charset="-120"/>
-              </a:rPr>
-              <a:t>Word/PDF 불러와 재평가</a:t>
-            </a:r>
-            <a:endParaRPr lang="en-US" sz="980" dirty="0"/>
-          </a:p>
-        </p:txBody>
-      </p:sp>
-      <p:sp>
-        <p:nvSpPr>
-          <p:cNvPr id="24" name="Shape 22"/>
-          <p:cNvSpPr/>
-          <p:nvPr/>
-        </p:nvSpPr>
-        <p:spPr>
-          <a:xfrm>
-            <a:off x="2551176" y="1783080"/>
-            <a:ext cx="2011680" cy="1417320"/>
-          </a:xfrm>
-          <a:prstGeom prst="rect">
-            <a:avLst/>
-          </a:prstGeom>
-          <a:solidFill>
-            <a:srgbClr val="FFFFFF"/>
-          </a:solidFill>
-          <a:ln w="12700">
+          <a:ln w="15240">
             <a:solidFill>
-              <a:srgbClr val="E5E7EB"/>
+              <a:srgbClr val="F0C0C0"/>
             </a:solidFill>
             <a:prstDash val="solid"/>
           </a:ln>
@@ -29856,406 +30381,40 @@
       </p:sp>
       <p:sp>
         <p:nvSpPr>
-          <p:cNvPr id="25" name="Shape 23"/>
-          <p:cNvSpPr/>
-          <p:nvPr/>
-        </p:nvSpPr>
-        <p:spPr>
-          <a:xfrm>
-            <a:off x="2551176" y="1783080"/>
-            <a:ext cx="2011680" cy="329184"/>
-          </a:xfrm>
-          <a:prstGeom prst="rect">
-            <a:avLst/>
-          </a:prstGeom>
-          <a:solidFill>
-            <a:srgbClr val="2563EB"/>
-          </a:solidFill>
-          <a:ln/>
-        </p:spPr>
-      </p:sp>
-      <p:sp>
-        <p:nvSpPr>
-          <p:cNvPr id="26" name="Text 24"/>
-          <p:cNvSpPr/>
-          <p:nvPr/>
-        </p:nvSpPr>
-        <p:spPr>
-          <a:xfrm>
-            <a:off x="2551176" y="1783080"/>
-            <a:ext cx="2011680" cy="329184"/>
-          </a:xfrm>
-          <a:prstGeom prst="rect">
-            <a:avLst/>
-          </a:prstGeom>
-          <a:noFill/>
-          <a:ln/>
-        </p:spPr>
-        <p:txBody>
-          <a:bodyPr wrap="square" lIns="0" tIns="0" rIns="0" bIns="0" rtlCol="0" anchor="ctr"/>
-          <a:lstStyle/>
-          <a:p>
-            <a:pPr algn="ctr" indent="0" marL="0">
-              <a:buNone/>
-            </a:pPr>
-            <a:r>
-              <a:rPr lang="en-US" sz="1150" b="1" dirty="0">
-                <a:solidFill>
-                  <a:srgbClr val="FFFFFF"/>
-                </a:solidFill>
-                <a:latin typeface="맑은 고딕" pitchFamily="34" charset="0"/>
-                <a:ea typeface="맑은 고딕" pitchFamily="34" charset="-122"/>
-                <a:cs typeface="맑은 고딕" pitchFamily="34" charset="-120"/>
-              </a:rPr>
-              <a:t>평가 엔진</a:t>
-            </a:r>
-            <a:endParaRPr lang="en-US" sz="1150" dirty="0"/>
-          </a:p>
-        </p:txBody>
-      </p:sp>
-      <p:sp>
-        <p:nvSpPr>
-          <p:cNvPr id="27" name="Text 25"/>
-          <p:cNvSpPr/>
-          <p:nvPr/>
-        </p:nvSpPr>
-        <p:spPr>
-          <a:xfrm>
-            <a:off x="2660904" y="2231136"/>
-            <a:ext cx="1792224" cy="868680"/>
-          </a:xfrm>
-          <a:prstGeom prst="rect">
-            <a:avLst/>
-          </a:prstGeom>
-          <a:noFill/>
-          <a:ln/>
-        </p:spPr>
-        <p:txBody>
-          <a:bodyPr wrap="square" lIns="0" tIns="0" rIns="0" bIns="0" rtlCol="0" anchor="ctr"/>
-          <a:lstStyle/>
-          <a:p>
-            <a:pPr algn="ctr" indent="0" marL="0">
-              <a:lnSpc>
-                <a:spcPct val="130000"/>
-              </a:lnSpc>
-              <a:buNone/>
-            </a:pPr>
-            <a:r>
-              <a:rPr lang="en-US" sz="980" dirty="0">
-                <a:solidFill>
-                  <a:srgbClr val="64748B"/>
-                </a:solidFill>
-                <a:latin typeface="맑은 고딕" pitchFamily="34" charset="0"/>
-                <a:ea typeface="맑은 고딕" pitchFamily="34" charset="-122"/>
-                <a:cs typeface="맑은 고딕" pitchFamily="34" charset="-120"/>
-              </a:rPr>
-              <a:t>문답 생성 · 이원 채점</a:t>
-            </a:r>
-            <a:endParaRPr lang="en-US" sz="980" dirty="0"/>
-          </a:p>
-          <a:p>
-            <a:pPr algn="ctr" indent="0" marL="0">
-              <a:lnSpc>
-                <a:spcPct val="130000"/>
-              </a:lnSpc>
-              <a:buNone/>
-            </a:pPr>
-            <a:r>
-              <a:rPr lang="en-US" sz="980" dirty="0">
-                <a:solidFill>
-                  <a:srgbClr val="64748B"/>
-                </a:solidFill>
-                <a:latin typeface="맑은 고딕" pitchFamily="34" charset="0"/>
-                <a:ea typeface="맑은 고딕" pitchFamily="34" charset="-122"/>
-                <a:cs typeface="맑은 고딕" pitchFamily="34" charset="-120"/>
-              </a:rPr>
-              <a:t>명세 추출 · 선례 판정</a:t>
-            </a:r>
-            <a:endParaRPr lang="en-US" sz="980" dirty="0"/>
-          </a:p>
-          <a:p>
-            <a:pPr algn="ctr" indent="0" marL="0">
-              <a:lnSpc>
-                <a:spcPct val="130000"/>
-              </a:lnSpc>
-              <a:buNone/>
-            </a:pPr>
-            <a:r>
-              <a:rPr lang="en-US" sz="980" dirty="0">
-                <a:solidFill>
-                  <a:srgbClr val="64748B"/>
-                </a:solidFill>
-                <a:latin typeface="맑은 고딕" pitchFamily="34" charset="0"/>
-                <a:ea typeface="맑은 고딕" pitchFamily="34" charset="-122"/>
-                <a:cs typeface="맑은 고딕" pitchFamily="34" charset="-120"/>
-              </a:rPr>
-              <a:t>판정 규칙은 문서로 분리</a:t>
-            </a:r>
-            <a:endParaRPr lang="en-US" sz="980" dirty="0"/>
-          </a:p>
-        </p:txBody>
-      </p:sp>
-      <p:sp>
-        <p:nvSpPr>
-          <p:cNvPr id="28" name="Shape 26"/>
-          <p:cNvSpPr/>
-          <p:nvPr/>
-        </p:nvSpPr>
-        <p:spPr>
-          <a:xfrm>
-            <a:off x="4736592" y="1783080"/>
-            <a:ext cx="2011680" cy="1417320"/>
-          </a:xfrm>
-          <a:prstGeom prst="rect">
-            <a:avLst/>
-          </a:prstGeom>
-          <a:solidFill>
-            <a:srgbClr val="FFFFFF"/>
-          </a:solidFill>
-          <a:ln w="12700">
-            <a:solidFill>
-              <a:srgbClr val="E5E7EB"/>
-            </a:solidFill>
-            <a:prstDash val="solid"/>
-          </a:ln>
-          <a:effectLst>
-            <a:outerShdw sx="100000" sy="100000" kx="0" ky="0" algn="bl" rotWithShape="0" blurRad="50800" dist="12700" dir="8100000">
-              <a:srgbClr val="000000">
-                <a:alpha val="8000"/>
-              </a:srgbClr>
-            </a:outerShdw>
-          </a:effectLst>
-        </p:spPr>
-      </p:sp>
-      <p:sp>
-        <p:nvSpPr>
-          <p:cNvPr id="29" name="Shape 27"/>
-          <p:cNvSpPr/>
-          <p:nvPr/>
-        </p:nvSpPr>
-        <p:spPr>
-          <a:xfrm>
-            <a:off x="4736592" y="1783080"/>
-            <a:ext cx="2011680" cy="329184"/>
-          </a:xfrm>
-          <a:prstGeom prst="rect">
-            <a:avLst/>
-          </a:prstGeom>
-          <a:solidFill>
-            <a:srgbClr val="2563EB"/>
-          </a:solidFill>
-          <a:ln/>
-        </p:spPr>
-      </p:sp>
-      <p:sp>
-        <p:nvSpPr>
-          <p:cNvPr id="30" name="Text 28"/>
-          <p:cNvSpPr/>
-          <p:nvPr/>
-        </p:nvSpPr>
-        <p:spPr>
-          <a:xfrm>
-            <a:off x="4736592" y="1783080"/>
-            <a:ext cx="2011680" cy="329184"/>
-          </a:xfrm>
-          <a:prstGeom prst="rect">
-            <a:avLst/>
-          </a:prstGeom>
-          <a:noFill/>
-          <a:ln/>
-        </p:spPr>
-        <p:txBody>
-          <a:bodyPr wrap="square" lIns="0" tIns="0" rIns="0" bIns="0" rtlCol="0" anchor="ctr"/>
-          <a:lstStyle/>
-          <a:p>
-            <a:pPr algn="ctr" indent="0" marL="0">
-              <a:buNone/>
-            </a:pPr>
-            <a:r>
-              <a:rPr lang="en-US" sz="1150" b="1" dirty="0">
-                <a:solidFill>
-                  <a:srgbClr val="FFFFFF"/>
-                </a:solidFill>
-                <a:latin typeface="맑은 고딕" pitchFamily="34" charset="0"/>
-                <a:ea typeface="맑은 고딕" pitchFamily="34" charset="-122"/>
-                <a:cs typeface="맑은 고딕" pitchFamily="34" charset="-120"/>
-              </a:rPr>
-              <a:t>데이터</a:t>
-            </a:r>
-            <a:endParaRPr lang="en-US" sz="1150" dirty="0"/>
-          </a:p>
-        </p:txBody>
-      </p:sp>
-      <p:sp>
-        <p:nvSpPr>
-          <p:cNvPr id="31" name="Text 29"/>
-          <p:cNvSpPr/>
-          <p:nvPr/>
-        </p:nvSpPr>
-        <p:spPr>
-          <a:xfrm>
-            <a:off x="4846320" y="2231136"/>
-            <a:ext cx="1792224" cy="868680"/>
-          </a:xfrm>
-          <a:prstGeom prst="rect">
-            <a:avLst/>
-          </a:prstGeom>
-          <a:noFill/>
-          <a:ln/>
-        </p:spPr>
-        <p:txBody>
-          <a:bodyPr wrap="square" lIns="0" tIns="0" rIns="0" bIns="0" rtlCol="0" anchor="ctr"/>
-          <a:lstStyle/>
-          <a:p>
-            <a:pPr algn="ctr" indent="0" marL="0">
-              <a:lnSpc>
-                <a:spcPct val="130000"/>
-              </a:lnSpc>
-              <a:buNone/>
-            </a:pPr>
-            <a:r>
-              <a:rPr lang="en-US" sz="980" dirty="0">
-                <a:solidFill>
-                  <a:srgbClr val="64748B"/>
-                </a:solidFill>
-                <a:latin typeface="맑은 고딕" pitchFamily="34" charset="0"/>
-                <a:ea typeface="맑은 고딕" pitchFamily="34" charset="-122"/>
-                <a:cs typeface="맑은 고딕" pitchFamily="34" charset="-120"/>
-              </a:rPr>
-              <a:t>KDI 발간물 7,362건</a:t>
-            </a:r>
-            <a:endParaRPr lang="en-US" sz="980" dirty="0"/>
-          </a:p>
-          <a:p>
-            <a:pPr algn="ctr" indent="0" marL="0">
-              <a:lnSpc>
-                <a:spcPct val="130000"/>
-              </a:lnSpc>
-              <a:buNone/>
-            </a:pPr>
-            <a:r>
-              <a:rPr lang="en-US" sz="980" dirty="0">
-                <a:solidFill>
-                  <a:srgbClr val="64748B"/>
-                </a:solidFill>
-                <a:latin typeface="맑은 고딕" pitchFamily="34" charset="0"/>
-                <a:ea typeface="맑은 고딕" pitchFamily="34" charset="-122"/>
-                <a:cs typeface="맑은 고딕" pitchFamily="34" charset="-120"/>
-              </a:rPr>
-              <a:t>OPSI 1,015건 (로컬)</a:t>
-            </a:r>
-            <a:endParaRPr lang="en-US" sz="980" dirty="0"/>
-          </a:p>
-          <a:p>
-            <a:pPr algn="ctr" indent="0" marL="0">
-              <a:lnSpc>
-                <a:spcPct val="130000"/>
-              </a:lnSpc>
-              <a:buNone/>
-            </a:pPr>
-            <a:r>
-              <a:rPr lang="en-US" sz="980" dirty="0">
-                <a:solidFill>
-                  <a:srgbClr val="64748B"/>
-                </a:solidFill>
-                <a:latin typeface="맑은 고딕" pitchFamily="34" charset="0"/>
-                <a:ea typeface="맑은 고딕" pitchFamily="34" charset="-122"/>
-                <a:cs typeface="맑은 고딕" pitchFamily="34" charset="-120"/>
-              </a:rPr>
-              <a:t>재정 · 국회 의안 (조회)</a:t>
-            </a:r>
-            <a:endParaRPr lang="en-US" sz="980" dirty="0"/>
-          </a:p>
-        </p:txBody>
-      </p:sp>
-      <p:sp>
-        <p:nvSpPr>
-          <p:cNvPr id="32" name="Shape 30"/>
-          <p:cNvSpPr/>
-          <p:nvPr/>
-        </p:nvSpPr>
-        <p:spPr>
-          <a:xfrm>
-            <a:off x="6922008" y="1783080"/>
-            <a:ext cx="2011680" cy="1417320"/>
-          </a:xfrm>
-          <a:prstGeom prst="rect">
-            <a:avLst/>
-          </a:prstGeom>
-          <a:solidFill>
-            <a:srgbClr val="FFFFFF"/>
-          </a:solidFill>
-          <a:ln w="12700">
-            <a:solidFill>
-              <a:srgbClr val="E5E7EB"/>
-            </a:solidFill>
-            <a:prstDash val="solid"/>
-          </a:ln>
-          <a:effectLst>
-            <a:outerShdw sx="100000" sy="100000" kx="0" ky="0" algn="bl" rotWithShape="0" blurRad="50800" dist="12700" dir="8100000">
-              <a:srgbClr val="000000">
-                <a:alpha val="8000"/>
-              </a:srgbClr>
-            </a:outerShdw>
-          </a:effectLst>
-        </p:spPr>
-      </p:sp>
-      <p:sp>
-        <p:nvSpPr>
-          <p:cNvPr id="33" name="Shape 31"/>
-          <p:cNvSpPr/>
-          <p:nvPr/>
-        </p:nvSpPr>
-        <p:spPr>
-          <a:xfrm>
-            <a:off x="6922008" y="1783080"/>
-            <a:ext cx="2011680" cy="329184"/>
-          </a:xfrm>
-          <a:prstGeom prst="rect">
-            <a:avLst/>
-          </a:prstGeom>
-          <a:solidFill>
-            <a:srgbClr val="2563EB"/>
-          </a:solidFill>
-          <a:ln/>
-        </p:spPr>
-      </p:sp>
-      <p:sp>
-        <p:nvSpPr>
           <p:cNvPr id="34" name="Text 32"/>
           <p:cNvSpPr/>
           <p:nvPr/>
         </p:nvSpPr>
         <p:spPr>
           <a:xfrm>
-            <a:off x="6922008" y="1783080"/>
-            <a:ext cx="2011680" cy="329184"/>
-          </a:xfrm>
-          <a:prstGeom prst="rect">
-            <a:avLst/>
-          </a:prstGeom>
-          <a:noFill/>
-          <a:ln/>
-        </p:spPr>
-        <p:txBody>
-          <a:bodyPr wrap="square" lIns="0" tIns="0" rIns="0" bIns="0" rtlCol="0" anchor="ctr"/>
-          <a:lstStyle/>
-          <a:p>
-            <a:pPr algn="ctr" indent="0" marL="0">
-              <a:buNone/>
-            </a:pPr>
-            <a:r>
-              <a:rPr lang="en-US" sz="1150" b="1" dirty="0">
-                <a:solidFill>
-                  <a:srgbClr val="FFFFFF"/>
-                </a:solidFill>
-                <a:latin typeface="맑은 고딕" pitchFamily="34" charset="0"/>
-                <a:ea typeface="맑은 고딕" pitchFamily="34" charset="-122"/>
-                <a:cs typeface="맑은 고딕" pitchFamily="34" charset="-120"/>
-              </a:rPr>
-              <a:t>배포</a:t>
-            </a:r>
-            <a:endParaRPr lang="en-US" sz="1150" dirty="0"/>
+            <a:off x="4828032" y="1847088"/>
+            <a:ext cx="3749040" cy="274320"/>
+          </a:xfrm>
+          <a:prstGeom prst="rect">
+            <a:avLst/>
+          </a:prstGeom>
+          <a:noFill/>
+          <a:ln/>
+        </p:spPr>
+        <p:txBody>
+          <a:bodyPr wrap="square" lIns="0" tIns="0" rIns="0" bIns="0" rtlCol="0" anchor="ctr"/>
+          <a:lstStyle/>
+          <a:p>
+            <a:pPr indent="0" marL="0">
+              <a:buNone/>
+            </a:pPr>
+            <a:r>
+              <a:rPr lang="en-US" sz="1350" b="1" dirty="0">
+                <a:solidFill>
+                  <a:srgbClr val="C0392B"/>
+                </a:solidFill>
+                <a:latin typeface="맑은 고딕" pitchFamily="34" charset="0"/>
+                <a:ea typeface="맑은 고딕" pitchFamily="34" charset="-122"/>
+                <a:cs typeface="맑은 고딕" pitchFamily="34" charset="-120"/>
+              </a:rPr>
+              <a:t>확인되지 않은 것</a:t>
+            </a:r>
+            <a:endParaRPr lang="en-US" sz="1350" dirty="0"/>
           </a:p>
         </p:txBody>
       </p:sp>
@@ -30267,90 +30426,398 @@
         </p:nvSpPr>
         <p:spPr>
           <a:xfrm>
-            <a:off x="7031736" y="2231136"/>
-            <a:ext cx="1792224" cy="868680"/>
-          </a:xfrm>
-          <a:prstGeom prst="rect">
-            <a:avLst/>
-          </a:prstGeom>
-          <a:noFill/>
-          <a:ln/>
-        </p:spPr>
-        <p:txBody>
-          <a:bodyPr wrap="square" lIns="0" tIns="0" rIns="0" bIns="0" rtlCol="0" anchor="ctr"/>
-          <a:lstStyle/>
-          <a:p>
-            <a:pPr algn="ctr" indent="0" marL="0">
-              <a:lnSpc>
-                <a:spcPct val="130000"/>
-              </a:lnSpc>
-              <a:buNone/>
-            </a:pPr>
-            <a:r>
-              <a:rPr lang="en-US" sz="980" dirty="0">
-                <a:solidFill>
-                  <a:srgbClr val="64748B"/>
-                </a:solidFill>
-                <a:latin typeface="맑은 고딕" pitchFamily="34" charset="0"/>
-                <a:ea typeface="맑은 고딕" pitchFamily="34" charset="-122"/>
-                <a:cs typeface="맑은 고딕" pitchFamily="34" charset="-120"/>
-              </a:rPr>
-              <a:t>연구용 · 공개용 2종</a:t>
-            </a:r>
-            <a:endParaRPr lang="en-US" sz="980" dirty="0"/>
-          </a:p>
-          <a:p>
-            <a:pPr algn="ctr" indent="0" marL="0">
-              <a:lnSpc>
-                <a:spcPct val="130000"/>
-              </a:lnSpc>
-              <a:buNone/>
-            </a:pPr>
-            <a:r>
-              <a:rPr lang="en-US" sz="980" dirty="0">
-                <a:solidFill>
-                  <a:srgbClr val="64748B"/>
-                </a:solidFill>
-                <a:latin typeface="맑은 고딕" pitchFamily="34" charset="0"/>
-                <a:ea typeface="맑은 고딕" pitchFamily="34" charset="-122"/>
-                <a:cs typeface="맑은 고딕" pitchFamily="34" charset="-120"/>
-              </a:rPr>
-              <a:t>초대 코드 접근 통제</a:t>
-            </a:r>
-            <a:endParaRPr lang="en-US" sz="980" dirty="0"/>
-          </a:p>
-          <a:p>
-            <a:pPr algn="ctr" indent="0" marL="0">
-              <a:lnSpc>
-                <a:spcPct val="130000"/>
-              </a:lnSpc>
-              <a:buNone/>
-            </a:pPr>
-            <a:r>
-              <a:rPr lang="en-US" sz="980" dirty="0">
-                <a:solidFill>
-                  <a:srgbClr val="64748B"/>
-                </a:solidFill>
-                <a:latin typeface="맑은 고딕" pitchFamily="34" charset="0"/>
-                <a:ea typeface="맑은 고딕" pitchFamily="34" charset="-122"/>
-                <a:cs typeface="맑은 고딕" pitchFamily="34" charset="-120"/>
-              </a:rPr>
-              <a:t>키는 서버에 미보관</a:t>
-            </a:r>
-            <a:endParaRPr lang="en-US" sz="980" dirty="0"/>
-          </a:p>
-        </p:txBody>
-      </p:sp>
-      <p:sp>
-        <p:nvSpPr>
-          <p:cNvPr id="36" name="Shape 34"/>
-          <p:cNvSpPr/>
-          <p:nvPr/>
-        </p:nvSpPr>
-        <p:spPr>
-          <a:xfrm>
-            <a:off x="365760" y="3337560"/>
-            <a:ext cx="8412480" cy="1572768"/>
+            <a:off x="4846320" y="2176272"/>
+            <a:ext cx="128016" cy="347472"/>
+          </a:xfrm>
+          <a:prstGeom prst="rect">
+            <a:avLst/>
+          </a:prstGeom>
+          <a:noFill/>
+          <a:ln/>
+        </p:spPr>
+        <p:txBody>
+          <a:bodyPr wrap="square" lIns="0" tIns="0" rIns="0" bIns="0" rtlCol="0" anchor="t"/>
+          <a:lstStyle/>
+          <a:p>
+            <a:pPr indent="0" marL="0">
+              <a:buNone/>
+            </a:pPr>
+            <a:r>
+              <a:rPr lang="en-US" sz="1000" dirty="0">
+                <a:solidFill>
+                  <a:srgbClr val="2563EB"/>
+                </a:solidFill>
+                <a:latin typeface="맑은 고딕" pitchFamily="34" charset="0"/>
+                <a:ea typeface="맑은 고딕" pitchFamily="34" charset="-122"/>
+                <a:cs typeface="맑은 고딕" pitchFamily="34" charset="-120"/>
+              </a:rPr>
+              <a:t>•</a:t>
+            </a:r>
+            <a:endParaRPr lang="en-US" sz="1000" dirty="0"/>
+          </a:p>
+        </p:txBody>
+      </p:sp>
+      <p:sp>
+        <p:nvSpPr>
+          <p:cNvPr id="36" name="Text 34"/>
+          <p:cNvSpPr/>
+          <p:nvPr/>
+        </p:nvSpPr>
+        <p:spPr>
+          <a:xfrm>
+            <a:off x="4983480" y="2176272"/>
+            <a:ext cx="3657600" cy="347472"/>
+          </a:xfrm>
+          <a:prstGeom prst="rect">
+            <a:avLst/>
+          </a:prstGeom>
+          <a:noFill/>
+          <a:ln/>
+        </p:spPr>
+        <p:txBody>
+          <a:bodyPr wrap="square" lIns="0" tIns="0" rIns="0" bIns="0" rtlCol="0" anchor="t"/>
+          <a:lstStyle/>
+          <a:p>
+            <a:pPr indent="0" marL="0">
+              <a:buNone/>
+            </a:pPr>
+            <a:r>
+              <a:rPr lang="en-US" sz="1000" dirty="0">
+                <a:solidFill>
+                  <a:srgbClr val="1E293B"/>
+                </a:solidFill>
+                <a:latin typeface="맑은 고딕" pitchFamily="34" charset="0"/>
+                <a:ea typeface="맑은 고딕" pitchFamily="34" charset="-122"/>
+                <a:cs typeface="맑은 고딕" pitchFamily="34" charset="-120"/>
+              </a:rPr>
+              <a:t>전문가 판정과의 일치도 (심사지 준비 · 미실시)</a:t>
+            </a:r>
+            <a:endParaRPr lang="en-US" sz="1000" dirty="0"/>
+          </a:p>
+        </p:txBody>
+      </p:sp>
+      <p:sp>
+        <p:nvSpPr>
+          <p:cNvPr id="37" name="Text 35"/>
+          <p:cNvSpPr/>
+          <p:nvPr/>
+        </p:nvSpPr>
+        <p:spPr>
+          <a:xfrm>
+            <a:off x="4846320" y="2523744"/>
+            <a:ext cx="128016" cy="347472"/>
+          </a:xfrm>
+          <a:prstGeom prst="rect">
+            <a:avLst/>
+          </a:prstGeom>
+          <a:noFill/>
+          <a:ln/>
+        </p:spPr>
+        <p:txBody>
+          <a:bodyPr wrap="square" lIns="0" tIns="0" rIns="0" bIns="0" rtlCol="0" anchor="t"/>
+          <a:lstStyle/>
+          <a:p>
+            <a:pPr indent="0" marL="0">
+              <a:buNone/>
+            </a:pPr>
+            <a:r>
+              <a:rPr lang="en-US" sz="1000" dirty="0">
+                <a:solidFill>
+                  <a:srgbClr val="2563EB"/>
+                </a:solidFill>
+                <a:latin typeface="맑은 고딕" pitchFamily="34" charset="0"/>
+                <a:ea typeface="맑은 고딕" pitchFamily="34" charset="-122"/>
+                <a:cs typeface="맑은 고딕" pitchFamily="34" charset="-120"/>
+              </a:rPr>
+              <a:t>•</a:t>
+            </a:r>
+            <a:endParaRPr lang="en-US" sz="1000" dirty="0"/>
+          </a:p>
+        </p:txBody>
+      </p:sp>
+      <p:sp>
+        <p:nvSpPr>
+          <p:cNvPr id="38" name="Text 36"/>
+          <p:cNvSpPr/>
+          <p:nvPr/>
+        </p:nvSpPr>
+        <p:spPr>
+          <a:xfrm>
+            <a:off x="4983480" y="2523744"/>
+            <a:ext cx="3657600" cy="347472"/>
+          </a:xfrm>
+          <a:prstGeom prst="rect">
+            <a:avLst/>
+          </a:prstGeom>
+          <a:noFill/>
+          <a:ln/>
+        </p:spPr>
+        <p:txBody>
+          <a:bodyPr wrap="square" lIns="0" tIns="0" rIns="0" bIns="0" rtlCol="0" anchor="t"/>
+          <a:lstStyle/>
+          <a:p>
+            <a:pPr indent="0" marL="0">
+              <a:buNone/>
+            </a:pPr>
+            <a:r>
+              <a:rPr lang="en-US" sz="1000" dirty="0">
+                <a:solidFill>
+                  <a:srgbClr val="1E293B"/>
+                </a:solidFill>
+                <a:latin typeface="맑은 고딕" pitchFamily="34" charset="0"/>
+                <a:ea typeface="맑은 고딕" pitchFamily="34" charset="-122"/>
+                <a:cs typeface="맑은 고딕" pitchFamily="34" charset="-120"/>
+              </a:rPr>
+              <a:t>동일 대화 재채점 시 재현성</a:t>
+            </a:r>
+            <a:endParaRPr lang="en-US" sz="1000" dirty="0"/>
+          </a:p>
+        </p:txBody>
+      </p:sp>
+      <p:sp>
+        <p:nvSpPr>
+          <p:cNvPr id="39" name="Text 37"/>
+          <p:cNvSpPr/>
+          <p:nvPr/>
+        </p:nvSpPr>
+        <p:spPr>
+          <a:xfrm>
+            <a:off x="4846320" y="2871216"/>
+            <a:ext cx="128016" cy="347472"/>
+          </a:xfrm>
+          <a:prstGeom prst="rect">
+            <a:avLst/>
+          </a:prstGeom>
+          <a:noFill/>
+          <a:ln/>
+        </p:spPr>
+        <p:txBody>
+          <a:bodyPr wrap="square" lIns="0" tIns="0" rIns="0" bIns="0" rtlCol="0" anchor="t"/>
+          <a:lstStyle/>
+          <a:p>
+            <a:pPr indent="0" marL="0">
+              <a:buNone/>
+            </a:pPr>
+            <a:r>
+              <a:rPr lang="en-US" sz="1000" dirty="0">
+                <a:solidFill>
+                  <a:srgbClr val="2563EB"/>
+                </a:solidFill>
+                <a:latin typeface="맑은 고딕" pitchFamily="34" charset="0"/>
+                <a:ea typeface="맑은 고딕" pitchFamily="34" charset="-122"/>
+                <a:cs typeface="맑은 고딕" pitchFamily="34" charset="-120"/>
+              </a:rPr>
+              <a:t>•</a:t>
+            </a:r>
+            <a:endParaRPr lang="en-US" sz="1000" dirty="0"/>
+          </a:p>
+        </p:txBody>
+      </p:sp>
+      <p:sp>
+        <p:nvSpPr>
+          <p:cNvPr id="40" name="Text 38"/>
+          <p:cNvSpPr/>
+          <p:nvPr/>
+        </p:nvSpPr>
+        <p:spPr>
+          <a:xfrm>
+            <a:off x="4983480" y="2871216"/>
+            <a:ext cx="3657600" cy="347472"/>
+          </a:xfrm>
+          <a:prstGeom prst="rect">
+            <a:avLst/>
+          </a:prstGeom>
+          <a:noFill/>
+          <a:ln/>
+        </p:spPr>
+        <p:txBody>
+          <a:bodyPr wrap="square" lIns="0" tIns="0" rIns="0" bIns="0" rtlCol="0" anchor="t"/>
+          <a:lstStyle/>
+          <a:p>
+            <a:pPr indent="0" marL="0">
+              <a:buNone/>
+            </a:pPr>
+            <a:r>
+              <a:rPr lang="en-US" sz="1000" dirty="0">
+                <a:solidFill>
+                  <a:srgbClr val="1E293B"/>
+                </a:solidFill>
+                <a:latin typeface="맑은 고딕" pitchFamily="34" charset="0"/>
+                <a:ea typeface="맑은 고딕" pitchFamily="34" charset="-122"/>
+                <a:cs typeface="맑은 고딕" pitchFamily="34" charset="-120"/>
+              </a:rPr>
+              <a:t>경계 사례에서의 판별력</a:t>
+            </a:r>
+            <a:endParaRPr lang="en-US" sz="1000" dirty="0"/>
+          </a:p>
+        </p:txBody>
+      </p:sp>
+      <p:sp>
+        <p:nvSpPr>
+          <p:cNvPr id="41" name="Text 39"/>
+          <p:cNvSpPr/>
+          <p:nvPr/>
+        </p:nvSpPr>
+        <p:spPr>
+          <a:xfrm>
+            <a:off x="4846320" y="3218688"/>
+            <a:ext cx="128016" cy="347472"/>
+          </a:xfrm>
+          <a:prstGeom prst="rect">
+            <a:avLst/>
+          </a:prstGeom>
+          <a:noFill/>
+          <a:ln/>
+        </p:spPr>
+        <p:txBody>
+          <a:bodyPr wrap="square" lIns="0" tIns="0" rIns="0" bIns="0" rtlCol="0" anchor="t"/>
+          <a:lstStyle/>
+          <a:p>
+            <a:pPr indent="0" marL="0">
+              <a:buNone/>
+            </a:pPr>
+            <a:r>
+              <a:rPr lang="en-US" sz="1000" dirty="0">
+                <a:solidFill>
+                  <a:srgbClr val="2563EB"/>
+                </a:solidFill>
+                <a:latin typeface="맑은 고딕" pitchFamily="34" charset="0"/>
+                <a:ea typeface="맑은 고딕" pitchFamily="34" charset="-122"/>
+                <a:cs typeface="맑은 고딕" pitchFamily="34" charset="-120"/>
+              </a:rPr>
+              <a:t>•</a:t>
+            </a:r>
+            <a:endParaRPr lang="en-US" sz="1000" dirty="0"/>
+          </a:p>
+        </p:txBody>
+      </p:sp>
+      <p:sp>
+        <p:nvSpPr>
+          <p:cNvPr id="42" name="Text 40"/>
+          <p:cNvSpPr/>
+          <p:nvPr/>
+        </p:nvSpPr>
+        <p:spPr>
+          <a:xfrm>
+            <a:off x="4983480" y="3218688"/>
+            <a:ext cx="3657600" cy="347472"/>
+          </a:xfrm>
+          <a:prstGeom prst="rect">
+            <a:avLst/>
+          </a:prstGeom>
+          <a:noFill/>
+          <a:ln/>
+        </p:spPr>
+        <p:txBody>
+          <a:bodyPr wrap="square" lIns="0" tIns="0" rIns="0" bIns="0" rtlCol="0" anchor="t"/>
+          <a:lstStyle/>
+          <a:p>
+            <a:pPr indent="0" marL="0">
+              <a:buNone/>
+            </a:pPr>
+            <a:r>
+              <a:rPr lang="en-US" sz="1000" dirty="0">
+                <a:solidFill>
+                  <a:srgbClr val="1E293B"/>
+                </a:solidFill>
+                <a:latin typeface="맑은 고딕" pitchFamily="34" charset="0"/>
+                <a:ea typeface="맑은 고딕" pitchFamily="34" charset="-122"/>
+                <a:cs typeface="맑은 고딕" pitchFamily="34" charset="-120"/>
+              </a:rPr>
+              <a:t>표현력 편향의 크기 (일부만 확인)</a:t>
+            </a:r>
+            <a:endParaRPr lang="en-US" sz="1000" dirty="0"/>
+          </a:p>
+        </p:txBody>
+      </p:sp>
+      <p:sp>
+        <p:nvSpPr>
+          <p:cNvPr id="43" name="Text 41"/>
+          <p:cNvSpPr/>
+          <p:nvPr/>
+        </p:nvSpPr>
+        <p:spPr>
+          <a:xfrm>
+            <a:off x="4846320" y="3566160"/>
+            <a:ext cx="128016" cy="347472"/>
+          </a:xfrm>
+          <a:prstGeom prst="rect">
+            <a:avLst/>
+          </a:prstGeom>
+          <a:noFill/>
+          <a:ln/>
+        </p:spPr>
+        <p:txBody>
+          <a:bodyPr wrap="square" lIns="0" tIns="0" rIns="0" bIns="0" rtlCol="0" anchor="t"/>
+          <a:lstStyle/>
+          <a:p>
+            <a:pPr indent="0" marL="0">
+              <a:buNone/>
+            </a:pPr>
+            <a:r>
+              <a:rPr lang="en-US" sz="1000" dirty="0">
+                <a:solidFill>
+                  <a:srgbClr val="2563EB"/>
+                </a:solidFill>
+                <a:latin typeface="맑은 고딕" pitchFamily="34" charset="0"/>
+                <a:ea typeface="맑은 고딕" pitchFamily="34" charset="-122"/>
+                <a:cs typeface="맑은 고딕" pitchFamily="34" charset="-120"/>
+              </a:rPr>
+              <a:t>•</a:t>
+            </a:r>
+            <a:endParaRPr lang="en-US" sz="1000" dirty="0"/>
+          </a:p>
+        </p:txBody>
+      </p:sp>
+      <p:sp>
+        <p:nvSpPr>
+          <p:cNvPr id="44" name="Text 42"/>
+          <p:cNvSpPr/>
+          <p:nvPr/>
+        </p:nvSpPr>
+        <p:spPr>
+          <a:xfrm>
+            <a:off x="4983480" y="3566160"/>
+            <a:ext cx="3657600" cy="347472"/>
+          </a:xfrm>
+          <a:prstGeom prst="rect">
+            <a:avLst/>
+          </a:prstGeom>
+          <a:noFill/>
+          <a:ln/>
+        </p:spPr>
+        <p:txBody>
+          <a:bodyPr wrap="square" lIns="0" tIns="0" rIns="0" bIns="0" rtlCol="0" anchor="t"/>
+          <a:lstStyle/>
+          <a:p>
+            <a:pPr indent="0" marL="0">
+              <a:buNone/>
+            </a:pPr>
+            <a:r>
+              <a:rPr lang="en-US" sz="1000" dirty="0">
+                <a:solidFill>
+                  <a:srgbClr val="1E293B"/>
+                </a:solidFill>
+                <a:latin typeface="맑은 고딕" pitchFamily="34" charset="0"/>
+                <a:ea typeface="맑은 고딕" pitchFamily="34" charset="-122"/>
+                <a:cs typeface="맑은 고딕" pitchFamily="34" charset="-120"/>
+              </a:rPr>
+              <a:t>실제 중복 제안 탐지율</a:t>
+            </a:r>
+            <a:endParaRPr lang="en-US" sz="1000" dirty="0"/>
+          </a:p>
+        </p:txBody>
+      </p:sp>
+      <p:sp>
+        <p:nvSpPr>
+          <p:cNvPr id="45" name="Shape 43"/>
+          <p:cNvSpPr/>
+          <p:nvPr/>
+        </p:nvSpPr>
+        <p:spPr>
+          <a:xfrm>
+            <a:off x="365760" y="4169664"/>
+            <a:ext cx="8412480" cy="786384"/>
           </a:xfrm>
           <a:prstGeom prst="rect">
             <a:avLst/>
@@ -30368,14 +30835,14 @@
       </p:sp>
       <p:sp>
         <p:nvSpPr>
-          <p:cNvPr id="37" name="Text 35"/>
-          <p:cNvSpPr/>
-          <p:nvPr/>
-        </p:nvSpPr>
-        <p:spPr>
-          <a:xfrm>
-            <a:off x="566928" y="3438144"/>
-            <a:ext cx="3657600" cy="256032"/>
+          <p:cNvPr id="46" name="Text 44"/>
+          <p:cNvSpPr/>
+          <p:nvPr/>
+        </p:nvSpPr>
+        <p:spPr>
+          <a:xfrm>
+            <a:off x="566928" y="4242816"/>
+            <a:ext cx="2743200" cy="237744"/>
           </a:xfrm>
           <a:prstGeom prst="rect">
             <a:avLst/>
@@ -30391,7 +30858,7 @@
               <a:buNone/>
             </a:pPr>
             <a:r>
-              <a:rPr lang="en-US" sz="1250" b="1" dirty="0">
+              <a:rPr lang="en-US" sz="1150" b="1" dirty="0">
                 <a:solidFill>
                   <a:srgbClr val="2563EB"/>
                 </a:solidFill>
@@ -30399,22 +30866,22 @@
                 <a:ea typeface="맑은 고딕" pitchFamily="34" charset="-122"/>
                 <a:cs typeface="맑은 고딕" pitchFamily="34" charset="-120"/>
               </a:rPr>
-              <a:t>데이터 확보에서 지킨 원칙</a:t>
-            </a:r>
-            <a:endParaRPr lang="en-US" sz="1250" dirty="0"/>
-          </a:p>
-        </p:txBody>
-      </p:sp>
-      <p:sp>
-        <p:nvSpPr>
-          <p:cNvPr id="38" name="Text 36"/>
-          <p:cNvSpPr/>
-          <p:nvPr/>
-        </p:nvSpPr>
-        <p:spPr>
-          <a:xfrm>
-            <a:off x="603504" y="3776472"/>
-            <a:ext cx="137160" cy="310896"/>
+              <a:t>현재 판정력이 입증된 범위</a:t>
+            </a:r>
+            <a:endParaRPr lang="en-US" sz="1150" dirty="0"/>
+          </a:p>
+        </p:txBody>
+      </p:sp>
+      <p:sp>
+        <p:nvSpPr>
+          <p:cNvPr id="47" name="Text 45"/>
+          <p:cNvSpPr/>
+          <p:nvPr/>
+        </p:nvSpPr>
+        <p:spPr>
+          <a:xfrm>
+            <a:off x="566928" y="4480560"/>
+            <a:ext cx="8046720" cy="438912"/>
           </a:xfrm>
           <a:prstGeom prst="rect">
             <a:avLst/>
@@ -30427,49 +30894,33 @@
           <a:lstStyle/>
           <a:p>
             <a:pPr indent="0" marL="0">
-              <a:buNone/>
-            </a:pPr>
-            <a:r>
-              <a:rPr lang="en-US" sz="1100" dirty="0">
-                <a:solidFill>
-                  <a:srgbClr val="2563EB"/>
-                </a:solidFill>
-                <a:latin typeface="맑은 고딕" pitchFamily="34" charset="0"/>
-                <a:ea typeface="맑은 고딕" pitchFamily="34" charset="-122"/>
-                <a:cs typeface="맑은 고딕" pitchFamily="34" charset="-120"/>
-              </a:rPr>
-              <a:t>•</a:t>
-            </a:r>
-            <a:endParaRPr lang="en-US" sz="1100" dirty="0"/>
-          </a:p>
-        </p:txBody>
-      </p:sp>
-      <p:sp>
-        <p:nvSpPr>
-          <p:cNvPr id="39" name="Text 37"/>
-          <p:cNvSpPr/>
-          <p:nvPr/>
-        </p:nvSpPr>
-        <p:spPr>
-          <a:xfrm>
-            <a:off x="768096" y="3776472"/>
-            <a:ext cx="2651760" cy="310896"/>
-          </a:xfrm>
-          <a:prstGeom prst="rect">
-            <a:avLst/>
-          </a:prstGeom>
-          <a:noFill/>
-          <a:ln/>
-        </p:spPr>
-        <p:txBody>
-          <a:bodyPr wrap="square" lIns="0" tIns="0" rIns="0" bIns="0" rtlCol="0" anchor="ctr"/>
-          <a:lstStyle/>
+              <a:lnSpc>
+                <a:spcPct val="125000"/>
+              </a:lnSpc>
+              <a:buNone/>
+            </a:pPr>
+            <a:r>
+              <a:rPr lang="en-US" sz="1020" dirty="0">
+                <a:solidFill>
+                  <a:srgbClr val="1E293B"/>
+                </a:solidFill>
+                <a:latin typeface="맑은 고딕" pitchFamily="34" charset="0"/>
+                <a:ea typeface="맑은 고딕" pitchFamily="34" charset="-122"/>
+                <a:cs typeface="맑은 고딕" pitchFamily="34" charset="-120"/>
+              </a:rPr>
+              <a:t>표본 10건 · 극단 사례(명백히 진부 vs 명백히 창의)에 한정됩니다. 시험 문항은 사람이 아니라 모델이 생성했습니다.</a:t>
+            </a:r>
+            <a:endParaRPr lang="en-US" sz="1020" dirty="0"/>
+          </a:p>
           <a:p>
             <a:pPr indent="0" marL="0">
-              <a:buNone/>
-            </a:pPr>
-            <a:r>
-              <a:rPr lang="en-US" sz="1080" b="1" dirty="0">
+              <a:lnSpc>
+                <a:spcPct val="125000"/>
+              </a:lnSpc>
+              <a:buNone/>
+            </a:pPr>
+            <a:r>
+              <a:rPr lang="en-US" sz="1020" dirty="0">
                 <a:solidFill>
                   <a:srgbClr val="1E293B"/>
                 </a:solidFill>
@@ -30477,282 +30928,9 @@
                 <a:ea typeface="맑은 고딕" pitchFamily="34" charset="-122"/>
                 <a:cs typeface="맑은 고딕" pitchFamily="34" charset="-120"/>
               </a:rPr>
-              <a:t>불안정한 소스는 끈다</a:t>
-            </a:r>
-            <a:endParaRPr lang="en-US" sz="1080" dirty="0"/>
-          </a:p>
-        </p:txBody>
-      </p:sp>
-      <p:sp>
-        <p:nvSpPr>
-          <p:cNvPr id="40" name="Text 38"/>
-          <p:cNvSpPr/>
-          <p:nvPr/>
-        </p:nvSpPr>
-        <p:spPr>
-          <a:xfrm>
-            <a:off x="3474720" y="3776472"/>
-            <a:ext cx="5166360" cy="310896"/>
-          </a:xfrm>
-          <a:prstGeom prst="rect">
-            <a:avLst/>
-          </a:prstGeom>
-          <a:noFill/>
-          <a:ln/>
-        </p:spPr>
-        <p:txBody>
-          <a:bodyPr wrap="square" lIns="0" tIns="0" rIns="0" bIns="0" rtlCol="0" anchor="ctr"/>
-          <a:lstStyle/>
-          <a:p>
-            <a:pPr indent="0" marL="0">
-              <a:buNone/>
-            </a:pPr>
-            <a:r>
-              <a:rPr lang="en-US" sz="1050" dirty="0">
-                <a:solidFill>
-                  <a:srgbClr val="64748B"/>
-                </a:solidFill>
-                <a:latin typeface="맑은 고딕" pitchFamily="34" charset="0"/>
-                <a:ea typeface="맑은 고딕" pitchFamily="34" charset="-122"/>
-                <a:cs typeface="맑은 고딕" pitchFamily="34" charset="-120"/>
-              </a:rPr>
-              <a:t>외부 연구정보 API가 응답을 보장하지 못해 중단하고, 로컬 코퍼스로 대체</a:t>
-            </a:r>
-            <a:endParaRPr lang="en-US" sz="1050" dirty="0"/>
-          </a:p>
-        </p:txBody>
-      </p:sp>
-      <p:sp>
-        <p:nvSpPr>
-          <p:cNvPr id="41" name="Text 39"/>
-          <p:cNvSpPr/>
-          <p:nvPr/>
-        </p:nvSpPr>
-        <p:spPr>
-          <a:xfrm>
-            <a:off x="603504" y="4142232"/>
-            <a:ext cx="137160" cy="310896"/>
-          </a:xfrm>
-          <a:prstGeom prst="rect">
-            <a:avLst/>
-          </a:prstGeom>
-          <a:noFill/>
-          <a:ln/>
-        </p:spPr>
-        <p:txBody>
-          <a:bodyPr wrap="square" lIns="0" tIns="0" rIns="0" bIns="0" rtlCol="0" anchor="ctr"/>
-          <a:lstStyle/>
-          <a:p>
-            <a:pPr indent="0" marL="0">
-              <a:buNone/>
-            </a:pPr>
-            <a:r>
-              <a:rPr lang="en-US" sz="1100" dirty="0">
-                <a:solidFill>
-                  <a:srgbClr val="2563EB"/>
-                </a:solidFill>
-                <a:latin typeface="맑은 고딕" pitchFamily="34" charset="0"/>
-                <a:ea typeface="맑은 고딕" pitchFamily="34" charset="-122"/>
-                <a:cs typeface="맑은 고딕" pitchFamily="34" charset="-120"/>
-              </a:rPr>
-              <a:t>•</a:t>
-            </a:r>
-            <a:endParaRPr lang="en-US" sz="1100" dirty="0"/>
-          </a:p>
-        </p:txBody>
-      </p:sp>
-      <p:sp>
-        <p:nvSpPr>
-          <p:cNvPr id="42" name="Text 40"/>
-          <p:cNvSpPr/>
-          <p:nvPr/>
-        </p:nvSpPr>
-        <p:spPr>
-          <a:xfrm>
-            <a:off x="768096" y="4142232"/>
-            <a:ext cx="2651760" cy="310896"/>
-          </a:xfrm>
-          <a:prstGeom prst="rect">
-            <a:avLst/>
-          </a:prstGeom>
-          <a:noFill/>
-          <a:ln/>
-        </p:spPr>
-        <p:txBody>
-          <a:bodyPr wrap="square" lIns="0" tIns="0" rIns="0" bIns="0" rtlCol="0" anchor="ctr"/>
-          <a:lstStyle/>
-          <a:p>
-            <a:pPr indent="0" marL="0">
-              <a:buNone/>
-            </a:pPr>
-            <a:r>
-              <a:rPr lang="en-US" sz="1080" b="1" dirty="0">
-                <a:solidFill>
-                  <a:srgbClr val="1E293B"/>
-                </a:solidFill>
-                <a:latin typeface="맑은 고딕" pitchFamily="34" charset="0"/>
-                <a:ea typeface="맑은 고딕" pitchFamily="34" charset="-122"/>
-                <a:cs typeface="맑은 고딕" pitchFamily="34" charset="-120"/>
-              </a:rPr>
-              <a:t>우회하지 않는다</a:t>
-            </a:r>
-            <a:endParaRPr lang="en-US" sz="1080" dirty="0"/>
-          </a:p>
-        </p:txBody>
-      </p:sp>
-      <p:sp>
-        <p:nvSpPr>
-          <p:cNvPr id="43" name="Text 41"/>
-          <p:cNvSpPr/>
-          <p:nvPr/>
-        </p:nvSpPr>
-        <p:spPr>
-          <a:xfrm>
-            <a:off x="3474720" y="4142232"/>
-            <a:ext cx="5166360" cy="310896"/>
-          </a:xfrm>
-          <a:prstGeom prst="rect">
-            <a:avLst/>
-          </a:prstGeom>
-          <a:noFill/>
-          <a:ln/>
-        </p:spPr>
-        <p:txBody>
-          <a:bodyPr wrap="square" lIns="0" tIns="0" rIns="0" bIns="0" rtlCol="0" anchor="ctr"/>
-          <a:lstStyle/>
-          <a:p>
-            <a:pPr indent="0" marL="0">
-              <a:buNone/>
-            </a:pPr>
-            <a:r>
-              <a:rPr lang="en-US" sz="1050" dirty="0">
-                <a:solidFill>
-                  <a:srgbClr val="64748B"/>
-                </a:solidFill>
-                <a:latin typeface="맑은 고딕" pitchFamily="34" charset="0"/>
-                <a:ea typeface="맑은 고딕" pitchFamily="34" charset="-122"/>
-                <a:cs typeface="맑은 고딕" pitchFamily="34" charset="-120"/>
-              </a:rPr>
-              <a:t>해외 사이트의 자동 수집 차단을 기술적으로 우회하지 않고, 공개 자료를 정리해 구축</a:t>
-            </a:r>
-            <a:endParaRPr lang="en-US" sz="1050" dirty="0"/>
-          </a:p>
-        </p:txBody>
-      </p:sp>
-      <p:sp>
-        <p:nvSpPr>
-          <p:cNvPr id="44" name="Text 42"/>
-          <p:cNvSpPr/>
-          <p:nvPr/>
-        </p:nvSpPr>
-        <p:spPr>
-          <a:xfrm>
-            <a:off x="603504" y="4507992"/>
-            <a:ext cx="137160" cy="310896"/>
-          </a:xfrm>
-          <a:prstGeom prst="rect">
-            <a:avLst/>
-          </a:prstGeom>
-          <a:noFill/>
-          <a:ln/>
-        </p:spPr>
-        <p:txBody>
-          <a:bodyPr wrap="square" lIns="0" tIns="0" rIns="0" bIns="0" rtlCol="0" anchor="ctr"/>
-          <a:lstStyle/>
-          <a:p>
-            <a:pPr indent="0" marL="0">
-              <a:buNone/>
-            </a:pPr>
-            <a:r>
-              <a:rPr lang="en-US" sz="1100" dirty="0">
-                <a:solidFill>
-                  <a:srgbClr val="2563EB"/>
-                </a:solidFill>
-                <a:latin typeface="맑은 고딕" pitchFamily="34" charset="0"/>
-                <a:ea typeface="맑은 고딕" pitchFamily="34" charset="-122"/>
-                <a:cs typeface="맑은 고딕" pitchFamily="34" charset="-120"/>
-              </a:rPr>
-              <a:t>•</a:t>
-            </a:r>
-            <a:endParaRPr lang="en-US" sz="1100" dirty="0"/>
-          </a:p>
-        </p:txBody>
-      </p:sp>
-      <p:sp>
-        <p:nvSpPr>
-          <p:cNvPr id="45" name="Text 43"/>
-          <p:cNvSpPr/>
-          <p:nvPr/>
-        </p:nvSpPr>
-        <p:spPr>
-          <a:xfrm>
-            <a:off x="768096" y="4507992"/>
-            <a:ext cx="2651760" cy="310896"/>
-          </a:xfrm>
-          <a:prstGeom prst="rect">
-            <a:avLst/>
-          </a:prstGeom>
-          <a:noFill/>
-          <a:ln/>
-        </p:spPr>
-        <p:txBody>
-          <a:bodyPr wrap="square" lIns="0" tIns="0" rIns="0" bIns="0" rtlCol="0" anchor="ctr"/>
-          <a:lstStyle/>
-          <a:p>
-            <a:pPr indent="0" marL="0">
-              <a:buNone/>
-            </a:pPr>
-            <a:r>
-              <a:rPr lang="en-US" sz="1080" b="1" dirty="0">
-                <a:solidFill>
-                  <a:srgbClr val="1E293B"/>
-                </a:solidFill>
-                <a:latin typeface="맑은 고딕" pitchFamily="34" charset="0"/>
-                <a:ea typeface="맑은 고딕" pitchFamily="34" charset="-122"/>
-                <a:cs typeface="맑은 고딕" pitchFamily="34" charset="-120"/>
-              </a:rPr>
-              <a:t>외국 상용 서비스에 의존하지 않는다</a:t>
-            </a:r>
-            <a:endParaRPr lang="en-US" sz="1080" dirty="0"/>
-          </a:p>
-        </p:txBody>
-      </p:sp>
-      <p:sp>
-        <p:nvSpPr>
-          <p:cNvPr id="46" name="Text 44"/>
-          <p:cNvSpPr/>
-          <p:nvPr/>
-        </p:nvSpPr>
-        <p:spPr>
-          <a:xfrm>
-            <a:off x="3474720" y="4507992"/>
-            <a:ext cx="5166360" cy="310896"/>
-          </a:xfrm>
-          <a:prstGeom prst="rect">
-            <a:avLst/>
-          </a:prstGeom>
-          <a:noFill/>
-          <a:ln/>
-        </p:spPr>
-        <p:txBody>
-          <a:bodyPr wrap="square" lIns="0" tIns="0" rIns="0" bIns="0" rtlCol="0" anchor="ctr"/>
-          <a:lstStyle/>
-          <a:p>
-            <a:pPr indent="0" marL="0">
-              <a:buNone/>
-            </a:pPr>
-            <a:r>
-              <a:rPr lang="en-US" sz="1050" dirty="0">
-                <a:solidFill>
-                  <a:srgbClr val="64748B"/>
-                </a:solidFill>
-                <a:latin typeface="맑은 고딕" pitchFamily="34" charset="0"/>
-                <a:ea typeface="맑은 고딕" pitchFamily="34" charset="-122"/>
-                <a:cs typeface="맑은 고딕" pitchFamily="34" charset="-120"/>
-              </a:rPr>
-              <a:t>유료 해외 정책DB 대신 OECD 공개 사례로 코퍼스를 자체 확보</a:t>
-            </a:r>
-            <a:endParaRPr lang="en-US" sz="1050" dirty="0"/>
+              <a:t>실제 국민 제안은 중간대에 몰리므로, 경계 사례 판별력과 전문가 일치도는 도입 전 별도 검증이 필요합니다.</a:t>
+            </a:r>
+            <a:endParaRPr lang="en-US" sz="1020" dirty="0"/>
           </a:p>
         </p:txBody>
       </p:sp>
@@ -30873,7 +31051,7 @@
                 <a:ea typeface="맑은 고딕" pitchFamily="34" charset="-122"/>
                 <a:cs typeface="맑은 고딕" pitchFamily="34" charset="-120"/>
               </a:rPr>
-              <a:t>26 / 28</a:t>
+              <a:t>26 / 29</a:t>
             </a:r>
             <a:endParaRPr lang="en-US" sz="1100" dirty="0"/>
           </a:p>
@@ -31355,7 +31533,7 @@
                 <a:ea typeface="맑은 고딕" pitchFamily="34" charset="-122"/>
                 <a:cs typeface="맑은 고딕" pitchFamily="34" charset="-120"/>
               </a:rPr>
-              <a:t>운영 비용 — 월 처리량별 추정</a:t>
+              <a:t>어떻게 만들었나</a:t>
             </a:r>
             <a:endParaRPr lang="en-US" sz="2100" dirty="0"/>
           </a:p>
@@ -31363,1659 +31541,20 @@
       </p:sp>
       <p:sp>
         <p:nvSpPr>
-          <p:cNvPr id="20" name="Text 18"/>
-          <p:cNvSpPr/>
-          <p:nvPr/>
-        </p:nvSpPr>
-        <p:spPr>
-          <a:xfrm>
-            <a:off x="365760" y="1719072"/>
-            <a:ext cx="8412480" cy="274320"/>
-          </a:xfrm>
-          <a:prstGeom prst="rect">
-            <a:avLst/>
-          </a:prstGeom>
-          <a:noFill/>
-          <a:ln/>
-        </p:spPr>
-        <p:txBody>
-          <a:bodyPr wrap="square" lIns="0" tIns="0" rIns="0" bIns="0" rtlCol="0" anchor="ctr"/>
-          <a:lstStyle/>
-          <a:p>
-            <a:pPr indent="0" marL="0">
-              <a:buNone/>
-            </a:pPr>
-            <a:r>
-              <a:rPr lang="en-US" sz="1100" dirty="0">
-                <a:solidFill>
-                  <a:srgbClr val="64748B"/>
-                </a:solidFill>
-                <a:latin typeface="맑은 고딕" pitchFamily="34" charset="0"/>
-                <a:ea typeface="맑은 고딕" pitchFamily="34" charset="-122"/>
-                <a:cs typeface="맑은 고딕" pitchFamily="34" charset="-120"/>
-              </a:rPr>
-              <a:t>아이디어 1건당 약 2.8만~4.3만 토큰 · 캐싱 적용 시 추정(현재 미구현) · 환율 1,500원 기준</a:t>
-            </a:r>
-            <a:endParaRPr lang="en-US" sz="1100" dirty="0"/>
-          </a:p>
-        </p:txBody>
-      </p:sp>
-      <p:sp>
-        <p:nvSpPr>
-          <p:cNvPr id="21" name="Shape 19"/>
-          <p:cNvSpPr/>
-          <p:nvPr/>
-        </p:nvSpPr>
-        <p:spPr>
-          <a:xfrm>
-            <a:off x="365760" y="2103120"/>
-            <a:ext cx="1554480" cy="402336"/>
-          </a:xfrm>
-          <a:prstGeom prst="rect">
-            <a:avLst/>
-          </a:prstGeom>
-          <a:solidFill>
-            <a:srgbClr val="2563EB"/>
-          </a:solidFill>
-          <a:ln w="6350">
-            <a:solidFill>
-              <a:srgbClr val="FFFFFF"/>
-            </a:solidFill>
-            <a:prstDash val="solid"/>
-          </a:ln>
-        </p:spPr>
-      </p:sp>
-      <p:sp>
-        <p:nvSpPr>
-          <p:cNvPr id="22" name="Text 20"/>
-          <p:cNvSpPr/>
-          <p:nvPr/>
-        </p:nvSpPr>
-        <p:spPr>
-          <a:xfrm>
-            <a:off x="365760" y="2103120"/>
-            <a:ext cx="1554480" cy="402336"/>
-          </a:xfrm>
-          <a:prstGeom prst="rect">
-            <a:avLst/>
-          </a:prstGeom>
-          <a:noFill/>
-          <a:ln/>
-        </p:spPr>
-        <p:txBody>
-          <a:bodyPr wrap="square" lIns="0" tIns="0" rIns="0" bIns="0" rtlCol="0" anchor="ctr"/>
-          <a:lstStyle/>
-          <a:p>
-            <a:pPr algn="ctr" indent="0" marL="0">
-              <a:buNone/>
-            </a:pPr>
-            <a:r>
-              <a:rPr lang="en-US" sz="1050" b="1" dirty="0">
-                <a:solidFill>
-                  <a:srgbClr val="FFFFFF"/>
-                </a:solidFill>
-                <a:latin typeface="맑은 고딕" pitchFamily="34" charset="0"/>
-                <a:ea typeface="맑은 고딕" pitchFamily="34" charset="-122"/>
-                <a:cs typeface="맑은 고딕" pitchFamily="34" charset="-120"/>
-              </a:rPr>
-              <a:t>월 처리량</a:t>
-            </a:r>
-            <a:endParaRPr lang="en-US" sz="1050" dirty="0"/>
-          </a:p>
-        </p:txBody>
-      </p:sp>
-      <p:sp>
-        <p:nvSpPr>
-          <p:cNvPr id="23" name="Shape 21"/>
-          <p:cNvSpPr/>
-          <p:nvPr/>
-        </p:nvSpPr>
-        <p:spPr>
-          <a:xfrm>
-            <a:off x="1920240" y="2103120"/>
-            <a:ext cx="1714500" cy="402336"/>
-          </a:xfrm>
-          <a:prstGeom prst="rect">
-            <a:avLst/>
-          </a:prstGeom>
-          <a:solidFill>
-            <a:srgbClr val="2563EB"/>
-          </a:solidFill>
-          <a:ln w="6350">
-            <a:solidFill>
-              <a:srgbClr val="FFFFFF"/>
-            </a:solidFill>
-            <a:prstDash val="solid"/>
-          </a:ln>
-        </p:spPr>
-      </p:sp>
-      <p:sp>
-        <p:nvSpPr>
-          <p:cNvPr id="24" name="Text 22"/>
-          <p:cNvSpPr/>
-          <p:nvPr/>
-        </p:nvSpPr>
-        <p:spPr>
-          <a:xfrm>
-            <a:off x="1920240" y="2103120"/>
-            <a:ext cx="1714500" cy="402336"/>
-          </a:xfrm>
-          <a:prstGeom prst="rect">
-            <a:avLst/>
-          </a:prstGeom>
-          <a:noFill/>
-          <a:ln/>
-        </p:spPr>
-        <p:txBody>
-          <a:bodyPr wrap="square" lIns="0" tIns="0" rIns="0" bIns="0" rtlCol="0" anchor="ctr"/>
-          <a:lstStyle/>
-          <a:p>
-            <a:pPr algn="ctr" indent="0" marL="0">
-              <a:buNone/>
-            </a:pPr>
-            <a:r>
-              <a:rPr lang="en-US" sz="1050" b="1" dirty="0">
-                <a:solidFill>
-                  <a:srgbClr val="FFFFFF"/>
-                </a:solidFill>
-                <a:latin typeface="맑은 고딕" pitchFamily="34" charset="0"/>
-                <a:ea typeface="맑은 고딕" pitchFamily="34" charset="-122"/>
-                <a:cs typeface="맑은 고딕" pitchFamily="34" charset="-120"/>
-              </a:rPr>
-              <a:t>표준 모델 · 단문</a:t>
-            </a:r>
-            <a:endParaRPr lang="en-US" sz="1050" dirty="0"/>
-          </a:p>
-        </p:txBody>
-      </p:sp>
-      <p:sp>
-        <p:nvSpPr>
-          <p:cNvPr id="25" name="Shape 23"/>
-          <p:cNvSpPr/>
-          <p:nvPr/>
-        </p:nvSpPr>
-        <p:spPr>
-          <a:xfrm>
-            <a:off x="3634740" y="2103120"/>
-            <a:ext cx="1714500" cy="402336"/>
-          </a:xfrm>
-          <a:prstGeom prst="rect">
-            <a:avLst/>
-          </a:prstGeom>
-          <a:solidFill>
-            <a:srgbClr val="2563EB"/>
-          </a:solidFill>
-          <a:ln w="6350">
-            <a:solidFill>
-              <a:srgbClr val="FFFFFF"/>
-            </a:solidFill>
-            <a:prstDash val="solid"/>
-          </a:ln>
-        </p:spPr>
-      </p:sp>
-      <p:sp>
-        <p:nvSpPr>
-          <p:cNvPr id="26" name="Text 24"/>
-          <p:cNvSpPr/>
-          <p:nvPr/>
-        </p:nvSpPr>
-        <p:spPr>
-          <a:xfrm>
-            <a:off x="3634740" y="2103120"/>
-            <a:ext cx="1714500" cy="402336"/>
-          </a:xfrm>
-          <a:prstGeom prst="rect">
-            <a:avLst/>
-          </a:prstGeom>
-          <a:noFill/>
-          <a:ln/>
-        </p:spPr>
-        <p:txBody>
-          <a:bodyPr wrap="square" lIns="0" tIns="0" rIns="0" bIns="0" rtlCol="0" anchor="ctr"/>
-          <a:lstStyle/>
-          <a:p>
-            <a:pPr algn="ctr" indent="0" marL="0">
-              <a:buNone/>
-            </a:pPr>
-            <a:r>
-              <a:rPr lang="en-US" sz="1050" b="1" dirty="0">
-                <a:solidFill>
-                  <a:srgbClr val="FFFFFF"/>
-                </a:solidFill>
-                <a:latin typeface="맑은 고딕" pitchFamily="34" charset="0"/>
-                <a:ea typeface="맑은 고딕" pitchFamily="34" charset="-122"/>
-                <a:cs typeface="맑은 고딕" pitchFamily="34" charset="-120"/>
-              </a:rPr>
-              <a:t>표준 모델 · 장문</a:t>
-            </a:r>
-            <a:endParaRPr lang="en-US" sz="1050" dirty="0"/>
-          </a:p>
-        </p:txBody>
-      </p:sp>
-      <p:sp>
-        <p:nvSpPr>
-          <p:cNvPr id="27" name="Shape 25"/>
-          <p:cNvSpPr/>
-          <p:nvPr/>
-        </p:nvSpPr>
-        <p:spPr>
-          <a:xfrm>
-            <a:off x="5349240" y="2103120"/>
-            <a:ext cx="1714500" cy="402336"/>
-          </a:xfrm>
-          <a:prstGeom prst="rect">
-            <a:avLst/>
-          </a:prstGeom>
-          <a:solidFill>
-            <a:srgbClr val="2563EB"/>
-          </a:solidFill>
-          <a:ln w="6350">
-            <a:solidFill>
-              <a:srgbClr val="FFFFFF"/>
-            </a:solidFill>
-            <a:prstDash val="solid"/>
-          </a:ln>
-        </p:spPr>
-      </p:sp>
-      <p:sp>
-        <p:nvSpPr>
-          <p:cNvPr id="28" name="Text 26"/>
-          <p:cNvSpPr/>
-          <p:nvPr/>
-        </p:nvSpPr>
-        <p:spPr>
-          <a:xfrm>
-            <a:off x="5349240" y="2103120"/>
-            <a:ext cx="1714500" cy="402336"/>
-          </a:xfrm>
-          <a:prstGeom prst="rect">
-            <a:avLst/>
-          </a:prstGeom>
-          <a:noFill/>
-          <a:ln/>
-        </p:spPr>
-        <p:txBody>
-          <a:bodyPr wrap="square" lIns="0" tIns="0" rIns="0" bIns="0" rtlCol="0" anchor="ctr"/>
-          <a:lstStyle/>
-          <a:p>
-            <a:pPr algn="ctr" indent="0" marL="0">
-              <a:buNone/>
-            </a:pPr>
-            <a:r>
-              <a:rPr lang="en-US" sz="1050" b="1" dirty="0">
-                <a:solidFill>
-                  <a:srgbClr val="FFFFFF"/>
-                </a:solidFill>
-                <a:latin typeface="맑은 고딕" pitchFamily="34" charset="0"/>
-                <a:ea typeface="맑은 고딕" pitchFamily="34" charset="-122"/>
-                <a:cs typeface="맑은 고딕" pitchFamily="34" charset="-120"/>
-              </a:rPr>
-              <a:t>고급 모델 · 단문</a:t>
-            </a:r>
-            <a:endParaRPr lang="en-US" sz="1050" dirty="0"/>
-          </a:p>
-        </p:txBody>
-      </p:sp>
-      <p:sp>
-        <p:nvSpPr>
-          <p:cNvPr id="29" name="Shape 27"/>
-          <p:cNvSpPr/>
-          <p:nvPr/>
-        </p:nvSpPr>
-        <p:spPr>
-          <a:xfrm>
-            <a:off x="7063740" y="2103120"/>
-            <a:ext cx="1714500" cy="402336"/>
-          </a:xfrm>
-          <a:prstGeom prst="rect">
-            <a:avLst/>
-          </a:prstGeom>
-          <a:solidFill>
-            <a:srgbClr val="2563EB"/>
-          </a:solidFill>
-          <a:ln w="6350">
-            <a:solidFill>
-              <a:srgbClr val="FFFFFF"/>
-            </a:solidFill>
-            <a:prstDash val="solid"/>
-          </a:ln>
-        </p:spPr>
-      </p:sp>
-      <p:sp>
-        <p:nvSpPr>
-          <p:cNvPr id="30" name="Text 28"/>
-          <p:cNvSpPr/>
-          <p:nvPr/>
-        </p:nvSpPr>
-        <p:spPr>
-          <a:xfrm>
-            <a:off x="7063740" y="2103120"/>
-            <a:ext cx="1714500" cy="402336"/>
-          </a:xfrm>
-          <a:prstGeom prst="rect">
-            <a:avLst/>
-          </a:prstGeom>
-          <a:noFill/>
-          <a:ln/>
-        </p:spPr>
-        <p:txBody>
-          <a:bodyPr wrap="square" lIns="0" tIns="0" rIns="0" bIns="0" rtlCol="0" anchor="ctr"/>
-          <a:lstStyle/>
-          <a:p>
-            <a:pPr algn="ctr" indent="0" marL="0">
-              <a:buNone/>
-            </a:pPr>
-            <a:r>
-              <a:rPr lang="en-US" sz="1050" b="1" dirty="0">
-                <a:solidFill>
-                  <a:srgbClr val="FFFFFF"/>
-                </a:solidFill>
-                <a:latin typeface="맑은 고딕" pitchFamily="34" charset="0"/>
-                <a:ea typeface="맑은 고딕" pitchFamily="34" charset="-122"/>
-                <a:cs typeface="맑은 고딕" pitchFamily="34" charset="-120"/>
-              </a:rPr>
-              <a:t>고급 모델 · 장문</a:t>
-            </a:r>
-            <a:endParaRPr lang="en-US" sz="1050" dirty="0"/>
-          </a:p>
-        </p:txBody>
-      </p:sp>
-      <p:sp>
-        <p:nvSpPr>
-          <p:cNvPr id="31" name="Shape 29"/>
-          <p:cNvSpPr/>
-          <p:nvPr/>
-        </p:nvSpPr>
-        <p:spPr>
-          <a:xfrm>
-            <a:off x="365760" y="2505456"/>
-            <a:ext cx="1554480" cy="420624"/>
+          <p:cNvPr id="20" name="Shape 18"/>
+          <p:cNvSpPr/>
+          <p:nvPr/>
+        </p:nvSpPr>
+        <p:spPr>
+          <a:xfrm>
+            <a:off x="365760" y="1783080"/>
+            <a:ext cx="2011680" cy="1417320"/>
           </a:xfrm>
           <a:prstGeom prst="rect">
             <a:avLst/>
           </a:prstGeom>
           <a:solidFill>
             <a:srgbClr val="FFFFFF"/>
-          </a:solidFill>
-          <a:ln w="6350">
-            <a:solidFill>
-              <a:srgbClr val="E5E7EB"/>
-            </a:solidFill>
-            <a:prstDash val="solid"/>
-          </a:ln>
-        </p:spPr>
-      </p:sp>
-      <p:sp>
-        <p:nvSpPr>
-          <p:cNvPr id="32" name="Text 30"/>
-          <p:cNvSpPr/>
-          <p:nvPr/>
-        </p:nvSpPr>
-        <p:spPr>
-          <a:xfrm>
-            <a:off x="365760" y="2505456"/>
-            <a:ext cx="1554480" cy="420624"/>
-          </a:xfrm>
-          <a:prstGeom prst="rect">
-            <a:avLst/>
-          </a:prstGeom>
-          <a:noFill/>
-          <a:ln/>
-        </p:spPr>
-        <p:txBody>
-          <a:bodyPr wrap="square" lIns="0" tIns="0" rIns="0" bIns="0" rtlCol="0" anchor="ctr"/>
-          <a:lstStyle/>
-          <a:p>
-            <a:pPr algn="ctr" indent="0" marL="0">
-              <a:buNone/>
-            </a:pPr>
-            <a:r>
-              <a:rPr lang="en-US" sz="1100" b="1" dirty="0">
-                <a:solidFill>
-                  <a:srgbClr val="2563EB"/>
-                </a:solidFill>
-                <a:latin typeface="맑은 고딕" pitchFamily="34" charset="0"/>
-                <a:ea typeface="맑은 고딕" pitchFamily="34" charset="-122"/>
-                <a:cs typeface="맑은 고딕" pitchFamily="34" charset="-120"/>
-              </a:rPr>
-              <a:t>500건</a:t>
-            </a:r>
-            <a:endParaRPr lang="en-US" sz="1100" dirty="0"/>
-          </a:p>
-        </p:txBody>
-      </p:sp>
-      <p:sp>
-        <p:nvSpPr>
-          <p:cNvPr id="33" name="Shape 31"/>
-          <p:cNvSpPr/>
-          <p:nvPr/>
-        </p:nvSpPr>
-        <p:spPr>
-          <a:xfrm>
-            <a:off x="1920240" y="2505456"/>
-            <a:ext cx="1714500" cy="420624"/>
-          </a:xfrm>
-          <a:prstGeom prst="rect">
-            <a:avLst/>
-          </a:prstGeom>
-          <a:solidFill>
-            <a:srgbClr val="FFFFFF"/>
-          </a:solidFill>
-          <a:ln w="6350">
-            <a:solidFill>
-              <a:srgbClr val="E5E7EB"/>
-            </a:solidFill>
-            <a:prstDash val="solid"/>
-          </a:ln>
-        </p:spPr>
-      </p:sp>
-      <p:sp>
-        <p:nvSpPr>
-          <p:cNvPr id="34" name="Text 32"/>
-          <p:cNvSpPr/>
-          <p:nvPr/>
-        </p:nvSpPr>
-        <p:spPr>
-          <a:xfrm>
-            <a:off x="1920240" y="2505456"/>
-            <a:ext cx="1714500" cy="420624"/>
-          </a:xfrm>
-          <a:prstGeom prst="rect">
-            <a:avLst/>
-          </a:prstGeom>
-          <a:noFill/>
-          <a:ln/>
-        </p:spPr>
-        <p:txBody>
-          <a:bodyPr wrap="square" lIns="0" tIns="0" rIns="0" bIns="0" rtlCol="0" anchor="ctr"/>
-          <a:lstStyle/>
-          <a:p>
-            <a:pPr algn="ctr" indent="0" marL="0">
-              <a:buNone/>
-            </a:pPr>
-            <a:r>
-              <a:rPr lang="en-US" sz="1100" dirty="0">
-                <a:solidFill>
-                  <a:srgbClr val="1E293B"/>
-                </a:solidFill>
-                <a:latin typeface="맑은 고딕" pitchFamily="34" charset="0"/>
-                <a:ea typeface="맑은 고딕" pitchFamily="34" charset="-122"/>
-                <a:cs typeface="맑은 고딕" pitchFamily="34" charset="-120"/>
-              </a:rPr>
-              <a:t>약 14만 원</a:t>
-            </a:r>
-            <a:endParaRPr lang="en-US" sz="1100" dirty="0"/>
-          </a:p>
-        </p:txBody>
-      </p:sp>
-      <p:sp>
-        <p:nvSpPr>
-          <p:cNvPr id="35" name="Shape 33"/>
-          <p:cNvSpPr/>
-          <p:nvPr/>
-        </p:nvSpPr>
-        <p:spPr>
-          <a:xfrm>
-            <a:off x="3634740" y="2505456"/>
-            <a:ext cx="1714500" cy="420624"/>
-          </a:xfrm>
-          <a:prstGeom prst="rect">
-            <a:avLst/>
-          </a:prstGeom>
-          <a:solidFill>
-            <a:srgbClr val="FFFFFF"/>
-          </a:solidFill>
-          <a:ln w="6350">
-            <a:solidFill>
-              <a:srgbClr val="E5E7EB"/>
-            </a:solidFill>
-            <a:prstDash val="solid"/>
-          </a:ln>
-        </p:spPr>
-      </p:sp>
-      <p:sp>
-        <p:nvSpPr>
-          <p:cNvPr id="36" name="Text 34"/>
-          <p:cNvSpPr/>
-          <p:nvPr/>
-        </p:nvSpPr>
-        <p:spPr>
-          <a:xfrm>
-            <a:off x="3634740" y="2505456"/>
-            <a:ext cx="1714500" cy="420624"/>
-          </a:xfrm>
-          <a:prstGeom prst="rect">
-            <a:avLst/>
-          </a:prstGeom>
-          <a:noFill/>
-          <a:ln/>
-        </p:spPr>
-        <p:txBody>
-          <a:bodyPr wrap="square" lIns="0" tIns="0" rIns="0" bIns="0" rtlCol="0" anchor="ctr"/>
-          <a:lstStyle/>
-          <a:p>
-            <a:pPr algn="ctr" indent="0" marL="0">
-              <a:buNone/>
-            </a:pPr>
-            <a:r>
-              <a:rPr lang="en-US" sz="1100" dirty="0">
-                <a:solidFill>
-                  <a:srgbClr val="1E293B"/>
-                </a:solidFill>
-                <a:latin typeface="맑은 고딕" pitchFamily="34" charset="0"/>
-                <a:ea typeface="맑은 고딕" pitchFamily="34" charset="-122"/>
-                <a:cs typeface="맑은 고딕" pitchFamily="34" charset="-120"/>
-              </a:rPr>
-              <a:t>약 18만 원</a:t>
-            </a:r>
-            <a:endParaRPr lang="en-US" sz="1100" dirty="0"/>
-          </a:p>
-        </p:txBody>
-      </p:sp>
-      <p:sp>
-        <p:nvSpPr>
-          <p:cNvPr id="37" name="Shape 35"/>
-          <p:cNvSpPr/>
-          <p:nvPr/>
-        </p:nvSpPr>
-        <p:spPr>
-          <a:xfrm>
-            <a:off x="5349240" y="2505456"/>
-            <a:ext cx="1714500" cy="420624"/>
-          </a:xfrm>
-          <a:prstGeom prst="rect">
-            <a:avLst/>
-          </a:prstGeom>
-          <a:solidFill>
-            <a:srgbClr val="FFFFFF"/>
-          </a:solidFill>
-          <a:ln w="6350">
-            <a:solidFill>
-              <a:srgbClr val="E5E7EB"/>
-            </a:solidFill>
-            <a:prstDash val="solid"/>
-          </a:ln>
-        </p:spPr>
-      </p:sp>
-      <p:sp>
-        <p:nvSpPr>
-          <p:cNvPr id="38" name="Text 36"/>
-          <p:cNvSpPr/>
-          <p:nvPr/>
-        </p:nvSpPr>
-        <p:spPr>
-          <a:xfrm>
-            <a:off x="5349240" y="2505456"/>
-            <a:ext cx="1714500" cy="420624"/>
-          </a:xfrm>
-          <a:prstGeom prst="rect">
-            <a:avLst/>
-          </a:prstGeom>
-          <a:noFill/>
-          <a:ln/>
-        </p:spPr>
-        <p:txBody>
-          <a:bodyPr wrap="square" lIns="0" tIns="0" rIns="0" bIns="0" rtlCol="0" anchor="ctr"/>
-          <a:lstStyle/>
-          <a:p>
-            <a:pPr algn="ctr" indent="0" marL="0">
-              <a:buNone/>
-            </a:pPr>
-            <a:r>
-              <a:rPr lang="en-US" sz="1100" dirty="0">
-                <a:solidFill>
-                  <a:srgbClr val="1E293B"/>
-                </a:solidFill>
-                <a:latin typeface="맑은 고딕" pitchFamily="34" charset="0"/>
-                <a:ea typeface="맑은 고딕" pitchFamily="34" charset="-122"/>
-                <a:cs typeface="맑은 고딕" pitchFamily="34" charset="-120"/>
-              </a:rPr>
-              <a:t>약 24만 원</a:t>
-            </a:r>
-            <a:endParaRPr lang="en-US" sz="1100" dirty="0"/>
-          </a:p>
-        </p:txBody>
-      </p:sp>
-      <p:sp>
-        <p:nvSpPr>
-          <p:cNvPr id="39" name="Shape 37"/>
-          <p:cNvSpPr/>
-          <p:nvPr/>
-        </p:nvSpPr>
-        <p:spPr>
-          <a:xfrm>
-            <a:off x="7063740" y="2505456"/>
-            <a:ext cx="1714500" cy="420624"/>
-          </a:xfrm>
-          <a:prstGeom prst="rect">
-            <a:avLst/>
-          </a:prstGeom>
-          <a:solidFill>
-            <a:srgbClr val="FFFFFF"/>
-          </a:solidFill>
-          <a:ln w="6350">
-            <a:solidFill>
-              <a:srgbClr val="E5E7EB"/>
-            </a:solidFill>
-            <a:prstDash val="solid"/>
-          </a:ln>
-        </p:spPr>
-      </p:sp>
-      <p:sp>
-        <p:nvSpPr>
-          <p:cNvPr id="40" name="Text 38"/>
-          <p:cNvSpPr/>
-          <p:nvPr/>
-        </p:nvSpPr>
-        <p:spPr>
-          <a:xfrm>
-            <a:off x="7063740" y="2505456"/>
-            <a:ext cx="1714500" cy="420624"/>
-          </a:xfrm>
-          <a:prstGeom prst="rect">
-            <a:avLst/>
-          </a:prstGeom>
-          <a:noFill/>
-          <a:ln/>
-        </p:spPr>
-        <p:txBody>
-          <a:bodyPr wrap="square" lIns="0" tIns="0" rIns="0" bIns="0" rtlCol="0" anchor="ctr"/>
-          <a:lstStyle/>
-          <a:p>
-            <a:pPr algn="ctr" indent="0" marL="0">
-              <a:buNone/>
-            </a:pPr>
-            <a:r>
-              <a:rPr lang="en-US" sz="1100" dirty="0">
-                <a:solidFill>
-                  <a:srgbClr val="1E293B"/>
-                </a:solidFill>
-                <a:latin typeface="맑은 고딕" pitchFamily="34" charset="0"/>
-                <a:ea typeface="맑은 고딕" pitchFamily="34" charset="-122"/>
-                <a:cs typeface="맑은 고딕" pitchFamily="34" charset="-120"/>
-              </a:rPr>
-              <a:t>약 30만 원</a:t>
-            </a:r>
-            <a:endParaRPr lang="en-US" sz="1100" dirty="0"/>
-          </a:p>
-        </p:txBody>
-      </p:sp>
-      <p:sp>
-        <p:nvSpPr>
-          <p:cNvPr id="41" name="Shape 39"/>
-          <p:cNvSpPr/>
-          <p:nvPr/>
-        </p:nvSpPr>
-        <p:spPr>
-          <a:xfrm>
-            <a:off x="365760" y="2926080"/>
-            <a:ext cx="1554480" cy="420624"/>
-          </a:xfrm>
-          <a:prstGeom prst="rect">
-            <a:avLst/>
-          </a:prstGeom>
-          <a:solidFill>
-            <a:srgbClr val="F8FAFC"/>
-          </a:solidFill>
-          <a:ln w="6350">
-            <a:solidFill>
-              <a:srgbClr val="E5E7EB"/>
-            </a:solidFill>
-            <a:prstDash val="solid"/>
-          </a:ln>
-        </p:spPr>
-      </p:sp>
-      <p:sp>
-        <p:nvSpPr>
-          <p:cNvPr id="42" name="Text 40"/>
-          <p:cNvSpPr/>
-          <p:nvPr/>
-        </p:nvSpPr>
-        <p:spPr>
-          <a:xfrm>
-            <a:off x="365760" y="2926080"/>
-            <a:ext cx="1554480" cy="420624"/>
-          </a:xfrm>
-          <a:prstGeom prst="rect">
-            <a:avLst/>
-          </a:prstGeom>
-          <a:noFill/>
-          <a:ln/>
-        </p:spPr>
-        <p:txBody>
-          <a:bodyPr wrap="square" lIns="0" tIns="0" rIns="0" bIns="0" rtlCol="0" anchor="ctr"/>
-          <a:lstStyle/>
-          <a:p>
-            <a:pPr algn="ctr" indent="0" marL="0">
-              <a:buNone/>
-            </a:pPr>
-            <a:r>
-              <a:rPr lang="en-US" sz="1100" b="1" dirty="0">
-                <a:solidFill>
-                  <a:srgbClr val="2563EB"/>
-                </a:solidFill>
-                <a:latin typeface="맑은 고딕" pitchFamily="34" charset="0"/>
-                <a:ea typeface="맑은 고딕" pitchFamily="34" charset="-122"/>
-                <a:cs typeface="맑은 고딕" pitchFamily="34" charset="-120"/>
-              </a:rPr>
-              <a:t>1,000건</a:t>
-            </a:r>
-            <a:endParaRPr lang="en-US" sz="1100" dirty="0"/>
-          </a:p>
-        </p:txBody>
-      </p:sp>
-      <p:sp>
-        <p:nvSpPr>
-          <p:cNvPr id="43" name="Shape 41"/>
-          <p:cNvSpPr/>
-          <p:nvPr/>
-        </p:nvSpPr>
-        <p:spPr>
-          <a:xfrm>
-            <a:off x="1920240" y="2926080"/>
-            <a:ext cx="1714500" cy="420624"/>
-          </a:xfrm>
-          <a:prstGeom prst="rect">
-            <a:avLst/>
-          </a:prstGeom>
-          <a:solidFill>
-            <a:srgbClr val="F8FAFC"/>
-          </a:solidFill>
-          <a:ln w="6350">
-            <a:solidFill>
-              <a:srgbClr val="E5E7EB"/>
-            </a:solidFill>
-            <a:prstDash val="solid"/>
-          </a:ln>
-        </p:spPr>
-      </p:sp>
-      <p:sp>
-        <p:nvSpPr>
-          <p:cNvPr id="44" name="Text 42"/>
-          <p:cNvSpPr/>
-          <p:nvPr/>
-        </p:nvSpPr>
-        <p:spPr>
-          <a:xfrm>
-            <a:off x="1920240" y="2926080"/>
-            <a:ext cx="1714500" cy="420624"/>
-          </a:xfrm>
-          <a:prstGeom prst="rect">
-            <a:avLst/>
-          </a:prstGeom>
-          <a:noFill/>
-          <a:ln/>
-        </p:spPr>
-        <p:txBody>
-          <a:bodyPr wrap="square" lIns="0" tIns="0" rIns="0" bIns="0" rtlCol="0" anchor="ctr"/>
-          <a:lstStyle/>
-          <a:p>
-            <a:pPr algn="ctr" indent="0" marL="0">
-              <a:buNone/>
-            </a:pPr>
-            <a:r>
-              <a:rPr lang="en-US" sz="1100" dirty="0">
-                <a:solidFill>
-                  <a:srgbClr val="1E293B"/>
-                </a:solidFill>
-                <a:latin typeface="맑은 고딕" pitchFamily="34" charset="0"/>
-                <a:ea typeface="맑은 고딕" pitchFamily="34" charset="-122"/>
-                <a:cs typeface="맑은 고딕" pitchFamily="34" charset="-120"/>
-              </a:rPr>
-              <a:t>약 29만 원</a:t>
-            </a:r>
-            <a:endParaRPr lang="en-US" sz="1100" dirty="0"/>
-          </a:p>
-        </p:txBody>
-      </p:sp>
-      <p:sp>
-        <p:nvSpPr>
-          <p:cNvPr id="45" name="Shape 43"/>
-          <p:cNvSpPr/>
-          <p:nvPr/>
-        </p:nvSpPr>
-        <p:spPr>
-          <a:xfrm>
-            <a:off x="3634740" y="2926080"/>
-            <a:ext cx="1714500" cy="420624"/>
-          </a:xfrm>
-          <a:prstGeom prst="rect">
-            <a:avLst/>
-          </a:prstGeom>
-          <a:solidFill>
-            <a:srgbClr val="F8FAFC"/>
-          </a:solidFill>
-          <a:ln w="6350">
-            <a:solidFill>
-              <a:srgbClr val="E5E7EB"/>
-            </a:solidFill>
-            <a:prstDash val="solid"/>
-          </a:ln>
-        </p:spPr>
-      </p:sp>
-      <p:sp>
-        <p:nvSpPr>
-          <p:cNvPr id="46" name="Text 44"/>
-          <p:cNvSpPr/>
-          <p:nvPr/>
-        </p:nvSpPr>
-        <p:spPr>
-          <a:xfrm>
-            <a:off x="3634740" y="2926080"/>
-            <a:ext cx="1714500" cy="420624"/>
-          </a:xfrm>
-          <a:prstGeom prst="rect">
-            <a:avLst/>
-          </a:prstGeom>
-          <a:noFill/>
-          <a:ln/>
-        </p:spPr>
-        <p:txBody>
-          <a:bodyPr wrap="square" lIns="0" tIns="0" rIns="0" bIns="0" rtlCol="0" anchor="ctr"/>
-          <a:lstStyle/>
-          <a:p>
-            <a:pPr algn="ctr" indent="0" marL="0">
-              <a:buNone/>
-            </a:pPr>
-            <a:r>
-              <a:rPr lang="en-US" sz="1100" dirty="0">
-                <a:solidFill>
-                  <a:srgbClr val="1E293B"/>
-                </a:solidFill>
-                <a:latin typeface="맑은 고딕" pitchFamily="34" charset="0"/>
-                <a:ea typeface="맑은 고딕" pitchFamily="34" charset="-122"/>
-                <a:cs typeface="맑은 고딕" pitchFamily="34" charset="-120"/>
-              </a:rPr>
-              <a:t>약 36만 원</a:t>
-            </a:r>
-            <a:endParaRPr lang="en-US" sz="1100" dirty="0"/>
-          </a:p>
-        </p:txBody>
-      </p:sp>
-      <p:sp>
-        <p:nvSpPr>
-          <p:cNvPr id="47" name="Shape 45"/>
-          <p:cNvSpPr/>
-          <p:nvPr/>
-        </p:nvSpPr>
-        <p:spPr>
-          <a:xfrm>
-            <a:off x="5349240" y="2926080"/>
-            <a:ext cx="1714500" cy="420624"/>
-          </a:xfrm>
-          <a:prstGeom prst="rect">
-            <a:avLst/>
-          </a:prstGeom>
-          <a:solidFill>
-            <a:srgbClr val="F8FAFC"/>
-          </a:solidFill>
-          <a:ln w="6350">
-            <a:solidFill>
-              <a:srgbClr val="E5E7EB"/>
-            </a:solidFill>
-            <a:prstDash val="solid"/>
-          </a:ln>
-        </p:spPr>
-      </p:sp>
-      <p:sp>
-        <p:nvSpPr>
-          <p:cNvPr id="48" name="Text 46"/>
-          <p:cNvSpPr/>
-          <p:nvPr/>
-        </p:nvSpPr>
-        <p:spPr>
-          <a:xfrm>
-            <a:off x="5349240" y="2926080"/>
-            <a:ext cx="1714500" cy="420624"/>
-          </a:xfrm>
-          <a:prstGeom prst="rect">
-            <a:avLst/>
-          </a:prstGeom>
-          <a:noFill/>
-          <a:ln/>
-        </p:spPr>
-        <p:txBody>
-          <a:bodyPr wrap="square" lIns="0" tIns="0" rIns="0" bIns="0" rtlCol="0" anchor="ctr"/>
-          <a:lstStyle/>
-          <a:p>
-            <a:pPr algn="ctr" indent="0" marL="0">
-              <a:buNone/>
-            </a:pPr>
-            <a:r>
-              <a:rPr lang="en-US" sz="1100" dirty="0">
-                <a:solidFill>
-                  <a:srgbClr val="1E293B"/>
-                </a:solidFill>
-                <a:latin typeface="맑은 고딕" pitchFamily="34" charset="0"/>
-                <a:ea typeface="맑은 고딕" pitchFamily="34" charset="-122"/>
-                <a:cs typeface="맑은 고딕" pitchFamily="34" charset="-120"/>
-              </a:rPr>
-              <a:t>약 48만 원</a:t>
-            </a:r>
-            <a:endParaRPr lang="en-US" sz="1100" dirty="0"/>
-          </a:p>
-        </p:txBody>
-      </p:sp>
-      <p:sp>
-        <p:nvSpPr>
-          <p:cNvPr id="49" name="Shape 47"/>
-          <p:cNvSpPr/>
-          <p:nvPr/>
-        </p:nvSpPr>
-        <p:spPr>
-          <a:xfrm>
-            <a:off x="7063740" y="2926080"/>
-            <a:ext cx="1714500" cy="420624"/>
-          </a:xfrm>
-          <a:prstGeom prst="rect">
-            <a:avLst/>
-          </a:prstGeom>
-          <a:solidFill>
-            <a:srgbClr val="F8FAFC"/>
-          </a:solidFill>
-          <a:ln w="6350">
-            <a:solidFill>
-              <a:srgbClr val="E5E7EB"/>
-            </a:solidFill>
-            <a:prstDash val="solid"/>
-          </a:ln>
-        </p:spPr>
-      </p:sp>
-      <p:sp>
-        <p:nvSpPr>
-          <p:cNvPr id="50" name="Text 48"/>
-          <p:cNvSpPr/>
-          <p:nvPr/>
-        </p:nvSpPr>
-        <p:spPr>
-          <a:xfrm>
-            <a:off x="7063740" y="2926080"/>
-            <a:ext cx="1714500" cy="420624"/>
-          </a:xfrm>
-          <a:prstGeom prst="rect">
-            <a:avLst/>
-          </a:prstGeom>
-          <a:noFill/>
-          <a:ln/>
-        </p:spPr>
-        <p:txBody>
-          <a:bodyPr wrap="square" lIns="0" tIns="0" rIns="0" bIns="0" rtlCol="0" anchor="ctr"/>
-          <a:lstStyle/>
-          <a:p>
-            <a:pPr algn="ctr" indent="0" marL="0">
-              <a:buNone/>
-            </a:pPr>
-            <a:r>
-              <a:rPr lang="en-US" sz="1100" dirty="0">
-                <a:solidFill>
-                  <a:srgbClr val="1E293B"/>
-                </a:solidFill>
-                <a:latin typeface="맑은 고딕" pitchFamily="34" charset="0"/>
-                <a:ea typeface="맑은 고딕" pitchFamily="34" charset="-122"/>
-                <a:cs typeface="맑은 고딕" pitchFamily="34" charset="-120"/>
-              </a:rPr>
-              <a:t>약 60만 원</a:t>
-            </a:r>
-            <a:endParaRPr lang="en-US" sz="1100" dirty="0"/>
-          </a:p>
-        </p:txBody>
-      </p:sp>
-      <p:sp>
-        <p:nvSpPr>
-          <p:cNvPr id="51" name="Shape 49"/>
-          <p:cNvSpPr/>
-          <p:nvPr/>
-        </p:nvSpPr>
-        <p:spPr>
-          <a:xfrm>
-            <a:off x="365760" y="3346704"/>
-            <a:ext cx="1554480" cy="420624"/>
-          </a:xfrm>
-          <a:prstGeom prst="rect">
-            <a:avLst/>
-          </a:prstGeom>
-          <a:solidFill>
-            <a:srgbClr val="FFFFFF"/>
-          </a:solidFill>
-          <a:ln w="6350">
-            <a:solidFill>
-              <a:srgbClr val="E5E7EB"/>
-            </a:solidFill>
-            <a:prstDash val="solid"/>
-          </a:ln>
-        </p:spPr>
-      </p:sp>
-      <p:sp>
-        <p:nvSpPr>
-          <p:cNvPr id="52" name="Text 50"/>
-          <p:cNvSpPr/>
-          <p:nvPr/>
-        </p:nvSpPr>
-        <p:spPr>
-          <a:xfrm>
-            <a:off x="365760" y="3346704"/>
-            <a:ext cx="1554480" cy="420624"/>
-          </a:xfrm>
-          <a:prstGeom prst="rect">
-            <a:avLst/>
-          </a:prstGeom>
-          <a:noFill/>
-          <a:ln/>
-        </p:spPr>
-        <p:txBody>
-          <a:bodyPr wrap="square" lIns="0" tIns="0" rIns="0" bIns="0" rtlCol="0" anchor="ctr"/>
-          <a:lstStyle/>
-          <a:p>
-            <a:pPr algn="ctr" indent="0" marL="0">
-              <a:buNone/>
-            </a:pPr>
-            <a:r>
-              <a:rPr lang="en-US" sz="1100" b="1" dirty="0">
-                <a:solidFill>
-                  <a:srgbClr val="2563EB"/>
-                </a:solidFill>
-                <a:latin typeface="맑은 고딕" pitchFamily="34" charset="0"/>
-                <a:ea typeface="맑은 고딕" pitchFamily="34" charset="-122"/>
-                <a:cs typeface="맑은 고딕" pitchFamily="34" charset="-120"/>
-              </a:rPr>
-              <a:t>2,000건</a:t>
-            </a:r>
-            <a:endParaRPr lang="en-US" sz="1100" dirty="0"/>
-          </a:p>
-        </p:txBody>
-      </p:sp>
-      <p:sp>
-        <p:nvSpPr>
-          <p:cNvPr id="53" name="Shape 51"/>
-          <p:cNvSpPr/>
-          <p:nvPr/>
-        </p:nvSpPr>
-        <p:spPr>
-          <a:xfrm>
-            <a:off x="1920240" y="3346704"/>
-            <a:ext cx="1714500" cy="420624"/>
-          </a:xfrm>
-          <a:prstGeom prst="rect">
-            <a:avLst/>
-          </a:prstGeom>
-          <a:solidFill>
-            <a:srgbClr val="FFFFFF"/>
-          </a:solidFill>
-          <a:ln w="6350">
-            <a:solidFill>
-              <a:srgbClr val="E5E7EB"/>
-            </a:solidFill>
-            <a:prstDash val="solid"/>
-          </a:ln>
-        </p:spPr>
-      </p:sp>
-      <p:sp>
-        <p:nvSpPr>
-          <p:cNvPr id="54" name="Text 52"/>
-          <p:cNvSpPr/>
-          <p:nvPr/>
-        </p:nvSpPr>
-        <p:spPr>
-          <a:xfrm>
-            <a:off x="1920240" y="3346704"/>
-            <a:ext cx="1714500" cy="420624"/>
-          </a:xfrm>
-          <a:prstGeom prst="rect">
-            <a:avLst/>
-          </a:prstGeom>
-          <a:noFill/>
-          <a:ln/>
-        </p:spPr>
-        <p:txBody>
-          <a:bodyPr wrap="square" lIns="0" tIns="0" rIns="0" bIns="0" rtlCol="0" anchor="ctr"/>
-          <a:lstStyle/>
-          <a:p>
-            <a:pPr algn="ctr" indent="0" marL="0">
-              <a:buNone/>
-            </a:pPr>
-            <a:r>
-              <a:rPr lang="en-US" sz="1100" dirty="0">
-                <a:solidFill>
-                  <a:srgbClr val="1E293B"/>
-                </a:solidFill>
-                <a:latin typeface="맑은 고딕" pitchFamily="34" charset="0"/>
-                <a:ea typeface="맑은 고딕" pitchFamily="34" charset="-122"/>
-                <a:cs typeface="맑은 고딕" pitchFamily="34" charset="-120"/>
-              </a:rPr>
-              <a:t>약 57만 원</a:t>
-            </a:r>
-            <a:endParaRPr lang="en-US" sz="1100" dirty="0"/>
-          </a:p>
-        </p:txBody>
-      </p:sp>
-      <p:sp>
-        <p:nvSpPr>
-          <p:cNvPr id="55" name="Shape 53"/>
-          <p:cNvSpPr/>
-          <p:nvPr/>
-        </p:nvSpPr>
-        <p:spPr>
-          <a:xfrm>
-            <a:off x="3634740" y="3346704"/>
-            <a:ext cx="1714500" cy="420624"/>
-          </a:xfrm>
-          <a:prstGeom prst="rect">
-            <a:avLst/>
-          </a:prstGeom>
-          <a:solidFill>
-            <a:srgbClr val="FFFFFF"/>
-          </a:solidFill>
-          <a:ln w="6350">
-            <a:solidFill>
-              <a:srgbClr val="E5E7EB"/>
-            </a:solidFill>
-            <a:prstDash val="solid"/>
-          </a:ln>
-        </p:spPr>
-      </p:sp>
-      <p:sp>
-        <p:nvSpPr>
-          <p:cNvPr id="56" name="Text 54"/>
-          <p:cNvSpPr/>
-          <p:nvPr/>
-        </p:nvSpPr>
-        <p:spPr>
-          <a:xfrm>
-            <a:off x="3634740" y="3346704"/>
-            <a:ext cx="1714500" cy="420624"/>
-          </a:xfrm>
-          <a:prstGeom prst="rect">
-            <a:avLst/>
-          </a:prstGeom>
-          <a:noFill/>
-          <a:ln/>
-        </p:spPr>
-        <p:txBody>
-          <a:bodyPr wrap="square" lIns="0" tIns="0" rIns="0" bIns="0" rtlCol="0" anchor="ctr"/>
-          <a:lstStyle/>
-          <a:p>
-            <a:pPr algn="ctr" indent="0" marL="0">
-              <a:buNone/>
-            </a:pPr>
-            <a:r>
-              <a:rPr lang="en-US" sz="1100" dirty="0">
-                <a:solidFill>
-                  <a:srgbClr val="1E293B"/>
-                </a:solidFill>
-                <a:latin typeface="맑은 고딕" pitchFamily="34" charset="0"/>
-                <a:ea typeface="맑은 고딕" pitchFamily="34" charset="-122"/>
-                <a:cs typeface="맑은 고딕" pitchFamily="34" charset="-120"/>
-              </a:rPr>
-              <a:t>약 72만 원</a:t>
-            </a:r>
-            <a:endParaRPr lang="en-US" sz="1100" dirty="0"/>
-          </a:p>
-        </p:txBody>
-      </p:sp>
-      <p:sp>
-        <p:nvSpPr>
-          <p:cNvPr id="57" name="Shape 55"/>
-          <p:cNvSpPr/>
-          <p:nvPr/>
-        </p:nvSpPr>
-        <p:spPr>
-          <a:xfrm>
-            <a:off x="5349240" y="3346704"/>
-            <a:ext cx="1714500" cy="420624"/>
-          </a:xfrm>
-          <a:prstGeom prst="rect">
-            <a:avLst/>
-          </a:prstGeom>
-          <a:solidFill>
-            <a:srgbClr val="FFFFFF"/>
-          </a:solidFill>
-          <a:ln w="6350">
-            <a:solidFill>
-              <a:srgbClr val="E5E7EB"/>
-            </a:solidFill>
-            <a:prstDash val="solid"/>
-          </a:ln>
-        </p:spPr>
-      </p:sp>
-      <p:sp>
-        <p:nvSpPr>
-          <p:cNvPr id="58" name="Text 56"/>
-          <p:cNvSpPr/>
-          <p:nvPr/>
-        </p:nvSpPr>
-        <p:spPr>
-          <a:xfrm>
-            <a:off x="5349240" y="3346704"/>
-            <a:ext cx="1714500" cy="420624"/>
-          </a:xfrm>
-          <a:prstGeom prst="rect">
-            <a:avLst/>
-          </a:prstGeom>
-          <a:noFill/>
-          <a:ln/>
-        </p:spPr>
-        <p:txBody>
-          <a:bodyPr wrap="square" lIns="0" tIns="0" rIns="0" bIns="0" rtlCol="0" anchor="ctr"/>
-          <a:lstStyle/>
-          <a:p>
-            <a:pPr algn="ctr" indent="0" marL="0">
-              <a:buNone/>
-            </a:pPr>
-            <a:r>
-              <a:rPr lang="en-US" sz="1100" dirty="0">
-                <a:solidFill>
-                  <a:srgbClr val="1E293B"/>
-                </a:solidFill>
-                <a:latin typeface="맑은 고딕" pitchFamily="34" charset="0"/>
-                <a:ea typeface="맑은 고딕" pitchFamily="34" charset="-122"/>
-                <a:cs typeface="맑은 고딕" pitchFamily="34" charset="-120"/>
-              </a:rPr>
-              <a:t>약 96만 원</a:t>
-            </a:r>
-            <a:endParaRPr lang="en-US" sz="1100" dirty="0"/>
-          </a:p>
-        </p:txBody>
-      </p:sp>
-      <p:sp>
-        <p:nvSpPr>
-          <p:cNvPr id="59" name="Shape 57"/>
-          <p:cNvSpPr/>
-          <p:nvPr/>
-        </p:nvSpPr>
-        <p:spPr>
-          <a:xfrm>
-            <a:off x="7063740" y="3346704"/>
-            <a:ext cx="1714500" cy="420624"/>
-          </a:xfrm>
-          <a:prstGeom prst="rect">
-            <a:avLst/>
-          </a:prstGeom>
-          <a:solidFill>
-            <a:srgbClr val="FFFFFF"/>
-          </a:solidFill>
-          <a:ln w="6350">
-            <a:solidFill>
-              <a:srgbClr val="E5E7EB"/>
-            </a:solidFill>
-            <a:prstDash val="solid"/>
-          </a:ln>
-        </p:spPr>
-      </p:sp>
-      <p:sp>
-        <p:nvSpPr>
-          <p:cNvPr id="60" name="Text 58"/>
-          <p:cNvSpPr/>
-          <p:nvPr/>
-        </p:nvSpPr>
-        <p:spPr>
-          <a:xfrm>
-            <a:off x="7063740" y="3346704"/>
-            <a:ext cx="1714500" cy="420624"/>
-          </a:xfrm>
-          <a:prstGeom prst="rect">
-            <a:avLst/>
-          </a:prstGeom>
-          <a:noFill/>
-          <a:ln/>
-        </p:spPr>
-        <p:txBody>
-          <a:bodyPr wrap="square" lIns="0" tIns="0" rIns="0" bIns="0" rtlCol="0" anchor="ctr"/>
-          <a:lstStyle/>
-          <a:p>
-            <a:pPr algn="ctr" indent="0" marL="0">
-              <a:buNone/>
-            </a:pPr>
-            <a:r>
-              <a:rPr lang="en-US" sz="1100" dirty="0">
-                <a:solidFill>
-                  <a:srgbClr val="1E293B"/>
-                </a:solidFill>
-                <a:latin typeface="맑은 고딕" pitchFamily="34" charset="0"/>
-                <a:ea typeface="맑은 고딕" pitchFamily="34" charset="-122"/>
-                <a:cs typeface="맑은 고딕" pitchFamily="34" charset="-120"/>
-              </a:rPr>
-              <a:t>약 120만 원</a:t>
-            </a:r>
-            <a:endParaRPr lang="en-US" sz="1100" dirty="0"/>
-          </a:p>
-        </p:txBody>
-      </p:sp>
-      <p:sp>
-        <p:nvSpPr>
-          <p:cNvPr id="61" name="Shape 59"/>
-          <p:cNvSpPr/>
-          <p:nvPr/>
-        </p:nvSpPr>
-        <p:spPr>
-          <a:xfrm>
-            <a:off x="365760" y="3767328"/>
-            <a:ext cx="1554480" cy="420624"/>
-          </a:xfrm>
-          <a:prstGeom prst="rect">
-            <a:avLst/>
-          </a:prstGeom>
-          <a:solidFill>
-            <a:srgbClr val="F8FAFC"/>
-          </a:solidFill>
-          <a:ln w="6350">
-            <a:solidFill>
-              <a:srgbClr val="E5E7EB"/>
-            </a:solidFill>
-            <a:prstDash val="solid"/>
-          </a:ln>
-        </p:spPr>
-      </p:sp>
-      <p:sp>
-        <p:nvSpPr>
-          <p:cNvPr id="62" name="Text 60"/>
-          <p:cNvSpPr/>
-          <p:nvPr/>
-        </p:nvSpPr>
-        <p:spPr>
-          <a:xfrm>
-            <a:off x="365760" y="3767328"/>
-            <a:ext cx="1554480" cy="420624"/>
-          </a:xfrm>
-          <a:prstGeom prst="rect">
-            <a:avLst/>
-          </a:prstGeom>
-          <a:noFill/>
-          <a:ln/>
-        </p:spPr>
-        <p:txBody>
-          <a:bodyPr wrap="square" lIns="0" tIns="0" rIns="0" bIns="0" rtlCol="0" anchor="ctr"/>
-          <a:lstStyle/>
-          <a:p>
-            <a:pPr algn="ctr" indent="0" marL="0">
-              <a:buNone/>
-            </a:pPr>
-            <a:r>
-              <a:rPr lang="en-US" sz="1100" b="1" dirty="0">
-                <a:solidFill>
-                  <a:srgbClr val="2563EB"/>
-                </a:solidFill>
-                <a:latin typeface="맑은 고딕" pitchFamily="34" charset="0"/>
-                <a:ea typeface="맑은 고딕" pitchFamily="34" charset="-122"/>
-                <a:cs typeface="맑은 고딕" pitchFamily="34" charset="-120"/>
-              </a:rPr>
-              <a:t>10,000건</a:t>
-            </a:r>
-            <a:endParaRPr lang="en-US" sz="1100" dirty="0"/>
-          </a:p>
-        </p:txBody>
-      </p:sp>
-      <p:sp>
-        <p:nvSpPr>
-          <p:cNvPr id="63" name="Shape 61"/>
-          <p:cNvSpPr/>
-          <p:nvPr/>
-        </p:nvSpPr>
-        <p:spPr>
-          <a:xfrm>
-            <a:off x="1920240" y="3767328"/>
-            <a:ext cx="1714500" cy="420624"/>
-          </a:xfrm>
-          <a:prstGeom prst="rect">
-            <a:avLst/>
-          </a:prstGeom>
-          <a:solidFill>
-            <a:srgbClr val="F8FAFC"/>
-          </a:solidFill>
-          <a:ln w="6350">
-            <a:solidFill>
-              <a:srgbClr val="E5E7EB"/>
-            </a:solidFill>
-            <a:prstDash val="solid"/>
-          </a:ln>
-        </p:spPr>
-      </p:sp>
-      <p:sp>
-        <p:nvSpPr>
-          <p:cNvPr id="64" name="Text 62"/>
-          <p:cNvSpPr/>
-          <p:nvPr/>
-        </p:nvSpPr>
-        <p:spPr>
-          <a:xfrm>
-            <a:off x="1920240" y="3767328"/>
-            <a:ext cx="1714500" cy="420624"/>
-          </a:xfrm>
-          <a:prstGeom prst="rect">
-            <a:avLst/>
-          </a:prstGeom>
-          <a:noFill/>
-          <a:ln/>
-        </p:spPr>
-        <p:txBody>
-          <a:bodyPr wrap="square" lIns="0" tIns="0" rIns="0" bIns="0" rtlCol="0" anchor="ctr"/>
-          <a:lstStyle/>
-          <a:p>
-            <a:pPr algn="ctr" indent="0" marL="0">
-              <a:buNone/>
-            </a:pPr>
-            <a:r>
-              <a:rPr lang="en-US" sz="1100" dirty="0">
-                <a:solidFill>
-                  <a:srgbClr val="1E293B"/>
-                </a:solidFill>
-                <a:latin typeface="맑은 고딕" pitchFamily="34" charset="0"/>
-                <a:ea typeface="맑은 고딕" pitchFamily="34" charset="-122"/>
-                <a:cs typeface="맑은 고딕" pitchFamily="34" charset="-120"/>
-              </a:rPr>
-              <a:t>약 285만 원</a:t>
-            </a:r>
-            <a:endParaRPr lang="en-US" sz="1100" dirty="0"/>
-          </a:p>
-        </p:txBody>
-      </p:sp>
-      <p:sp>
-        <p:nvSpPr>
-          <p:cNvPr id="65" name="Shape 63"/>
-          <p:cNvSpPr/>
-          <p:nvPr/>
-        </p:nvSpPr>
-        <p:spPr>
-          <a:xfrm>
-            <a:off x="3634740" y="3767328"/>
-            <a:ext cx="1714500" cy="420624"/>
-          </a:xfrm>
-          <a:prstGeom prst="rect">
-            <a:avLst/>
-          </a:prstGeom>
-          <a:solidFill>
-            <a:srgbClr val="F8FAFC"/>
-          </a:solidFill>
-          <a:ln w="6350">
-            <a:solidFill>
-              <a:srgbClr val="E5E7EB"/>
-            </a:solidFill>
-            <a:prstDash val="solid"/>
-          </a:ln>
-        </p:spPr>
-      </p:sp>
-      <p:sp>
-        <p:nvSpPr>
-          <p:cNvPr id="66" name="Text 64"/>
-          <p:cNvSpPr/>
-          <p:nvPr/>
-        </p:nvSpPr>
-        <p:spPr>
-          <a:xfrm>
-            <a:off x="3634740" y="3767328"/>
-            <a:ext cx="1714500" cy="420624"/>
-          </a:xfrm>
-          <a:prstGeom prst="rect">
-            <a:avLst/>
-          </a:prstGeom>
-          <a:noFill/>
-          <a:ln/>
-        </p:spPr>
-        <p:txBody>
-          <a:bodyPr wrap="square" lIns="0" tIns="0" rIns="0" bIns="0" rtlCol="0" anchor="ctr"/>
-          <a:lstStyle/>
-          <a:p>
-            <a:pPr algn="ctr" indent="0" marL="0">
-              <a:buNone/>
-            </a:pPr>
-            <a:r>
-              <a:rPr lang="en-US" sz="1100" dirty="0">
-                <a:solidFill>
-                  <a:srgbClr val="1E293B"/>
-                </a:solidFill>
-                <a:latin typeface="맑은 고딕" pitchFamily="34" charset="0"/>
-                <a:ea typeface="맑은 고딕" pitchFamily="34" charset="-122"/>
-                <a:cs typeface="맑은 고딕" pitchFamily="34" charset="-120"/>
-              </a:rPr>
-              <a:t>약 360만 원</a:t>
-            </a:r>
-            <a:endParaRPr lang="en-US" sz="1100" dirty="0"/>
-          </a:p>
-        </p:txBody>
-      </p:sp>
-      <p:sp>
-        <p:nvSpPr>
-          <p:cNvPr id="67" name="Shape 65"/>
-          <p:cNvSpPr/>
-          <p:nvPr/>
-        </p:nvSpPr>
-        <p:spPr>
-          <a:xfrm>
-            <a:off x="5349240" y="3767328"/>
-            <a:ext cx="1714500" cy="420624"/>
-          </a:xfrm>
-          <a:prstGeom prst="rect">
-            <a:avLst/>
-          </a:prstGeom>
-          <a:solidFill>
-            <a:srgbClr val="F8FAFC"/>
-          </a:solidFill>
-          <a:ln w="6350">
-            <a:solidFill>
-              <a:srgbClr val="E5E7EB"/>
-            </a:solidFill>
-            <a:prstDash val="solid"/>
-          </a:ln>
-        </p:spPr>
-      </p:sp>
-      <p:sp>
-        <p:nvSpPr>
-          <p:cNvPr id="68" name="Text 66"/>
-          <p:cNvSpPr/>
-          <p:nvPr/>
-        </p:nvSpPr>
-        <p:spPr>
-          <a:xfrm>
-            <a:off x="5349240" y="3767328"/>
-            <a:ext cx="1714500" cy="420624"/>
-          </a:xfrm>
-          <a:prstGeom prst="rect">
-            <a:avLst/>
-          </a:prstGeom>
-          <a:noFill/>
-          <a:ln/>
-        </p:spPr>
-        <p:txBody>
-          <a:bodyPr wrap="square" lIns="0" tIns="0" rIns="0" bIns="0" rtlCol="0" anchor="ctr"/>
-          <a:lstStyle/>
-          <a:p>
-            <a:pPr algn="ctr" indent="0" marL="0">
-              <a:buNone/>
-            </a:pPr>
-            <a:r>
-              <a:rPr lang="en-US" sz="1100" dirty="0">
-                <a:solidFill>
-                  <a:srgbClr val="1E293B"/>
-                </a:solidFill>
-                <a:latin typeface="맑은 고딕" pitchFamily="34" charset="0"/>
-                <a:ea typeface="맑은 고딕" pitchFamily="34" charset="-122"/>
-                <a:cs typeface="맑은 고딕" pitchFamily="34" charset="-120"/>
-              </a:rPr>
-              <a:t>약 480만 원</a:t>
-            </a:r>
-            <a:endParaRPr lang="en-US" sz="1100" dirty="0"/>
-          </a:p>
-        </p:txBody>
-      </p:sp>
-      <p:sp>
-        <p:nvSpPr>
-          <p:cNvPr id="69" name="Shape 67"/>
-          <p:cNvSpPr/>
-          <p:nvPr/>
-        </p:nvSpPr>
-        <p:spPr>
-          <a:xfrm>
-            <a:off x="7063740" y="3767328"/>
-            <a:ext cx="1714500" cy="420624"/>
-          </a:xfrm>
-          <a:prstGeom prst="rect">
-            <a:avLst/>
-          </a:prstGeom>
-          <a:solidFill>
-            <a:srgbClr val="F8FAFC"/>
-          </a:solidFill>
-          <a:ln w="6350">
-            <a:solidFill>
-              <a:srgbClr val="E5E7EB"/>
-            </a:solidFill>
-            <a:prstDash val="solid"/>
-          </a:ln>
-        </p:spPr>
-      </p:sp>
-      <p:sp>
-        <p:nvSpPr>
-          <p:cNvPr id="70" name="Text 68"/>
-          <p:cNvSpPr/>
-          <p:nvPr/>
-        </p:nvSpPr>
-        <p:spPr>
-          <a:xfrm>
-            <a:off x="7063740" y="3767328"/>
-            <a:ext cx="1714500" cy="420624"/>
-          </a:xfrm>
-          <a:prstGeom prst="rect">
-            <a:avLst/>
-          </a:prstGeom>
-          <a:noFill/>
-          <a:ln/>
-        </p:spPr>
-        <p:txBody>
-          <a:bodyPr wrap="square" lIns="0" tIns="0" rIns="0" bIns="0" rtlCol="0" anchor="ctr"/>
-          <a:lstStyle/>
-          <a:p>
-            <a:pPr algn="ctr" indent="0" marL="0">
-              <a:buNone/>
-            </a:pPr>
-            <a:r>
-              <a:rPr lang="en-US" sz="1100" dirty="0">
-                <a:solidFill>
-                  <a:srgbClr val="1E293B"/>
-                </a:solidFill>
-                <a:latin typeface="맑은 고딕" pitchFamily="34" charset="0"/>
-                <a:ea typeface="맑은 고딕" pitchFamily="34" charset="-122"/>
-                <a:cs typeface="맑은 고딕" pitchFamily="34" charset="-120"/>
-              </a:rPr>
-              <a:t>약 600만 원</a:t>
-            </a:r>
-            <a:endParaRPr lang="en-US" sz="1100" dirty="0"/>
-          </a:p>
-        </p:txBody>
-      </p:sp>
-      <p:sp>
-        <p:nvSpPr>
-          <p:cNvPr id="71" name="Shape 69"/>
-          <p:cNvSpPr/>
-          <p:nvPr/>
-        </p:nvSpPr>
-        <p:spPr>
-          <a:xfrm>
-            <a:off x="365760" y="4315968"/>
-            <a:ext cx="8412480" cy="621792"/>
-          </a:xfrm>
-          <a:prstGeom prst="rect">
-            <a:avLst/>
-          </a:prstGeom>
-          <a:solidFill>
-            <a:srgbClr val="EBF5FF"/>
           </a:solidFill>
           <a:ln w="12700">
             <a:solidFill>
@@ -33023,18 +31562,45 @@
             </a:solidFill>
             <a:prstDash val="solid"/>
           </a:ln>
-        </p:spPr>
-      </p:sp>
-      <p:sp>
-        <p:nvSpPr>
-          <p:cNvPr id="72" name="Text 70"/>
-          <p:cNvSpPr/>
-          <p:nvPr/>
-        </p:nvSpPr>
-        <p:spPr>
-          <a:xfrm>
-            <a:off x="457200" y="4370832"/>
-            <a:ext cx="8229600" cy="274320"/>
+          <a:effectLst>
+            <a:outerShdw sx="100000" sy="100000" kx="0" ky="0" algn="bl" rotWithShape="0" blurRad="50800" dist="12700" dir="8100000">
+              <a:srgbClr val="000000">
+                <a:alpha val="8000"/>
+              </a:srgbClr>
+            </a:outerShdw>
+          </a:effectLst>
+        </p:spPr>
+      </p:sp>
+      <p:sp>
+        <p:nvSpPr>
+          <p:cNvPr id="21" name="Shape 19"/>
+          <p:cNvSpPr/>
+          <p:nvPr/>
+        </p:nvSpPr>
+        <p:spPr>
+          <a:xfrm>
+            <a:off x="365760" y="1783080"/>
+            <a:ext cx="2011680" cy="329184"/>
+          </a:xfrm>
+          <a:prstGeom prst="rect">
+            <a:avLst/>
+          </a:prstGeom>
+          <a:solidFill>
+            <a:srgbClr val="2563EB"/>
+          </a:solidFill>
+          <a:ln/>
+        </p:spPr>
+      </p:sp>
+      <p:sp>
+        <p:nvSpPr>
+          <p:cNvPr id="22" name="Text 20"/>
+          <p:cNvSpPr/>
+          <p:nvPr/>
+        </p:nvSpPr>
+        <p:spPr>
+          <a:xfrm>
+            <a:off x="365760" y="1783080"/>
+            <a:ext cx="2011680" cy="329184"/>
           </a:xfrm>
           <a:prstGeom prst="rect">
             <a:avLst/>
@@ -33052,44 +31618,787 @@
             <a:r>
               <a:rPr lang="en-US" sz="1150" b="1" dirty="0">
                 <a:solidFill>
+                  <a:srgbClr val="FFFFFF"/>
+                </a:solidFill>
+                <a:latin typeface="맑은 고딕" pitchFamily="34" charset="0"/>
+                <a:ea typeface="맑은 고딕" pitchFamily="34" charset="-122"/>
+                <a:cs typeface="맑은 고딕" pitchFamily="34" charset="-120"/>
+              </a:rPr>
+              <a:t>화면</a:t>
+            </a:r>
+            <a:endParaRPr lang="en-US" sz="1150" dirty="0"/>
+          </a:p>
+        </p:txBody>
+      </p:sp>
+      <p:sp>
+        <p:nvSpPr>
+          <p:cNvPr id="23" name="Text 21"/>
+          <p:cNvSpPr/>
+          <p:nvPr/>
+        </p:nvSpPr>
+        <p:spPr>
+          <a:xfrm>
+            <a:off x="475488" y="2231136"/>
+            <a:ext cx="1792224" cy="868680"/>
+          </a:xfrm>
+          <a:prstGeom prst="rect">
+            <a:avLst/>
+          </a:prstGeom>
+          <a:noFill/>
+          <a:ln/>
+        </p:spPr>
+        <p:txBody>
+          <a:bodyPr wrap="square" lIns="0" tIns="0" rIns="0" bIns="0" rtlCol="0" anchor="ctr"/>
+          <a:lstStyle/>
+          <a:p>
+            <a:pPr algn="ctr" indent="0" marL="0">
+              <a:lnSpc>
+                <a:spcPct val="130000"/>
+              </a:lnSpc>
+              <a:buNone/>
+            </a:pPr>
+            <a:r>
+              <a:rPr lang="en-US" sz="980" dirty="0">
+                <a:solidFill>
+                  <a:srgbClr val="64748B"/>
+                </a:solidFill>
+                <a:latin typeface="맑은 고딕" pitchFamily="34" charset="0"/>
+                <a:ea typeface="맑은 고딕" pitchFamily="34" charset="-122"/>
+                <a:cs typeface="맑은 고딕" pitchFamily="34" charset="-120"/>
+              </a:rPr>
+              <a:t>문답·결과 웹 화면</a:t>
+            </a:r>
+            <a:endParaRPr lang="en-US" sz="980" dirty="0"/>
+          </a:p>
+          <a:p>
+            <a:pPr algn="ctr" indent="0" marL="0">
+              <a:lnSpc>
+                <a:spcPct val="130000"/>
+              </a:lnSpc>
+              <a:buNone/>
+            </a:pPr>
+            <a:r>
+              <a:rPr lang="en-US" sz="980" dirty="0">
+                <a:solidFill>
+                  <a:srgbClr val="64748B"/>
+                </a:solidFill>
+                <a:latin typeface="맑은 고딕" pitchFamily="34" charset="0"/>
+                <a:ea typeface="맑은 고딕" pitchFamily="34" charset="-122"/>
+                <a:cs typeface="맑은 고딕" pitchFamily="34" charset="-120"/>
+              </a:rPr>
+              <a:t>음성 입력 · 문답 저장</a:t>
+            </a:r>
+            <a:endParaRPr lang="en-US" sz="980" dirty="0"/>
+          </a:p>
+          <a:p>
+            <a:pPr algn="ctr" indent="0" marL="0">
+              <a:lnSpc>
+                <a:spcPct val="130000"/>
+              </a:lnSpc>
+              <a:buNone/>
+            </a:pPr>
+            <a:r>
+              <a:rPr lang="en-US" sz="980" dirty="0">
+                <a:solidFill>
+                  <a:srgbClr val="64748B"/>
+                </a:solidFill>
+                <a:latin typeface="맑은 고딕" pitchFamily="34" charset="0"/>
+                <a:ea typeface="맑은 고딕" pitchFamily="34" charset="-122"/>
+                <a:cs typeface="맑은 고딕" pitchFamily="34" charset="-120"/>
+              </a:rPr>
+              <a:t>Word/PDF 불러와 재평가</a:t>
+            </a:r>
+            <a:endParaRPr lang="en-US" sz="980" dirty="0"/>
+          </a:p>
+        </p:txBody>
+      </p:sp>
+      <p:sp>
+        <p:nvSpPr>
+          <p:cNvPr id="24" name="Shape 22"/>
+          <p:cNvSpPr/>
+          <p:nvPr/>
+        </p:nvSpPr>
+        <p:spPr>
+          <a:xfrm>
+            <a:off x="2551176" y="1783080"/>
+            <a:ext cx="2011680" cy="1417320"/>
+          </a:xfrm>
+          <a:prstGeom prst="rect">
+            <a:avLst/>
+          </a:prstGeom>
+          <a:solidFill>
+            <a:srgbClr val="FFFFFF"/>
+          </a:solidFill>
+          <a:ln w="12700">
+            <a:solidFill>
+              <a:srgbClr val="E5E7EB"/>
+            </a:solidFill>
+            <a:prstDash val="solid"/>
+          </a:ln>
+          <a:effectLst>
+            <a:outerShdw sx="100000" sy="100000" kx="0" ky="0" algn="bl" rotWithShape="0" blurRad="50800" dist="12700" dir="8100000">
+              <a:srgbClr val="000000">
+                <a:alpha val="8000"/>
+              </a:srgbClr>
+            </a:outerShdw>
+          </a:effectLst>
+        </p:spPr>
+      </p:sp>
+      <p:sp>
+        <p:nvSpPr>
+          <p:cNvPr id="25" name="Shape 23"/>
+          <p:cNvSpPr/>
+          <p:nvPr/>
+        </p:nvSpPr>
+        <p:spPr>
+          <a:xfrm>
+            <a:off x="2551176" y="1783080"/>
+            <a:ext cx="2011680" cy="329184"/>
+          </a:xfrm>
+          <a:prstGeom prst="rect">
+            <a:avLst/>
+          </a:prstGeom>
+          <a:solidFill>
+            <a:srgbClr val="2563EB"/>
+          </a:solidFill>
+          <a:ln/>
+        </p:spPr>
+      </p:sp>
+      <p:sp>
+        <p:nvSpPr>
+          <p:cNvPr id="26" name="Text 24"/>
+          <p:cNvSpPr/>
+          <p:nvPr/>
+        </p:nvSpPr>
+        <p:spPr>
+          <a:xfrm>
+            <a:off x="2551176" y="1783080"/>
+            <a:ext cx="2011680" cy="329184"/>
+          </a:xfrm>
+          <a:prstGeom prst="rect">
+            <a:avLst/>
+          </a:prstGeom>
+          <a:noFill/>
+          <a:ln/>
+        </p:spPr>
+        <p:txBody>
+          <a:bodyPr wrap="square" lIns="0" tIns="0" rIns="0" bIns="0" rtlCol="0" anchor="ctr"/>
+          <a:lstStyle/>
+          <a:p>
+            <a:pPr algn="ctr" indent="0" marL="0">
+              <a:buNone/>
+            </a:pPr>
+            <a:r>
+              <a:rPr lang="en-US" sz="1150" b="1" dirty="0">
+                <a:solidFill>
+                  <a:srgbClr val="FFFFFF"/>
+                </a:solidFill>
+                <a:latin typeface="맑은 고딕" pitchFamily="34" charset="0"/>
+                <a:ea typeface="맑은 고딕" pitchFamily="34" charset="-122"/>
+                <a:cs typeface="맑은 고딕" pitchFamily="34" charset="-120"/>
+              </a:rPr>
+              <a:t>평가 엔진</a:t>
+            </a:r>
+            <a:endParaRPr lang="en-US" sz="1150" dirty="0"/>
+          </a:p>
+        </p:txBody>
+      </p:sp>
+      <p:sp>
+        <p:nvSpPr>
+          <p:cNvPr id="27" name="Text 25"/>
+          <p:cNvSpPr/>
+          <p:nvPr/>
+        </p:nvSpPr>
+        <p:spPr>
+          <a:xfrm>
+            <a:off x="2660904" y="2231136"/>
+            <a:ext cx="1792224" cy="868680"/>
+          </a:xfrm>
+          <a:prstGeom prst="rect">
+            <a:avLst/>
+          </a:prstGeom>
+          <a:noFill/>
+          <a:ln/>
+        </p:spPr>
+        <p:txBody>
+          <a:bodyPr wrap="square" lIns="0" tIns="0" rIns="0" bIns="0" rtlCol="0" anchor="ctr"/>
+          <a:lstStyle/>
+          <a:p>
+            <a:pPr algn="ctr" indent="0" marL="0">
+              <a:lnSpc>
+                <a:spcPct val="130000"/>
+              </a:lnSpc>
+              <a:buNone/>
+            </a:pPr>
+            <a:r>
+              <a:rPr lang="en-US" sz="980" dirty="0">
+                <a:solidFill>
+                  <a:srgbClr val="64748B"/>
+                </a:solidFill>
+                <a:latin typeface="맑은 고딕" pitchFamily="34" charset="0"/>
+                <a:ea typeface="맑은 고딕" pitchFamily="34" charset="-122"/>
+                <a:cs typeface="맑은 고딕" pitchFamily="34" charset="-120"/>
+              </a:rPr>
+              <a:t>문답 생성 · 이원 채점</a:t>
+            </a:r>
+            <a:endParaRPr lang="en-US" sz="980" dirty="0"/>
+          </a:p>
+          <a:p>
+            <a:pPr algn="ctr" indent="0" marL="0">
+              <a:lnSpc>
+                <a:spcPct val="130000"/>
+              </a:lnSpc>
+              <a:buNone/>
+            </a:pPr>
+            <a:r>
+              <a:rPr lang="en-US" sz="980" dirty="0">
+                <a:solidFill>
+                  <a:srgbClr val="64748B"/>
+                </a:solidFill>
+                <a:latin typeface="맑은 고딕" pitchFamily="34" charset="0"/>
+                <a:ea typeface="맑은 고딕" pitchFamily="34" charset="-122"/>
+                <a:cs typeface="맑은 고딕" pitchFamily="34" charset="-120"/>
+              </a:rPr>
+              <a:t>명세 추출 · 선례 판정</a:t>
+            </a:r>
+            <a:endParaRPr lang="en-US" sz="980" dirty="0"/>
+          </a:p>
+          <a:p>
+            <a:pPr algn="ctr" indent="0" marL="0">
+              <a:lnSpc>
+                <a:spcPct val="130000"/>
+              </a:lnSpc>
+              <a:buNone/>
+            </a:pPr>
+            <a:r>
+              <a:rPr lang="en-US" sz="980" dirty="0">
+                <a:solidFill>
+                  <a:srgbClr val="64748B"/>
+                </a:solidFill>
+                <a:latin typeface="맑은 고딕" pitchFamily="34" charset="0"/>
+                <a:ea typeface="맑은 고딕" pitchFamily="34" charset="-122"/>
+                <a:cs typeface="맑은 고딕" pitchFamily="34" charset="-120"/>
+              </a:rPr>
+              <a:t>판정 규칙은 문서로 분리</a:t>
+            </a:r>
+            <a:endParaRPr lang="en-US" sz="980" dirty="0"/>
+          </a:p>
+        </p:txBody>
+      </p:sp>
+      <p:sp>
+        <p:nvSpPr>
+          <p:cNvPr id="28" name="Shape 26"/>
+          <p:cNvSpPr/>
+          <p:nvPr/>
+        </p:nvSpPr>
+        <p:spPr>
+          <a:xfrm>
+            <a:off x="4736592" y="1783080"/>
+            <a:ext cx="2011680" cy="1417320"/>
+          </a:xfrm>
+          <a:prstGeom prst="rect">
+            <a:avLst/>
+          </a:prstGeom>
+          <a:solidFill>
+            <a:srgbClr val="FFFFFF"/>
+          </a:solidFill>
+          <a:ln w="12700">
+            <a:solidFill>
+              <a:srgbClr val="E5E7EB"/>
+            </a:solidFill>
+            <a:prstDash val="solid"/>
+          </a:ln>
+          <a:effectLst>
+            <a:outerShdw sx="100000" sy="100000" kx="0" ky="0" algn="bl" rotWithShape="0" blurRad="50800" dist="12700" dir="8100000">
+              <a:srgbClr val="000000">
+                <a:alpha val="8000"/>
+              </a:srgbClr>
+            </a:outerShdw>
+          </a:effectLst>
+        </p:spPr>
+      </p:sp>
+      <p:sp>
+        <p:nvSpPr>
+          <p:cNvPr id="29" name="Shape 27"/>
+          <p:cNvSpPr/>
+          <p:nvPr/>
+        </p:nvSpPr>
+        <p:spPr>
+          <a:xfrm>
+            <a:off x="4736592" y="1783080"/>
+            <a:ext cx="2011680" cy="329184"/>
+          </a:xfrm>
+          <a:prstGeom prst="rect">
+            <a:avLst/>
+          </a:prstGeom>
+          <a:solidFill>
+            <a:srgbClr val="2563EB"/>
+          </a:solidFill>
+          <a:ln/>
+        </p:spPr>
+      </p:sp>
+      <p:sp>
+        <p:nvSpPr>
+          <p:cNvPr id="30" name="Text 28"/>
+          <p:cNvSpPr/>
+          <p:nvPr/>
+        </p:nvSpPr>
+        <p:spPr>
+          <a:xfrm>
+            <a:off x="4736592" y="1783080"/>
+            <a:ext cx="2011680" cy="329184"/>
+          </a:xfrm>
+          <a:prstGeom prst="rect">
+            <a:avLst/>
+          </a:prstGeom>
+          <a:noFill/>
+          <a:ln/>
+        </p:spPr>
+        <p:txBody>
+          <a:bodyPr wrap="square" lIns="0" tIns="0" rIns="0" bIns="0" rtlCol="0" anchor="ctr"/>
+          <a:lstStyle/>
+          <a:p>
+            <a:pPr algn="ctr" indent="0" marL="0">
+              <a:buNone/>
+            </a:pPr>
+            <a:r>
+              <a:rPr lang="en-US" sz="1150" b="1" dirty="0">
+                <a:solidFill>
+                  <a:srgbClr val="FFFFFF"/>
+                </a:solidFill>
+                <a:latin typeface="맑은 고딕" pitchFamily="34" charset="0"/>
+                <a:ea typeface="맑은 고딕" pitchFamily="34" charset="-122"/>
+                <a:cs typeface="맑은 고딕" pitchFamily="34" charset="-120"/>
+              </a:rPr>
+              <a:t>데이터</a:t>
+            </a:r>
+            <a:endParaRPr lang="en-US" sz="1150" dirty="0"/>
+          </a:p>
+        </p:txBody>
+      </p:sp>
+      <p:sp>
+        <p:nvSpPr>
+          <p:cNvPr id="31" name="Text 29"/>
+          <p:cNvSpPr/>
+          <p:nvPr/>
+        </p:nvSpPr>
+        <p:spPr>
+          <a:xfrm>
+            <a:off x="4846320" y="2231136"/>
+            <a:ext cx="1792224" cy="868680"/>
+          </a:xfrm>
+          <a:prstGeom prst="rect">
+            <a:avLst/>
+          </a:prstGeom>
+          <a:noFill/>
+          <a:ln/>
+        </p:spPr>
+        <p:txBody>
+          <a:bodyPr wrap="square" lIns="0" tIns="0" rIns="0" bIns="0" rtlCol="0" anchor="ctr"/>
+          <a:lstStyle/>
+          <a:p>
+            <a:pPr algn="ctr" indent="0" marL="0">
+              <a:lnSpc>
+                <a:spcPct val="130000"/>
+              </a:lnSpc>
+              <a:buNone/>
+            </a:pPr>
+            <a:r>
+              <a:rPr lang="en-US" sz="980" dirty="0">
+                <a:solidFill>
+                  <a:srgbClr val="64748B"/>
+                </a:solidFill>
+                <a:latin typeface="맑은 고딕" pitchFamily="34" charset="0"/>
+                <a:ea typeface="맑은 고딕" pitchFamily="34" charset="-122"/>
+                <a:cs typeface="맑은 고딕" pitchFamily="34" charset="-120"/>
+              </a:rPr>
+              <a:t>KDI 발간물 7,362건</a:t>
+            </a:r>
+            <a:endParaRPr lang="en-US" sz="980" dirty="0"/>
+          </a:p>
+          <a:p>
+            <a:pPr algn="ctr" indent="0" marL="0">
+              <a:lnSpc>
+                <a:spcPct val="130000"/>
+              </a:lnSpc>
+              <a:buNone/>
+            </a:pPr>
+            <a:r>
+              <a:rPr lang="en-US" sz="980" dirty="0">
+                <a:solidFill>
+                  <a:srgbClr val="64748B"/>
+                </a:solidFill>
+                <a:latin typeface="맑은 고딕" pitchFamily="34" charset="0"/>
+                <a:ea typeface="맑은 고딕" pitchFamily="34" charset="-122"/>
+                <a:cs typeface="맑은 고딕" pitchFamily="34" charset="-120"/>
+              </a:rPr>
+              <a:t>OPSI 1,015건 (로컬)</a:t>
+            </a:r>
+            <a:endParaRPr lang="en-US" sz="980" dirty="0"/>
+          </a:p>
+          <a:p>
+            <a:pPr algn="ctr" indent="0" marL="0">
+              <a:lnSpc>
+                <a:spcPct val="130000"/>
+              </a:lnSpc>
+              <a:buNone/>
+            </a:pPr>
+            <a:r>
+              <a:rPr lang="en-US" sz="980" dirty="0">
+                <a:solidFill>
+                  <a:srgbClr val="64748B"/>
+                </a:solidFill>
+                <a:latin typeface="맑은 고딕" pitchFamily="34" charset="0"/>
+                <a:ea typeface="맑은 고딕" pitchFamily="34" charset="-122"/>
+                <a:cs typeface="맑은 고딕" pitchFamily="34" charset="-120"/>
+              </a:rPr>
+              <a:t>재정 · 국회 의안 (조회)</a:t>
+            </a:r>
+            <a:endParaRPr lang="en-US" sz="980" dirty="0"/>
+          </a:p>
+        </p:txBody>
+      </p:sp>
+      <p:sp>
+        <p:nvSpPr>
+          <p:cNvPr id="32" name="Shape 30"/>
+          <p:cNvSpPr/>
+          <p:nvPr/>
+        </p:nvSpPr>
+        <p:spPr>
+          <a:xfrm>
+            <a:off x="6922008" y="1783080"/>
+            <a:ext cx="2011680" cy="1417320"/>
+          </a:xfrm>
+          <a:prstGeom prst="rect">
+            <a:avLst/>
+          </a:prstGeom>
+          <a:solidFill>
+            <a:srgbClr val="FFFFFF"/>
+          </a:solidFill>
+          <a:ln w="12700">
+            <a:solidFill>
+              <a:srgbClr val="E5E7EB"/>
+            </a:solidFill>
+            <a:prstDash val="solid"/>
+          </a:ln>
+          <a:effectLst>
+            <a:outerShdw sx="100000" sy="100000" kx="0" ky="0" algn="bl" rotWithShape="0" blurRad="50800" dist="12700" dir="8100000">
+              <a:srgbClr val="000000">
+                <a:alpha val="8000"/>
+              </a:srgbClr>
+            </a:outerShdw>
+          </a:effectLst>
+        </p:spPr>
+      </p:sp>
+      <p:sp>
+        <p:nvSpPr>
+          <p:cNvPr id="33" name="Shape 31"/>
+          <p:cNvSpPr/>
+          <p:nvPr/>
+        </p:nvSpPr>
+        <p:spPr>
+          <a:xfrm>
+            <a:off x="6922008" y="1783080"/>
+            <a:ext cx="2011680" cy="329184"/>
+          </a:xfrm>
+          <a:prstGeom prst="rect">
+            <a:avLst/>
+          </a:prstGeom>
+          <a:solidFill>
+            <a:srgbClr val="2563EB"/>
+          </a:solidFill>
+          <a:ln/>
+        </p:spPr>
+      </p:sp>
+      <p:sp>
+        <p:nvSpPr>
+          <p:cNvPr id="34" name="Text 32"/>
+          <p:cNvSpPr/>
+          <p:nvPr/>
+        </p:nvSpPr>
+        <p:spPr>
+          <a:xfrm>
+            <a:off x="6922008" y="1783080"/>
+            <a:ext cx="2011680" cy="329184"/>
+          </a:xfrm>
+          <a:prstGeom prst="rect">
+            <a:avLst/>
+          </a:prstGeom>
+          <a:noFill/>
+          <a:ln/>
+        </p:spPr>
+        <p:txBody>
+          <a:bodyPr wrap="square" lIns="0" tIns="0" rIns="0" bIns="0" rtlCol="0" anchor="ctr"/>
+          <a:lstStyle/>
+          <a:p>
+            <a:pPr algn="ctr" indent="0" marL="0">
+              <a:buNone/>
+            </a:pPr>
+            <a:r>
+              <a:rPr lang="en-US" sz="1150" b="1" dirty="0">
+                <a:solidFill>
+                  <a:srgbClr val="FFFFFF"/>
+                </a:solidFill>
+                <a:latin typeface="맑은 고딕" pitchFamily="34" charset="0"/>
+                <a:ea typeface="맑은 고딕" pitchFamily="34" charset="-122"/>
+                <a:cs typeface="맑은 고딕" pitchFamily="34" charset="-120"/>
+              </a:rPr>
+              <a:t>배포</a:t>
+            </a:r>
+            <a:endParaRPr lang="en-US" sz="1150" dirty="0"/>
+          </a:p>
+        </p:txBody>
+      </p:sp>
+      <p:sp>
+        <p:nvSpPr>
+          <p:cNvPr id="35" name="Text 33"/>
+          <p:cNvSpPr/>
+          <p:nvPr/>
+        </p:nvSpPr>
+        <p:spPr>
+          <a:xfrm>
+            <a:off x="7031736" y="2231136"/>
+            <a:ext cx="1792224" cy="868680"/>
+          </a:xfrm>
+          <a:prstGeom prst="rect">
+            <a:avLst/>
+          </a:prstGeom>
+          <a:noFill/>
+          <a:ln/>
+        </p:spPr>
+        <p:txBody>
+          <a:bodyPr wrap="square" lIns="0" tIns="0" rIns="0" bIns="0" rtlCol="0" anchor="ctr"/>
+          <a:lstStyle/>
+          <a:p>
+            <a:pPr algn="ctr" indent="0" marL="0">
+              <a:lnSpc>
+                <a:spcPct val="130000"/>
+              </a:lnSpc>
+              <a:buNone/>
+            </a:pPr>
+            <a:r>
+              <a:rPr lang="en-US" sz="980" dirty="0">
+                <a:solidFill>
+                  <a:srgbClr val="64748B"/>
+                </a:solidFill>
+                <a:latin typeface="맑은 고딕" pitchFamily="34" charset="0"/>
+                <a:ea typeface="맑은 고딕" pitchFamily="34" charset="-122"/>
+                <a:cs typeface="맑은 고딕" pitchFamily="34" charset="-120"/>
+              </a:rPr>
+              <a:t>연구용 · 공개용 2종</a:t>
+            </a:r>
+            <a:endParaRPr lang="en-US" sz="980" dirty="0"/>
+          </a:p>
+          <a:p>
+            <a:pPr algn="ctr" indent="0" marL="0">
+              <a:lnSpc>
+                <a:spcPct val="130000"/>
+              </a:lnSpc>
+              <a:buNone/>
+            </a:pPr>
+            <a:r>
+              <a:rPr lang="en-US" sz="980" dirty="0">
+                <a:solidFill>
+                  <a:srgbClr val="64748B"/>
+                </a:solidFill>
+                <a:latin typeface="맑은 고딕" pitchFamily="34" charset="0"/>
+                <a:ea typeface="맑은 고딕" pitchFamily="34" charset="-122"/>
+                <a:cs typeface="맑은 고딕" pitchFamily="34" charset="-120"/>
+              </a:rPr>
+              <a:t>초대 코드 접근 통제</a:t>
+            </a:r>
+            <a:endParaRPr lang="en-US" sz="980" dirty="0"/>
+          </a:p>
+          <a:p>
+            <a:pPr algn="ctr" indent="0" marL="0">
+              <a:lnSpc>
+                <a:spcPct val="130000"/>
+              </a:lnSpc>
+              <a:buNone/>
+            </a:pPr>
+            <a:r>
+              <a:rPr lang="en-US" sz="980" dirty="0">
+                <a:solidFill>
+                  <a:srgbClr val="64748B"/>
+                </a:solidFill>
+                <a:latin typeface="맑은 고딕" pitchFamily="34" charset="0"/>
+                <a:ea typeface="맑은 고딕" pitchFamily="34" charset="-122"/>
+                <a:cs typeface="맑은 고딕" pitchFamily="34" charset="-120"/>
+              </a:rPr>
+              <a:t>키는 서버에 미보관</a:t>
+            </a:r>
+            <a:endParaRPr lang="en-US" sz="980" dirty="0"/>
+          </a:p>
+        </p:txBody>
+      </p:sp>
+      <p:sp>
+        <p:nvSpPr>
+          <p:cNvPr id="36" name="Shape 34"/>
+          <p:cNvSpPr/>
+          <p:nvPr/>
+        </p:nvSpPr>
+        <p:spPr>
+          <a:xfrm>
+            <a:off x="365760" y="3337560"/>
+            <a:ext cx="8412480" cy="1572768"/>
+          </a:xfrm>
+          <a:prstGeom prst="rect">
+            <a:avLst/>
+          </a:prstGeom>
+          <a:solidFill>
+            <a:srgbClr val="F8FAFC"/>
+          </a:solidFill>
+          <a:ln w="12700">
+            <a:solidFill>
+              <a:srgbClr val="E5E7EB"/>
+            </a:solidFill>
+            <a:prstDash val="solid"/>
+          </a:ln>
+        </p:spPr>
+      </p:sp>
+      <p:sp>
+        <p:nvSpPr>
+          <p:cNvPr id="37" name="Text 35"/>
+          <p:cNvSpPr/>
+          <p:nvPr/>
+        </p:nvSpPr>
+        <p:spPr>
+          <a:xfrm>
+            <a:off x="566928" y="3438144"/>
+            <a:ext cx="3657600" cy="256032"/>
+          </a:xfrm>
+          <a:prstGeom prst="rect">
+            <a:avLst/>
+          </a:prstGeom>
+          <a:noFill/>
+          <a:ln/>
+        </p:spPr>
+        <p:txBody>
+          <a:bodyPr wrap="square" lIns="0" tIns="0" rIns="0" bIns="0" rtlCol="0" anchor="ctr"/>
+          <a:lstStyle/>
+          <a:p>
+            <a:pPr indent="0" marL="0">
+              <a:buNone/>
+            </a:pPr>
+            <a:r>
+              <a:rPr lang="en-US" sz="1250" b="1" dirty="0">
+                <a:solidFill>
                   <a:srgbClr val="2563EB"/>
                 </a:solidFill>
                 <a:latin typeface="맑은 고딕" pitchFamily="34" charset="0"/>
                 <a:ea typeface="맑은 고딕" pitchFamily="34" charset="-122"/>
                 <a:cs typeface="맑은 고딕" pitchFamily="34" charset="-120"/>
               </a:rPr>
-              <a:t>월 1,000건을 표준 모델로 처리할 경우 약 29만~36만 원 (API 비용만)</a:t>
-            </a:r>
-            <a:endParaRPr lang="en-US" sz="1150" dirty="0"/>
-          </a:p>
-        </p:txBody>
-      </p:sp>
-      <p:sp>
-        <p:nvSpPr>
-          <p:cNvPr id="73" name="Text 71"/>
-          <p:cNvSpPr/>
-          <p:nvPr/>
-        </p:nvSpPr>
-        <p:spPr>
-          <a:xfrm>
-            <a:off x="457200" y="4645152"/>
-            <a:ext cx="8229600" cy="237744"/>
-          </a:xfrm>
-          <a:prstGeom prst="rect">
-            <a:avLst/>
-          </a:prstGeom>
-          <a:noFill/>
-          <a:ln/>
-        </p:spPr>
-        <p:txBody>
-          <a:bodyPr wrap="square" lIns="0" tIns="0" rIns="0" bIns="0" rtlCol="0" anchor="ctr"/>
-          <a:lstStyle/>
-          <a:p>
-            <a:pPr algn="ctr" indent="0" marL="0">
-              <a:buNone/>
-            </a:pPr>
-            <a:r>
-              <a:rPr lang="en-US" sz="950" dirty="0">
+              <a:t>데이터 확보에서 지킨 원칙</a:t>
+            </a:r>
+            <a:endParaRPr lang="en-US" sz="1250" dirty="0"/>
+          </a:p>
+        </p:txBody>
+      </p:sp>
+      <p:sp>
+        <p:nvSpPr>
+          <p:cNvPr id="38" name="Text 36"/>
+          <p:cNvSpPr/>
+          <p:nvPr/>
+        </p:nvSpPr>
+        <p:spPr>
+          <a:xfrm>
+            <a:off x="603504" y="3776472"/>
+            <a:ext cx="137160" cy="310896"/>
+          </a:xfrm>
+          <a:prstGeom prst="rect">
+            <a:avLst/>
+          </a:prstGeom>
+          <a:noFill/>
+          <a:ln/>
+        </p:spPr>
+        <p:txBody>
+          <a:bodyPr wrap="square" lIns="0" tIns="0" rIns="0" bIns="0" rtlCol="0" anchor="ctr"/>
+          <a:lstStyle/>
+          <a:p>
+            <a:pPr indent="0" marL="0">
+              <a:buNone/>
+            </a:pPr>
+            <a:r>
+              <a:rPr lang="en-US" sz="1100" dirty="0">
+                <a:solidFill>
+                  <a:srgbClr val="2563EB"/>
+                </a:solidFill>
+                <a:latin typeface="맑은 고딕" pitchFamily="34" charset="0"/>
+                <a:ea typeface="맑은 고딕" pitchFamily="34" charset="-122"/>
+                <a:cs typeface="맑은 고딕" pitchFamily="34" charset="-120"/>
+              </a:rPr>
+              <a:t>•</a:t>
+            </a:r>
+            <a:endParaRPr lang="en-US" sz="1100" dirty="0"/>
+          </a:p>
+        </p:txBody>
+      </p:sp>
+      <p:sp>
+        <p:nvSpPr>
+          <p:cNvPr id="39" name="Text 37"/>
+          <p:cNvSpPr/>
+          <p:nvPr/>
+        </p:nvSpPr>
+        <p:spPr>
+          <a:xfrm>
+            <a:off x="768096" y="3776472"/>
+            <a:ext cx="2651760" cy="310896"/>
+          </a:xfrm>
+          <a:prstGeom prst="rect">
+            <a:avLst/>
+          </a:prstGeom>
+          <a:noFill/>
+          <a:ln/>
+        </p:spPr>
+        <p:txBody>
+          <a:bodyPr wrap="square" lIns="0" tIns="0" rIns="0" bIns="0" rtlCol="0" anchor="ctr"/>
+          <a:lstStyle/>
+          <a:p>
+            <a:pPr indent="0" marL="0">
+              <a:buNone/>
+            </a:pPr>
+            <a:r>
+              <a:rPr lang="en-US" sz="1080" b="1" dirty="0">
+                <a:solidFill>
+                  <a:srgbClr val="1E293B"/>
+                </a:solidFill>
+                <a:latin typeface="맑은 고딕" pitchFamily="34" charset="0"/>
+                <a:ea typeface="맑은 고딕" pitchFamily="34" charset="-122"/>
+                <a:cs typeface="맑은 고딕" pitchFamily="34" charset="-120"/>
+              </a:rPr>
+              <a:t>불안정한 소스는 끈다</a:t>
+            </a:r>
+            <a:endParaRPr lang="en-US" sz="1080" dirty="0"/>
+          </a:p>
+        </p:txBody>
+      </p:sp>
+      <p:sp>
+        <p:nvSpPr>
+          <p:cNvPr id="40" name="Text 38"/>
+          <p:cNvSpPr/>
+          <p:nvPr/>
+        </p:nvSpPr>
+        <p:spPr>
+          <a:xfrm>
+            <a:off x="3474720" y="3776472"/>
+            <a:ext cx="5166360" cy="310896"/>
+          </a:xfrm>
+          <a:prstGeom prst="rect">
+            <a:avLst/>
+          </a:prstGeom>
+          <a:noFill/>
+          <a:ln/>
+        </p:spPr>
+        <p:txBody>
+          <a:bodyPr wrap="square" lIns="0" tIns="0" rIns="0" bIns="0" rtlCol="0" anchor="ctr"/>
+          <a:lstStyle/>
+          <a:p>
+            <a:pPr indent="0" marL="0">
+              <a:buNone/>
+            </a:pPr>
+            <a:r>
+              <a:rPr lang="en-US" sz="1050" dirty="0">
                 <a:solidFill>
                   <a:srgbClr val="64748B"/>
                 </a:solidFill>
@@ -33097,9 +32406,243 @@
                 <a:ea typeface="맑은 고딕" pitchFamily="34" charset="-122"/>
                 <a:cs typeface="맑은 고딕" pitchFamily="34" charset="-120"/>
               </a:rPr>
-              <a:t>※ 캐싱 미적용 시 입력 토큰이 전액 과금되어 실제 비용은 이보다 큼 · 인건비·서버·코퍼스 갱신 비용 제외</a:t>
-            </a:r>
-            <a:endParaRPr lang="en-US" sz="950" dirty="0"/>
+              <a:t>외부 연구정보 API가 응답을 보장하지 못해 중단하고, 로컬 코퍼스로 대체</a:t>
+            </a:r>
+            <a:endParaRPr lang="en-US" sz="1050" dirty="0"/>
+          </a:p>
+        </p:txBody>
+      </p:sp>
+      <p:sp>
+        <p:nvSpPr>
+          <p:cNvPr id="41" name="Text 39"/>
+          <p:cNvSpPr/>
+          <p:nvPr/>
+        </p:nvSpPr>
+        <p:spPr>
+          <a:xfrm>
+            <a:off x="603504" y="4142232"/>
+            <a:ext cx="137160" cy="310896"/>
+          </a:xfrm>
+          <a:prstGeom prst="rect">
+            <a:avLst/>
+          </a:prstGeom>
+          <a:noFill/>
+          <a:ln/>
+        </p:spPr>
+        <p:txBody>
+          <a:bodyPr wrap="square" lIns="0" tIns="0" rIns="0" bIns="0" rtlCol="0" anchor="ctr"/>
+          <a:lstStyle/>
+          <a:p>
+            <a:pPr indent="0" marL="0">
+              <a:buNone/>
+            </a:pPr>
+            <a:r>
+              <a:rPr lang="en-US" sz="1100" dirty="0">
+                <a:solidFill>
+                  <a:srgbClr val="2563EB"/>
+                </a:solidFill>
+                <a:latin typeface="맑은 고딕" pitchFamily="34" charset="0"/>
+                <a:ea typeface="맑은 고딕" pitchFamily="34" charset="-122"/>
+                <a:cs typeface="맑은 고딕" pitchFamily="34" charset="-120"/>
+              </a:rPr>
+              <a:t>•</a:t>
+            </a:r>
+            <a:endParaRPr lang="en-US" sz="1100" dirty="0"/>
+          </a:p>
+        </p:txBody>
+      </p:sp>
+      <p:sp>
+        <p:nvSpPr>
+          <p:cNvPr id="42" name="Text 40"/>
+          <p:cNvSpPr/>
+          <p:nvPr/>
+        </p:nvSpPr>
+        <p:spPr>
+          <a:xfrm>
+            <a:off x="768096" y="4142232"/>
+            <a:ext cx="2651760" cy="310896"/>
+          </a:xfrm>
+          <a:prstGeom prst="rect">
+            <a:avLst/>
+          </a:prstGeom>
+          <a:noFill/>
+          <a:ln/>
+        </p:spPr>
+        <p:txBody>
+          <a:bodyPr wrap="square" lIns="0" tIns="0" rIns="0" bIns="0" rtlCol="0" anchor="ctr"/>
+          <a:lstStyle/>
+          <a:p>
+            <a:pPr indent="0" marL="0">
+              <a:buNone/>
+            </a:pPr>
+            <a:r>
+              <a:rPr lang="en-US" sz="1080" b="1" dirty="0">
+                <a:solidFill>
+                  <a:srgbClr val="1E293B"/>
+                </a:solidFill>
+                <a:latin typeface="맑은 고딕" pitchFamily="34" charset="0"/>
+                <a:ea typeface="맑은 고딕" pitchFamily="34" charset="-122"/>
+                <a:cs typeface="맑은 고딕" pitchFamily="34" charset="-120"/>
+              </a:rPr>
+              <a:t>우회하지 않는다</a:t>
+            </a:r>
+            <a:endParaRPr lang="en-US" sz="1080" dirty="0"/>
+          </a:p>
+        </p:txBody>
+      </p:sp>
+      <p:sp>
+        <p:nvSpPr>
+          <p:cNvPr id="43" name="Text 41"/>
+          <p:cNvSpPr/>
+          <p:nvPr/>
+        </p:nvSpPr>
+        <p:spPr>
+          <a:xfrm>
+            <a:off x="3474720" y="4142232"/>
+            <a:ext cx="5166360" cy="310896"/>
+          </a:xfrm>
+          <a:prstGeom prst="rect">
+            <a:avLst/>
+          </a:prstGeom>
+          <a:noFill/>
+          <a:ln/>
+        </p:spPr>
+        <p:txBody>
+          <a:bodyPr wrap="square" lIns="0" tIns="0" rIns="0" bIns="0" rtlCol="0" anchor="ctr"/>
+          <a:lstStyle/>
+          <a:p>
+            <a:pPr indent="0" marL="0">
+              <a:buNone/>
+            </a:pPr>
+            <a:r>
+              <a:rPr lang="en-US" sz="1050" dirty="0">
+                <a:solidFill>
+                  <a:srgbClr val="64748B"/>
+                </a:solidFill>
+                <a:latin typeface="맑은 고딕" pitchFamily="34" charset="0"/>
+                <a:ea typeface="맑은 고딕" pitchFamily="34" charset="-122"/>
+                <a:cs typeface="맑은 고딕" pitchFamily="34" charset="-120"/>
+              </a:rPr>
+              <a:t>해외 사이트의 자동 수집 차단을 기술적으로 우회하지 않고, 공개 자료를 정리해 구축</a:t>
+            </a:r>
+            <a:endParaRPr lang="en-US" sz="1050" dirty="0"/>
+          </a:p>
+        </p:txBody>
+      </p:sp>
+      <p:sp>
+        <p:nvSpPr>
+          <p:cNvPr id="44" name="Text 42"/>
+          <p:cNvSpPr/>
+          <p:nvPr/>
+        </p:nvSpPr>
+        <p:spPr>
+          <a:xfrm>
+            <a:off x="603504" y="4507992"/>
+            <a:ext cx="137160" cy="310896"/>
+          </a:xfrm>
+          <a:prstGeom prst="rect">
+            <a:avLst/>
+          </a:prstGeom>
+          <a:noFill/>
+          <a:ln/>
+        </p:spPr>
+        <p:txBody>
+          <a:bodyPr wrap="square" lIns="0" tIns="0" rIns="0" bIns="0" rtlCol="0" anchor="ctr"/>
+          <a:lstStyle/>
+          <a:p>
+            <a:pPr indent="0" marL="0">
+              <a:buNone/>
+            </a:pPr>
+            <a:r>
+              <a:rPr lang="en-US" sz="1100" dirty="0">
+                <a:solidFill>
+                  <a:srgbClr val="2563EB"/>
+                </a:solidFill>
+                <a:latin typeface="맑은 고딕" pitchFamily="34" charset="0"/>
+                <a:ea typeface="맑은 고딕" pitchFamily="34" charset="-122"/>
+                <a:cs typeface="맑은 고딕" pitchFamily="34" charset="-120"/>
+              </a:rPr>
+              <a:t>•</a:t>
+            </a:r>
+            <a:endParaRPr lang="en-US" sz="1100" dirty="0"/>
+          </a:p>
+        </p:txBody>
+      </p:sp>
+      <p:sp>
+        <p:nvSpPr>
+          <p:cNvPr id="45" name="Text 43"/>
+          <p:cNvSpPr/>
+          <p:nvPr/>
+        </p:nvSpPr>
+        <p:spPr>
+          <a:xfrm>
+            <a:off x="768096" y="4507992"/>
+            <a:ext cx="2651760" cy="310896"/>
+          </a:xfrm>
+          <a:prstGeom prst="rect">
+            <a:avLst/>
+          </a:prstGeom>
+          <a:noFill/>
+          <a:ln/>
+        </p:spPr>
+        <p:txBody>
+          <a:bodyPr wrap="square" lIns="0" tIns="0" rIns="0" bIns="0" rtlCol="0" anchor="ctr"/>
+          <a:lstStyle/>
+          <a:p>
+            <a:pPr indent="0" marL="0">
+              <a:buNone/>
+            </a:pPr>
+            <a:r>
+              <a:rPr lang="en-US" sz="1080" b="1" dirty="0">
+                <a:solidFill>
+                  <a:srgbClr val="1E293B"/>
+                </a:solidFill>
+                <a:latin typeface="맑은 고딕" pitchFamily="34" charset="0"/>
+                <a:ea typeface="맑은 고딕" pitchFamily="34" charset="-122"/>
+                <a:cs typeface="맑은 고딕" pitchFamily="34" charset="-120"/>
+              </a:rPr>
+              <a:t>외국 상용 서비스에 의존하지 않는다</a:t>
+            </a:r>
+            <a:endParaRPr lang="en-US" sz="1080" dirty="0"/>
+          </a:p>
+        </p:txBody>
+      </p:sp>
+      <p:sp>
+        <p:nvSpPr>
+          <p:cNvPr id="46" name="Text 44"/>
+          <p:cNvSpPr/>
+          <p:nvPr/>
+        </p:nvSpPr>
+        <p:spPr>
+          <a:xfrm>
+            <a:off x="3474720" y="4507992"/>
+            <a:ext cx="5166360" cy="310896"/>
+          </a:xfrm>
+          <a:prstGeom prst="rect">
+            <a:avLst/>
+          </a:prstGeom>
+          <a:noFill/>
+          <a:ln/>
+        </p:spPr>
+        <p:txBody>
+          <a:bodyPr wrap="square" lIns="0" tIns="0" rIns="0" bIns="0" rtlCol="0" anchor="ctr"/>
+          <a:lstStyle/>
+          <a:p>
+            <a:pPr indent="0" marL="0">
+              <a:buNone/>
+            </a:pPr>
+            <a:r>
+              <a:rPr lang="en-US" sz="1050" dirty="0">
+                <a:solidFill>
+                  <a:srgbClr val="64748B"/>
+                </a:solidFill>
+                <a:latin typeface="맑은 고딕" pitchFamily="34" charset="0"/>
+                <a:ea typeface="맑은 고딕" pitchFamily="34" charset="-122"/>
+                <a:cs typeface="맑은 고딕" pitchFamily="34" charset="-120"/>
+              </a:rPr>
+              <a:t>유료 해외 정책DB 대신 OECD 공개 사례로 코퍼스를 자체 확보</a:t>
+            </a:r>
+            <a:endParaRPr lang="en-US" sz="1050" dirty="0"/>
           </a:p>
         </p:txBody>
       </p:sp>
@@ -33220,7 +32763,2354 @@
                 <a:ea typeface="맑은 고딕" pitchFamily="34" charset="-122"/>
                 <a:cs typeface="맑은 고딕" pitchFamily="34" charset="-120"/>
               </a:rPr>
-              <a:t>27 / 28</a:t>
+              <a:t>27 / 29</a:t>
+            </a:r>
+            <a:endParaRPr lang="en-US" sz="1100" dirty="0"/>
+          </a:p>
+        </p:txBody>
+      </p:sp>
+      <p:sp>
+        <p:nvSpPr>
+          <p:cNvPr id="5" name="Shape 3"/>
+          <p:cNvSpPr/>
+          <p:nvPr/>
+        </p:nvSpPr>
+        <p:spPr>
+          <a:xfrm>
+            <a:off x="0" y="502920"/>
+            <a:ext cx="1524000" cy="320040"/>
+          </a:xfrm>
+          <a:prstGeom prst="rect">
+            <a:avLst/>
+          </a:prstGeom>
+          <a:solidFill>
+            <a:srgbClr val="F1F5F9"/>
+          </a:solidFill>
+          <a:ln w="6350">
+            <a:solidFill>
+              <a:srgbClr val="E5E7EB"/>
+            </a:solidFill>
+            <a:prstDash val="solid"/>
+          </a:ln>
+        </p:spPr>
+      </p:sp>
+      <p:sp>
+        <p:nvSpPr>
+          <p:cNvPr id="6" name="Text 4"/>
+          <p:cNvSpPr/>
+          <p:nvPr/>
+        </p:nvSpPr>
+        <p:spPr>
+          <a:xfrm>
+            <a:off x="0" y="502920"/>
+            <a:ext cx="1524000" cy="320040"/>
+          </a:xfrm>
+          <a:prstGeom prst="rect">
+            <a:avLst/>
+          </a:prstGeom>
+          <a:noFill/>
+          <a:ln/>
+        </p:spPr>
+        <p:txBody>
+          <a:bodyPr wrap="square" lIns="0" tIns="0" rIns="0" bIns="0" rtlCol="0" anchor="ctr"/>
+          <a:lstStyle/>
+          <a:p>
+            <a:pPr algn="ctr" indent="0" marL="0">
+              <a:buNone/>
+            </a:pPr>
+            <a:r>
+              <a:rPr lang="en-US" sz="950" dirty="0">
+                <a:solidFill>
+                  <a:srgbClr val="64748B"/>
+                </a:solidFill>
+                <a:latin typeface="맑은 고딕" pitchFamily="34" charset="0"/>
+                <a:ea typeface="맑은 고딕" pitchFamily="34" charset="-122"/>
+                <a:cs typeface="맑은 고딕" pitchFamily="34" charset="-120"/>
+              </a:rPr>
+              <a:t>개요</a:t>
+            </a:r>
+            <a:endParaRPr lang="en-US" sz="950" dirty="0"/>
+          </a:p>
+        </p:txBody>
+      </p:sp>
+      <p:sp>
+        <p:nvSpPr>
+          <p:cNvPr id="7" name="Shape 5"/>
+          <p:cNvSpPr/>
+          <p:nvPr/>
+        </p:nvSpPr>
+        <p:spPr>
+          <a:xfrm>
+            <a:off x="1524000" y="502920"/>
+            <a:ext cx="1524000" cy="320040"/>
+          </a:xfrm>
+          <a:prstGeom prst="rect">
+            <a:avLst/>
+          </a:prstGeom>
+          <a:solidFill>
+            <a:srgbClr val="F1F5F9"/>
+          </a:solidFill>
+          <a:ln w="6350">
+            <a:solidFill>
+              <a:srgbClr val="E5E7EB"/>
+            </a:solidFill>
+            <a:prstDash val="solid"/>
+          </a:ln>
+        </p:spPr>
+      </p:sp>
+      <p:sp>
+        <p:nvSpPr>
+          <p:cNvPr id="8" name="Text 6"/>
+          <p:cNvSpPr/>
+          <p:nvPr/>
+        </p:nvSpPr>
+        <p:spPr>
+          <a:xfrm>
+            <a:off x="1524000" y="502920"/>
+            <a:ext cx="1524000" cy="320040"/>
+          </a:xfrm>
+          <a:prstGeom prst="rect">
+            <a:avLst/>
+          </a:prstGeom>
+          <a:noFill/>
+          <a:ln/>
+        </p:spPr>
+        <p:txBody>
+          <a:bodyPr wrap="square" lIns="0" tIns="0" rIns="0" bIns="0" rtlCol="0" anchor="ctr"/>
+          <a:lstStyle/>
+          <a:p>
+            <a:pPr algn="ctr" indent="0" marL="0">
+              <a:buNone/>
+            </a:pPr>
+            <a:r>
+              <a:rPr lang="en-US" sz="950" dirty="0">
+                <a:solidFill>
+                  <a:srgbClr val="64748B"/>
+                </a:solidFill>
+                <a:latin typeface="맑은 고딕" pitchFamily="34" charset="0"/>
+                <a:ea typeface="맑은 고딕" pitchFamily="34" charset="-122"/>
+                <a:cs typeface="맑은 고딕" pitchFamily="34" charset="-120"/>
+              </a:rPr>
+              <a:t>필요성</a:t>
+            </a:r>
+            <a:endParaRPr lang="en-US" sz="950" dirty="0"/>
+          </a:p>
+        </p:txBody>
+      </p:sp>
+      <p:sp>
+        <p:nvSpPr>
+          <p:cNvPr id="9" name="Shape 7"/>
+          <p:cNvSpPr/>
+          <p:nvPr/>
+        </p:nvSpPr>
+        <p:spPr>
+          <a:xfrm>
+            <a:off x="3048000" y="502920"/>
+            <a:ext cx="1524000" cy="320040"/>
+          </a:xfrm>
+          <a:prstGeom prst="rect">
+            <a:avLst/>
+          </a:prstGeom>
+          <a:solidFill>
+            <a:srgbClr val="F1F5F9"/>
+          </a:solidFill>
+          <a:ln w="6350">
+            <a:solidFill>
+              <a:srgbClr val="E5E7EB"/>
+            </a:solidFill>
+            <a:prstDash val="solid"/>
+          </a:ln>
+        </p:spPr>
+      </p:sp>
+      <p:sp>
+        <p:nvSpPr>
+          <p:cNvPr id="10" name="Text 8"/>
+          <p:cNvSpPr/>
+          <p:nvPr/>
+        </p:nvSpPr>
+        <p:spPr>
+          <a:xfrm>
+            <a:off x="3048000" y="502920"/>
+            <a:ext cx="1524000" cy="320040"/>
+          </a:xfrm>
+          <a:prstGeom prst="rect">
+            <a:avLst/>
+          </a:prstGeom>
+          <a:noFill/>
+          <a:ln/>
+        </p:spPr>
+        <p:txBody>
+          <a:bodyPr wrap="square" lIns="0" tIns="0" rIns="0" bIns="0" rtlCol="0" anchor="ctr"/>
+          <a:lstStyle/>
+          <a:p>
+            <a:pPr algn="ctr" indent="0" marL="0">
+              <a:buNone/>
+            </a:pPr>
+            <a:r>
+              <a:rPr lang="en-US" sz="950" dirty="0">
+                <a:solidFill>
+                  <a:srgbClr val="64748B"/>
+                </a:solidFill>
+                <a:latin typeface="맑은 고딕" pitchFamily="34" charset="0"/>
+                <a:ea typeface="맑은 고딕" pitchFamily="34" charset="-122"/>
+                <a:cs typeface="맑은 고딕" pitchFamily="34" charset="-120"/>
+              </a:rPr>
+              <a:t>시스템</a:t>
+            </a:r>
+            <a:endParaRPr lang="en-US" sz="950" dirty="0"/>
+          </a:p>
+        </p:txBody>
+      </p:sp>
+      <p:sp>
+        <p:nvSpPr>
+          <p:cNvPr id="11" name="Shape 9"/>
+          <p:cNvSpPr/>
+          <p:nvPr/>
+        </p:nvSpPr>
+        <p:spPr>
+          <a:xfrm>
+            <a:off x="4572000" y="502920"/>
+            <a:ext cx="1524000" cy="320040"/>
+          </a:xfrm>
+          <a:prstGeom prst="rect">
+            <a:avLst/>
+          </a:prstGeom>
+          <a:solidFill>
+            <a:srgbClr val="F1F5F9"/>
+          </a:solidFill>
+          <a:ln w="6350">
+            <a:solidFill>
+              <a:srgbClr val="E5E7EB"/>
+            </a:solidFill>
+            <a:prstDash val="solid"/>
+          </a:ln>
+        </p:spPr>
+      </p:sp>
+      <p:sp>
+        <p:nvSpPr>
+          <p:cNvPr id="12" name="Text 10"/>
+          <p:cNvSpPr/>
+          <p:nvPr/>
+        </p:nvSpPr>
+        <p:spPr>
+          <a:xfrm>
+            <a:off x="4572000" y="502920"/>
+            <a:ext cx="1524000" cy="320040"/>
+          </a:xfrm>
+          <a:prstGeom prst="rect">
+            <a:avLst/>
+          </a:prstGeom>
+          <a:noFill/>
+          <a:ln/>
+        </p:spPr>
+        <p:txBody>
+          <a:bodyPr wrap="square" lIns="0" tIns="0" rIns="0" bIns="0" rtlCol="0" anchor="ctr"/>
+          <a:lstStyle/>
+          <a:p>
+            <a:pPr algn="ctr" indent="0" marL="0">
+              <a:buNone/>
+            </a:pPr>
+            <a:r>
+              <a:rPr lang="en-US" sz="950" dirty="0">
+                <a:solidFill>
+                  <a:srgbClr val="64748B"/>
+                </a:solidFill>
+                <a:latin typeface="맑은 고딕" pitchFamily="34" charset="0"/>
+                <a:ea typeface="맑은 고딕" pitchFamily="34" charset="-122"/>
+                <a:cs typeface="맑은 고딕" pitchFamily="34" charset="-120"/>
+              </a:rPr>
+              <a:t>대화·채점</a:t>
+            </a:r>
+            <a:endParaRPr lang="en-US" sz="950" dirty="0"/>
+          </a:p>
+        </p:txBody>
+      </p:sp>
+      <p:sp>
+        <p:nvSpPr>
+          <p:cNvPr id="13" name="Shape 11"/>
+          <p:cNvSpPr/>
+          <p:nvPr/>
+        </p:nvSpPr>
+        <p:spPr>
+          <a:xfrm>
+            <a:off x="6096000" y="502920"/>
+            <a:ext cx="1524000" cy="320040"/>
+          </a:xfrm>
+          <a:prstGeom prst="rect">
+            <a:avLst/>
+          </a:prstGeom>
+          <a:solidFill>
+            <a:srgbClr val="F1F5F9"/>
+          </a:solidFill>
+          <a:ln w="6350">
+            <a:solidFill>
+              <a:srgbClr val="E5E7EB"/>
+            </a:solidFill>
+            <a:prstDash val="solid"/>
+          </a:ln>
+        </p:spPr>
+      </p:sp>
+      <p:sp>
+        <p:nvSpPr>
+          <p:cNvPr id="14" name="Text 12"/>
+          <p:cNvSpPr/>
+          <p:nvPr/>
+        </p:nvSpPr>
+        <p:spPr>
+          <a:xfrm>
+            <a:off x="6096000" y="502920"/>
+            <a:ext cx="1524000" cy="320040"/>
+          </a:xfrm>
+          <a:prstGeom prst="rect">
+            <a:avLst/>
+          </a:prstGeom>
+          <a:noFill/>
+          <a:ln/>
+        </p:spPr>
+        <p:txBody>
+          <a:bodyPr wrap="square" lIns="0" tIns="0" rIns="0" bIns="0" rtlCol="0" anchor="ctr"/>
+          <a:lstStyle/>
+          <a:p>
+            <a:pPr algn="ctr" indent="0" marL="0">
+              <a:buNone/>
+            </a:pPr>
+            <a:r>
+              <a:rPr lang="en-US" sz="950" dirty="0">
+                <a:solidFill>
+                  <a:srgbClr val="64748B"/>
+                </a:solidFill>
+                <a:latin typeface="맑은 고딕" pitchFamily="34" charset="0"/>
+                <a:ea typeface="맑은 고딕" pitchFamily="34" charset="-122"/>
+                <a:cs typeface="맑은 고딕" pitchFamily="34" charset="-120"/>
+              </a:rPr>
+              <a:t>검증 통로</a:t>
+            </a:r>
+            <a:endParaRPr lang="en-US" sz="950" dirty="0"/>
+          </a:p>
+        </p:txBody>
+      </p:sp>
+      <p:sp>
+        <p:nvSpPr>
+          <p:cNvPr id="15" name="Shape 13"/>
+          <p:cNvSpPr/>
+          <p:nvPr/>
+        </p:nvSpPr>
+        <p:spPr>
+          <a:xfrm>
+            <a:off x="7620000" y="502920"/>
+            <a:ext cx="1524000" cy="320040"/>
+          </a:xfrm>
+          <a:prstGeom prst="rect">
+            <a:avLst/>
+          </a:prstGeom>
+          <a:solidFill>
+            <a:srgbClr val="2563EB"/>
+          </a:solidFill>
+          <a:ln w="6350">
+            <a:solidFill>
+              <a:srgbClr val="E5E7EB"/>
+            </a:solidFill>
+            <a:prstDash val="solid"/>
+          </a:ln>
+        </p:spPr>
+      </p:sp>
+      <p:sp>
+        <p:nvSpPr>
+          <p:cNvPr id="16" name="Text 14"/>
+          <p:cNvSpPr/>
+          <p:nvPr/>
+        </p:nvSpPr>
+        <p:spPr>
+          <a:xfrm>
+            <a:off x="7620000" y="502920"/>
+            <a:ext cx="1524000" cy="320040"/>
+          </a:xfrm>
+          <a:prstGeom prst="rect">
+            <a:avLst/>
+          </a:prstGeom>
+          <a:noFill/>
+          <a:ln/>
+        </p:spPr>
+        <p:txBody>
+          <a:bodyPr wrap="square" lIns="0" tIns="0" rIns="0" bIns="0" rtlCol="0" anchor="ctr"/>
+          <a:lstStyle/>
+          <a:p>
+            <a:pPr algn="ctr" indent="0" marL="0">
+              <a:buNone/>
+            </a:pPr>
+            <a:r>
+              <a:rPr lang="en-US" sz="950" dirty="0">
+                <a:solidFill>
+                  <a:srgbClr val="FFFFFF"/>
+                </a:solidFill>
+                <a:latin typeface="맑은 고딕" pitchFamily="34" charset="0"/>
+                <a:ea typeface="맑은 고딕" pitchFamily="34" charset="-122"/>
+                <a:cs typeface="맑은 고딕" pitchFamily="34" charset="-120"/>
+              </a:rPr>
+              <a:t>신뢰성·운영</a:t>
+            </a:r>
+            <a:endParaRPr lang="en-US" sz="950" dirty="0"/>
+          </a:p>
+        </p:txBody>
+      </p:sp>
+      <p:sp>
+        <p:nvSpPr>
+          <p:cNvPr id="17" name="Text 15"/>
+          <p:cNvSpPr/>
+          <p:nvPr/>
+        </p:nvSpPr>
+        <p:spPr>
+          <a:xfrm>
+            <a:off x="365760" y="987552"/>
+            <a:ext cx="8412480" cy="237744"/>
+          </a:xfrm>
+          <a:prstGeom prst="rect">
+            <a:avLst/>
+          </a:prstGeom>
+          <a:noFill/>
+          <a:ln/>
+        </p:spPr>
+        <p:txBody>
+          <a:bodyPr wrap="square" lIns="0" tIns="0" rIns="0" bIns="0" rtlCol="0" anchor="ctr"/>
+          <a:lstStyle/>
+          <a:p>
+            <a:pPr indent="0" marL="0">
+              <a:buNone/>
+            </a:pPr>
+            <a:r>
+              <a:rPr lang="en-US" sz="1200" dirty="0">
+                <a:solidFill>
+                  <a:srgbClr val="2563EB"/>
+                </a:solidFill>
+                <a:latin typeface="맑은 고딕" pitchFamily="34" charset="0"/>
+                <a:ea typeface="맑은 고딕" pitchFamily="34" charset="-122"/>
+                <a:cs typeface="맑은 고딕" pitchFamily="34" charset="-120"/>
+              </a:rPr>
+              <a:t>06. 구축과 운영</a:t>
+            </a:r>
+            <a:endParaRPr lang="en-US" sz="1200" dirty="0"/>
+          </a:p>
+        </p:txBody>
+      </p:sp>
+      <p:sp>
+        <p:nvSpPr>
+          <p:cNvPr id="18" name="Shape 16"/>
+          <p:cNvSpPr/>
+          <p:nvPr/>
+        </p:nvSpPr>
+        <p:spPr>
+          <a:xfrm>
+            <a:off x="365760" y="1243584"/>
+            <a:ext cx="54864" cy="310896"/>
+          </a:xfrm>
+          <a:prstGeom prst="rect">
+            <a:avLst/>
+          </a:prstGeom>
+          <a:solidFill>
+            <a:srgbClr val="2563EB"/>
+          </a:solidFill>
+          <a:ln/>
+        </p:spPr>
+      </p:sp>
+      <p:sp>
+        <p:nvSpPr>
+          <p:cNvPr id="19" name="Text 17"/>
+          <p:cNvSpPr/>
+          <p:nvPr/>
+        </p:nvSpPr>
+        <p:spPr>
+          <a:xfrm>
+            <a:off x="512064" y="1207008"/>
+            <a:ext cx="8229600" cy="384048"/>
+          </a:xfrm>
+          <a:prstGeom prst="rect">
+            <a:avLst/>
+          </a:prstGeom>
+          <a:noFill/>
+          <a:ln/>
+        </p:spPr>
+        <p:txBody>
+          <a:bodyPr wrap="square" lIns="0" tIns="0" rIns="0" bIns="0" rtlCol="0" anchor="ctr"/>
+          <a:lstStyle/>
+          <a:p>
+            <a:pPr indent="0" marL="0">
+              <a:buNone/>
+            </a:pPr>
+            <a:r>
+              <a:rPr lang="en-US" sz="2100" b="1" dirty="0">
+                <a:solidFill>
+                  <a:srgbClr val="1E293B"/>
+                </a:solidFill>
+                <a:latin typeface="맑은 고딕" pitchFamily="34" charset="0"/>
+                <a:ea typeface="맑은 고딕" pitchFamily="34" charset="-122"/>
+                <a:cs typeface="맑은 고딕" pitchFamily="34" charset="-120"/>
+              </a:rPr>
+              <a:t>운영 비용 — 월 처리량별 추정</a:t>
+            </a:r>
+            <a:endParaRPr lang="en-US" sz="2100" dirty="0"/>
+          </a:p>
+        </p:txBody>
+      </p:sp>
+      <p:sp>
+        <p:nvSpPr>
+          <p:cNvPr id="20" name="Text 18"/>
+          <p:cNvSpPr/>
+          <p:nvPr/>
+        </p:nvSpPr>
+        <p:spPr>
+          <a:xfrm>
+            <a:off x="365760" y="1719072"/>
+            <a:ext cx="8412480" cy="274320"/>
+          </a:xfrm>
+          <a:prstGeom prst="rect">
+            <a:avLst/>
+          </a:prstGeom>
+          <a:noFill/>
+          <a:ln/>
+        </p:spPr>
+        <p:txBody>
+          <a:bodyPr wrap="square" lIns="0" tIns="0" rIns="0" bIns="0" rtlCol="0" anchor="ctr"/>
+          <a:lstStyle/>
+          <a:p>
+            <a:pPr indent="0" marL="0">
+              <a:buNone/>
+            </a:pPr>
+            <a:r>
+              <a:rPr lang="en-US" sz="1100" dirty="0">
+                <a:solidFill>
+                  <a:srgbClr val="64748B"/>
+                </a:solidFill>
+                <a:latin typeface="맑은 고딕" pitchFamily="34" charset="0"/>
+                <a:ea typeface="맑은 고딕" pitchFamily="34" charset="-122"/>
+                <a:cs typeface="맑은 고딕" pitchFamily="34" charset="-120"/>
+              </a:rPr>
+              <a:t>아이디어 1건당 약 2.8만~4.3만 토큰 · 캐싱 적용 시 추정(현재 미구현) · 환율 1,500원 기준</a:t>
+            </a:r>
+            <a:endParaRPr lang="en-US" sz="1100" dirty="0"/>
+          </a:p>
+        </p:txBody>
+      </p:sp>
+      <p:sp>
+        <p:nvSpPr>
+          <p:cNvPr id="21" name="Shape 19"/>
+          <p:cNvSpPr/>
+          <p:nvPr/>
+        </p:nvSpPr>
+        <p:spPr>
+          <a:xfrm>
+            <a:off x="365760" y="2103120"/>
+            <a:ext cx="1554480" cy="402336"/>
+          </a:xfrm>
+          <a:prstGeom prst="rect">
+            <a:avLst/>
+          </a:prstGeom>
+          <a:solidFill>
+            <a:srgbClr val="2563EB"/>
+          </a:solidFill>
+          <a:ln w="6350">
+            <a:solidFill>
+              <a:srgbClr val="FFFFFF"/>
+            </a:solidFill>
+            <a:prstDash val="solid"/>
+          </a:ln>
+        </p:spPr>
+      </p:sp>
+      <p:sp>
+        <p:nvSpPr>
+          <p:cNvPr id="22" name="Text 20"/>
+          <p:cNvSpPr/>
+          <p:nvPr/>
+        </p:nvSpPr>
+        <p:spPr>
+          <a:xfrm>
+            <a:off x="365760" y="2103120"/>
+            <a:ext cx="1554480" cy="402336"/>
+          </a:xfrm>
+          <a:prstGeom prst="rect">
+            <a:avLst/>
+          </a:prstGeom>
+          <a:noFill/>
+          <a:ln/>
+        </p:spPr>
+        <p:txBody>
+          <a:bodyPr wrap="square" lIns="0" tIns="0" rIns="0" bIns="0" rtlCol="0" anchor="ctr"/>
+          <a:lstStyle/>
+          <a:p>
+            <a:pPr algn="ctr" indent="0" marL="0">
+              <a:buNone/>
+            </a:pPr>
+            <a:r>
+              <a:rPr lang="en-US" sz="1050" b="1" dirty="0">
+                <a:solidFill>
+                  <a:srgbClr val="FFFFFF"/>
+                </a:solidFill>
+                <a:latin typeface="맑은 고딕" pitchFamily="34" charset="0"/>
+                <a:ea typeface="맑은 고딕" pitchFamily="34" charset="-122"/>
+                <a:cs typeface="맑은 고딕" pitchFamily="34" charset="-120"/>
+              </a:rPr>
+              <a:t>월 처리량</a:t>
+            </a:r>
+            <a:endParaRPr lang="en-US" sz="1050" dirty="0"/>
+          </a:p>
+        </p:txBody>
+      </p:sp>
+      <p:sp>
+        <p:nvSpPr>
+          <p:cNvPr id="23" name="Shape 21"/>
+          <p:cNvSpPr/>
+          <p:nvPr/>
+        </p:nvSpPr>
+        <p:spPr>
+          <a:xfrm>
+            <a:off x="1920240" y="2103120"/>
+            <a:ext cx="1714500" cy="402336"/>
+          </a:xfrm>
+          <a:prstGeom prst="rect">
+            <a:avLst/>
+          </a:prstGeom>
+          <a:solidFill>
+            <a:srgbClr val="2563EB"/>
+          </a:solidFill>
+          <a:ln w="6350">
+            <a:solidFill>
+              <a:srgbClr val="FFFFFF"/>
+            </a:solidFill>
+            <a:prstDash val="solid"/>
+          </a:ln>
+        </p:spPr>
+      </p:sp>
+      <p:sp>
+        <p:nvSpPr>
+          <p:cNvPr id="24" name="Text 22"/>
+          <p:cNvSpPr/>
+          <p:nvPr/>
+        </p:nvSpPr>
+        <p:spPr>
+          <a:xfrm>
+            <a:off x="1920240" y="2103120"/>
+            <a:ext cx="1714500" cy="402336"/>
+          </a:xfrm>
+          <a:prstGeom prst="rect">
+            <a:avLst/>
+          </a:prstGeom>
+          <a:noFill/>
+          <a:ln/>
+        </p:spPr>
+        <p:txBody>
+          <a:bodyPr wrap="square" lIns="0" tIns="0" rIns="0" bIns="0" rtlCol="0" anchor="ctr"/>
+          <a:lstStyle/>
+          <a:p>
+            <a:pPr algn="ctr" indent="0" marL="0">
+              <a:buNone/>
+            </a:pPr>
+            <a:r>
+              <a:rPr lang="en-US" sz="1050" b="1" dirty="0">
+                <a:solidFill>
+                  <a:srgbClr val="FFFFFF"/>
+                </a:solidFill>
+                <a:latin typeface="맑은 고딕" pitchFamily="34" charset="0"/>
+                <a:ea typeface="맑은 고딕" pitchFamily="34" charset="-122"/>
+                <a:cs typeface="맑은 고딕" pitchFamily="34" charset="-120"/>
+              </a:rPr>
+              <a:t>표준 모델 · 단문</a:t>
+            </a:r>
+            <a:endParaRPr lang="en-US" sz="1050" dirty="0"/>
+          </a:p>
+        </p:txBody>
+      </p:sp>
+      <p:sp>
+        <p:nvSpPr>
+          <p:cNvPr id="25" name="Shape 23"/>
+          <p:cNvSpPr/>
+          <p:nvPr/>
+        </p:nvSpPr>
+        <p:spPr>
+          <a:xfrm>
+            <a:off x="3634740" y="2103120"/>
+            <a:ext cx="1714500" cy="402336"/>
+          </a:xfrm>
+          <a:prstGeom prst="rect">
+            <a:avLst/>
+          </a:prstGeom>
+          <a:solidFill>
+            <a:srgbClr val="2563EB"/>
+          </a:solidFill>
+          <a:ln w="6350">
+            <a:solidFill>
+              <a:srgbClr val="FFFFFF"/>
+            </a:solidFill>
+            <a:prstDash val="solid"/>
+          </a:ln>
+        </p:spPr>
+      </p:sp>
+      <p:sp>
+        <p:nvSpPr>
+          <p:cNvPr id="26" name="Text 24"/>
+          <p:cNvSpPr/>
+          <p:nvPr/>
+        </p:nvSpPr>
+        <p:spPr>
+          <a:xfrm>
+            <a:off x="3634740" y="2103120"/>
+            <a:ext cx="1714500" cy="402336"/>
+          </a:xfrm>
+          <a:prstGeom prst="rect">
+            <a:avLst/>
+          </a:prstGeom>
+          <a:noFill/>
+          <a:ln/>
+        </p:spPr>
+        <p:txBody>
+          <a:bodyPr wrap="square" lIns="0" tIns="0" rIns="0" bIns="0" rtlCol="0" anchor="ctr"/>
+          <a:lstStyle/>
+          <a:p>
+            <a:pPr algn="ctr" indent="0" marL="0">
+              <a:buNone/>
+            </a:pPr>
+            <a:r>
+              <a:rPr lang="en-US" sz="1050" b="1" dirty="0">
+                <a:solidFill>
+                  <a:srgbClr val="FFFFFF"/>
+                </a:solidFill>
+                <a:latin typeface="맑은 고딕" pitchFamily="34" charset="0"/>
+                <a:ea typeface="맑은 고딕" pitchFamily="34" charset="-122"/>
+                <a:cs typeface="맑은 고딕" pitchFamily="34" charset="-120"/>
+              </a:rPr>
+              <a:t>표준 모델 · 장문</a:t>
+            </a:r>
+            <a:endParaRPr lang="en-US" sz="1050" dirty="0"/>
+          </a:p>
+        </p:txBody>
+      </p:sp>
+      <p:sp>
+        <p:nvSpPr>
+          <p:cNvPr id="27" name="Shape 25"/>
+          <p:cNvSpPr/>
+          <p:nvPr/>
+        </p:nvSpPr>
+        <p:spPr>
+          <a:xfrm>
+            <a:off x="5349240" y="2103120"/>
+            <a:ext cx="1714500" cy="402336"/>
+          </a:xfrm>
+          <a:prstGeom prst="rect">
+            <a:avLst/>
+          </a:prstGeom>
+          <a:solidFill>
+            <a:srgbClr val="2563EB"/>
+          </a:solidFill>
+          <a:ln w="6350">
+            <a:solidFill>
+              <a:srgbClr val="FFFFFF"/>
+            </a:solidFill>
+            <a:prstDash val="solid"/>
+          </a:ln>
+        </p:spPr>
+      </p:sp>
+      <p:sp>
+        <p:nvSpPr>
+          <p:cNvPr id="28" name="Text 26"/>
+          <p:cNvSpPr/>
+          <p:nvPr/>
+        </p:nvSpPr>
+        <p:spPr>
+          <a:xfrm>
+            <a:off x="5349240" y="2103120"/>
+            <a:ext cx="1714500" cy="402336"/>
+          </a:xfrm>
+          <a:prstGeom prst="rect">
+            <a:avLst/>
+          </a:prstGeom>
+          <a:noFill/>
+          <a:ln/>
+        </p:spPr>
+        <p:txBody>
+          <a:bodyPr wrap="square" lIns="0" tIns="0" rIns="0" bIns="0" rtlCol="0" anchor="ctr"/>
+          <a:lstStyle/>
+          <a:p>
+            <a:pPr algn="ctr" indent="0" marL="0">
+              <a:buNone/>
+            </a:pPr>
+            <a:r>
+              <a:rPr lang="en-US" sz="1050" b="1" dirty="0">
+                <a:solidFill>
+                  <a:srgbClr val="FFFFFF"/>
+                </a:solidFill>
+                <a:latin typeface="맑은 고딕" pitchFamily="34" charset="0"/>
+                <a:ea typeface="맑은 고딕" pitchFamily="34" charset="-122"/>
+                <a:cs typeface="맑은 고딕" pitchFamily="34" charset="-120"/>
+              </a:rPr>
+              <a:t>고급 모델 · 단문</a:t>
+            </a:r>
+            <a:endParaRPr lang="en-US" sz="1050" dirty="0"/>
+          </a:p>
+        </p:txBody>
+      </p:sp>
+      <p:sp>
+        <p:nvSpPr>
+          <p:cNvPr id="29" name="Shape 27"/>
+          <p:cNvSpPr/>
+          <p:nvPr/>
+        </p:nvSpPr>
+        <p:spPr>
+          <a:xfrm>
+            <a:off x="7063740" y="2103120"/>
+            <a:ext cx="1714500" cy="402336"/>
+          </a:xfrm>
+          <a:prstGeom prst="rect">
+            <a:avLst/>
+          </a:prstGeom>
+          <a:solidFill>
+            <a:srgbClr val="2563EB"/>
+          </a:solidFill>
+          <a:ln w="6350">
+            <a:solidFill>
+              <a:srgbClr val="FFFFFF"/>
+            </a:solidFill>
+            <a:prstDash val="solid"/>
+          </a:ln>
+        </p:spPr>
+      </p:sp>
+      <p:sp>
+        <p:nvSpPr>
+          <p:cNvPr id="30" name="Text 28"/>
+          <p:cNvSpPr/>
+          <p:nvPr/>
+        </p:nvSpPr>
+        <p:spPr>
+          <a:xfrm>
+            <a:off x="7063740" y="2103120"/>
+            <a:ext cx="1714500" cy="402336"/>
+          </a:xfrm>
+          <a:prstGeom prst="rect">
+            <a:avLst/>
+          </a:prstGeom>
+          <a:noFill/>
+          <a:ln/>
+        </p:spPr>
+        <p:txBody>
+          <a:bodyPr wrap="square" lIns="0" tIns="0" rIns="0" bIns="0" rtlCol="0" anchor="ctr"/>
+          <a:lstStyle/>
+          <a:p>
+            <a:pPr algn="ctr" indent="0" marL="0">
+              <a:buNone/>
+            </a:pPr>
+            <a:r>
+              <a:rPr lang="en-US" sz="1050" b="1" dirty="0">
+                <a:solidFill>
+                  <a:srgbClr val="FFFFFF"/>
+                </a:solidFill>
+                <a:latin typeface="맑은 고딕" pitchFamily="34" charset="0"/>
+                <a:ea typeface="맑은 고딕" pitchFamily="34" charset="-122"/>
+                <a:cs typeface="맑은 고딕" pitchFamily="34" charset="-120"/>
+              </a:rPr>
+              <a:t>고급 모델 · 장문</a:t>
+            </a:r>
+            <a:endParaRPr lang="en-US" sz="1050" dirty="0"/>
+          </a:p>
+        </p:txBody>
+      </p:sp>
+      <p:sp>
+        <p:nvSpPr>
+          <p:cNvPr id="31" name="Shape 29"/>
+          <p:cNvSpPr/>
+          <p:nvPr/>
+        </p:nvSpPr>
+        <p:spPr>
+          <a:xfrm>
+            <a:off x="365760" y="2505456"/>
+            <a:ext cx="1554480" cy="420624"/>
+          </a:xfrm>
+          <a:prstGeom prst="rect">
+            <a:avLst/>
+          </a:prstGeom>
+          <a:solidFill>
+            <a:srgbClr val="FFFFFF"/>
+          </a:solidFill>
+          <a:ln w="6350">
+            <a:solidFill>
+              <a:srgbClr val="E5E7EB"/>
+            </a:solidFill>
+            <a:prstDash val="solid"/>
+          </a:ln>
+        </p:spPr>
+      </p:sp>
+      <p:sp>
+        <p:nvSpPr>
+          <p:cNvPr id="32" name="Text 30"/>
+          <p:cNvSpPr/>
+          <p:nvPr/>
+        </p:nvSpPr>
+        <p:spPr>
+          <a:xfrm>
+            <a:off x="365760" y="2505456"/>
+            <a:ext cx="1554480" cy="420624"/>
+          </a:xfrm>
+          <a:prstGeom prst="rect">
+            <a:avLst/>
+          </a:prstGeom>
+          <a:noFill/>
+          <a:ln/>
+        </p:spPr>
+        <p:txBody>
+          <a:bodyPr wrap="square" lIns="0" tIns="0" rIns="0" bIns="0" rtlCol="0" anchor="ctr"/>
+          <a:lstStyle/>
+          <a:p>
+            <a:pPr algn="ctr" indent="0" marL="0">
+              <a:buNone/>
+            </a:pPr>
+            <a:r>
+              <a:rPr lang="en-US" sz="1100" b="1" dirty="0">
+                <a:solidFill>
+                  <a:srgbClr val="2563EB"/>
+                </a:solidFill>
+                <a:latin typeface="맑은 고딕" pitchFamily="34" charset="0"/>
+                <a:ea typeface="맑은 고딕" pitchFamily="34" charset="-122"/>
+                <a:cs typeface="맑은 고딕" pitchFamily="34" charset="-120"/>
+              </a:rPr>
+              <a:t>500건</a:t>
+            </a:r>
+            <a:endParaRPr lang="en-US" sz="1100" dirty="0"/>
+          </a:p>
+        </p:txBody>
+      </p:sp>
+      <p:sp>
+        <p:nvSpPr>
+          <p:cNvPr id="33" name="Shape 31"/>
+          <p:cNvSpPr/>
+          <p:nvPr/>
+        </p:nvSpPr>
+        <p:spPr>
+          <a:xfrm>
+            <a:off x="1920240" y="2505456"/>
+            <a:ext cx="1714500" cy="420624"/>
+          </a:xfrm>
+          <a:prstGeom prst="rect">
+            <a:avLst/>
+          </a:prstGeom>
+          <a:solidFill>
+            <a:srgbClr val="FFFFFF"/>
+          </a:solidFill>
+          <a:ln w="6350">
+            <a:solidFill>
+              <a:srgbClr val="E5E7EB"/>
+            </a:solidFill>
+            <a:prstDash val="solid"/>
+          </a:ln>
+        </p:spPr>
+      </p:sp>
+      <p:sp>
+        <p:nvSpPr>
+          <p:cNvPr id="34" name="Text 32"/>
+          <p:cNvSpPr/>
+          <p:nvPr/>
+        </p:nvSpPr>
+        <p:spPr>
+          <a:xfrm>
+            <a:off x="1920240" y="2505456"/>
+            <a:ext cx="1714500" cy="420624"/>
+          </a:xfrm>
+          <a:prstGeom prst="rect">
+            <a:avLst/>
+          </a:prstGeom>
+          <a:noFill/>
+          <a:ln/>
+        </p:spPr>
+        <p:txBody>
+          <a:bodyPr wrap="square" lIns="0" tIns="0" rIns="0" bIns="0" rtlCol="0" anchor="ctr"/>
+          <a:lstStyle/>
+          <a:p>
+            <a:pPr algn="ctr" indent="0" marL="0">
+              <a:buNone/>
+            </a:pPr>
+            <a:r>
+              <a:rPr lang="en-US" sz="1100" dirty="0">
+                <a:solidFill>
+                  <a:srgbClr val="1E293B"/>
+                </a:solidFill>
+                <a:latin typeface="맑은 고딕" pitchFamily="34" charset="0"/>
+                <a:ea typeface="맑은 고딕" pitchFamily="34" charset="-122"/>
+                <a:cs typeface="맑은 고딕" pitchFamily="34" charset="-120"/>
+              </a:rPr>
+              <a:t>약 14만 원</a:t>
+            </a:r>
+            <a:endParaRPr lang="en-US" sz="1100" dirty="0"/>
+          </a:p>
+        </p:txBody>
+      </p:sp>
+      <p:sp>
+        <p:nvSpPr>
+          <p:cNvPr id="35" name="Shape 33"/>
+          <p:cNvSpPr/>
+          <p:nvPr/>
+        </p:nvSpPr>
+        <p:spPr>
+          <a:xfrm>
+            <a:off x="3634740" y="2505456"/>
+            <a:ext cx="1714500" cy="420624"/>
+          </a:xfrm>
+          <a:prstGeom prst="rect">
+            <a:avLst/>
+          </a:prstGeom>
+          <a:solidFill>
+            <a:srgbClr val="FFFFFF"/>
+          </a:solidFill>
+          <a:ln w="6350">
+            <a:solidFill>
+              <a:srgbClr val="E5E7EB"/>
+            </a:solidFill>
+            <a:prstDash val="solid"/>
+          </a:ln>
+        </p:spPr>
+      </p:sp>
+      <p:sp>
+        <p:nvSpPr>
+          <p:cNvPr id="36" name="Text 34"/>
+          <p:cNvSpPr/>
+          <p:nvPr/>
+        </p:nvSpPr>
+        <p:spPr>
+          <a:xfrm>
+            <a:off x="3634740" y="2505456"/>
+            <a:ext cx="1714500" cy="420624"/>
+          </a:xfrm>
+          <a:prstGeom prst="rect">
+            <a:avLst/>
+          </a:prstGeom>
+          <a:noFill/>
+          <a:ln/>
+        </p:spPr>
+        <p:txBody>
+          <a:bodyPr wrap="square" lIns="0" tIns="0" rIns="0" bIns="0" rtlCol="0" anchor="ctr"/>
+          <a:lstStyle/>
+          <a:p>
+            <a:pPr algn="ctr" indent="0" marL="0">
+              <a:buNone/>
+            </a:pPr>
+            <a:r>
+              <a:rPr lang="en-US" sz="1100" dirty="0">
+                <a:solidFill>
+                  <a:srgbClr val="1E293B"/>
+                </a:solidFill>
+                <a:latin typeface="맑은 고딕" pitchFamily="34" charset="0"/>
+                <a:ea typeface="맑은 고딕" pitchFamily="34" charset="-122"/>
+                <a:cs typeface="맑은 고딕" pitchFamily="34" charset="-120"/>
+              </a:rPr>
+              <a:t>약 18만 원</a:t>
+            </a:r>
+            <a:endParaRPr lang="en-US" sz="1100" dirty="0"/>
+          </a:p>
+        </p:txBody>
+      </p:sp>
+      <p:sp>
+        <p:nvSpPr>
+          <p:cNvPr id="37" name="Shape 35"/>
+          <p:cNvSpPr/>
+          <p:nvPr/>
+        </p:nvSpPr>
+        <p:spPr>
+          <a:xfrm>
+            <a:off x="5349240" y="2505456"/>
+            <a:ext cx="1714500" cy="420624"/>
+          </a:xfrm>
+          <a:prstGeom prst="rect">
+            <a:avLst/>
+          </a:prstGeom>
+          <a:solidFill>
+            <a:srgbClr val="FFFFFF"/>
+          </a:solidFill>
+          <a:ln w="6350">
+            <a:solidFill>
+              <a:srgbClr val="E5E7EB"/>
+            </a:solidFill>
+            <a:prstDash val="solid"/>
+          </a:ln>
+        </p:spPr>
+      </p:sp>
+      <p:sp>
+        <p:nvSpPr>
+          <p:cNvPr id="38" name="Text 36"/>
+          <p:cNvSpPr/>
+          <p:nvPr/>
+        </p:nvSpPr>
+        <p:spPr>
+          <a:xfrm>
+            <a:off x="5349240" y="2505456"/>
+            <a:ext cx="1714500" cy="420624"/>
+          </a:xfrm>
+          <a:prstGeom prst="rect">
+            <a:avLst/>
+          </a:prstGeom>
+          <a:noFill/>
+          <a:ln/>
+        </p:spPr>
+        <p:txBody>
+          <a:bodyPr wrap="square" lIns="0" tIns="0" rIns="0" bIns="0" rtlCol="0" anchor="ctr"/>
+          <a:lstStyle/>
+          <a:p>
+            <a:pPr algn="ctr" indent="0" marL="0">
+              <a:buNone/>
+            </a:pPr>
+            <a:r>
+              <a:rPr lang="en-US" sz="1100" dirty="0">
+                <a:solidFill>
+                  <a:srgbClr val="1E293B"/>
+                </a:solidFill>
+                <a:latin typeface="맑은 고딕" pitchFamily="34" charset="0"/>
+                <a:ea typeface="맑은 고딕" pitchFamily="34" charset="-122"/>
+                <a:cs typeface="맑은 고딕" pitchFamily="34" charset="-120"/>
+              </a:rPr>
+              <a:t>약 24만 원</a:t>
+            </a:r>
+            <a:endParaRPr lang="en-US" sz="1100" dirty="0"/>
+          </a:p>
+        </p:txBody>
+      </p:sp>
+      <p:sp>
+        <p:nvSpPr>
+          <p:cNvPr id="39" name="Shape 37"/>
+          <p:cNvSpPr/>
+          <p:nvPr/>
+        </p:nvSpPr>
+        <p:spPr>
+          <a:xfrm>
+            <a:off x="7063740" y="2505456"/>
+            <a:ext cx="1714500" cy="420624"/>
+          </a:xfrm>
+          <a:prstGeom prst="rect">
+            <a:avLst/>
+          </a:prstGeom>
+          <a:solidFill>
+            <a:srgbClr val="FFFFFF"/>
+          </a:solidFill>
+          <a:ln w="6350">
+            <a:solidFill>
+              <a:srgbClr val="E5E7EB"/>
+            </a:solidFill>
+            <a:prstDash val="solid"/>
+          </a:ln>
+        </p:spPr>
+      </p:sp>
+      <p:sp>
+        <p:nvSpPr>
+          <p:cNvPr id="40" name="Text 38"/>
+          <p:cNvSpPr/>
+          <p:nvPr/>
+        </p:nvSpPr>
+        <p:spPr>
+          <a:xfrm>
+            <a:off x="7063740" y="2505456"/>
+            <a:ext cx="1714500" cy="420624"/>
+          </a:xfrm>
+          <a:prstGeom prst="rect">
+            <a:avLst/>
+          </a:prstGeom>
+          <a:noFill/>
+          <a:ln/>
+        </p:spPr>
+        <p:txBody>
+          <a:bodyPr wrap="square" lIns="0" tIns="0" rIns="0" bIns="0" rtlCol="0" anchor="ctr"/>
+          <a:lstStyle/>
+          <a:p>
+            <a:pPr algn="ctr" indent="0" marL="0">
+              <a:buNone/>
+            </a:pPr>
+            <a:r>
+              <a:rPr lang="en-US" sz="1100" dirty="0">
+                <a:solidFill>
+                  <a:srgbClr val="1E293B"/>
+                </a:solidFill>
+                <a:latin typeface="맑은 고딕" pitchFamily="34" charset="0"/>
+                <a:ea typeface="맑은 고딕" pitchFamily="34" charset="-122"/>
+                <a:cs typeface="맑은 고딕" pitchFamily="34" charset="-120"/>
+              </a:rPr>
+              <a:t>약 30만 원</a:t>
+            </a:r>
+            <a:endParaRPr lang="en-US" sz="1100" dirty="0"/>
+          </a:p>
+        </p:txBody>
+      </p:sp>
+      <p:sp>
+        <p:nvSpPr>
+          <p:cNvPr id="41" name="Shape 39"/>
+          <p:cNvSpPr/>
+          <p:nvPr/>
+        </p:nvSpPr>
+        <p:spPr>
+          <a:xfrm>
+            <a:off x="365760" y="2926080"/>
+            <a:ext cx="1554480" cy="420624"/>
+          </a:xfrm>
+          <a:prstGeom prst="rect">
+            <a:avLst/>
+          </a:prstGeom>
+          <a:solidFill>
+            <a:srgbClr val="F8FAFC"/>
+          </a:solidFill>
+          <a:ln w="6350">
+            <a:solidFill>
+              <a:srgbClr val="E5E7EB"/>
+            </a:solidFill>
+            <a:prstDash val="solid"/>
+          </a:ln>
+        </p:spPr>
+      </p:sp>
+      <p:sp>
+        <p:nvSpPr>
+          <p:cNvPr id="42" name="Text 40"/>
+          <p:cNvSpPr/>
+          <p:nvPr/>
+        </p:nvSpPr>
+        <p:spPr>
+          <a:xfrm>
+            <a:off x="365760" y="2926080"/>
+            <a:ext cx="1554480" cy="420624"/>
+          </a:xfrm>
+          <a:prstGeom prst="rect">
+            <a:avLst/>
+          </a:prstGeom>
+          <a:noFill/>
+          <a:ln/>
+        </p:spPr>
+        <p:txBody>
+          <a:bodyPr wrap="square" lIns="0" tIns="0" rIns="0" bIns="0" rtlCol="0" anchor="ctr"/>
+          <a:lstStyle/>
+          <a:p>
+            <a:pPr algn="ctr" indent="0" marL="0">
+              <a:buNone/>
+            </a:pPr>
+            <a:r>
+              <a:rPr lang="en-US" sz="1100" b="1" dirty="0">
+                <a:solidFill>
+                  <a:srgbClr val="2563EB"/>
+                </a:solidFill>
+                <a:latin typeface="맑은 고딕" pitchFamily="34" charset="0"/>
+                <a:ea typeface="맑은 고딕" pitchFamily="34" charset="-122"/>
+                <a:cs typeface="맑은 고딕" pitchFamily="34" charset="-120"/>
+              </a:rPr>
+              <a:t>1,000건</a:t>
+            </a:r>
+            <a:endParaRPr lang="en-US" sz="1100" dirty="0"/>
+          </a:p>
+        </p:txBody>
+      </p:sp>
+      <p:sp>
+        <p:nvSpPr>
+          <p:cNvPr id="43" name="Shape 41"/>
+          <p:cNvSpPr/>
+          <p:nvPr/>
+        </p:nvSpPr>
+        <p:spPr>
+          <a:xfrm>
+            <a:off x="1920240" y="2926080"/>
+            <a:ext cx="1714500" cy="420624"/>
+          </a:xfrm>
+          <a:prstGeom prst="rect">
+            <a:avLst/>
+          </a:prstGeom>
+          <a:solidFill>
+            <a:srgbClr val="F8FAFC"/>
+          </a:solidFill>
+          <a:ln w="6350">
+            <a:solidFill>
+              <a:srgbClr val="E5E7EB"/>
+            </a:solidFill>
+            <a:prstDash val="solid"/>
+          </a:ln>
+        </p:spPr>
+      </p:sp>
+      <p:sp>
+        <p:nvSpPr>
+          <p:cNvPr id="44" name="Text 42"/>
+          <p:cNvSpPr/>
+          <p:nvPr/>
+        </p:nvSpPr>
+        <p:spPr>
+          <a:xfrm>
+            <a:off x="1920240" y="2926080"/>
+            <a:ext cx="1714500" cy="420624"/>
+          </a:xfrm>
+          <a:prstGeom prst="rect">
+            <a:avLst/>
+          </a:prstGeom>
+          <a:noFill/>
+          <a:ln/>
+        </p:spPr>
+        <p:txBody>
+          <a:bodyPr wrap="square" lIns="0" tIns="0" rIns="0" bIns="0" rtlCol="0" anchor="ctr"/>
+          <a:lstStyle/>
+          <a:p>
+            <a:pPr algn="ctr" indent="0" marL="0">
+              <a:buNone/>
+            </a:pPr>
+            <a:r>
+              <a:rPr lang="en-US" sz="1100" dirty="0">
+                <a:solidFill>
+                  <a:srgbClr val="1E293B"/>
+                </a:solidFill>
+                <a:latin typeface="맑은 고딕" pitchFamily="34" charset="0"/>
+                <a:ea typeface="맑은 고딕" pitchFamily="34" charset="-122"/>
+                <a:cs typeface="맑은 고딕" pitchFamily="34" charset="-120"/>
+              </a:rPr>
+              <a:t>약 29만 원</a:t>
+            </a:r>
+            <a:endParaRPr lang="en-US" sz="1100" dirty="0"/>
+          </a:p>
+        </p:txBody>
+      </p:sp>
+      <p:sp>
+        <p:nvSpPr>
+          <p:cNvPr id="45" name="Shape 43"/>
+          <p:cNvSpPr/>
+          <p:nvPr/>
+        </p:nvSpPr>
+        <p:spPr>
+          <a:xfrm>
+            <a:off x="3634740" y="2926080"/>
+            <a:ext cx="1714500" cy="420624"/>
+          </a:xfrm>
+          <a:prstGeom prst="rect">
+            <a:avLst/>
+          </a:prstGeom>
+          <a:solidFill>
+            <a:srgbClr val="F8FAFC"/>
+          </a:solidFill>
+          <a:ln w="6350">
+            <a:solidFill>
+              <a:srgbClr val="E5E7EB"/>
+            </a:solidFill>
+            <a:prstDash val="solid"/>
+          </a:ln>
+        </p:spPr>
+      </p:sp>
+      <p:sp>
+        <p:nvSpPr>
+          <p:cNvPr id="46" name="Text 44"/>
+          <p:cNvSpPr/>
+          <p:nvPr/>
+        </p:nvSpPr>
+        <p:spPr>
+          <a:xfrm>
+            <a:off x="3634740" y="2926080"/>
+            <a:ext cx="1714500" cy="420624"/>
+          </a:xfrm>
+          <a:prstGeom prst="rect">
+            <a:avLst/>
+          </a:prstGeom>
+          <a:noFill/>
+          <a:ln/>
+        </p:spPr>
+        <p:txBody>
+          <a:bodyPr wrap="square" lIns="0" tIns="0" rIns="0" bIns="0" rtlCol="0" anchor="ctr"/>
+          <a:lstStyle/>
+          <a:p>
+            <a:pPr algn="ctr" indent="0" marL="0">
+              <a:buNone/>
+            </a:pPr>
+            <a:r>
+              <a:rPr lang="en-US" sz="1100" dirty="0">
+                <a:solidFill>
+                  <a:srgbClr val="1E293B"/>
+                </a:solidFill>
+                <a:latin typeface="맑은 고딕" pitchFamily="34" charset="0"/>
+                <a:ea typeface="맑은 고딕" pitchFamily="34" charset="-122"/>
+                <a:cs typeface="맑은 고딕" pitchFamily="34" charset="-120"/>
+              </a:rPr>
+              <a:t>약 36만 원</a:t>
+            </a:r>
+            <a:endParaRPr lang="en-US" sz="1100" dirty="0"/>
+          </a:p>
+        </p:txBody>
+      </p:sp>
+      <p:sp>
+        <p:nvSpPr>
+          <p:cNvPr id="47" name="Shape 45"/>
+          <p:cNvSpPr/>
+          <p:nvPr/>
+        </p:nvSpPr>
+        <p:spPr>
+          <a:xfrm>
+            <a:off x="5349240" y="2926080"/>
+            <a:ext cx="1714500" cy="420624"/>
+          </a:xfrm>
+          <a:prstGeom prst="rect">
+            <a:avLst/>
+          </a:prstGeom>
+          <a:solidFill>
+            <a:srgbClr val="F8FAFC"/>
+          </a:solidFill>
+          <a:ln w="6350">
+            <a:solidFill>
+              <a:srgbClr val="E5E7EB"/>
+            </a:solidFill>
+            <a:prstDash val="solid"/>
+          </a:ln>
+        </p:spPr>
+      </p:sp>
+      <p:sp>
+        <p:nvSpPr>
+          <p:cNvPr id="48" name="Text 46"/>
+          <p:cNvSpPr/>
+          <p:nvPr/>
+        </p:nvSpPr>
+        <p:spPr>
+          <a:xfrm>
+            <a:off x="5349240" y="2926080"/>
+            <a:ext cx="1714500" cy="420624"/>
+          </a:xfrm>
+          <a:prstGeom prst="rect">
+            <a:avLst/>
+          </a:prstGeom>
+          <a:noFill/>
+          <a:ln/>
+        </p:spPr>
+        <p:txBody>
+          <a:bodyPr wrap="square" lIns="0" tIns="0" rIns="0" bIns="0" rtlCol="0" anchor="ctr"/>
+          <a:lstStyle/>
+          <a:p>
+            <a:pPr algn="ctr" indent="0" marL="0">
+              <a:buNone/>
+            </a:pPr>
+            <a:r>
+              <a:rPr lang="en-US" sz="1100" dirty="0">
+                <a:solidFill>
+                  <a:srgbClr val="1E293B"/>
+                </a:solidFill>
+                <a:latin typeface="맑은 고딕" pitchFamily="34" charset="0"/>
+                <a:ea typeface="맑은 고딕" pitchFamily="34" charset="-122"/>
+                <a:cs typeface="맑은 고딕" pitchFamily="34" charset="-120"/>
+              </a:rPr>
+              <a:t>약 48만 원</a:t>
+            </a:r>
+            <a:endParaRPr lang="en-US" sz="1100" dirty="0"/>
+          </a:p>
+        </p:txBody>
+      </p:sp>
+      <p:sp>
+        <p:nvSpPr>
+          <p:cNvPr id="49" name="Shape 47"/>
+          <p:cNvSpPr/>
+          <p:nvPr/>
+        </p:nvSpPr>
+        <p:spPr>
+          <a:xfrm>
+            <a:off x="7063740" y="2926080"/>
+            <a:ext cx="1714500" cy="420624"/>
+          </a:xfrm>
+          <a:prstGeom prst="rect">
+            <a:avLst/>
+          </a:prstGeom>
+          <a:solidFill>
+            <a:srgbClr val="F8FAFC"/>
+          </a:solidFill>
+          <a:ln w="6350">
+            <a:solidFill>
+              <a:srgbClr val="E5E7EB"/>
+            </a:solidFill>
+            <a:prstDash val="solid"/>
+          </a:ln>
+        </p:spPr>
+      </p:sp>
+      <p:sp>
+        <p:nvSpPr>
+          <p:cNvPr id="50" name="Text 48"/>
+          <p:cNvSpPr/>
+          <p:nvPr/>
+        </p:nvSpPr>
+        <p:spPr>
+          <a:xfrm>
+            <a:off x="7063740" y="2926080"/>
+            <a:ext cx="1714500" cy="420624"/>
+          </a:xfrm>
+          <a:prstGeom prst="rect">
+            <a:avLst/>
+          </a:prstGeom>
+          <a:noFill/>
+          <a:ln/>
+        </p:spPr>
+        <p:txBody>
+          <a:bodyPr wrap="square" lIns="0" tIns="0" rIns="0" bIns="0" rtlCol="0" anchor="ctr"/>
+          <a:lstStyle/>
+          <a:p>
+            <a:pPr algn="ctr" indent="0" marL="0">
+              <a:buNone/>
+            </a:pPr>
+            <a:r>
+              <a:rPr lang="en-US" sz="1100" dirty="0">
+                <a:solidFill>
+                  <a:srgbClr val="1E293B"/>
+                </a:solidFill>
+                <a:latin typeface="맑은 고딕" pitchFamily="34" charset="0"/>
+                <a:ea typeface="맑은 고딕" pitchFamily="34" charset="-122"/>
+                <a:cs typeface="맑은 고딕" pitchFamily="34" charset="-120"/>
+              </a:rPr>
+              <a:t>약 60만 원</a:t>
+            </a:r>
+            <a:endParaRPr lang="en-US" sz="1100" dirty="0"/>
+          </a:p>
+        </p:txBody>
+      </p:sp>
+      <p:sp>
+        <p:nvSpPr>
+          <p:cNvPr id="51" name="Shape 49"/>
+          <p:cNvSpPr/>
+          <p:nvPr/>
+        </p:nvSpPr>
+        <p:spPr>
+          <a:xfrm>
+            <a:off x="365760" y="3346704"/>
+            <a:ext cx="1554480" cy="420624"/>
+          </a:xfrm>
+          <a:prstGeom prst="rect">
+            <a:avLst/>
+          </a:prstGeom>
+          <a:solidFill>
+            <a:srgbClr val="FFFFFF"/>
+          </a:solidFill>
+          <a:ln w="6350">
+            <a:solidFill>
+              <a:srgbClr val="E5E7EB"/>
+            </a:solidFill>
+            <a:prstDash val="solid"/>
+          </a:ln>
+        </p:spPr>
+      </p:sp>
+      <p:sp>
+        <p:nvSpPr>
+          <p:cNvPr id="52" name="Text 50"/>
+          <p:cNvSpPr/>
+          <p:nvPr/>
+        </p:nvSpPr>
+        <p:spPr>
+          <a:xfrm>
+            <a:off x="365760" y="3346704"/>
+            <a:ext cx="1554480" cy="420624"/>
+          </a:xfrm>
+          <a:prstGeom prst="rect">
+            <a:avLst/>
+          </a:prstGeom>
+          <a:noFill/>
+          <a:ln/>
+        </p:spPr>
+        <p:txBody>
+          <a:bodyPr wrap="square" lIns="0" tIns="0" rIns="0" bIns="0" rtlCol="0" anchor="ctr"/>
+          <a:lstStyle/>
+          <a:p>
+            <a:pPr algn="ctr" indent="0" marL="0">
+              <a:buNone/>
+            </a:pPr>
+            <a:r>
+              <a:rPr lang="en-US" sz="1100" b="1" dirty="0">
+                <a:solidFill>
+                  <a:srgbClr val="2563EB"/>
+                </a:solidFill>
+                <a:latin typeface="맑은 고딕" pitchFamily="34" charset="0"/>
+                <a:ea typeface="맑은 고딕" pitchFamily="34" charset="-122"/>
+                <a:cs typeface="맑은 고딕" pitchFamily="34" charset="-120"/>
+              </a:rPr>
+              <a:t>2,000건</a:t>
+            </a:r>
+            <a:endParaRPr lang="en-US" sz="1100" dirty="0"/>
+          </a:p>
+        </p:txBody>
+      </p:sp>
+      <p:sp>
+        <p:nvSpPr>
+          <p:cNvPr id="53" name="Shape 51"/>
+          <p:cNvSpPr/>
+          <p:nvPr/>
+        </p:nvSpPr>
+        <p:spPr>
+          <a:xfrm>
+            <a:off x="1920240" y="3346704"/>
+            <a:ext cx="1714500" cy="420624"/>
+          </a:xfrm>
+          <a:prstGeom prst="rect">
+            <a:avLst/>
+          </a:prstGeom>
+          <a:solidFill>
+            <a:srgbClr val="FFFFFF"/>
+          </a:solidFill>
+          <a:ln w="6350">
+            <a:solidFill>
+              <a:srgbClr val="E5E7EB"/>
+            </a:solidFill>
+            <a:prstDash val="solid"/>
+          </a:ln>
+        </p:spPr>
+      </p:sp>
+      <p:sp>
+        <p:nvSpPr>
+          <p:cNvPr id="54" name="Text 52"/>
+          <p:cNvSpPr/>
+          <p:nvPr/>
+        </p:nvSpPr>
+        <p:spPr>
+          <a:xfrm>
+            <a:off x="1920240" y="3346704"/>
+            <a:ext cx="1714500" cy="420624"/>
+          </a:xfrm>
+          <a:prstGeom prst="rect">
+            <a:avLst/>
+          </a:prstGeom>
+          <a:noFill/>
+          <a:ln/>
+        </p:spPr>
+        <p:txBody>
+          <a:bodyPr wrap="square" lIns="0" tIns="0" rIns="0" bIns="0" rtlCol="0" anchor="ctr"/>
+          <a:lstStyle/>
+          <a:p>
+            <a:pPr algn="ctr" indent="0" marL="0">
+              <a:buNone/>
+            </a:pPr>
+            <a:r>
+              <a:rPr lang="en-US" sz="1100" dirty="0">
+                <a:solidFill>
+                  <a:srgbClr val="1E293B"/>
+                </a:solidFill>
+                <a:latin typeface="맑은 고딕" pitchFamily="34" charset="0"/>
+                <a:ea typeface="맑은 고딕" pitchFamily="34" charset="-122"/>
+                <a:cs typeface="맑은 고딕" pitchFamily="34" charset="-120"/>
+              </a:rPr>
+              <a:t>약 57만 원</a:t>
+            </a:r>
+            <a:endParaRPr lang="en-US" sz="1100" dirty="0"/>
+          </a:p>
+        </p:txBody>
+      </p:sp>
+      <p:sp>
+        <p:nvSpPr>
+          <p:cNvPr id="55" name="Shape 53"/>
+          <p:cNvSpPr/>
+          <p:nvPr/>
+        </p:nvSpPr>
+        <p:spPr>
+          <a:xfrm>
+            <a:off x="3634740" y="3346704"/>
+            <a:ext cx="1714500" cy="420624"/>
+          </a:xfrm>
+          <a:prstGeom prst="rect">
+            <a:avLst/>
+          </a:prstGeom>
+          <a:solidFill>
+            <a:srgbClr val="FFFFFF"/>
+          </a:solidFill>
+          <a:ln w="6350">
+            <a:solidFill>
+              <a:srgbClr val="E5E7EB"/>
+            </a:solidFill>
+            <a:prstDash val="solid"/>
+          </a:ln>
+        </p:spPr>
+      </p:sp>
+      <p:sp>
+        <p:nvSpPr>
+          <p:cNvPr id="56" name="Text 54"/>
+          <p:cNvSpPr/>
+          <p:nvPr/>
+        </p:nvSpPr>
+        <p:spPr>
+          <a:xfrm>
+            <a:off x="3634740" y="3346704"/>
+            <a:ext cx="1714500" cy="420624"/>
+          </a:xfrm>
+          <a:prstGeom prst="rect">
+            <a:avLst/>
+          </a:prstGeom>
+          <a:noFill/>
+          <a:ln/>
+        </p:spPr>
+        <p:txBody>
+          <a:bodyPr wrap="square" lIns="0" tIns="0" rIns="0" bIns="0" rtlCol="0" anchor="ctr"/>
+          <a:lstStyle/>
+          <a:p>
+            <a:pPr algn="ctr" indent="0" marL="0">
+              <a:buNone/>
+            </a:pPr>
+            <a:r>
+              <a:rPr lang="en-US" sz="1100" dirty="0">
+                <a:solidFill>
+                  <a:srgbClr val="1E293B"/>
+                </a:solidFill>
+                <a:latin typeface="맑은 고딕" pitchFamily="34" charset="0"/>
+                <a:ea typeface="맑은 고딕" pitchFamily="34" charset="-122"/>
+                <a:cs typeface="맑은 고딕" pitchFamily="34" charset="-120"/>
+              </a:rPr>
+              <a:t>약 72만 원</a:t>
+            </a:r>
+            <a:endParaRPr lang="en-US" sz="1100" dirty="0"/>
+          </a:p>
+        </p:txBody>
+      </p:sp>
+      <p:sp>
+        <p:nvSpPr>
+          <p:cNvPr id="57" name="Shape 55"/>
+          <p:cNvSpPr/>
+          <p:nvPr/>
+        </p:nvSpPr>
+        <p:spPr>
+          <a:xfrm>
+            <a:off x="5349240" y="3346704"/>
+            <a:ext cx="1714500" cy="420624"/>
+          </a:xfrm>
+          <a:prstGeom prst="rect">
+            <a:avLst/>
+          </a:prstGeom>
+          <a:solidFill>
+            <a:srgbClr val="FFFFFF"/>
+          </a:solidFill>
+          <a:ln w="6350">
+            <a:solidFill>
+              <a:srgbClr val="E5E7EB"/>
+            </a:solidFill>
+            <a:prstDash val="solid"/>
+          </a:ln>
+        </p:spPr>
+      </p:sp>
+      <p:sp>
+        <p:nvSpPr>
+          <p:cNvPr id="58" name="Text 56"/>
+          <p:cNvSpPr/>
+          <p:nvPr/>
+        </p:nvSpPr>
+        <p:spPr>
+          <a:xfrm>
+            <a:off x="5349240" y="3346704"/>
+            <a:ext cx="1714500" cy="420624"/>
+          </a:xfrm>
+          <a:prstGeom prst="rect">
+            <a:avLst/>
+          </a:prstGeom>
+          <a:noFill/>
+          <a:ln/>
+        </p:spPr>
+        <p:txBody>
+          <a:bodyPr wrap="square" lIns="0" tIns="0" rIns="0" bIns="0" rtlCol="0" anchor="ctr"/>
+          <a:lstStyle/>
+          <a:p>
+            <a:pPr algn="ctr" indent="0" marL="0">
+              <a:buNone/>
+            </a:pPr>
+            <a:r>
+              <a:rPr lang="en-US" sz="1100" dirty="0">
+                <a:solidFill>
+                  <a:srgbClr val="1E293B"/>
+                </a:solidFill>
+                <a:latin typeface="맑은 고딕" pitchFamily="34" charset="0"/>
+                <a:ea typeface="맑은 고딕" pitchFamily="34" charset="-122"/>
+                <a:cs typeface="맑은 고딕" pitchFamily="34" charset="-120"/>
+              </a:rPr>
+              <a:t>약 96만 원</a:t>
+            </a:r>
+            <a:endParaRPr lang="en-US" sz="1100" dirty="0"/>
+          </a:p>
+        </p:txBody>
+      </p:sp>
+      <p:sp>
+        <p:nvSpPr>
+          <p:cNvPr id="59" name="Shape 57"/>
+          <p:cNvSpPr/>
+          <p:nvPr/>
+        </p:nvSpPr>
+        <p:spPr>
+          <a:xfrm>
+            <a:off x="7063740" y="3346704"/>
+            <a:ext cx="1714500" cy="420624"/>
+          </a:xfrm>
+          <a:prstGeom prst="rect">
+            <a:avLst/>
+          </a:prstGeom>
+          <a:solidFill>
+            <a:srgbClr val="FFFFFF"/>
+          </a:solidFill>
+          <a:ln w="6350">
+            <a:solidFill>
+              <a:srgbClr val="E5E7EB"/>
+            </a:solidFill>
+            <a:prstDash val="solid"/>
+          </a:ln>
+        </p:spPr>
+      </p:sp>
+      <p:sp>
+        <p:nvSpPr>
+          <p:cNvPr id="60" name="Text 58"/>
+          <p:cNvSpPr/>
+          <p:nvPr/>
+        </p:nvSpPr>
+        <p:spPr>
+          <a:xfrm>
+            <a:off x="7063740" y="3346704"/>
+            <a:ext cx="1714500" cy="420624"/>
+          </a:xfrm>
+          <a:prstGeom prst="rect">
+            <a:avLst/>
+          </a:prstGeom>
+          <a:noFill/>
+          <a:ln/>
+        </p:spPr>
+        <p:txBody>
+          <a:bodyPr wrap="square" lIns="0" tIns="0" rIns="0" bIns="0" rtlCol="0" anchor="ctr"/>
+          <a:lstStyle/>
+          <a:p>
+            <a:pPr algn="ctr" indent="0" marL="0">
+              <a:buNone/>
+            </a:pPr>
+            <a:r>
+              <a:rPr lang="en-US" sz="1100" dirty="0">
+                <a:solidFill>
+                  <a:srgbClr val="1E293B"/>
+                </a:solidFill>
+                <a:latin typeface="맑은 고딕" pitchFamily="34" charset="0"/>
+                <a:ea typeface="맑은 고딕" pitchFamily="34" charset="-122"/>
+                <a:cs typeface="맑은 고딕" pitchFamily="34" charset="-120"/>
+              </a:rPr>
+              <a:t>약 120만 원</a:t>
+            </a:r>
+            <a:endParaRPr lang="en-US" sz="1100" dirty="0"/>
+          </a:p>
+        </p:txBody>
+      </p:sp>
+      <p:sp>
+        <p:nvSpPr>
+          <p:cNvPr id="61" name="Shape 59"/>
+          <p:cNvSpPr/>
+          <p:nvPr/>
+        </p:nvSpPr>
+        <p:spPr>
+          <a:xfrm>
+            <a:off x="365760" y="3767328"/>
+            <a:ext cx="1554480" cy="420624"/>
+          </a:xfrm>
+          <a:prstGeom prst="rect">
+            <a:avLst/>
+          </a:prstGeom>
+          <a:solidFill>
+            <a:srgbClr val="F8FAFC"/>
+          </a:solidFill>
+          <a:ln w="6350">
+            <a:solidFill>
+              <a:srgbClr val="E5E7EB"/>
+            </a:solidFill>
+            <a:prstDash val="solid"/>
+          </a:ln>
+        </p:spPr>
+      </p:sp>
+      <p:sp>
+        <p:nvSpPr>
+          <p:cNvPr id="62" name="Text 60"/>
+          <p:cNvSpPr/>
+          <p:nvPr/>
+        </p:nvSpPr>
+        <p:spPr>
+          <a:xfrm>
+            <a:off x="365760" y="3767328"/>
+            <a:ext cx="1554480" cy="420624"/>
+          </a:xfrm>
+          <a:prstGeom prst="rect">
+            <a:avLst/>
+          </a:prstGeom>
+          <a:noFill/>
+          <a:ln/>
+        </p:spPr>
+        <p:txBody>
+          <a:bodyPr wrap="square" lIns="0" tIns="0" rIns="0" bIns="0" rtlCol="0" anchor="ctr"/>
+          <a:lstStyle/>
+          <a:p>
+            <a:pPr algn="ctr" indent="0" marL="0">
+              <a:buNone/>
+            </a:pPr>
+            <a:r>
+              <a:rPr lang="en-US" sz="1100" b="1" dirty="0">
+                <a:solidFill>
+                  <a:srgbClr val="2563EB"/>
+                </a:solidFill>
+                <a:latin typeface="맑은 고딕" pitchFamily="34" charset="0"/>
+                <a:ea typeface="맑은 고딕" pitchFamily="34" charset="-122"/>
+                <a:cs typeface="맑은 고딕" pitchFamily="34" charset="-120"/>
+              </a:rPr>
+              <a:t>10,000건</a:t>
+            </a:r>
+            <a:endParaRPr lang="en-US" sz="1100" dirty="0"/>
+          </a:p>
+        </p:txBody>
+      </p:sp>
+      <p:sp>
+        <p:nvSpPr>
+          <p:cNvPr id="63" name="Shape 61"/>
+          <p:cNvSpPr/>
+          <p:nvPr/>
+        </p:nvSpPr>
+        <p:spPr>
+          <a:xfrm>
+            <a:off x="1920240" y="3767328"/>
+            <a:ext cx="1714500" cy="420624"/>
+          </a:xfrm>
+          <a:prstGeom prst="rect">
+            <a:avLst/>
+          </a:prstGeom>
+          <a:solidFill>
+            <a:srgbClr val="F8FAFC"/>
+          </a:solidFill>
+          <a:ln w="6350">
+            <a:solidFill>
+              <a:srgbClr val="E5E7EB"/>
+            </a:solidFill>
+            <a:prstDash val="solid"/>
+          </a:ln>
+        </p:spPr>
+      </p:sp>
+      <p:sp>
+        <p:nvSpPr>
+          <p:cNvPr id="64" name="Text 62"/>
+          <p:cNvSpPr/>
+          <p:nvPr/>
+        </p:nvSpPr>
+        <p:spPr>
+          <a:xfrm>
+            <a:off x="1920240" y="3767328"/>
+            <a:ext cx="1714500" cy="420624"/>
+          </a:xfrm>
+          <a:prstGeom prst="rect">
+            <a:avLst/>
+          </a:prstGeom>
+          <a:noFill/>
+          <a:ln/>
+        </p:spPr>
+        <p:txBody>
+          <a:bodyPr wrap="square" lIns="0" tIns="0" rIns="0" bIns="0" rtlCol="0" anchor="ctr"/>
+          <a:lstStyle/>
+          <a:p>
+            <a:pPr algn="ctr" indent="0" marL="0">
+              <a:buNone/>
+            </a:pPr>
+            <a:r>
+              <a:rPr lang="en-US" sz="1100" dirty="0">
+                <a:solidFill>
+                  <a:srgbClr val="1E293B"/>
+                </a:solidFill>
+                <a:latin typeface="맑은 고딕" pitchFamily="34" charset="0"/>
+                <a:ea typeface="맑은 고딕" pitchFamily="34" charset="-122"/>
+                <a:cs typeface="맑은 고딕" pitchFamily="34" charset="-120"/>
+              </a:rPr>
+              <a:t>약 285만 원</a:t>
+            </a:r>
+            <a:endParaRPr lang="en-US" sz="1100" dirty="0"/>
+          </a:p>
+        </p:txBody>
+      </p:sp>
+      <p:sp>
+        <p:nvSpPr>
+          <p:cNvPr id="65" name="Shape 63"/>
+          <p:cNvSpPr/>
+          <p:nvPr/>
+        </p:nvSpPr>
+        <p:spPr>
+          <a:xfrm>
+            <a:off x="3634740" y="3767328"/>
+            <a:ext cx="1714500" cy="420624"/>
+          </a:xfrm>
+          <a:prstGeom prst="rect">
+            <a:avLst/>
+          </a:prstGeom>
+          <a:solidFill>
+            <a:srgbClr val="F8FAFC"/>
+          </a:solidFill>
+          <a:ln w="6350">
+            <a:solidFill>
+              <a:srgbClr val="E5E7EB"/>
+            </a:solidFill>
+            <a:prstDash val="solid"/>
+          </a:ln>
+        </p:spPr>
+      </p:sp>
+      <p:sp>
+        <p:nvSpPr>
+          <p:cNvPr id="66" name="Text 64"/>
+          <p:cNvSpPr/>
+          <p:nvPr/>
+        </p:nvSpPr>
+        <p:spPr>
+          <a:xfrm>
+            <a:off x="3634740" y="3767328"/>
+            <a:ext cx="1714500" cy="420624"/>
+          </a:xfrm>
+          <a:prstGeom prst="rect">
+            <a:avLst/>
+          </a:prstGeom>
+          <a:noFill/>
+          <a:ln/>
+        </p:spPr>
+        <p:txBody>
+          <a:bodyPr wrap="square" lIns="0" tIns="0" rIns="0" bIns="0" rtlCol="0" anchor="ctr"/>
+          <a:lstStyle/>
+          <a:p>
+            <a:pPr algn="ctr" indent="0" marL="0">
+              <a:buNone/>
+            </a:pPr>
+            <a:r>
+              <a:rPr lang="en-US" sz="1100" dirty="0">
+                <a:solidFill>
+                  <a:srgbClr val="1E293B"/>
+                </a:solidFill>
+                <a:latin typeface="맑은 고딕" pitchFamily="34" charset="0"/>
+                <a:ea typeface="맑은 고딕" pitchFamily="34" charset="-122"/>
+                <a:cs typeface="맑은 고딕" pitchFamily="34" charset="-120"/>
+              </a:rPr>
+              <a:t>약 360만 원</a:t>
+            </a:r>
+            <a:endParaRPr lang="en-US" sz="1100" dirty="0"/>
+          </a:p>
+        </p:txBody>
+      </p:sp>
+      <p:sp>
+        <p:nvSpPr>
+          <p:cNvPr id="67" name="Shape 65"/>
+          <p:cNvSpPr/>
+          <p:nvPr/>
+        </p:nvSpPr>
+        <p:spPr>
+          <a:xfrm>
+            <a:off x="5349240" y="3767328"/>
+            <a:ext cx="1714500" cy="420624"/>
+          </a:xfrm>
+          <a:prstGeom prst="rect">
+            <a:avLst/>
+          </a:prstGeom>
+          <a:solidFill>
+            <a:srgbClr val="F8FAFC"/>
+          </a:solidFill>
+          <a:ln w="6350">
+            <a:solidFill>
+              <a:srgbClr val="E5E7EB"/>
+            </a:solidFill>
+            <a:prstDash val="solid"/>
+          </a:ln>
+        </p:spPr>
+      </p:sp>
+      <p:sp>
+        <p:nvSpPr>
+          <p:cNvPr id="68" name="Text 66"/>
+          <p:cNvSpPr/>
+          <p:nvPr/>
+        </p:nvSpPr>
+        <p:spPr>
+          <a:xfrm>
+            <a:off x="5349240" y="3767328"/>
+            <a:ext cx="1714500" cy="420624"/>
+          </a:xfrm>
+          <a:prstGeom prst="rect">
+            <a:avLst/>
+          </a:prstGeom>
+          <a:noFill/>
+          <a:ln/>
+        </p:spPr>
+        <p:txBody>
+          <a:bodyPr wrap="square" lIns="0" tIns="0" rIns="0" bIns="0" rtlCol="0" anchor="ctr"/>
+          <a:lstStyle/>
+          <a:p>
+            <a:pPr algn="ctr" indent="0" marL="0">
+              <a:buNone/>
+            </a:pPr>
+            <a:r>
+              <a:rPr lang="en-US" sz="1100" dirty="0">
+                <a:solidFill>
+                  <a:srgbClr val="1E293B"/>
+                </a:solidFill>
+                <a:latin typeface="맑은 고딕" pitchFamily="34" charset="0"/>
+                <a:ea typeface="맑은 고딕" pitchFamily="34" charset="-122"/>
+                <a:cs typeface="맑은 고딕" pitchFamily="34" charset="-120"/>
+              </a:rPr>
+              <a:t>약 480만 원</a:t>
+            </a:r>
+            <a:endParaRPr lang="en-US" sz="1100" dirty="0"/>
+          </a:p>
+        </p:txBody>
+      </p:sp>
+      <p:sp>
+        <p:nvSpPr>
+          <p:cNvPr id="69" name="Shape 67"/>
+          <p:cNvSpPr/>
+          <p:nvPr/>
+        </p:nvSpPr>
+        <p:spPr>
+          <a:xfrm>
+            <a:off x="7063740" y="3767328"/>
+            <a:ext cx="1714500" cy="420624"/>
+          </a:xfrm>
+          <a:prstGeom prst="rect">
+            <a:avLst/>
+          </a:prstGeom>
+          <a:solidFill>
+            <a:srgbClr val="F8FAFC"/>
+          </a:solidFill>
+          <a:ln w="6350">
+            <a:solidFill>
+              <a:srgbClr val="E5E7EB"/>
+            </a:solidFill>
+            <a:prstDash val="solid"/>
+          </a:ln>
+        </p:spPr>
+      </p:sp>
+      <p:sp>
+        <p:nvSpPr>
+          <p:cNvPr id="70" name="Text 68"/>
+          <p:cNvSpPr/>
+          <p:nvPr/>
+        </p:nvSpPr>
+        <p:spPr>
+          <a:xfrm>
+            <a:off x="7063740" y="3767328"/>
+            <a:ext cx="1714500" cy="420624"/>
+          </a:xfrm>
+          <a:prstGeom prst="rect">
+            <a:avLst/>
+          </a:prstGeom>
+          <a:noFill/>
+          <a:ln/>
+        </p:spPr>
+        <p:txBody>
+          <a:bodyPr wrap="square" lIns="0" tIns="0" rIns="0" bIns="0" rtlCol="0" anchor="ctr"/>
+          <a:lstStyle/>
+          <a:p>
+            <a:pPr algn="ctr" indent="0" marL="0">
+              <a:buNone/>
+            </a:pPr>
+            <a:r>
+              <a:rPr lang="en-US" sz="1100" dirty="0">
+                <a:solidFill>
+                  <a:srgbClr val="1E293B"/>
+                </a:solidFill>
+                <a:latin typeface="맑은 고딕" pitchFamily="34" charset="0"/>
+                <a:ea typeface="맑은 고딕" pitchFamily="34" charset="-122"/>
+                <a:cs typeface="맑은 고딕" pitchFamily="34" charset="-120"/>
+              </a:rPr>
+              <a:t>약 600만 원</a:t>
+            </a:r>
+            <a:endParaRPr lang="en-US" sz="1100" dirty="0"/>
+          </a:p>
+        </p:txBody>
+      </p:sp>
+      <p:sp>
+        <p:nvSpPr>
+          <p:cNvPr id="71" name="Shape 69"/>
+          <p:cNvSpPr/>
+          <p:nvPr/>
+        </p:nvSpPr>
+        <p:spPr>
+          <a:xfrm>
+            <a:off x="365760" y="4315968"/>
+            <a:ext cx="8412480" cy="621792"/>
+          </a:xfrm>
+          <a:prstGeom prst="rect">
+            <a:avLst/>
+          </a:prstGeom>
+          <a:solidFill>
+            <a:srgbClr val="EBF5FF"/>
+          </a:solidFill>
+          <a:ln w="12700">
+            <a:solidFill>
+              <a:srgbClr val="E5E7EB"/>
+            </a:solidFill>
+            <a:prstDash val="solid"/>
+          </a:ln>
+        </p:spPr>
+      </p:sp>
+      <p:sp>
+        <p:nvSpPr>
+          <p:cNvPr id="72" name="Text 70"/>
+          <p:cNvSpPr/>
+          <p:nvPr/>
+        </p:nvSpPr>
+        <p:spPr>
+          <a:xfrm>
+            <a:off x="457200" y="4370832"/>
+            <a:ext cx="8229600" cy="274320"/>
+          </a:xfrm>
+          <a:prstGeom prst="rect">
+            <a:avLst/>
+          </a:prstGeom>
+          <a:noFill/>
+          <a:ln/>
+        </p:spPr>
+        <p:txBody>
+          <a:bodyPr wrap="square" lIns="0" tIns="0" rIns="0" bIns="0" rtlCol="0" anchor="ctr"/>
+          <a:lstStyle/>
+          <a:p>
+            <a:pPr algn="ctr" indent="0" marL="0">
+              <a:buNone/>
+            </a:pPr>
+            <a:r>
+              <a:rPr lang="en-US" sz="1150" b="1" dirty="0">
+                <a:solidFill>
+                  <a:srgbClr val="2563EB"/>
+                </a:solidFill>
+                <a:latin typeface="맑은 고딕" pitchFamily="34" charset="0"/>
+                <a:ea typeface="맑은 고딕" pitchFamily="34" charset="-122"/>
+                <a:cs typeface="맑은 고딕" pitchFamily="34" charset="-120"/>
+              </a:rPr>
+              <a:t>월 1,000건을 표준 모델로 처리할 경우 약 29만~36만 원 (API 비용만)</a:t>
+            </a:r>
+            <a:endParaRPr lang="en-US" sz="1150" dirty="0"/>
+          </a:p>
+        </p:txBody>
+      </p:sp>
+      <p:sp>
+        <p:nvSpPr>
+          <p:cNvPr id="73" name="Text 71"/>
+          <p:cNvSpPr/>
+          <p:nvPr/>
+        </p:nvSpPr>
+        <p:spPr>
+          <a:xfrm>
+            <a:off x="457200" y="4645152"/>
+            <a:ext cx="8229600" cy="237744"/>
+          </a:xfrm>
+          <a:prstGeom prst="rect">
+            <a:avLst/>
+          </a:prstGeom>
+          <a:noFill/>
+          <a:ln/>
+        </p:spPr>
+        <p:txBody>
+          <a:bodyPr wrap="square" lIns="0" tIns="0" rIns="0" bIns="0" rtlCol="0" anchor="ctr"/>
+          <a:lstStyle/>
+          <a:p>
+            <a:pPr algn="ctr" indent="0" marL="0">
+              <a:buNone/>
+            </a:pPr>
+            <a:r>
+              <a:rPr lang="en-US" sz="950" dirty="0">
+                <a:solidFill>
+                  <a:srgbClr val="64748B"/>
+                </a:solidFill>
+                <a:latin typeface="맑은 고딕" pitchFamily="34" charset="0"/>
+                <a:ea typeface="맑은 고딕" pitchFamily="34" charset="-122"/>
+                <a:cs typeface="맑은 고딕" pitchFamily="34" charset="-120"/>
+              </a:rPr>
+              <a:t>※ 캐싱 미적용 시 입력 토큰이 전액 과금되어 실제 비용은 이보다 큼 · 인건비·서버·코퍼스 갱신 비용 제외</a:t>
+            </a:r>
+            <a:endParaRPr lang="en-US" sz="950" dirty="0"/>
+          </a:p>
+        </p:txBody>
+      </p:sp>
+    </p:spTree>
+  </p:cSld>
+  <p:clrMapOvr>
+    <a:masterClrMapping/>
+  </p:clrMapOvr>
+</p:sld>
+</file>
+
+<file path=ppt/slides/slide28.xml><?xml version="1.0" encoding="utf-8"?>
+<p:sld xmlns:a="http://schemas.openxmlformats.org/drawingml/2006/main" xmlns:r="http://schemas.openxmlformats.org/officeDocument/2006/relationships" xmlns:p="http://schemas.openxmlformats.org/presentationml/2006/main">
+  <p:cSld name="Slide 28">
+    <p:spTree>
+      <p:nvGrpSpPr>
+        <p:cNvPr id="1" name=""/>
+        <p:cNvGrpSpPr/>
+        <p:nvPr/>
+      </p:nvGrpSpPr>
+      <p:grpSpPr>
+        <a:xfrm>
+          <a:off x="0" y="0"/>
+          <a:ext cx="0" cy="0"/>
+          <a:chOff x="0" y="0"/>
+          <a:chExt cx="0" cy="0"/>
+        </a:xfrm>
+      </p:grpSpPr>
+      <p:sp>
+        <p:nvSpPr>
+          <p:cNvPr id="2" name="Shape 0"/>
+          <p:cNvSpPr/>
+          <p:nvPr/>
+        </p:nvSpPr>
+        <p:spPr>
+          <a:xfrm>
+            <a:off x="0" y="0"/>
+            <a:ext cx="9144000" cy="502920"/>
+          </a:xfrm>
+          <a:prstGeom prst="rect">
+            <a:avLst/>
+          </a:prstGeom>
+          <a:solidFill>
+            <a:srgbClr val="1A1A2E"/>
+          </a:solidFill>
+          <a:ln/>
+        </p:spPr>
+      </p:sp>
+      <p:sp>
+        <p:nvSpPr>
+          <p:cNvPr id="3" name="Text 1"/>
+          <p:cNvSpPr/>
+          <p:nvPr/>
+        </p:nvSpPr>
+        <p:spPr>
+          <a:xfrm>
+            <a:off x="365760" y="0"/>
+            <a:ext cx="6949440" cy="502920"/>
+          </a:xfrm>
+          <a:prstGeom prst="rect">
+            <a:avLst/>
+          </a:prstGeom>
+          <a:noFill/>
+          <a:ln/>
+        </p:spPr>
+        <p:txBody>
+          <a:bodyPr wrap="square" lIns="0" tIns="0" rIns="0" bIns="0" rtlCol="0" anchor="ctr"/>
+          <a:lstStyle/>
+          <a:p>
+            <a:pPr indent="0" marL="0">
+              <a:buNone/>
+            </a:pPr>
+            <a:r>
+              <a:rPr lang="en-US" sz="1200" b="1" dirty="0">
+                <a:solidFill>
+                  <a:srgbClr val="FFFFFF"/>
+                </a:solidFill>
+                <a:latin typeface="맑은 고딕" pitchFamily="34" charset="0"/>
+                <a:ea typeface="맑은 고딕" pitchFamily="34" charset="-122"/>
+                <a:cs typeface="맑은 고딕" pitchFamily="34" charset="-120"/>
+              </a:rPr>
+              <a:t>온 국민 아이디어 등록제 — 정책 아이디어 평가 시스템</a:t>
+            </a:r>
+            <a:endParaRPr lang="en-US" sz="1200" dirty="0"/>
+          </a:p>
+        </p:txBody>
+      </p:sp>
+      <p:sp>
+        <p:nvSpPr>
+          <p:cNvPr id="4" name="Text 2"/>
+          <p:cNvSpPr/>
+          <p:nvPr/>
+        </p:nvSpPr>
+        <p:spPr>
+          <a:xfrm>
+            <a:off x="7680960" y="0"/>
+            <a:ext cx="1097280" cy="502920"/>
+          </a:xfrm>
+          <a:prstGeom prst="rect">
+            <a:avLst/>
+          </a:prstGeom>
+          <a:noFill/>
+          <a:ln/>
+        </p:spPr>
+        <p:txBody>
+          <a:bodyPr wrap="square" lIns="0" tIns="0" rIns="0" bIns="0" rtlCol="0" anchor="ctr"/>
+          <a:lstStyle/>
+          <a:p>
+            <a:pPr algn="r" indent="0" marL="0">
+              <a:buNone/>
+            </a:pPr>
+            <a:r>
+              <a:rPr lang="en-US" sz="1100" dirty="0">
+                <a:solidFill>
+                  <a:srgbClr val="FFFFFF"/>
+                </a:solidFill>
+                <a:latin typeface="맑은 고딕" pitchFamily="34" charset="0"/>
+                <a:ea typeface="맑은 고딕" pitchFamily="34" charset="-122"/>
+                <a:cs typeface="맑은 고딕" pitchFamily="34" charset="-120"/>
+              </a:rPr>
+              <a:t>28 / 29</a:t>
             </a:r>
             <a:endParaRPr lang="en-US" sz="1100" dirty="0"/>
           </a:p>
@@ -34893,9 +36783,9 @@
 </p:sld>
 </file>
 
-<file path=ppt/slides/slide28.xml><?xml version="1.0" encoding="utf-8"?>
+<file path=ppt/slides/slide29.xml><?xml version="1.0" encoding="utf-8"?>
 <p:sld xmlns:a="http://schemas.openxmlformats.org/drawingml/2006/main" xmlns:r="http://schemas.openxmlformats.org/officeDocument/2006/relationships" xmlns:p="http://schemas.openxmlformats.org/presentationml/2006/main">
-  <p:cSld name="Slide 28">
+  <p:cSld name="Slide 29">
     <p:bg>
       <p:bgPr>
         <a:solidFill>
@@ -35146,7 +37036,7 @@
                 <a:ea typeface="맑은 고딕" pitchFamily="34" charset="-122"/>
                 <a:cs typeface="맑은 고딕" pitchFamily="34" charset="-120"/>
               </a:rPr>
-              <a:t>28 / 28</a:t>
+              <a:t>29 / 29</a:t>
             </a:r>
             <a:endParaRPr lang="en-US" sz="1000" dirty="0"/>
           </a:p>
@@ -35269,7 +37159,7 @@
                 <a:ea typeface="맑은 고딕" pitchFamily="34" charset="-122"/>
                 <a:cs typeface="맑은 고딕" pitchFamily="34" charset="-120"/>
               </a:rPr>
-              <a:t>3 / 28</a:t>
+              <a:t>3 / 29</a:t>
             </a:r>
             <a:endParaRPr lang="en-US" sz="1100" dirty="0"/>
           </a:p>
@@ -36888,7 +38778,7 @@
                 <a:ea typeface="맑은 고딕" pitchFamily="34" charset="-122"/>
                 <a:cs typeface="맑은 고딕" pitchFamily="34" charset="-120"/>
               </a:rPr>
-              <a:t>4 / 28</a:t>
+              <a:t>4 / 29</a:t>
             </a:r>
             <a:endParaRPr lang="en-US" sz="1100" dirty="0"/>
           </a:p>
@@ -38254,7 +40144,7 @@
                 <a:ea typeface="맑은 고딕" pitchFamily="34" charset="-122"/>
                 <a:cs typeface="맑은 고딕" pitchFamily="34" charset="-120"/>
               </a:rPr>
-              <a:t>5 / 28</a:t>
+              <a:t>5 / 29</a:t>
             </a:r>
             <a:endParaRPr lang="en-US" sz="1100" dirty="0"/>
           </a:p>
@@ -39781,7 +41671,7 @@
                 <a:ea typeface="맑은 고딕" pitchFamily="34" charset="-122"/>
                 <a:cs typeface="맑은 고딕" pitchFamily="34" charset="-120"/>
               </a:rPr>
-              <a:t>6 / 28</a:t>
+              <a:t>6 / 29</a:t>
             </a:r>
             <a:endParaRPr lang="en-US" sz="1100" dirty="0"/>
           </a:p>
@@ -41751,7 +43641,7 @@
                 <a:ea typeface="맑은 고딕" pitchFamily="34" charset="-122"/>
                 <a:cs typeface="맑은 고딕" pitchFamily="34" charset="-120"/>
               </a:rPr>
-              <a:t>7 / 28</a:t>
+              <a:t>7 / 29</a:t>
             </a:r>
             <a:endParaRPr lang="en-US" sz="1100" dirty="0"/>
           </a:p>
@@ -42920,7 +44810,7 @@
                 <a:ea typeface="맑은 고딕" pitchFamily="34" charset="-122"/>
                 <a:cs typeface="맑은 고딕" pitchFamily="34" charset="-120"/>
               </a:rPr>
-              <a:t>8 / 28</a:t>
+              <a:t>8 / 29</a:t>
             </a:r>
             <a:endParaRPr lang="en-US" sz="1100" dirty="0"/>
           </a:p>
@@ -45048,7 +46938,7 @@
                 <a:ea typeface="맑은 고딕" pitchFamily="34" charset="-122"/>
                 <a:cs typeface="맑은 고딕" pitchFamily="34" charset="-120"/>
               </a:rPr>
-              <a:t>9 / 28</a:t>
+              <a:t>9 / 29</a:t>
             </a:r>
             <a:endParaRPr lang="en-US" sz="1100" dirty="0"/>
           </a:p>

--- a/docs/온국민아이디어등록제_설명자료.pptx
+++ b/docs/온국민아이디어등록제_설명자료.pptx
@@ -8760,7 +8760,7 @@
               <a:buNone/>
             </a:pPr>
             <a:r>
-              <a:rPr lang="en-US" sz="1400" b="1" dirty="0">
+              <a:rPr lang="en-US" sz="1250" b="1" dirty="0">
                 <a:solidFill>
                   <a:srgbClr val="2563EB"/>
                 </a:solidFill>
@@ -8768,9 +8768,9 @@
                 <a:ea typeface="맑은 고딕" pitchFamily="34" charset="-122"/>
                 <a:cs typeface="맑은 고딕" pitchFamily="34" charset="-120"/>
               </a:rPr>
-              <a:t>기준별 최종점수  =  ( 체크리스트 점수  +  종합판단 점수 )  ÷  2</a:t>
-            </a:r>
-            <a:endParaRPr lang="en-US" sz="1400" dirty="0"/>
+              <a:t>기준별 최종점수  =  ( 체크리스트  +  종합판단 )  ÷  2      ·      두 채점이 3점 이상 벌어지면 낮은 쪽 채택</a:t>
+            </a:r>
+            <a:endParaRPr lang="en-US" sz="1250" dirty="0"/>
           </a:p>
         </p:txBody>
       </p:sp>
@@ -12947,7 +12947,7 @@
                 <a:ea typeface="맑은 고딕" pitchFamily="34" charset="-122"/>
                 <a:cs typeface="맑은 고딕" pitchFamily="34" charset="-120"/>
               </a:rPr>
-              <a:t>7.0 (범위 좁음)</a:t>
+              <a:t>7.0 (평균)</a:t>
             </a:r>
             <a:endParaRPr lang="en-US" sz="1200" dirty="0"/>
           </a:p>
@@ -13077,7 +13077,7 @@
                 <a:ea typeface="맑은 고딕" pitchFamily="34" charset="-122"/>
                 <a:cs typeface="맑은 고딕" pitchFamily="34" charset="-120"/>
               </a:rPr>
-              <a:t>두 채점이 어긋남</a:t>
+              <a:t>3점 이상 벌어짐</a:t>
             </a:r>
             <a:endParaRPr lang="en-US" sz="1200" dirty="0"/>
           </a:p>
@@ -13116,7 +13116,7 @@
                 <a:ea typeface="맑은 고딕" pitchFamily="34" charset="-122"/>
                 <a:cs typeface="맑은 고딕" pitchFamily="34" charset="-120"/>
               </a:rPr>
-              <a:t>체크리스트 8 · 종합 4</a:t>
+              <a:t>체크리스트 9 · 종합 6</a:t>
             </a:r>
             <a:endParaRPr lang="en-US" sz="1100" dirty="0"/>
           </a:p>
@@ -13155,7 +13155,7 @@
                 <a:ea typeface="맑은 고딕" pitchFamily="34" charset="-122"/>
                 <a:cs typeface="맑은 고딕" pitchFamily="34" charset="-120"/>
               </a:rPr>
-              <a:t>6.0 (범위 넓음)</a:t>
+              <a:t>6.0 (낮은 쪽)</a:t>
             </a:r>
             <a:endParaRPr lang="en-US" sz="1200" dirty="0"/>
           </a:p>
@@ -13194,7 +13194,7 @@
                 <a:ea typeface="맑은 고딕" pitchFamily="34" charset="-122"/>
                 <a:cs typeface="맑은 고딕" pitchFamily="34" charset="-120"/>
               </a:rPr>
-              <a:t>추가 확인 필요</a:t>
+              <a:t>평균을 쓰지 않음</a:t>
             </a:r>
             <a:endParaRPr lang="en-US" sz="1100" dirty="0"/>
           </a:p>
@@ -13253,7 +13253,7 @@
                 <a:ea typeface="맑은 고딕" pitchFamily="34" charset="-122"/>
                 <a:cs typeface="맑은 고딕" pitchFamily="34" charset="-120"/>
               </a:rPr>
-              <a:t>"6.0 (5.2–6.8)" 형태로 제시 — 통계적 신뢰구간이 아니라 두 채점의 편차 폭입니다</a:t>
+              <a:t>괴리가 크면 평균이 경고를 삼킵니다 — 그래서 3점 이상이면 낮은 쪽을 채택합니다</a:t>
             </a:r>
             <a:endParaRPr lang="en-US" sz="1250" dirty="0"/>
           </a:p>
@@ -29856,7 +29856,7 @@
         <p:spPr>
           <a:xfrm>
             <a:off x="365760" y="1755648"/>
-            <a:ext cx="4114800" cy="2304288"/>
+            <a:ext cx="4114800" cy="2487168"/>
           </a:xfrm>
           <a:prstGeom prst="rect">
             <a:avLst/>
@@ -30302,7 +30302,7 @@
                 <a:ea typeface="맑은 고딕" pitchFamily="34" charset="-122"/>
                 <a:cs typeface="맑은 고딕" pitchFamily="34" charset="-120"/>
               </a:rPr>
-              <a:t>조작 내성 시험 (장황·유창하게 재작성)</a:t>
+              <a:t>조작 내성 · LLM 대필 시험</a:t>
             </a:r>
             <a:endParaRPr lang="en-US" sz="1050" dirty="0"/>
           </a:p>
@@ -30341,7 +30341,7 @@
                 <a:ea typeface="맑은 고딕" pitchFamily="34" charset="-122"/>
                 <a:cs typeface="맑은 고딕" pitchFamily="34" charset="-120"/>
               </a:rPr>
-              <a:t>점수 상승 없음 — 실용성 5→4로 오히려 하락</a:t>
+              <a:t>장황 재작성: 점수 상승 없음 (5→4 하락)</a:t>
             </a:r>
             <a:endParaRPr lang="en-US" sz="980" dirty="0"/>
           </a:p>
@@ -30349,14 +30349,53 @@
       </p:sp>
       <p:sp>
         <p:nvSpPr>
-          <p:cNvPr id="33" name="Shape 31"/>
+          <p:cNvPr id="33" name="Text 31"/>
+          <p:cNvSpPr/>
+          <p:nvPr/>
+        </p:nvSpPr>
+        <p:spPr>
+          <a:xfrm>
+            <a:off x="566928" y="3913632"/>
+            <a:ext cx="3749040" cy="219456"/>
+          </a:xfrm>
+          <a:prstGeom prst="rect">
+            <a:avLst/>
+          </a:prstGeom>
+          <a:noFill/>
+          <a:ln/>
+        </p:spPr>
+        <p:txBody>
+          <a:bodyPr wrap="square" lIns="0" tIns="0" rIns="0" bIns="0" rtlCol="0" anchor="ctr"/>
+          <a:lstStyle/>
+          <a:p>
+            <a:pPr indent="0" marL="0">
+              <a:buNone/>
+            </a:pPr>
+            <a:r>
+              <a:rPr lang="en-US" sz="980" dirty="0">
+                <a:solidFill>
+                  <a:srgbClr val="C0392B"/>
+                </a:solidFill>
+                <a:latin typeface="맑은 고딕" pitchFamily="34" charset="0"/>
+                <a:ea typeface="맑은 고딕" pitchFamily="34" charset="-122"/>
+                <a:cs typeface="맑은 고딕" pitchFamily="34" charset="-120"/>
+              </a:rPr>
+              <a:t>LLM 대필: 5.2 → 8.0 (격차 확인 · 대응 반영)</a:t>
+            </a:r>
+            <a:endParaRPr lang="en-US" sz="980" dirty="0"/>
+          </a:p>
+        </p:txBody>
+      </p:sp>
+      <p:sp>
+        <p:nvSpPr>
+          <p:cNvPr id="34" name="Shape 32"/>
           <p:cNvSpPr/>
           <p:nvPr/>
         </p:nvSpPr>
         <p:spPr>
           <a:xfrm>
             <a:off x="4663440" y="1755648"/>
-            <a:ext cx="4114800" cy="2304288"/>
+            <a:ext cx="4114800" cy="2487168"/>
           </a:xfrm>
           <a:prstGeom prst="rect">
             <a:avLst/>
@@ -30381,7 +30420,7 @@
       </p:sp>
       <p:sp>
         <p:nvSpPr>
-          <p:cNvPr id="34" name="Text 32"/>
+          <p:cNvPr id="35" name="Text 33"/>
           <p:cNvSpPr/>
           <p:nvPr/>
         </p:nvSpPr>
@@ -30420,7 +30459,7 @@
       </p:sp>
       <p:sp>
         <p:nvSpPr>
-          <p:cNvPr id="35" name="Text 33"/>
+          <p:cNvPr id="36" name="Text 34"/>
           <p:cNvSpPr/>
           <p:nvPr/>
         </p:nvSpPr>
@@ -30459,7 +30498,7 @@
       </p:sp>
       <p:sp>
         <p:nvSpPr>
-          <p:cNvPr id="36" name="Text 34"/>
+          <p:cNvPr id="37" name="Text 35"/>
           <p:cNvSpPr/>
           <p:nvPr/>
         </p:nvSpPr>
@@ -30498,7 +30537,7 @@
       </p:sp>
       <p:sp>
         <p:nvSpPr>
-          <p:cNvPr id="37" name="Text 35"/>
+          <p:cNvPr id="38" name="Text 36"/>
           <p:cNvSpPr/>
           <p:nvPr/>
         </p:nvSpPr>
@@ -30537,7 +30576,7 @@
       </p:sp>
       <p:sp>
         <p:nvSpPr>
-          <p:cNvPr id="38" name="Text 36"/>
+          <p:cNvPr id="39" name="Text 37"/>
           <p:cNvSpPr/>
           <p:nvPr/>
         </p:nvSpPr>
@@ -30576,7 +30615,7 @@
       </p:sp>
       <p:sp>
         <p:nvSpPr>
-          <p:cNvPr id="39" name="Text 37"/>
+          <p:cNvPr id="40" name="Text 38"/>
           <p:cNvSpPr/>
           <p:nvPr/>
         </p:nvSpPr>
@@ -30615,7 +30654,7 @@
       </p:sp>
       <p:sp>
         <p:nvSpPr>
-          <p:cNvPr id="40" name="Text 38"/>
+          <p:cNvPr id="41" name="Text 39"/>
           <p:cNvSpPr/>
           <p:nvPr/>
         </p:nvSpPr>
@@ -30654,7 +30693,7 @@
       </p:sp>
       <p:sp>
         <p:nvSpPr>
-          <p:cNvPr id="41" name="Text 39"/>
+          <p:cNvPr id="42" name="Text 40"/>
           <p:cNvSpPr/>
           <p:nvPr/>
         </p:nvSpPr>
@@ -30693,7 +30732,7 @@
       </p:sp>
       <p:sp>
         <p:nvSpPr>
-          <p:cNvPr id="42" name="Text 40"/>
+          <p:cNvPr id="43" name="Text 41"/>
           <p:cNvSpPr/>
           <p:nvPr/>
         </p:nvSpPr>
@@ -30732,7 +30771,7 @@
       </p:sp>
       <p:sp>
         <p:nvSpPr>
-          <p:cNvPr id="43" name="Text 41"/>
+          <p:cNvPr id="44" name="Text 42"/>
           <p:cNvSpPr/>
           <p:nvPr/>
         </p:nvSpPr>
@@ -30771,7 +30810,7 @@
       </p:sp>
       <p:sp>
         <p:nvSpPr>
-          <p:cNvPr id="44" name="Text 42"/>
+          <p:cNvPr id="45" name="Text 43"/>
           <p:cNvSpPr/>
           <p:nvPr/>
         </p:nvSpPr>
@@ -30810,14 +30849,14 @@
       </p:sp>
       <p:sp>
         <p:nvSpPr>
-          <p:cNvPr id="45" name="Shape 43"/>
-          <p:cNvSpPr/>
-          <p:nvPr/>
-        </p:nvSpPr>
-        <p:spPr>
-          <a:xfrm>
-            <a:off x="365760" y="4169664"/>
-            <a:ext cx="8412480" cy="786384"/>
+          <p:cNvPr id="46" name="Shape 44"/>
+          <p:cNvSpPr/>
+          <p:nvPr/>
+        </p:nvSpPr>
+        <p:spPr>
+          <a:xfrm>
+            <a:off x="365760" y="4334256"/>
+            <a:ext cx="8412480" cy="658368"/>
           </a:xfrm>
           <a:prstGeom prst="rect">
             <a:avLst/>
@@ -30835,13 +30874,13 @@
       </p:sp>
       <p:sp>
         <p:nvSpPr>
-          <p:cNvPr id="46" name="Text 44"/>
-          <p:cNvSpPr/>
-          <p:nvPr/>
-        </p:nvSpPr>
-        <p:spPr>
-          <a:xfrm>
-            <a:off x="566928" y="4242816"/>
+          <p:cNvPr id="47" name="Text 45"/>
+          <p:cNvSpPr/>
+          <p:nvPr/>
+        </p:nvSpPr>
+        <p:spPr>
+          <a:xfrm>
+            <a:off x="566928" y="4389120"/>
             <a:ext cx="2743200" cy="237744"/>
           </a:xfrm>
           <a:prstGeom prst="rect">
@@ -30874,14 +30913,14 @@
       </p:sp>
       <p:sp>
         <p:nvSpPr>
-          <p:cNvPr id="47" name="Text 45"/>
-          <p:cNvSpPr/>
-          <p:nvPr/>
-        </p:nvSpPr>
-        <p:spPr>
-          <a:xfrm>
-            <a:off x="566928" y="4480560"/>
-            <a:ext cx="8046720" cy="438912"/>
+          <p:cNvPr id="48" name="Text 46"/>
+          <p:cNvSpPr/>
+          <p:nvPr/>
+        </p:nvSpPr>
+        <p:spPr>
+          <a:xfrm>
+            <a:off x="566928" y="4608576"/>
+            <a:ext cx="8046720" cy="384048"/>
           </a:xfrm>
           <a:prstGeom prst="rect">
             <a:avLst/>
@@ -30895,12 +30934,12 @@
           <a:p>
             <a:pPr indent="0" marL="0">
               <a:lnSpc>
-                <a:spcPct val="125000"/>
+                <a:spcPct val="120000"/>
               </a:lnSpc>
               <a:buNone/>
             </a:pPr>
             <a:r>
-              <a:rPr lang="en-US" sz="1020" dirty="0">
+              <a:rPr lang="en-US" sz="960" dirty="0">
                 <a:solidFill>
                   <a:srgbClr val="1E293B"/>
                 </a:solidFill>
@@ -30910,17 +30949,17 @@
               </a:rPr>
               <a:t>표본 10건 · 극단 사례(명백히 진부 vs 명백히 창의)에 한정됩니다. 시험 문항은 사람이 아니라 모델이 생성했습니다.</a:t>
             </a:r>
-            <a:endParaRPr lang="en-US" sz="1020" dirty="0"/>
+            <a:endParaRPr lang="en-US" sz="960" dirty="0"/>
           </a:p>
           <a:p>
             <a:pPr indent="0" marL="0">
               <a:lnSpc>
-                <a:spcPct val="125000"/>
+                <a:spcPct val="120000"/>
               </a:lnSpc>
               <a:buNone/>
             </a:pPr>
             <a:r>
-              <a:rPr lang="en-US" sz="1020" dirty="0">
+              <a:rPr lang="en-US" sz="960" dirty="0">
                 <a:solidFill>
                   <a:srgbClr val="1E293B"/>
                 </a:solidFill>
@@ -30930,7 +30969,7 @@
               </a:rPr>
               <a:t>실제 국민 제안은 중간대에 몰리므로, 경계 사례 판별력과 전문가 일치도는 도입 전 별도 검증이 필요합니다.</a:t>
             </a:r>
-            <a:endParaRPr lang="en-US" sz="1020" dirty="0"/>
+            <a:endParaRPr lang="en-US" sz="960" dirty="0"/>
           </a:p>
         </p:txBody>
       </p:sp>
@@ -35761,7 +35800,7 @@
                 <a:ea typeface="맑은 고딕" pitchFamily="34" charset="-122"/>
                 <a:cs typeface="맑은 고딕" pitchFamily="34" charset="-120"/>
               </a:rPr>
-              <a:t>표현력 편향 — 조리 있게 말하는 제안자가 유리</a:t>
+              <a:t>표현력·도구 격차 — LLM 대필 시 5.2→8.0 관측</a:t>
             </a:r>
             <a:endParaRPr lang="en-US" sz="1000" dirty="0"/>
           </a:p>
@@ -36476,7 +36515,7 @@
                 <a:ea typeface="맑은 고딕" pitchFamily="34" charset="-122"/>
                 <a:cs typeface="맑은 고딕" pitchFamily="34" charset="-120"/>
               </a:rPr>
-              <a:t>표현력 편향 보정 설계 · 법적 타당성 항목 추가</a:t>
+              <a:t>체크리스트에 구체성 요건 도입(열거 방지)</a:t>
             </a:r>
             <a:endParaRPr lang="en-US" sz="1000" dirty="0"/>
           </a:p>
@@ -36554,7 +36593,7 @@
                 <a:ea typeface="맑은 고딕" pitchFamily="34" charset="-122"/>
                 <a:cs typeface="맑은 고딕" pitchFamily="34" charset="-120"/>
               </a:rPr>
-              <a:t>지자체·기금 데이터 통로 추가</a:t>
+              <a:t>모두에게 동일한 작성 보조 제공 검토</a:t>
             </a:r>
             <a:endParaRPr lang="en-US" sz="1000" dirty="0"/>
           </a:p>
